--- a/demo-template-dsfr.pptx
+++ b/demo-template-dsfr.pptx
@@ -23,6 +23,12 @@
     <p:sldId id="265" r:id="rId17"/>
     <p:sldId id="266" r:id="rId7"/>
     <p:sldId id="267" r:id="rId6"/>
+    <p:sldId id="268" r:id="rId5"/>
+    <p:sldId id="269" r:id="rId4"/>
+    <p:sldId id="270" r:id="rId3"/>
+    <p:sldId id="271" r:id="rId2"/>
+    <p:sldId id="272" r:id="rId24"/>
+    <p:sldId id="273" r:id="rId25"/>
   </p:sldIdLst>
   <p:sldSz cx="12191969" cy="6858000" type="screen16x9"/>
   <p:notesSz cx="6858000" cy="9144000"/>
@@ -997,6 +1003,426 @@
           <a:p>
             <a:r>
               <a:t>Transition vers la partie 4, réseaux sociaux accessibles.</a:t>
+            </a:r>
+          </a:p>
+        </p:txBody>
+      </p:sp>
+      <p:sp>
+        <p:nvSpPr>
+          <p:cNvPr id="4" name="Slide Number Placeholder 3"/>
+          <p:cNvSpPr>
+            <a:spLocks noGrp="1"/>
+          </p:cNvSpPr>
+          <p:nvPr>
+            <p:ph type="sldNum" idx="5" sz="quarter"/>
+          </p:nvPr>
+        </p:nvSpPr>
+        <p:spPr/>
+      </p:sp>
+    </p:spTree>
+  </p:cSld>
+  <p:clrMapOvr>
+    <a:masterClrMapping/>
+  </p:clrMapOvr>
+</p:notes>
+</file>
+
+<file path=ppt/notesSlides/notesSlide13.xml><?xml version="1.0" encoding="utf-8"?>
+<p:notes xmlns:a="http://schemas.openxmlformats.org/drawingml/2006/main" xmlns:p="http://schemas.openxmlformats.org/presentationml/2006/main" xmlns:r="http://schemas.openxmlformats.org/officeDocument/2006/relationships">
+  <p:cSld>
+    <p:spTree>
+      <p:nvGrpSpPr>
+        <p:cNvPr id="1" name=""/>
+        <p:cNvGrpSpPr/>
+        <p:nvPr/>
+      </p:nvGrpSpPr>
+      <p:grpSpPr>
+        <a:xfrm>
+          <a:off x="0" y="0"/>
+          <a:ext cx="0" cy="0"/>
+          <a:chOff x="0" y="0"/>
+          <a:chExt cx="0" cy="0"/>
+        </a:xfrm>
+      </p:grpSpPr>
+      <p:sp>
+        <p:nvSpPr>
+          <p:cNvPr id="2" name="Slide Image Placeholder 1"/>
+          <p:cNvSpPr>
+            <a:spLocks noGrp="1"/>
+          </p:cNvSpPr>
+          <p:nvPr>
+            <p:ph type="sldImg" idx="2"/>
+          </p:nvPr>
+        </p:nvSpPr>
+        <p:spPr/>
+      </p:sp>
+      <p:sp>
+        <p:nvSpPr>
+          <p:cNvPr id="3" name="Notes Placeholder 2"/>
+          <p:cNvSpPr>
+            <a:spLocks noGrp="1"/>
+          </p:cNvSpPr>
+          <p:nvPr>
+            <p:ph type="body" idx="3" sz="quarter"/>
+          </p:nvPr>
+        </p:nvSpPr>
+        <p:spPr/>
+        <p:txBody>
+          <a:bodyPr/>
+          <a:lstStyle/>
+          <a:p>
+            <a:r>
+              <a:t>Usage : message unique à retenir, concept structurant. Carte centrée pour focaliser l’attention.</a:t>
+            </a:r>
+          </a:p>
+        </p:txBody>
+      </p:sp>
+      <p:sp>
+        <p:nvSpPr>
+          <p:cNvPr id="4" name="Slide Number Placeholder 3"/>
+          <p:cNvSpPr>
+            <a:spLocks noGrp="1"/>
+          </p:cNvSpPr>
+          <p:nvPr>
+            <p:ph type="sldNum" idx="5" sz="quarter"/>
+          </p:nvPr>
+        </p:nvSpPr>
+        <p:spPr/>
+      </p:sp>
+    </p:spTree>
+  </p:cSld>
+  <p:clrMapOvr>
+    <a:masterClrMapping/>
+  </p:clrMapOvr>
+</p:notes>
+</file>
+
+<file path=ppt/notesSlides/notesSlide14.xml><?xml version="1.0" encoding="utf-8"?>
+<p:notes xmlns:a="http://schemas.openxmlformats.org/drawingml/2006/main" xmlns:p="http://schemas.openxmlformats.org/presentationml/2006/main" xmlns:r="http://schemas.openxmlformats.org/officeDocument/2006/relationships">
+  <p:cSld>
+    <p:spTree>
+      <p:nvGrpSpPr>
+        <p:cNvPr id="1" name=""/>
+        <p:cNvGrpSpPr/>
+        <p:nvPr/>
+      </p:nvGrpSpPr>
+      <p:grpSpPr>
+        <a:xfrm>
+          <a:off x="0" y="0"/>
+          <a:ext cx="0" cy="0"/>
+          <a:chOff x="0" y="0"/>
+          <a:chExt cx="0" cy="0"/>
+        </a:xfrm>
+      </p:grpSpPr>
+      <p:sp>
+        <p:nvSpPr>
+          <p:cNvPr id="2" name="Slide Image Placeholder 1"/>
+          <p:cNvSpPr>
+            <a:spLocks noGrp="1"/>
+          </p:cNvSpPr>
+          <p:nvPr>
+            <p:ph type="sldImg" idx="2"/>
+          </p:nvPr>
+        </p:nvSpPr>
+        <p:spPr/>
+      </p:sp>
+      <p:sp>
+        <p:nvSpPr>
+          <p:cNvPr id="3" name="Notes Placeholder 2"/>
+          <p:cNvSpPr>
+            <a:spLocks noGrp="1"/>
+          </p:cNvSpPr>
+          <p:nvPr>
+            <p:ph type="body" idx="3" sz="quarter"/>
+          </p:nvPr>
+        </p:nvSpPr>
+        <p:spPr/>
+        <p:txBody>
+          <a:bodyPr/>
+          <a:lstStyle/>
+          <a:p>
+            <a:r>
+              <a:t>Usage : comparaison en miroir, avant/après, deux approches. R21 de la neuropédagogie : apprentissage par opposition.</a:t>
+            </a:r>
+          </a:p>
+        </p:txBody>
+      </p:sp>
+      <p:sp>
+        <p:nvSpPr>
+          <p:cNvPr id="4" name="Slide Number Placeholder 3"/>
+          <p:cNvSpPr>
+            <a:spLocks noGrp="1"/>
+          </p:cNvSpPr>
+          <p:nvPr>
+            <p:ph type="sldNum" idx="5" sz="quarter"/>
+          </p:nvPr>
+        </p:nvSpPr>
+        <p:spPr/>
+      </p:sp>
+    </p:spTree>
+  </p:cSld>
+  <p:clrMapOvr>
+    <a:masterClrMapping/>
+  </p:clrMapOvr>
+</p:notes>
+</file>
+
+<file path=ppt/notesSlides/notesSlide15.xml><?xml version="1.0" encoding="utf-8"?>
+<p:notes xmlns:a="http://schemas.openxmlformats.org/drawingml/2006/main" xmlns:p="http://schemas.openxmlformats.org/presentationml/2006/main" xmlns:r="http://schemas.openxmlformats.org/officeDocument/2006/relationships">
+  <p:cSld>
+    <p:spTree>
+      <p:nvGrpSpPr>
+        <p:cNvPr id="1" name=""/>
+        <p:cNvGrpSpPr/>
+        <p:nvPr/>
+      </p:nvGrpSpPr>
+      <p:grpSpPr>
+        <a:xfrm>
+          <a:off x="0" y="0"/>
+          <a:ext cx="0" cy="0"/>
+          <a:chOff x="0" y="0"/>
+          <a:chExt cx="0" cy="0"/>
+        </a:xfrm>
+      </p:grpSpPr>
+      <p:sp>
+        <p:nvSpPr>
+          <p:cNvPr id="2" name="Slide Image Placeholder 1"/>
+          <p:cNvSpPr>
+            <a:spLocks noGrp="1"/>
+          </p:cNvSpPr>
+          <p:nvPr>
+            <p:ph type="sldImg" idx="2"/>
+          </p:nvPr>
+        </p:nvSpPr>
+        <p:spPr/>
+      </p:sp>
+      <p:sp>
+        <p:nvSpPr>
+          <p:cNvPr id="3" name="Notes Placeholder 2"/>
+          <p:cNvSpPr>
+            <a:spLocks noGrp="1"/>
+          </p:cNvSpPr>
+          <p:nvPr>
+            <p:ph type="body" idx="3" sz="quarter"/>
+          </p:nvPr>
+        </p:nvSpPr>
+        <p:spPr/>
+        <p:txBody>
+          <a:bodyPr/>
+          <a:lstStyle/>
+          <a:p>
+            <a:r>
+              <a:t>Usage : triptyque (3 directions), séquence (3 étapes), triade conceptuelle. Au-delà de 3 cartes, préférer un tableau.</a:t>
+            </a:r>
+          </a:p>
+        </p:txBody>
+      </p:sp>
+      <p:sp>
+        <p:nvSpPr>
+          <p:cNvPr id="4" name="Slide Number Placeholder 3"/>
+          <p:cNvSpPr>
+            <a:spLocks noGrp="1"/>
+          </p:cNvSpPr>
+          <p:nvPr>
+            <p:ph type="sldNum" idx="5" sz="quarter"/>
+          </p:nvPr>
+        </p:nvSpPr>
+        <p:spPr/>
+      </p:sp>
+    </p:spTree>
+  </p:cSld>
+  <p:clrMapOvr>
+    <a:masterClrMapping/>
+  </p:clrMapOvr>
+</p:notes>
+</file>
+
+<file path=ppt/notesSlides/notesSlide16.xml><?xml version="1.0" encoding="utf-8"?>
+<p:notes xmlns:a="http://schemas.openxmlformats.org/drawingml/2006/main" xmlns:p="http://schemas.openxmlformats.org/presentationml/2006/main" xmlns:r="http://schemas.openxmlformats.org/officeDocument/2006/relationships">
+  <p:cSld>
+    <p:spTree>
+      <p:nvGrpSpPr>
+        <p:cNvPr id="1" name=""/>
+        <p:cNvGrpSpPr/>
+        <p:nvPr/>
+      </p:nvGrpSpPr>
+      <p:grpSpPr>
+        <a:xfrm>
+          <a:off x="0" y="0"/>
+          <a:ext cx="0" cy="0"/>
+          <a:chOff x="0" y="0"/>
+          <a:chExt cx="0" cy="0"/>
+        </a:xfrm>
+      </p:grpSpPr>
+      <p:sp>
+        <p:nvSpPr>
+          <p:cNvPr id="2" name="Slide Image Placeholder 1"/>
+          <p:cNvSpPr>
+            <a:spLocks noGrp="1"/>
+          </p:cNvSpPr>
+          <p:nvPr>
+            <p:ph type="sldImg" idx="2"/>
+          </p:nvPr>
+        </p:nvSpPr>
+        <p:spPr/>
+      </p:sp>
+      <p:sp>
+        <p:nvSpPr>
+          <p:cNvPr id="3" name="Notes Placeholder 2"/>
+          <p:cNvSpPr>
+            <a:spLocks noGrp="1"/>
+          </p:cNvSpPr>
+          <p:nvPr>
+            <p:ph type="body" idx="3" sz="quarter"/>
+          </p:nvPr>
+        </p:nvSpPr>
+        <p:spPr/>
+        <p:txBody>
+          <a:bodyPr/>
+          <a:lstStyle/>
+          <a:p>
+            <a:r>
+              <a:t>Usage : carte = message principal, callout = renforcement ou implication concrète.</a:t>
+            </a:r>
+          </a:p>
+        </p:txBody>
+      </p:sp>
+      <p:sp>
+        <p:nvSpPr>
+          <p:cNvPr id="4" name="Slide Number Placeholder 3"/>
+          <p:cNvSpPr>
+            <a:spLocks noGrp="1"/>
+          </p:cNvSpPr>
+          <p:nvPr>
+            <p:ph type="sldNum" idx="5" sz="quarter"/>
+          </p:nvPr>
+        </p:nvSpPr>
+        <p:spPr/>
+      </p:sp>
+    </p:spTree>
+  </p:cSld>
+  <p:clrMapOvr>
+    <a:masterClrMapping/>
+  </p:clrMapOvr>
+</p:notes>
+</file>
+
+<file path=ppt/notesSlides/notesSlide17.xml><?xml version="1.0" encoding="utf-8"?>
+<p:notes xmlns:a="http://schemas.openxmlformats.org/drawingml/2006/main" xmlns:p="http://schemas.openxmlformats.org/presentationml/2006/main" xmlns:r="http://schemas.openxmlformats.org/officeDocument/2006/relationships">
+  <p:cSld>
+    <p:spTree>
+      <p:nvGrpSpPr>
+        <p:cNvPr id="1" name=""/>
+        <p:cNvGrpSpPr/>
+        <p:nvPr/>
+      </p:nvGrpSpPr>
+      <p:grpSpPr>
+        <a:xfrm>
+          <a:off x="0" y="0"/>
+          <a:ext cx="0" cy="0"/>
+          <a:chOff x="0" y="0"/>
+          <a:chExt cx="0" cy="0"/>
+        </a:xfrm>
+      </p:grpSpPr>
+      <p:sp>
+        <p:nvSpPr>
+          <p:cNvPr id="2" name="Slide Image Placeholder 1"/>
+          <p:cNvSpPr>
+            <a:spLocks noGrp="1"/>
+          </p:cNvSpPr>
+          <p:nvPr>
+            <p:ph type="sldImg" idx="2"/>
+          </p:nvPr>
+        </p:nvSpPr>
+        <p:spPr/>
+      </p:sp>
+      <p:sp>
+        <p:nvSpPr>
+          <p:cNvPr id="3" name="Notes Placeholder 2"/>
+          <p:cNvSpPr>
+            <a:spLocks noGrp="1"/>
+          </p:cNvSpPr>
+          <p:nvPr>
+            <p:ph type="body" idx="3" sz="quarter"/>
+          </p:nvPr>
+        </p:nvSpPr>
+        <p:spPr/>
+        <p:txBody>
+          <a:bodyPr/>
+          <a:lstStyle/>
+          <a:p>
+            <a:r>
+              <a:t>Usage : cartes = comparaison, callout = conclusion/synthèse qui relie les deux.</a:t>
+            </a:r>
+          </a:p>
+        </p:txBody>
+      </p:sp>
+      <p:sp>
+        <p:nvSpPr>
+          <p:cNvPr id="4" name="Slide Number Placeholder 3"/>
+          <p:cNvSpPr>
+            <a:spLocks noGrp="1"/>
+          </p:cNvSpPr>
+          <p:nvPr>
+            <p:ph type="sldNum" idx="5" sz="quarter"/>
+          </p:nvPr>
+        </p:nvSpPr>
+        <p:spPr/>
+      </p:sp>
+    </p:spTree>
+  </p:cSld>
+  <p:clrMapOvr>
+    <a:masterClrMapping/>
+  </p:clrMapOvr>
+</p:notes>
+</file>
+
+<file path=ppt/notesSlides/notesSlide18.xml><?xml version="1.0" encoding="utf-8"?>
+<p:notes xmlns:a="http://schemas.openxmlformats.org/drawingml/2006/main" xmlns:p="http://schemas.openxmlformats.org/presentationml/2006/main" xmlns:r="http://schemas.openxmlformats.org/officeDocument/2006/relationships">
+  <p:cSld>
+    <p:spTree>
+      <p:nvGrpSpPr>
+        <p:cNvPr id="1" name=""/>
+        <p:cNvGrpSpPr/>
+        <p:nvPr/>
+      </p:nvGrpSpPr>
+      <p:grpSpPr>
+        <a:xfrm>
+          <a:off x="0" y="0"/>
+          <a:ext cx="0" cy="0"/>
+          <a:chOff x="0" y="0"/>
+          <a:chExt cx="0" cy="0"/>
+        </a:xfrm>
+      </p:grpSpPr>
+      <p:sp>
+        <p:nvSpPr>
+          <p:cNvPr id="2" name="Slide Image Placeholder 1"/>
+          <p:cNvSpPr>
+            <a:spLocks noGrp="1"/>
+          </p:cNvSpPr>
+          <p:nvPr>
+            <p:ph type="sldImg" idx="2"/>
+          </p:nvPr>
+        </p:nvSpPr>
+        <p:spPr/>
+      </p:sp>
+      <p:sp>
+        <p:nvSpPr>
+          <p:cNvPr id="3" name="Notes Placeholder 2"/>
+          <p:cNvSpPr>
+            <a:spLocks noGrp="1"/>
+          </p:cNvSpPr>
+          <p:nvPr>
+            <p:ph type="body" idx="3" sz="quarter"/>
+          </p:nvPr>
+        </p:nvSpPr>
+        <p:spPr/>
+        <p:txBody>
+          <a:bodyPr/>
+          <a:lstStyle/>
+          <a:p>
+            <a:r>
+              <a:t>Usage : cartes = étapes d’un processus, callout = règle transverse à retenir.</a:t>
             </a:r>
           </a:p>
         </p:txBody>
@@ -5092,6 +5518,4594 @@
 </p:sld>
 </file>
 
+<file path=ppt/slides/slide13.xml><?xml version="1.0" encoding="utf-8"?>
+<p:sld xmlns:a="http://schemas.openxmlformats.org/drawingml/2006/main" xmlns:p="http://schemas.openxmlformats.org/presentationml/2006/main" xmlns:r="http://schemas.openxmlformats.org/officeDocument/2006/relationships">
+  <p:cSld>
+    <p:spTree>
+      <p:nvGrpSpPr>
+        <p:cNvPr id="1" name=""/>
+        <p:cNvGrpSpPr/>
+        <p:nvPr/>
+      </p:nvGrpSpPr>
+      <p:grpSpPr/>
+      <p:sp>
+        <p:nvSpPr>
+          <p:cNvPr id="2" name="Title 1"/>
+          <p:cNvSpPr>
+            <a:spLocks noGrp="1"/>
+          </p:cNvSpPr>
+          <p:nvPr>
+            <p:ph type="title"/>
+          </p:nvPr>
+        </p:nvSpPr>
+        <p:spPr/>
+        <p:txBody>
+          <a:bodyPr wrap="square" anchor="t" lIns="73152" rIns="73152"/>
+          <a:lstStyle/>
+          <a:p>
+            <a:pPr algn="l">
+              <a:lnSpc>
+                <a:spcPct val="125000"/>
+              </a:lnSpc>
+            </a:pPr>
+            <a:r>
+              <a:rPr sz="2800" b="1" i="0" lang="fr-FR">
+                <a:solidFill>
+                  <a:srgbClr val="000091"/>
+                </a:solidFill>
+                <a:latin typeface="Marianne"/>
+              </a:rPr>
+              <a:t>Layout une carte — message central</a:t>
+            </a:r>
+          </a:p>
+        </p:txBody>
+      </p:sp>
+      <p:sp>
+        <p:nvSpPr>
+          <p:cNvPr id="4" name="Text Placeholder 3"/>
+          <p:cNvSpPr>
+            <a:spLocks noGrp="1"/>
+          </p:cNvSpPr>
+          <p:nvPr>
+            <p:ph type="body" idx="13" sz="quarter"/>
+          </p:nvPr>
+        </p:nvSpPr>
+        <p:spPr/>
+        <p:txBody>
+          <a:bodyPr wrap="square" anchor="t" lIns="73152" rIns="73152"/>
+          <a:lstStyle/>
+          <a:p>
+            <a:pPr algn="r">
+              <a:lnSpc>
+                <a:spcPct val="125000"/>
+              </a:lnSpc>
+            </a:pPr>
+            <a:r>
+              <a:rPr sz="1100" b="0" i="0" lang="fr-FR">
+                <a:solidFill>
+                  <a:srgbClr val="666666"/>
+                </a:solidFill>
+                <a:latin typeface="Marianne"/>
+              </a:rPr>
+              <a:t>Démo | 1 carte</a:t>
+            </a:r>
+          </a:p>
+        </p:txBody>
+      </p:sp>
+      <p:sp>
+        <p:nvSpPr>
+          <p:cNvPr id="7" name="Espace réservé du numéro de diapositive 6"/>
+          <p:cNvSpPr>
+            <a:spLocks noGrp="1"/>
+          </p:cNvSpPr>
+          <p:nvPr>
+            <p:ph type="sldNum" sz="quarter" idx="12"/>
+          </p:nvPr>
+        </p:nvSpPr>
+        <p:spPr bwMode="gray"/>
+        <p:txBody>
+          <a:bodyPr wrap="square" anchor="t" lIns="73152" rIns="73152"/>
+          <a:lstStyle/>
+          <a:p>
+            <a:pPr algn="l">
+              <a:lnSpc>
+                <a:spcPct val="125000"/>
+              </a:lnSpc>
+            </a:pPr>
+            <a:r>
+              <a:rPr sz="1000" b="0" i="0" lang="fr-FR">
+                <a:solidFill>
+                  <a:srgbClr val="666666"/>
+                </a:solidFill>
+                <a:latin typeface="Marianne"/>
+              </a:rPr>
+              <a:t>13</a:t>
+            </a:r>
+            <a:endParaRPr lang="fr-FR" dirty="0"/>
+          </a:p>
+        </p:txBody>
+      </p:sp>
+      <p:sp>
+        <p:nvSpPr>
+          <p:cNvPr id="9" name="DSFR-box"/>
+          <p:cNvSpPr/>
+          <p:nvPr/>
+        </p:nvSpPr>
+        <p:spPr>
+          <a:xfrm>
+            <a:off x="566928" y="2240280"/>
+            <a:ext cx="11137392" cy="3200400"/>
+          </a:xfrm>
+          <a:prstGeom prst="rect">
+            <a:avLst/>
+          </a:prstGeom>
+          <a:solidFill>
+            <a:srgbClr val="F6F6F6"/>
+          </a:solidFill>
+          <a:ln>
+            <a:noFill/>
+          </a:ln>
+          <a:effectLst/>
+        </p:spPr>
+        <p:style>
+          <a:lnRef idx="1">
+            <a:schemeClr val="accent1"/>
+          </a:lnRef>
+          <a:fillRef idx="3">
+            <a:schemeClr val="accent1"/>
+          </a:fillRef>
+          <a:effectRef idx="2">
+            <a:schemeClr val="accent1"/>
+          </a:effectRef>
+          <a:fontRef idx="minor">
+            <a:schemeClr val="lt1"/>
+          </a:fontRef>
+        </p:style>
+        <p:txBody>
+          <a:bodyPr rtlCol="0" anchor="ctr"/>
+          <a:lstStyle/>
+          <a:p>
+            <a:pPr algn="ctr"/>
+          </a:p>
+        </p:txBody>
+      </p:sp>
+      <p:sp>
+        <p:nvSpPr>
+          <p:cNvPr id="11" name="DSFR-card-titre"/>
+          <p:cNvSpPr txBox="1"/>
+          <p:nvPr/>
+        </p:nvSpPr>
+        <p:spPr>
+          <a:xfrm>
+            <a:off x="704088" y="2926080"/>
+            <a:ext cx="10863072" cy="411480"/>
+          </a:xfrm>
+          <a:prstGeom prst="rect">
+            <a:avLst/>
+          </a:prstGeom>
+          <a:noFill/>
+        </p:spPr>
+        <p:txBody>
+          <a:bodyPr wrap="square" anchor="t" lIns="73152" rIns="73152">
+            <a:spAutoFit/>
+          </a:bodyPr>
+          <a:lstStyle/>
+          <a:p>
+            <a:pPr algn="l">
+              <a:lnSpc>
+                <a:spcPct val="125000"/>
+              </a:lnSpc>
+            </a:pPr>
+            <a:r>
+              <a:rPr sz="1400" b="1" i="0" lang="fr-FR">
+                <a:solidFill>
+                  <a:srgbClr val="000091"/>
+                </a:solidFill>
+                <a:latin typeface="Marianne"/>
+              </a:rPr>
+              <a:t>Principe fondamental</a:t>
+            </a:r>
+          </a:p>
+        </p:txBody>
+      </p:sp>
+      <p:sp>
+        <p:nvSpPr>
+          <p:cNvPr id="12" name="DSFR-card-contenu"/>
+          <p:cNvSpPr txBox="1"/>
+          <p:nvPr/>
+        </p:nvSpPr>
+        <p:spPr>
+          <a:xfrm>
+            <a:off x="704088" y="3383280"/>
+            <a:ext cx="10863072" cy="1920240"/>
+          </a:xfrm>
+          <a:prstGeom prst="rect">
+            <a:avLst/>
+          </a:prstGeom>
+          <a:noFill/>
+        </p:spPr>
+        <p:txBody>
+          <a:bodyPr wrap="square" lIns="73152" rIns="73152">
+            <a:spAutoFit/>
+          </a:bodyPr>
+          <a:lstStyle/>
+          <a:p>
+            <a:pPr algn="l">
+              <a:lnSpc>
+                <a:spcPct val="125000"/>
+              </a:lnSpc>
+            </a:pPr>
+            <a:r>
+              <a:rPr sz="1100" lang="fr-FR">
+                <a:solidFill>
+                  <a:srgbClr val="161616"/>
+                </a:solidFill>
+                <a:latin typeface="Marianne"/>
+              </a:rPr>
+              <a:t>• Une information doit être perceptible,</a:t>
+            </a:r>
+          </a:p>
+          <a:p>
+            <a:pPr algn="l">
+              <a:lnSpc>
+                <a:spcPct val="125000"/>
+              </a:lnSpc>
+            </a:pPr>
+            <a:r>
+              <a:rPr sz="1100" lang="fr-FR">
+                <a:solidFill>
+                  <a:srgbClr val="161616"/>
+                </a:solidFill>
+                <a:latin typeface="Marianne"/>
+              </a:rPr>
+              <a:t>• utilisable, compréhensible et robuste</a:t>
+            </a:r>
+          </a:p>
+          <a:p>
+            <a:pPr algn="l">
+              <a:lnSpc>
+                <a:spcPct val="125000"/>
+              </a:lnSpc>
+            </a:pPr>
+            <a:r>
+              <a:rPr sz="1100" lang="fr-FR">
+                <a:solidFill>
+                  <a:srgbClr val="161616"/>
+                </a:solidFill>
+                <a:latin typeface="Marianne"/>
+              </a:rPr>
+              <a:t>• (acronyme POUR de WCAG 2.2).</a:t>
+            </a:r>
+          </a:p>
+        </p:txBody>
+      </p:sp>
+      <p:sp>
+        <p:nvSpPr>
+          <p:cNvPr id="5" name="Espace réservé de la date 4"/>
+          <p:cNvSpPr>
+            <a:spLocks noGrp="1"/>
+          </p:cNvSpPr>
+          <p:nvPr>
+            <p:ph type="dt" sz="half" idx="10"/>
+          </p:nvPr>
+        </p:nvSpPr>
+        <p:spPr bwMode="gray"/>
+        <p:txBody>
+          <a:bodyPr wrap="square" anchor="t" lIns="73152" rIns="73152"/>
+          <a:lstStyle/>
+          <a:p>
+            <a:pPr algn="l">
+              <a:lnSpc>
+                <a:spcPct val="125000"/>
+              </a:lnSpc>
+            </a:pPr>
+            <a:r>
+              <a:rPr sz="1000" b="0" i="0" lang="fr-FR">
+                <a:solidFill>
+                  <a:srgbClr val="666666"/>
+                </a:solidFill>
+                <a:latin typeface="Marianne"/>
+              </a:rPr>
+              <a:t>4 juin 2026</a:t>
+            </a:r>
+            <a:endParaRPr lang="fr-FR" cap="all" dirty="0"/>
+          </a:p>
+        </p:txBody>
+      </p:sp>
+      <p:sp>
+        <p:nvSpPr>
+          <p:cNvPr id="6" name="Espace réservé du pied de page 5"/>
+          <p:cNvSpPr>
+            <a:spLocks noGrp="1"/>
+          </p:cNvSpPr>
+          <p:nvPr>
+            <p:ph type="ftr" sz="quarter" idx="11"/>
+          </p:nvPr>
+        </p:nvSpPr>
+        <p:spPr bwMode="gray">
+          <a:xfrm>
+            <a:off x="479998" y="6377984"/>
+            <a:ext cx="7871980" cy="479998"/>
+          </a:xfrm>
+        </p:spPr>
+        <p:txBody>
+          <a:bodyPr wrap="square" anchor="t" lIns="73152" rIns="73152"/>
+          <a:lstStyle/>
+          <a:p>
+            <a:pPr algn="l">
+              <a:lnSpc>
+                <a:spcPct val="125000"/>
+              </a:lnSpc>
+            </a:pPr>
+            <a:r>
+              <a:rPr sz="1000" b="0" i="0" lang="fr-FR">
+                <a:solidFill>
+                  <a:srgbClr val="666666"/>
+                </a:solidFill>
+                <a:latin typeface="Marianne"/>
+              </a:rPr>
+              <a:t>Formation 102638 / Démo composants</a:t>
+            </a:r>
+          </a:p>
+        </p:txBody>
+      </p:sp>
+      <p:sp>
+        <p:nvSpPr>
+          <p:cNvPr id="10" name="DSFR-card-numero"/>
+          <p:cNvSpPr/>
+          <p:nvPr/>
+        </p:nvSpPr>
+        <p:spPr>
+          <a:xfrm>
+            <a:off x="704088" y="2377440"/>
+            <a:ext cx="457200" cy="457200"/>
+          </a:xfrm>
+          <a:prstGeom prst="ellipse">
+            <a:avLst/>
+          </a:prstGeom>
+          <a:solidFill>
+            <a:srgbClr val="000091"/>
+          </a:solidFill>
+          <a:ln>
+            <a:noFill/>
+          </a:ln>
+          <a:effectLst/>
+        </p:spPr>
+        <p:style>
+          <a:lnRef idx="1">
+            <a:schemeClr val="accent1"/>
+          </a:lnRef>
+          <a:fillRef idx="3">
+            <a:schemeClr val="accent1"/>
+          </a:fillRef>
+          <a:effectRef idx="2">
+            <a:schemeClr val="accent1"/>
+          </a:effectRef>
+          <a:fontRef idx="minor">
+            <a:schemeClr val="lt1"/>
+          </a:fontRef>
+        </p:style>
+        <p:txBody>
+          <a:bodyPr rtlCol="0" anchor="ctr" wrap="square" lIns="73152" rIns="73152"/>
+          <a:lstStyle/>
+          <a:p>
+            <a:pPr algn="ctr">
+              <a:lnSpc>
+                <a:spcPct val="125000"/>
+              </a:lnSpc>
+            </a:pPr>
+            <a:r>
+              <a:rPr sz="1600" b="1" i="0" lang="fr-FR">
+                <a:solidFill>
+                  <a:srgbClr val="FFFFFF"/>
+                </a:solidFill>
+                <a:latin typeface="Marianne"/>
+              </a:rPr>
+              <a:t>1</a:t>
+            </a:r>
+          </a:p>
+        </p:txBody>
+      </p:sp>
+      <p:sp>
+        <p:nvSpPr>
+          <p:cNvPr id="8" name="DSFR-accent-decoratif" descr=""/>
+          <p:cNvSpPr/>
+          <p:nvPr/>
+        </p:nvSpPr>
+        <p:spPr>
+          <a:xfrm>
+            <a:off x="475488" y="2240280"/>
+            <a:ext cx="91440" cy="3200400"/>
+          </a:xfrm>
+          <a:prstGeom prst="rect">
+            <a:avLst/>
+          </a:prstGeom>
+          <a:solidFill>
+            <a:srgbClr val="000091"/>
+          </a:solidFill>
+          <a:ln>
+            <a:noFill/>
+          </a:ln>
+          <a:effectLst/>
+        </p:spPr>
+        <p:style>
+          <a:lnRef idx="1">
+            <a:schemeClr val="accent1"/>
+          </a:lnRef>
+          <a:fillRef idx="3">
+            <a:schemeClr val="accent1"/>
+          </a:fillRef>
+          <a:effectRef idx="2">
+            <a:schemeClr val="accent1"/>
+          </a:effectRef>
+          <a:fontRef idx="minor">
+            <a:schemeClr val="lt1"/>
+          </a:fontRef>
+        </p:style>
+        <p:txBody>
+          <a:bodyPr rtlCol="0" anchor="ctr"/>
+          <a:lstStyle/>
+          <a:p>
+            <a:pPr algn="ctr"/>
+          </a:p>
+        </p:txBody>
+      </p:sp>
+    </p:spTree>
+  </p:cSld>
+  <p:clrMapOvr>
+    <a:masterClrMapping/>
+  </p:clrMapOvr>
+</p:sld>
+</file>
+
+<file path=ppt/slides/slide14.xml><?xml version="1.0" encoding="utf-8"?>
+<p:sld xmlns:a="http://schemas.openxmlformats.org/drawingml/2006/main" xmlns:p="http://schemas.openxmlformats.org/presentationml/2006/main" xmlns:r="http://schemas.openxmlformats.org/officeDocument/2006/relationships">
+  <p:cSld>
+    <p:spTree>
+      <p:nvGrpSpPr>
+        <p:cNvPr id="1" name=""/>
+        <p:cNvGrpSpPr/>
+        <p:nvPr/>
+      </p:nvGrpSpPr>
+      <p:grpSpPr/>
+      <p:sp>
+        <p:nvSpPr>
+          <p:cNvPr id="2" name="Title 1"/>
+          <p:cNvSpPr>
+            <a:spLocks noGrp="1"/>
+          </p:cNvSpPr>
+          <p:nvPr>
+            <p:ph type="title"/>
+          </p:nvPr>
+        </p:nvSpPr>
+        <p:spPr/>
+        <p:txBody>
+          <a:bodyPr wrap="square" anchor="t" lIns="73152" rIns="73152"/>
+          <a:lstStyle/>
+          <a:p>
+            <a:pPr algn="l">
+              <a:lnSpc>
+                <a:spcPct val="125000"/>
+              </a:lnSpc>
+            </a:pPr>
+            <a:r>
+              <a:rPr sz="2800" b="1" i="0" lang="fr-FR">
+                <a:solidFill>
+                  <a:srgbClr val="000091"/>
+                </a:solidFill>
+                <a:latin typeface="Marianne"/>
+              </a:rPr>
+              <a:t>Layout deux cartes — comparer ou opposer</a:t>
+            </a:r>
+          </a:p>
+        </p:txBody>
+      </p:sp>
+      <p:sp>
+        <p:nvSpPr>
+          <p:cNvPr id="4" name="Text Placeholder 3"/>
+          <p:cNvSpPr>
+            <a:spLocks noGrp="1"/>
+          </p:cNvSpPr>
+          <p:nvPr>
+            <p:ph type="body" idx="13" sz="quarter"/>
+          </p:nvPr>
+        </p:nvSpPr>
+        <p:spPr/>
+        <p:txBody>
+          <a:bodyPr wrap="square" anchor="t" lIns="73152" rIns="73152"/>
+          <a:lstStyle/>
+          <a:p>
+            <a:pPr algn="r">
+              <a:lnSpc>
+                <a:spcPct val="125000"/>
+              </a:lnSpc>
+            </a:pPr>
+            <a:r>
+              <a:rPr sz="1100" b="0" i="0" lang="fr-FR">
+                <a:solidFill>
+                  <a:srgbClr val="666666"/>
+                </a:solidFill>
+                <a:latin typeface="Marianne"/>
+              </a:rPr>
+              <a:t>Démo | 2 cartes</a:t>
+            </a:r>
+          </a:p>
+        </p:txBody>
+      </p:sp>
+      <p:sp>
+        <p:nvSpPr>
+          <p:cNvPr id="7" name="Espace réservé du numéro de diapositive 6"/>
+          <p:cNvSpPr>
+            <a:spLocks noGrp="1"/>
+          </p:cNvSpPr>
+          <p:nvPr>
+            <p:ph type="sldNum" sz="quarter" idx="12"/>
+          </p:nvPr>
+        </p:nvSpPr>
+        <p:spPr bwMode="gray"/>
+        <p:txBody>
+          <a:bodyPr wrap="square" anchor="t" lIns="73152" rIns="73152"/>
+          <a:lstStyle/>
+          <a:p>
+            <a:pPr algn="l">
+              <a:lnSpc>
+                <a:spcPct val="125000"/>
+              </a:lnSpc>
+            </a:pPr>
+            <a:r>
+              <a:rPr sz="1000" b="0" i="0" lang="fr-FR">
+                <a:solidFill>
+                  <a:srgbClr val="666666"/>
+                </a:solidFill>
+                <a:latin typeface="Marianne"/>
+              </a:rPr>
+              <a:t>14</a:t>
+            </a:r>
+            <a:endParaRPr lang="fr-FR" dirty="0"/>
+          </a:p>
+        </p:txBody>
+      </p:sp>
+      <p:sp>
+        <p:nvSpPr>
+          <p:cNvPr id="9" name="DSFR-box"/>
+          <p:cNvSpPr/>
+          <p:nvPr/>
+        </p:nvSpPr>
+        <p:spPr>
+          <a:xfrm>
+            <a:off x="566928" y="2240280"/>
+            <a:ext cx="5372100" cy="3200400"/>
+          </a:xfrm>
+          <a:prstGeom prst="rect">
+            <a:avLst/>
+          </a:prstGeom>
+          <a:solidFill>
+            <a:srgbClr val="F6F6F6"/>
+          </a:solidFill>
+          <a:ln>
+            <a:noFill/>
+          </a:ln>
+          <a:effectLst/>
+        </p:spPr>
+        <p:style>
+          <a:lnRef idx="1">
+            <a:schemeClr val="accent1"/>
+          </a:lnRef>
+          <a:fillRef idx="3">
+            <a:schemeClr val="accent1"/>
+          </a:fillRef>
+          <a:effectRef idx="2">
+            <a:schemeClr val="accent1"/>
+          </a:effectRef>
+          <a:fontRef idx="minor">
+            <a:schemeClr val="lt1"/>
+          </a:fontRef>
+        </p:style>
+        <p:txBody>
+          <a:bodyPr rtlCol="0" anchor="ctr"/>
+          <a:lstStyle/>
+          <a:p>
+            <a:pPr algn="ctr"/>
+          </a:p>
+        </p:txBody>
+      </p:sp>
+      <p:sp>
+        <p:nvSpPr>
+          <p:cNvPr id="11" name="DSFR-card-titre"/>
+          <p:cNvSpPr txBox="1"/>
+          <p:nvPr/>
+        </p:nvSpPr>
+        <p:spPr>
+          <a:xfrm>
+            <a:off x="704088" y="2926080"/>
+            <a:ext cx="5097779" cy="411480"/>
+          </a:xfrm>
+          <a:prstGeom prst="rect">
+            <a:avLst/>
+          </a:prstGeom>
+          <a:noFill/>
+        </p:spPr>
+        <p:txBody>
+          <a:bodyPr wrap="square" anchor="t" lIns="73152" rIns="73152">
+            <a:spAutoFit/>
+          </a:bodyPr>
+          <a:lstStyle/>
+          <a:p>
+            <a:pPr algn="l">
+              <a:lnSpc>
+                <a:spcPct val="125000"/>
+              </a:lnSpc>
+            </a:pPr>
+            <a:r>
+              <a:rPr sz="1400" b="1" i="0" lang="fr-FR">
+                <a:solidFill>
+                  <a:srgbClr val="000091"/>
+                </a:solidFill>
+                <a:latin typeface="Marianne"/>
+              </a:rPr>
+              <a:t>Audit automatique</a:t>
+            </a:r>
+          </a:p>
+        </p:txBody>
+      </p:sp>
+      <p:sp>
+        <p:nvSpPr>
+          <p:cNvPr id="12" name="DSFR-card-contenu"/>
+          <p:cNvSpPr txBox="1"/>
+          <p:nvPr/>
+        </p:nvSpPr>
+        <p:spPr>
+          <a:xfrm>
+            <a:off x="704088" y="3383280"/>
+            <a:ext cx="5097779" cy="1920240"/>
+          </a:xfrm>
+          <a:prstGeom prst="rect">
+            <a:avLst/>
+          </a:prstGeom>
+          <a:noFill/>
+        </p:spPr>
+        <p:txBody>
+          <a:bodyPr wrap="square" lIns="73152" rIns="73152">
+            <a:spAutoFit/>
+          </a:bodyPr>
+          <a:lstStyle/>
+          <a:p>
+            <a:pPr algn="l">
+              <a:lnSpc>
+                <a:spcPct val="125000"/>
+              </a:lnSpc>
+            </a:pPr>
+            <a:r>
+              <a:rPr sz="1100" lang="fr-FR">
+                <a:solidFill>
+                  <a:srgbClr val="161616"/>
+                </a:solidFill>
+                <a:latin typeface="Marianne"/>
+              </a:rPr>
+              <a:t>• Rapide (quelques minutes)</a:t>
+            </a:r>
+          </a:p>
+          <a:p>
+            <a:pPr algn="l">
+              <a:lnSpc>
+                <a:spcPct val="125000"/>
+              </a:lnSpc>
+            </a:pPr>
+            <a:r>
+              <a:rPr sz="1100" lang="fr-FR">
+                <a:solidFill>
+                  <a:srgbClr val="161616"/>
+                </a:solidFill>
+                <a:latin typeface="Marianne"/>
+              </a:rPr>
+              <a:t>• Couvre 30 % des critères</a:t>
+            </a:r>
+          </a:p>
+          <a:p>
+            <a:pPr algn="l">
+              <a:lnSpc>
+                <a:spcPct val="125000"/>
+              </a:lnSpc>
+            </a:pPr>
+            <a:r>
+              <a:rPr sz="1100" lang="fr-FR">
+                <a:solidFill>
+                  <a:srgbClr val="161616"/>
+                </a:solidFill>
+                <a:latin typeface="Marianne"/>
+              </a:rPr>
+              <a:t>• Outils : axe-core, WAVE, Lighthouse</a:t>
+            </a:r>
+          </a:p>
+        </p:txBody>
+      </p:sp>
+      <p:sp>
+        <p:nvSpPr>
+          <p:cNvPr id="14" name="DSFR-box"/>
+          <p:cNvSpPr/>
+          <p:nvPr/>
+        </p:nvSpPr>
+        <p:spPr>
+          <a:xfrm>
+            <a:off x="6332219" y="2240280"/>
+            <a:ext cx="5372100" cy="3200400"/>
+          </a:xfrm>
+          <a:prstGeom prst="rect">
+            <a:avLst/>
+          </a:prstGeom>
+          <a:solidFill>
+            <a:srgbClr val="F6F6F6"/>
+          </a:solidFill>
+          <a:ln>
+            <a:noFill/>
+          </a:ln>
+          <a:effectLst/>
+        </p:spPr>
+        <p:style>
+          <a:lnRef idx="1">
+            <a:schemeClr val="accent1"/>
+          </a:lnRef>
+          <a:fillRef idx="3">
+            <a:schemeClr val="accent1"/>
+          </a:fillRef>
+          <a:effectRef idx="2">
+            <a:schemeClr val="accent1"/>
+          </a:effectRef>
+          <a:fontRef idx="minor">
+            <a:schemeClr val="lt1"/>
+          </a:fontRef>
+        </p:style>
+        <p:txBody>
+          <a:bodyPr rtlCol="0" anchor="ctr"/>
+          <a:lstStyle/>
+          <a:p>
+            <a:pPr algn="ctr"/>
+          </a:p>
+        </p:txBody>
+      </p:sp>
+      <p:sp>
+        <p:nvSpPr>
+          <p:cNvPr id="16" name="DSFR-card-titre"/>
+          <p:cNvSpPr txBox="1"/>
+          <p:nvPr/>
+        </p:nvSpPr>
+        <p:spPr>
+          <a:xfrm>
+            <a:off x="6469379" y="2926080"/>
+            <a:ext cx="5097779" cy="411480"/>
+          </a:xfrm>
+          <a:prstGeom prst="rect">
+            <a:avLst/>
+          </a:prstGeom>
+          <a:noFill/>
+        </p:spPr>
+        <p:txBody>
+          <a:bodyPr wrap="square" anchor="t" lIns="73152" rIns="73152">
+            <a:spAutoFit/>
+          </a:bodyPr>
+          <a:lstStyle/>
+          <a:p>
+            <a:pPr algn="l">
+              <a:lnSpc>
+                <a:spcPct val="125000"/>
+              </a:lnSpc>
+            </a:pPr>
+            <a:r>
+              <a:rPr sz="1400" b="1" i="0" lang="fr-FR">
+                <a:solidFill>
+                  <a:srgbClr val="000091"/>
+                </a:solidFill>
+                <a:latin typeface="Marianne"/>
+              </a:rPr>
+              <a:t>Audit manuel</a:t>
+            </a:r>
+          </a:p>
+        </p:txBody>
+      </p:sp>
+      <p:sp>
+        <p:nvSpPr>
+          <p:cNvPr id="17" name="DSFR-card-contenu"/>
+          <p:cNvSpPr txBox="1"/>
+          <p:nvPr/>
+        </p:nvSpPr>
+        <p:spPr>
+          <a:xfrm>
+            <a:off x="6469379" y="3383280"/>
+            <a:ext cx="5097779" cy="1920240"/>
+          </a:xfrm>
+          <a:prstGeom prst="rect">
+            <a:avLst/>
+          </a:prstGeom>
+          <a:noFill/>
+        </p:spPr>
+        <p:txBody>
+          <a:bodyPr wrap="square" lIns="73152" rIns="73152">
+            <a:spAutoFit/>
+          </a:bodyPr>
+          <a:lstStyle/>
+          <a:p>
+            <a:pPr algn="l">
+              <a:lnSpc>
+                <a:spcPct val="125000"/>
+              </a:lnSpc>
+            </a:pPr>
+            <a:r>
+              <a:rPr sz="1100" lang="fr-FR">
+                <a:solidFill>
+                  <a:srgbClr val="161616"/>
+                </a:solidFill>
+                <a:latin typeface="Marianne"/>
+              </a:rPr>
+              <a:t>• Long (journées à semaines)</a:t>
+            </a:r>
+          </a:p>
+          <a:p>
+            <a:pPr algn="l">
+              <a:lnSpc>
+                <a:spcPct val="125000"/>
+              </a:lnSpc>
+            </a:pPr>
+            <a:r>
+              <a:rPr sz="1100" lang="fr-FR">
+                <a:solidFill>
+                  <a:srgbClr val="161616"/>
+                </a:solidFill>
+                <a:latin typeface="Marianne"/>
+              </a:rPr>
+              <a:t>• Couvre 100 % des critères</a:t>
+            </a:r>
+          </a:p>
+          <a:p>
+            <a:pPr algn="l">
+              <a:lnSpc>
+                <a:spcPct val="125000"/>
+              </a:lnSpc>
+            </a:pPr>
+            <a:r>
+              <a:rPr sz="1100" lang="fr-FR">
+                <a:solidFill>
+                  <a:srgbClr val="161616"/>
+                </a:solidFill>
+                <a:latin typeface="Marianne"/>
+              </a:rPr>
+              <a:t>• Tests clavier, lecteur d’écran, contraste</a:t>
+            </a:r>
+          </a:p>
+        </p:txBody>
+      </p:sp>
+      <p:sp>
+        <p:nvSpPr>
+          <p:cNvPr id="5" name="Espace réservé de la date 4"/>
+          <p:cNvSpPr>
+            <a:spLocks noGrp="1"/>
+          </p:cNvSpPr>
+          <p:nvPr>
+            <p:ph type="dt" sz="half" idx="10"/>
+          </p:nvPr>
+        </p:nvSpPr>
+        <p:spPr bwMode="gray"/>
+        <p:txBody>
+          <a:bodyPr wrap="square" anchor="t" lIns="73152" rIns="73152"/>
+          <a:lstStyle/>
+          <a:p>
+            <a:pPr algn="l">
+              <a:lnSpc>
+                <a:spcPct val="125000"/>
+              </a:lnSpc>
+            </a:pPr>
+            <a:r>
+              <a:rPr sz="1000" b="0" i="0" lang="fr-FR">
+                <a:solidFill>
+                  <a:srgbClr val="666666"/>
+                </a:solidFill>
+                <a:latin typeface="Marianne"/>
+              </a:rPr>
+              <a:t>4 juin 2026</a:t>
+            </a:r>
+            <a:endParaRPr lang="fr-FR" cap="all" dirty="0"/>
+          </a:p>
+        </p:txBody>
+      </p:sp>
+      <p:sp>
+        <p:nvSpPr>
+          <p:cNvPr id="6" name="Espace réservé du pied de page 5"/>
+          <p:cNvSpPr>
+            <a:spLocks noGrp="1"/>
+          </p:cNvSpPr>
+          <p:nvPr>
+            <p:ph type="ftr" sz="quarter" idx="11"/>
+          </p:nvPr>
+        </p:nvSpPr>
+        <p:spPr bwMode="gray">
+          <a:xfrm>
+            <a:off x="479998" y="6377984"/>
+            <a:ext cx="7871980" cy="479998"/>
+          </a:xfrm>
+        </p:spPr>
+        <p:txBody>
+          <a:bodyPr wrap="square" anchor="t" lIns="73152" rIns="73152"/>
+          <a:lstStyle/>
+          <a:p>
+            <a:pPr algn="l">
+              <a:lnSpc>
+                <a:spcPct val="125000"/>
+              </a:lnSpc>
+            </a:pPr>
+            <a:r>
+              <a:rPr sz="1000" b="0" i="0" lang="fr-FR">
+                <a:solidFill>
+                  <a:srgbClr val="666666"/>
+                </a:solidFill>
+                <a:latin typeface="Marianne"/>
+              </a:rPr>
+              <a:t>Formation 102638 / Démo composants</a:t>
+            </a:r>
+          </a:p>
+        </p:txBody>
+      </p:sp>
+      <p:sp>
+        <p:nvSpPr>
+          <p:cNvPr id="10" name="DSFR-card-numero"/>
+          <p:cNvSpPr/>
+          <p:nvPr/>
+        </p:nvSpPr>
+        <p:spPr>
+          <a:xfrm>
+            <a:off x="704088" y="2377440"/>
+            <a:ext cx="457200" cy="457200"/>
+          </a:xfrm>
+          <a:prstGeom prst="ellipse">
+            <a:avLst/>
+          </a:prstGeom>
+          <a:solidFill>
+            <a:srgbClr val="000091"/>
+          </a:solidFill>
+          <a:ln>
+            <a:noFill/>
+          </a:ln>
+          <a:effectLst/>
+        </p:spPr>
+        <p:style>
+          <a:lnRef idx="1">
+            <a:schemeClr val="accent1"/>
+          </a:lnRef>
+          <a:fillRef idx="3">
+            <a:schemeClr val="accent1"/>
+          </a:fillRef>
+          <a:effectRef idx="2">
+            <a:schemeClr val="accent1"/>
+          </a:effectRef>
+          <a:fontRef idx="minor">
+            <a:schemeClr val="lt1"/>
+          </a:fontRef>
+        </p:style>
+        <p:txBody>
+          <a:bodyPr rtlCol="0" anchor="ctr" wrap="square" lIns="73152" rIns="73152"/>
+          <a:lstStyle/>
+          <a:p>
+            <a:pPr algn="ctr">
+              <a:lnSpc>
+                <a:spcPct val="125000"/>
+              </a:lnSpc>
+            </a:pPr>
+            <a:r>
+              <a:rPr sz="1600" b="1" i="0" lang="fr-FR">
+                <a:solidFill>
+                  <a:srgbClr val="FFFFFF"/>
+                </a:solidFill>
+                <a:latin typeface="Marianne"/>
+              </a:rPr>
+              <a:t>1</a:t>
+            </a:r>
+          </a:p>
+        </p:txBody>
+      </p:sp>
+      <p:sp>
+        <p:nvSpPr>
+          <p:cNvPr id="15" name="DSFR-card-numero"/>
+          <p:cNvSpPr/>
+          <p:nvPr/>
+        </p:nvSpPr>
+        <p:spPr>
+          <a:xfrm>
+            <a:off x="6469379" y="2377440"/>
+            <a:ext cx="457200" cy="457200"/>
+          </a:xfrm>
+          <a:prstGeom prst="ellipse">
+            <a:avLst/>
+          </a:prstGeom>
+          <a:solidFill>
+            <a:srgbClr val="000091"/>
+          </a:solidFill>
+          <a:ln>
+            <a:noFill/>
+          </a:ln>
+          <a:effectLst/>
+        </p:spPr>
+        <p:style>
+          <a:lnRef idx="1">
+            <a:schemeClr val="accent1"/>
+          </a:lnRef>
+          <a:fillRef idx="3">
+            <a:schemeClr val="accent1"/>
+          </a:fillRef>
+          <a:effectRef idx="2">
+            <a:schemeClr val="accent1"/>
+          </a:effectRef>
+          <a:fontRef idx="minor">
+            <a:schemeClr val="lt1"/>
+          </a:fontRef>
+        </p:style>
+        <p:txBody>
+          <a:bodyPr rtlCol="0" anchor="ctr" wrap="square" lIns="73152" rIns="73152"/>
+          <a:lstStyle/>
+          <a:p>
+            <a:pPr algn="ctr">
+              <a:lnSpc>
+                <a:spcPct val="125000"/>
+              </a:lnSpc>
+            </a:pPr>
+            <a:r>
+              <a:rPr sz="1600" b="1" i="0" lang="fr-FR">
+                <a:solidFill>
+                  <a:srgbClr val="FFFFFF"/>
+                </a:solidFill>
+                <a:latin typeface="Marianne"/>
+              </a:rPr>
+              <a:t>2</a:t>
+            </a:r>
+          </a:p>
+        </p:txBody>
+      </p:sp>
+      <p:sp>
+        <p:nvSpPr>
+          <p:cNvPr id="8" name="DSFR-accent-decoratif" descr=""/>
+          <p:cNvSpPr/>
+          <p:nvPr/>
+        </p:nvSpPr>
+        <p:spPr>
+          <a:xfrm>
+            <a:off x="475488" y="2240280"/>
+            <a:ext cx="91440" cy="3200400"/>
+          </a:xfrm>
+          <a:prstGeom prst="rect">
+            <a:avLst/>
+          </a:prstGeom>
+          <a:solidFill>
+            <a:srgbClr val="000091"/>
+          </a:solidFill>
+          <a:ln>
+            <a:noFill/>
+          </a:ln>
+          <a:effectLst/>
+        </p:spPr>
+        <p:style>
+          <a:lnRef idx="1">
+            <a:schemeClr val="accent1"/>
+          </a:lnRef>
+          <a:fillRef idx="3">
+            <a:schemeClr val="accent1"/>
+          </a:fillRef>
+          <a:effectRef idx="2">
+            <a:schemeClr val="accent1"/>
+          </a:effectRef>
+          <a:fontRef idx="minor">
+            <a:schemeClr val="lt1"/>
+          </a:fontRef>
+        </p:style>
+        <p:txBody>
+          <a:bodyPr rtlCol="0" anchor="ctr"/>
+          <a:lstStyle/>
+          <a:p>
+            <a:pPr algn="ctr"/>
+          </a:p>
+        </p:txBody>
+      </p:sp>
+      <p:sp>
+        <p:nvSpPr>
+          <p:cNvPr id="13" name="DSFR-accent-decoratif" descr=""/>
+          <p:cNvSpPr/>
+          <p:nvPr/>
+        </p:nvSpPr>
+        <p:spPr>
+          <a:xfrm>
+            <a:off x="6240779" y="2240280"/>
+            <a:ext cx="91440" cy="3200400"/>
+          </a:xfrm>
+          <a:prstGeom prst="rect">
+            <a:avLst/>
+          </a:prstGeom>
+          <a:solidFill>
+            <a:srgbClr val="000091"/>
+          </a:solidFill>
+          <a:ln>
+            <a:noFill/>
+          </a:ln>
+          <a:effectLst/>
+        </p:spPr>
+        <p:style>
+          <a:lnRef idx="1">
+            <a:schemeClr val="accent1"/>
+          </a:lnRef>
+          <a:fillRef idx="3">
+            <a:schemeClr val="accent1"/>
+          </a:fillRef>
+          <a:effectRef idx="2">
+            <a:schemeClr val="accent1"/>
+          </a:effectRef>
+          <a:fontRef idx="minor">
+            <a:schemeClr val="lt1"/>
+          </a:fontRef>
+        </p:style>
+        <p:txBody>
+          <a:bodyPr rtlCol="0" anchor="ctr"/>
+          <a:lstStyle/>
+          <a:p>
+            <a:pPr algn="ctr"/>
+          </a:p>
+        </p:txBody>
+      </p:sp>
+    </p:spTree>
+  </p:cSld>
+  <p:clrMapOvr>
+    <a:masterClrMapping/>
+  </p:clrMapOvr>
+</p:sld>
+</file>
+
+<file path=ppt/slides/slide15.xml><?xml version="1.0" encoding="utf-8"?>
+<p:sld xmlns:a="http://schemas.openxmlformats.org/drawingml/2006/main" xmlns:p="http://schemas.openxmlformats.org/presentationml/2006/main" xmlns:r="http://schemas.openxmlformats.org/officeDocument/2006/relationships">
+  <p:cSld>
+    <p:spTree>
+      <p:nvGrpSpPr>
+        <p:cNvPr id="1" name=""/>
+        <p:cNvGrpSpPr/>
+        <p:nvPr/>
+      </p:nvGrpSpPr>
+      <p:grpSpPr/>
+      <p:sp>
+        <p:nvSpPr>
+          <p:cNvPr id="2" name="Title 1"/>
+          <p:cNvSpPr>
+            <a:spLocks noGrp="1"/>
+          </p:cNvSpPr>
+          <p:nvPr>
+            <p:ph type="title"/>
+          </p:nvPr>
+        </p:nvSpPr>
+        <p:spPr/>
+        <p:txBody>
+          <a:bodyPr wrap="square" anchor="t" lIns="73152" rIns="73152"/>
+          <a:lstStyle/>
+          <a:p>
+            <a:pPr algn="l">
+              <a:lnSpc>
+                <a:spcPct val="125000"/>
+              </a:lnSpc>
+            </a:pPr>
+            <a:r>
+              <a:rPr sz="2800" b="1" i="0" lang="fr-FR">
+                <a:solidFill>
+                  <a:srgbClr val="000091"/>
+                </a:solidFill>
+                <a:latin typeface="Marianne"/>
+              </a:rPr>
+              <a:t>Layout trois cartes — triptyque ou séquence</a:t>
+            </a:r>
+          </a:p>
+        </p:txBody>
+      </p:sp>
+      <p:sp>
+        <p:nvSpPr>
+          <p:cNvPr id="4" name="Text Placeholder 3"/>
+          <p:cNvSpPr>
+            <a:spLocks noGrp="1"/>
+          </p:cNvSpPr>
+          <p:nvPr>
+            <p:ph type="body" idx="13" sz="quarter"/>
+          </p:nvPr>
+        </p:nvSpPr>
+        <p:spPr/>
+        <p:txBody>
+          <a:bodyPr wrap="square" anchor="t" lIns="73152" rIns="73152"/>
+          <a:lstStyle/>
+          <a:p>
+            <a:pPr algn="r">
+              <a:lnSpc>
+                <a:spcPct val="125000"/>
+              </a:lnSpc>
+            </a:pPr>
+            <a:r>
+              <a:rPr sz="1100" b="0" i="0" lang="fr-FR">
+                <a:solidFill>
+                  <a:srgbClr val="666666"/>
+                </a:solidFill>
+                <a:latin typeface="Marianne"/>
+              </a:rPr>
+              <a:t>Démo | 3 cartes</a:t>
+            </a:r>
+          </a:p>
+        </p:txBody>
+      </p:sp>
+      <p:sp>
+        <p:nvSpPr>
+          <p:cNvPr id="7" name="Espace réservé du numéro de diapositive 6"/>
+          <p:cNvSpPr>
+            <a:spLocks noGrp="1"/>
+          </p:cNvSpPr>
+          <p:nvPr>
+            <p:ph type="sldNum" sz="quarter" idx="12"/>
+          </p:nvPr>
+        </p:nvSpPr>
+        <p:spPr bwMode="gray"/>
+        <p:txBody>
+          <a:bodyPr wrap="square" anchor="t" lIns="73152" rIns="73152"/>
+          <a:lstStyle/>
+          <a:p>
+            <a:pPr algn="l">
+              <a:lnSpc>
+                <a:spcPct val="125000"/>
+              </a:lnSpc>
+            </a:pPr>
+            <a:r>
+              <a:rPr sz="1000" b="0" i="0" lang="fr-FR">
+                <a:solidFill>
+                  <a:srgbClr val="666666"/>
+                </a:solidFill>
+                <a:latin typeface="Marianne"/>
+              </a:rPr>
+              <a:t>15</a:t>
+            </a:r>
+            <a:endParaRPr lang="fr-FR" dirty="0"/>
+          </a:p>
+        </p:txBody>
+      </p:sp>
+      <p:sp>
+        <p:nvSpPr>
+          <p:cNvPr id="9" name="DSFR-box"/>
+          <p:cNvSpPr/>
+          <p:nvPr/>
+        </p:nvSpPr>
+        <p:spPr>
+          <a:xfrm>
+            <a:off x="566928" y="2240280"/>
+            <a:ext cx="3450335" cy="2743200"/>
+          </a:xfrm>
+          <a:prstGeom prst="rect">
+            <a:avLst/>
+          </a:prstGeom>
+          <a:solidFill>
+            <a:srgbClr val="F6F6F6"/>
+          </a:solidFill>
+          <a:ln>
+            <a:noFill/>
+          </a:ln>
+          <a:effectLst/>
+        </p:spPr>
+        <p:style>
+          <a:lnRef idx="1">
+            <a:schemeClr val="accent1"/>
+          </a:lnRef>
+          <a:fillRef idx="3">
+            <a:schemeClr val="accent1"/>
+          </a:fillRef>
+          <a:effectRef idx="2">
+            <a:schemeClr val="accent1"/>
+          </a:effectRef>
+          <a:fontRef idx="minor">
+            <a:schemeClr val="lt1"/>
+          </a:fontRef>
+        </p:style>
+        <p:txBody>
+          <a:bodyPr rtlCol="0" anchor="ctr"/>
+          <a:lstStyle/>
+          <a:p>
+            <a:pPr algn="ctr"/>
+          </a:p>
+        </p:txBody>
+      </p:sp>
+      <p:sp>
+        <p:nvSpPr>
+          <p:cNvPr id="11" name="DSFR-card-titre"/>
+          <p:cNvSpPr txBox="1"/>
+          <p:nvPr/>
+        </p:nvSpPr>
+        <p:spPr>
+          <a:xfrm>
+            <a:off x="704088" y="2926080"/>
+            <a:ext cx="3176016" cy="411480"/>
+          </a:xfrm>
+          <a:prstGeom prst="rect">
+            <a:avLst/>
+          </a:prstGeom>
+          <a:noFill/>
+        </p:spPr>
+        <p:txBody>
+          <a:bodyPr wrap="square" anchor="t" lIns="73152" rIns="73152">
+            <a:spAutoFit/>
+          </a:bodyPr>
+          <a:lstStyle/>
+          <a:p>
+            <a:pPr algn="l">
+              <a:lnSpc>
+                <a:spcPct val="125000"/>
+              </a:lnSpc>
+            </a:pPr>
+            <a:r>
+              <a:rPr sz="1400" b="1" i="0" lang="fr-FR">
+                <a:solidFill>
+                  <a:srgbClr val="000091"/>
+                </a:solidFill>
+                <a:latin typeface="Marianne"/>
+              </a:rPr>
+              <a:t>Analyser</a:t>
+            </a:r>
+          </a:p>
+        </p:txBody>
+      </p:sp>
+      <p:sp>
+        <p:nvSpPr>
+          <p:cNvPr id="12" name="DSFR-card-contenu"/>
+          <p:cNvSpPr txBox="1"/>
+          <p:nvPr/>
+        </p:nvSpPr>
+        <p:spPr>
+          <a:xfrm>
+            <a:off x="704088" y="3383280"/>
+            <a:ext cx="3176016" cy="1463040"/>
+          </a:xfrm>
+          <a:prstGeom prst="rect">
+            <a:avLst/>
+          </a:prstGeom>
+          <a:noFill/>
+        </p:spPr>
+        <p:txBody>
+          <a:bodyPr wrap="square" lIns="73152" rIns="73152">
+            <a:spAutoFit/>
+          </a:bodyPr>
+          <a:lstStyle/>
+          <a:p>
+            <a:pPr algn="l">
+              <a:lnSpc>
+                <a:spcPct val="125000"/>
+              </a:lnSpc>
+            </a:pPr>
+            <a:r>
+              <a:rPr sz="1100" lang="fr-FR">
+                <a:solidFill>
+                  <a:srgbClr val="161616"/>
+                </a:solidFill>
+                <a:latin typeface="Marianne"/>
+              </a:rPr>
+              <a:t>• Identifier les points de blocage</a:t>
+            </a:r>
+          </a:p>
+          <a:p>
+            <a:pPr algn="l">
+              <a:lnSpc>
+                <a:spcPct val="125000"/>
+              </a:lnSpc>
+            </a:pPr>
+            <a:r>
+              <a:rPr sz="1100" lang="fr-FR">
+                <a:solidFill>
+                  <a:srgbClr val="161616"/>
+                </a:solidFill>
+                <a:latin typeface="Marianne"/>
+              </a:rPr>
+              <a:t>• Prioriser par impact utilisateur</a:t>
+            </a:r>
+          </a:p>
+        </p:txBody>
+      </p:sp>
+      <p:sp>
+        <p:nvSpPr>
+          <p:cNvPr id="14" name="DSFR-box"/>
+          <p:cNvSpPr/>
+          <p:nvPr/>
+        </p:nvSpPr>
+        <p:spPr>
+          <a:xfrm>
+            <a:off x="4410455" y="2240280"/>
+            <a:ext cx="3450335" cy="2743200"/>
+          </a:xfrm>
+          <a:prstGeom prst="rect">
+            <a:avLst/>
+          </a:prstGeom>
+          <a:solidFill>
+            <a:srgbClr val="F6F6F6"/>
+          </a:solidFill>
+          <a:ln>
+            <a:noFill/>
+          </a:ln>
+          <a:effectLst/>
+        </p:spPr>
+        <p:style>
+          <a:lnRef idx="1">
+            <a:schemeClr val="accent1"/>
+          </a:lnRef>
+          <a:fillRef idx="3">
+            <a:schemeClr val="accent1"/>
+          </a:fillRef>
+          <a:effectRef idx="2">
+            <a:schemeClr val="accent1"/>
+          </a:effectRef>
+          <a:fontRef idx="minor">
+            <a:schemeClr val="lt1"/>
+          </a:fontRef>
+        </p:style>
+        <p:txBody>
+          <a:bodyPr rtlCol="0" anchor="ctr"/>
+          <a:lstStyle/>
+          <a:p>
+            <a:pPr algn="ctr"/>
+          </a:p>
+        </p:txBody>
+      </p:sp>
+      <p:sp>
+        <p:nvSpPr>
+          <p:cNvPr id="16" name="DSFR-card-titre"/>
+          <p:cNvSpPr txBox="1"/>
+          <p:nvPr/>
+        </p:nvSpPr>
+        <p:spPr>
+          <a:xfrm>
+            <a:off x="4547615" y="2926080"/>
+            <a:ext cx="3176016" cy="411480"/>
+          </a:xfrm>
+          <a:prstGeom prst="rect">
+            <a:avLst/>
+          </a:prstGeom>
+          <a:noFill/>
+        </p:spPr>
+        <p:txBody>
+          <a:bodyPr wrap="square" anchor="t" lIns="73152" rIns="73152">
+            <a:spAutoFit/>
+          </a:bodyPr>
+          <a:lstStyle/>
+          <a:p>
+            <a:pPr algn="l">
+              <a:lnSpc>
+                <a:spcPct val="125000"/>
+              </a:lnSpc>
+            </a:pPr>
+            <a:r>
+              <a:rPr sz="1400" b="1" i="0" lang="fr-FR">
+                <a:solidFill>
+                  <a:srgbClr val="000091"/>
+                </a:solidFill>
+                <a:latin typeface="Marianne"/>
+              </a:rPr>
+              <a:t>Corriger</a:t>
+            </a:r>
+          </a:p>
+        </p:txBody>
+      </p:sp>
+      <p:sp>
+        <p:nvSpPr>
+          <p:cNvPr id="17" name="DSFR-card-contenu"/>
+          <p:cNvSpPr txBox="1"/>
+          <p:nvPr/>
+        </p:nvSpPr>
+        <p:spPr>
+          <a:xfrm>
+            <a:off x="4547615" y="3383280"/>
+            <a:ext cx="3176016" cy="1463040"/>
+          </a:xfrm>
+          <a:prstGeom prst="rect">
+            <a:avLst/>
+          </a:prstGeom>
+          <a:noFill/>
+        </p:spPr>
+        <p:txBody>
+          <a:bodyPr wrap="square" lIns="73152" rIns="73152">
+            <a:spAutoFit/>
+          </a:bodyPr>
+          <a:lstStyle/>
+          <a:p>
+            <a:pPr algn="l">
+              <a:lnSpc>
+                <a:spcPct val="125000"/>
+              </a:lnSpc>
+            </a:pPr>
+            <a:r>
+              <a:rPr sz="1100" lang="fr-FR">
+                <a:solidFill>
+                  <a:srgbClr val="161616"/>
+                </a:solidFill>
+                <a:latin typeface="Marianne"/>
+              </a:rPr>
+              <a:t>• Appliquer les remédiations</a:t>
+            </a:r>
+          </a:p>
+          <a:p>
+            <a:pPr algn="l">
+              <a:lnSpc>
+                <a:spcPct val="125000"/>
+              </a:lnSpc>
+            </a:pPr>
+            <a:r>
+              <a:rPr sz="1100" lang="fr-FR">
+                <a:solidFill>
+                  <a:srgbClr val="161616"/>
+                </a:solidFill>
+                <a:latin typeface="Marianne"/>
+              </a:rPr>
+              <a:t>• Documenter les écarts restants</a:t>
+            </a:r>
+          </a:p>
+        </p:txBody>
+      </p:sp>
+      <p:sp>
+        <p:nvSpPr>
+          <p:cNvPr id="19" name="DSFR-box"/>
+          <p:cNvSpPr/>
+          <p:nvPr/>
+        </p:nvSpPr>
+        <p:spPr>
+          <a:xfrm>
+            <a:off x="8253983" y="2240280"/>
+            <a:ext cx="3450335" cy="2743200"/>
+          </a:xfrm>
+          <a:prstGeom prst="rect">
+            <a:avLst/>
+          </a:prstGeom>
+          <a:solidFill>
+            <a:srgbClr val="F6F6F6"/>
+          </a:solidFill>
+          <a:ln>
+            <a:noFill/>
+          </a:ln>
+          <a:effectLst/>
+        </p:spPr>
+        <p:style>
+          <a:lnRef idx="1">
+            <a:schemeClr val="accent1"/>
+          </a:lnRef>
+          <a:fillRef idx="3">
+            <a:schemeClr val="accent1"/>
+          </a:fillRef>
+          <a:effectRef idx="2">
+            <a:schemeClr val="accent1"/>
+          </a:effectRef>
+          <a:fontRef idx="minor">
+            <a:schemeClr val="lt1"/>
+          </a:fontRef>
+        </p:style>
+        <p:txBody>
+          <a:bodyPr rtlCol="0" anchor="ctr"/>
+          <a:lstStyle/>
+          <a:p>
+            <a:pPr algn="ctr"/>
+          </a:p>
+        </p:txBody>
+      </p:sp>
+      <p:sp>
+        <p:nvSpPr>
+          <p:cNvPr id="21" name="DSFR-card-titre"/>
+          <p:cNvSpPr txBox="1"/>
+          <p:nvPr/>
+        </p:nvSpPr>
+        <p:spPr>
+          <a:xfrm>
+            <a:off x="8391144" y="2926080"/>
+            <a:ext cx="3176016" cy="411480"/>
+          </a:xfrm>
+          <a:prstGeom prst="rect">
+            <a:avLst/>
+          </a:prstGeom>
+          <a:noFill/>
+        </p:spPr>
+        <p:txBody>
+          <a:bodyPr wrap="square" anchor="t" lIns="73152" rIns="73152">
+            <a:spAutoFit/>
+          </a:bodyPr>
+          <a:lstStyle/>
+          <a:p>
+            <a:pPr algn="l">
+              <a:lnSpc>
+                <a:spcPct val="125000"/>
+              </a:lnSpc>
+            </a:pPr>
+            <a:r>
+              <a:rPr sz="1400" b="1" i="0" lang="fr-FR">
+                <a:solidFill>
+                  <a:srgbClr val="000091"/>
+                </a:solidFill>
+                <a:latin typeface="Marianne"/>
+              </a:rPr>
+              <a:t>Vérifier</a:t>
+            </a:r>
+          </a:p>
+        </p:txBody>
+      </p:sp>
+      <p:sp>
+        <p:nvSpPr>
+          <p:cNvPr id="22" name="DSFR-card-contenu"/>
+          <p:cNvSpPr txBox="1"/>
+          <p:nvPr/>
+        </p:nvSpPr>
+        <p:spPr>
+          <a:xfrm>
+            <a:off x="8391144" y="3383280"/>
+            <a:ext cx="3176016" cy="1463040"/>
+          </a:xfrm>
+          <a:prstGeom prst="rect">
+            <a:avLst/>
+          </a:prstGeom>
+          <a:noFill/>
+        </p:spPr>
+        <p:txBody>
+          <a:bodyPr wrap="square" lIns="73152" rIns="73152">
+            <a:spAutoFit/>
+          </a:bodyPr>
+          <a:lstStyle/>
+          <a:p>
+            <a:pPr algn="l">
+              <a:lnSpc>
+                <a:spcPct val="125000"/>
+              </a:lnSpc>
+            </a:pPr>
+            <a:r>
+              <a:rPr sz="1100" lang="fr-FR">
+                <a:solidFill>
+                  <a:srgbClr val="161616"/>
+                </a:solidFill>
+                <a:latin typeface="Marianne"/>
+              </a:rPr>
+              <a:t>• Tester sur le terrain</a:t>
+            </a:r>
+          </a:p>
+          <a:p>
+            <a:pPr algn="l">
+              <a:lnSpc>
+                <a:spcPct val="125000"/>
+              </a:lnSpc>
+            </a:pPr>
+            <a:r>
+              <a:rPr sz="1100" lang="fr-FR">
+                <a:solidFill>
+                  <a:srgbClr val="161616"/>
+                </a:solidFill>
+                <a:latin typeface="Marianne"/>
+              </a:rPr>
+              <a:t>• Mesurer la progression</a:t>
+            </a:r>
+          </a:p>
+        </p:txBody>
+      </p:sp>
+      <p:sp>
+        <p:nvSpPr>
+          <p:cNvPr id="5" name="Espace réservé de la date 4"/>
+          <p:cNvSpPr>
+            <a:spLocks noGrp="1"/>
+          </p:cNvSpPr>
+          <p:nvPr>
+            <p:ph type="dt" sz="half" idx="10"/>
+          </p:nvPr>
+        </p:nvSpPr>
+        <p:spPr bwMode="gray"/>
+        <p:txBody>
+          <a:bodyPr wrap="square" anchor="t" lIns="73152" rIns="73152"/>
+          <a:lstStyle/>
+          <a:p>
+            <a:pPr algn="l">
+              <a:lnSpc>
+                <a:spcPct val="125000"/>
+              </a:lnSpc>
+            </a:pPr>
+            <a:r>
+              <a:rPr sz="1000" b="0" i="0" lang="fr-FR">
+                <a:solidFill>
+                  <a:srgbClr val="666666"/>
+                </a:solidFill>
+                <a:latin typeface="Marianne"/>
+              </a:rPr>
+              <a:t>4 juin 2026</a:t>
+            </a:r>
+            <a:endParaRPr lang="fr-FR" cap="all" dirty="0"/>
+          </a:p>
+        </p:txBody>
+      </p:sp>
+      <p:sp>
+        <p:nvSpPr>
+          <p:cNvPr id="6" name="Espace réservé du pied de page 5"/>
+          <p:cNvSpPr>
+            <a:spLocks noGrp="1"/>
+          </p:cNvSpPr>
+          <p:nvPr>
+            <p:ph type="ftr" sz="quarter" idx="11"/>
+          </p:nvPr>
+        </p:nvSpPr>
+        <p:spPr bwMode="gray">
+          <a:xfrm>
+            <a:off x="479998" y="6377984"/>
+            <a:ext cx="7871980" cy="479998"/>
+          </a:xfrm>
+        </p:spPr>
+        <p:txBody>
+          <a:bodyPr wrap="square" anchor="t" lIns="73152" rIns="73152"/>
+          <a:lstStyle/>
+          <a:p>
+            <a:pPr algn="l">
+              <a:lnSpc>
+                <a:spcPct val="125000"/>
+              </a:lnSpc>
+            </a:pPr>
+            <a:r>
+              <a:rPr sz="1000" b="0" i="0" lang="fr-FR">
+                <a:solidFill>
+                  <a:srgbClr val="666666"/>
+                </a:solidFill>
+                <a:latin typeface="Marianne"/>
+              </a:rPr>
+              <a:t>Formation 102638 / Démo composants</a:t>
+            </a:r>
+          </a:p>
+        </p:txBody>
+      </p:sp>
+      <p:sp>
+        <p:nvSpPr>
+          <p:cNvPr id="10" name="DSFR-card-numero"/>
+          <p:cNvSpPr/>
+          <p:nvPr/>
+        </p:nvSpPr>
+        <p:spPr>
+          <a:xfrm>
+            <a:off x="704088" y="2377440"/>
+            <a:ext cx="457200" cy="457200"/>
+          </a:xfrm>
+          <a:prstGeom prst="ellipse">
+            <a:avLst/>
+          </a:prstGeom>
+          <a:solidFill>
+            <a:srgbClr val="000091"/>
+          </a:solidFill>
+          <a:ln>
+            <a:noFill/>
+          </a:ln>
+          <a:effectLst/>
+        </p:spPr>
+        <p:style>
+          <a:lnRef idx="1">
+            <a:schemeClr val="accent1"/>
+          </a:lnRef>
+          <a:fillRef idx="3">
+            <a:schemeClr val="accent1"/>
+          </a:fillRef>
+          <a:effectRef idx="2">
+            <a:schemeClr val="accent1"/>
+          </a:effectRef>
+          <a:fontRef idx="minor">
+            <a:schemeClr val="lt1"/>
+          </a:fontRef>
+        </p:style>
+        <p:txBody>
+          <a:bodyPr rtlCol="0" anchor="ctr" wrap="square" lIns="73152" rIns="73152"/>
+          <a:lstStyle/>
+          <a:p>
+            <a:pPr algn="ctr">
+              <a:lnSpc>
+                <a:spcPct val="125000"/>
+              </a:lnSpc>
+            </a:pPr>
+            <a:r>
+              <a:rPr sz="1600" b="1" i="0" lang="fr-FR">
+                <a:solidFill>
+                  <a:srgbClr val="FFFFFF"/>
+                </a:solidFill>
+                <a:latin typeface="Marianne"/>
+              </a:rPr>
+              <a:t>1</a:t>
+            </a:r>
+          </a:p>
+        </p:txBody>
+      </p:sp>
+      <p:sp>
+        <p:nvSpPr>
+          <p:cNvPr id="15" name="DSFR-card-numero"/>
+          <p:cNvSpPr/>
+          <p:nvPr/>
+        </p:nvSpPr>
+        <p:spPr>
+          <a:xfrm>
+            <a:off x="4547615" y="2377440"/>
+            <a:ext cx="457200" cy="457200"/>
+          </a:xfrm>
+          <a:prstGeom prst="ellipse">
+            <a:avLst/>
+          </a:prstGeom>
+          <a:solidFill>
+            <a:srgbClr val="000091"/>
+          </a:solidFill>
+          <a:ln>
+            <a:noFill/>
+          </a:ln>
+          <a:effectLst/>
+        </p:spPr>
+        <p:style>
+          <a:lnRef idx="1">
+            <a:schemeClr val="accent1"/>
+          </a:lnRef>
+          <a:fillRef idx="3">
+            <a:schemeClr val="accent1"/>
+          </a:fillRef>
+          <a:effectRef idx="2">
+            <a:schemeClr val="accent1"/>
+          </a:effectRef>
+          <a:fontRef idx="minor">
+            <a:schemeClr val="lt1"/>
+          </a:fontRef>
+        </p:style>
+        <p:txBody>
+          <a:bodyPr rtlCol="0" anchor="ctr" wrap="square" lIns="73152" rIns="73152"/>
+          <a:lstStyle/>
+          <a:p>
+            <a:pPr algn="ctr">
+              <a:lnSpc>
+                <a:spcPct val="125000"/>
+              </a:lnSpc>
+            </a:pPr>
+            <a:r>
+              <a:rPr sz="1600" b="1" i="0" lang="fr-FR">
+                <a:solidFill>
+                  <a:srgbClr val="FFFFFF"/>
+                </a:solidFill>
+                <a:latin typeface="Marianne"/>
+              </a:rPr>
+              <a:t>2</a:t>
+            </a:r>
+          </a:p>
+        </p:txBody>
+      </p:sp>
+      <p:sp>
+        <p:nvSpPr>
+          <p:cNvPr id="20" name="DSFR-card-numero"/>
+          <p:cNvSpPr/>
+          <p:nvPr/>
+        </p:nvSpPr>
+        <p:spPr>
+          <a:xfrm>
+            <a:off x="8391144" y="2377440"/>
+            <a:ext cx="457200" cy="457200"/>
+          </a:xfrm>
+          <a:prstGeom prst="ellipse">
+            <a:avLst/>
+          </a:prstGeom>
+          <a:solidFill>
+            <a:srgbClr val="000091"/>
+          </a:solidFill>
+          <a:ln>
+            <a:noFill/>
+          </a:ln>
+          <a:effectLst/>
+        </p:spPr>
+        <p:style>
+          <a:lnRef idx="1">
+            <a:schemeClr val="accent1"/>
+          </a:lnRef>
+          <a:fillRef idx="3">
+            <a:schemeClr val="accent1"/>
+          </a:fillRef>
+          <a:effectRef idx="2">
+            <a:schemeClr val="accent1"/>
+          </a:effectRef>
+          <a:fontRef idx="minor">
+            <a:schemeClr val="lt1"/>
+          </a:fontRef>
+        </p:style>
+        <p:txBody>
+          <a:bodyPr rtlCol="0" anchor="ctr" wrap="square" lIns="73152" rIns="73152"/>
+          <a:lstStyle/>
+          <a:p>
+            <a:pPr algn="ctr">
+              <a:lnSpc>
+                <a:spcPct val="125000"/>
+              </a:lnSpc>
+            </a:pPr>
+            <a:r>
+              <a:rPr sz="1600" b="1" i="0" lang="fr-FR">
+                <a:solidFill>
+                  <a:srgbClr val="FFFFFF"/>
+                </a:solidFill>
+                <a:latin typeface="Marianne"/>
+              </a:rPr>
+              <a:t>3</a:t>
+            </a:r>
+          </a:p>
+        </p:txBody>
+      </p:sp>
+      <p:sp>
+        <p:nvSpPr>
+          <p:cNvPr id="8" name="DSFR-accent-decoratif" descr=""/>
+          <p:cNvSpPr/>
+          <p:nvPr/>
+        </p:nvSpPr>
+        <p:spPr>
+          <a:xfrm>
+            <a:off x="475488" y="2240280"/>
+            <a:ext cx="91440" cy="2743200"/>
+          </a:xfrm>
+          <a:prstGeom prst="rect">
+            <a:avLst/>
+          </a:prstGeom>
+          <a:solidFill>
+            <a:srgbClr val="000091"/>
+          </a:solidFill>
+          <a:ln>
+            <a:noFill/>
+          </a:ln>
+          <a:effectLst/>
+        </p:spPr>
+        <p:style>
+          <a:lnRef idx="1">
+            <a:schemeClr val="accent1"/>
+          </a:lnRef>
+          <a:fillRef idx="3">
+            <a:schemeClr val="accent1"/>
+          </a:fillRef>
+          <a:effectRef idx="2">
+            <a:schemeClr val="accent1"/>
+          </a:effectRef>
+          <a:fontRef idx="minor">
+            <a:schemeClr val="lt1"/>
+          </a:fontRef>
+        </p:style>
+        <p:txBody>
+          <a:bodyPr rtlCol="0" anchor="ctr"/>
+          <a:lstStyle/>
+          <a:p>
+            <a:pPr algn="ctr"/>
+          </a:p>
+        </p:txBody>
+      </p:sp>
+      <p:sp>
+        <p:nvSpPr>
+          <p:cNvPr id="13" name="DSFR-accent-decoratif" descr=""/>
+          <p:cNvSpPr/>
+          <p:nvPr/>
+        </p:nvSpPr>
+        <p:spPr>
+          <a:xfrm>
+            <a:off x="4319015" y="2240280"/>
+            <a:ext cx="91440" cy="2743200"/>
+          </a:xfrm>
+          <a:prstGeom prst="rect">
+            <a:avLst/>
+          </a:prstGeom>
+          <a:solidFill>
+            <a:srgbClr val="000091"/>
+          </a:solidFill>
+          <a:ln>
+            <a:noFill/>
+          </a:ln>
+          <a:effectLst/>
+        </p:spPr>
+        <p:style>
+          <a:lnRef idx="1">
+            <a:schemeClr val="accent1"/>
+          </a:lnRef>
+          <a:fillRef idx="3">
+            <a:schemeClr val="accent1"/>
+          </a:fillRef>
+          <a:effectRef idx="2">
+            <a:schemeClr val="accent1"/>
+          </a:effectRef>
+          <a:fontRef idx="minor">
+            <a:schemeClr val="lt1"/>
+          </a:fontRef>
+        </p:style>
+        <p:txBody>
+          <a:bodyPr rtlCol="0" anchor="ctr"/>
+          <a:lstStyle/>
+          <a:p>
+            <a:pPr algn="ctr"/>
+          </a:p>
+        </p:txBody>
+      </p:sp>
+      <p:sp>
+        <p:nvSpPr>
+          <p:cNvPr id="18" name="DSFR-accent-decoratif" descr=""/>
+          <p:cNvSpPr/>
+          <p:nvPr/>
+        </p:nvSpPr>
+        <p:spPr>
+          <a:xfrm>
+            <a:off x="8162543" y="2240280"/>
+            <a:ext cx="91440" cy="2743200"/>
+          </a:xfrm>
+          <a:prstGeom prst="rect">
+            <a:avLst/>
+          </a:prstGeom>
+          <a:solidFill>
+            <a:srgbClr val="000091"/>
+          </a:solidFill>
+          <a:ln>
+            <a:noFill/>
+          </a:ln>
+          <a:effectLst/>
+        </p:spPr>
+        <p:style>
+          <a:lnRef idx="1">
+            <a:schemeClr val="accent1"/>
+          </a:lnRef>
+          <a:fillRef idx="3">
+            <a:schemeClr val="accent1"/>
+          </a:fillRef>
+          <a:effectRef idx="2">
+            <a:schemeClr val="accent1"/>
+          </a:effectRef>
+          <a:fontRef idx="minor">
+            <a:schemeClr val="lt1"/>
+          </a:fontRef>
+        </p:style>
+        <p:txBody>
+          <a:bodyPr rtlCol="0" anchor="ctr"/>
+          <a:lstStyle/>
+          <a:p>
+            <a:pPr algn="ctr"/>
+          </a:p>
+        </p:txBody>
+      </p:sp>
+    </p:spTree>
+  </p:cSld>
+  <p:clrMapOvr>
+    <a:masterClrMapping/>
+  </p:clrMapOvr>
+</p:sld>
+</file>
+
+<file path=ppt/slides/slide16.xml><?xml version="1.0" encoding="utf-8"?>
+<p:sld xmlns:a="http://schemas.openxmlformats.org/drawingml/2006/main" xmlns:p="http://schemas.openxmlformats.org/presentationml/2006/main" xmlns:r="http://schemas.openxmlformats.org/officeDocument/2006/relationships">
+  <p:cSld>
+    <p:spTree>
+      <p:nvGrpSpPr>
+        <p:cNvPr id="1" name=""/>
+        <p:cNvGrpSpPr/>
+        <p:nvPr/>
+      </p:nvGrpSpPr>
+      <p:grpSpPr/>
+      <p:sp>
+        <p:nvSpPr>
+          <p:cNvPr id="2" name="Title 1"/>
+          <p:cNvSpPr>
+            <a:spLocks noGrp="1"/>
+          </p:cNvSpPr>
+          <p:nvPr>
+            <p:ph type="title"/>
+          </p:nvPr>
+        </p:nvSpPr>
+        <p:spPr/>
+        <p:txBody>
+          <a:bodyPr wrap="square" anchor="t" lIns="73152" rIns="73152"/>
+          <a:lstStyle/>
+          <a:p>
+            <a:pPr algn="l">
+              <a:lnSpc>
+                <a:spcPct val="125000"/>
+              </a:lnSpc>
+            </a:pPr>
+            <a:r>
+              <a:rPr sz="2800" b="1" i="0" lang="fr-FR">
+                <a:solidFill>
+                  <a:srgbClr val="000091"/>
+                </a:solidFill>
+                <a:latin typeface="Marianne"/>
+              </a:rPr>
+              <a:t>Une carte + callout — accroche et renforcement</a:t>
+            </a:r>
+          </a:p>
+        </p:txBody>
+      </p:sp>
+      <p:sp>
+        <p:nvSpPr>
+          <p:cNvPr id="4" name="Text Placeholder 3"/>
+          <p:cNvSpPr>
+            <a:spLocks noGrp="1"/>
+          </p:cNvSpPr>
+          <p:nvPr>
+            <p:ph type="body" idx="13" sz="quarter"/>
+          </p:nvPr>
+        </p:nvSpPr>
+        <p:spPr/>
+        <p:txBody>
+          <a:bodyPr wrap="square" anchor="t" lIns="73152" rIns="73152"/>
+          <a:lstStyle/>
+          <a:p>
+            <a:pPr algn="r">
+              <a:lnSpc>
+                <a:spcPct val="125000"/>
+              </a:lnSpc>
+            </a:pPr>
+            <a:r>
+              <a:rPr sz="1100" b="0" i="0" lang="fr-FR">
+                <a:solidFill>
+                  <a:srgbClr val="666666"/>
+                </a:solidFill>
+                <a:latin typeface="Marianne"/>
+              </a:rPr>
+              <a:t>Démo | 1 carte + callout</a:t>
+            </a:r>
+          </a:p>
+        </p:txBody>
+      </p:sp>
+      <p:sp>
+        <p:nvSpPr>
+          <p:cNvPr id="7" name="Espace réservé du numéro de diapositive 6"/>
+          <p:cNvSpPr>
+            <a:spLocks noGrp="1"/>
+          </p:cNvSpPr>
+          <p:nvPr>
+            <p:ph type="sldNum" sz="quarter" idx="12"/>
+          </p:nvPr>
+        </p:nvSpPr>
+        <p:spPr bwMode="gray"/>
+        <p:txBody>
+          <a:bodyPr wrap="square" anchor="t" lIns="73152" rIns="73152"/>
+          <a:lstStyle/>
+          <a:p>
+            <a:pPr algn="l">
+              <a:lnSpc>
+                <a:spcPct val="125000"/>
+              </a:lnSpc>
+            </a:pPr>
+            <a:r>
+              <a:rPr sz="1000" b="0" i="0" lang="fr-FR">
+                <a:solidFill>
+                  <a:srgbClr val="666666"/>
+                </a:solidFill>
+                <a:latin typeface="Marianne"/>
+              </a:rPr>
+              <a:t>16</a:t>
+            </a:r>
+            <a:endParaRPr lang="fr-FR" dirty="0"/>
+          </a:p>
+        </p:txBody>
+      </p:sp>
+      <p:sp>
+        <p:nvSpPr>
+          <p:cNvPr id="9" name="DSFR-box"/>
+          <p:cNvSpPr/>
+          <p:nvPr/>
+        </p:nvSpPr>
+        <p:spPr>
+          <a:xfrm>
+            <a:off x="566928" y="2240280"/>
+            <a:ext cx="11137392" cy="2103120"/>
+          </a:xfrm>
+          <a:prstGeom prst="rect">
+            <a:avLst/>
+          </a:prstGeom>
+          <a:solidFill>
+            <a:srgbClr val="F6F6F6"/>
+          </a:solidFill>
+          <a:ln>
+            <a:noFill/>
+          </a:ln>
+          <a:effectLst/>
+        </p:spPr>
+        <p:style>
+          <a:lnRef idx="1">
+            <a:schemeClr val="accent1"/>
+          </a:lnRef>
+          <a:fillRef idx="3">
+            <a:schemeClr val="accent1"/>
+          </a:fillRef>
+          <a:effectRef idx="2">
+            <a:schemeClr val="accent1"/>
+          </a:effectRef>
+          <a:fontRef idx="minor">
+            <a:schemeClr val="lt1"/>
+          </a:fontRef>
+        </p:style>
+        <p:txBody>
+          <a:bodyPr rtlCol="0" anchor="ctr"/>
+          <a:lstStyle/>
+          <a:p>
+            <a:pPr algn="ctr"/>
+          </a:p>
+        </p:txBody>
+      </p:sp>
+      <p:sp>
+        <p:nvSpPr>
+          <p:cNvPr id="11" name="DSFR-card-titre"/>
+          <p:cNvSpPr txBox="1"/>
+          <p:nvPr/>
+        </p:nvSpPr>
+        <p:spPr>
+          <a:xfrm>
+            <a:off x="704088" y="2926080"/>
+            <a:ext cx="10863072" cy="411480"/>
+          </a:xfrm>
+          <a:prstGeom prst="rect">
+            <a:avLst/>
+          </a:prstGeom>
+          <a:noFill/>
+        </p:spPr>
+        <p:txBody>
+          <a:bodyPr wrap="square" anchor="t" lIns="73152" rIns="73152">
+            <a:spAutoFit/>
+          </a:bodyPr>
+          <a:lstStyle/>
+          <a:p>
+            <a:pPr algn="l">
+              <a:lnSpc>
+                <a:spcPct val="125000"/>
+              </a:lnSpc>
+            </a:pPr>
+            <a:r>
+              <a:rPr sz="1400" b="1" i="0" lang="fr-FR">
+                <a:solidFill>
+                  <a:srgbClr val="000091"/>
+                </a:solidFill>
+                <a:latin typeface="Marianne"/>
+              </a:rPr>
+              <a:t>Principe fondamental</a:t>
+            </a:r>
+          </a:p>
+        </p:txBody>
+      </p:sp>
+      <p:sp>
+        <p:nvSpPr>
+          <p:cNvPr id="12" name="DSFR-card-contenu"/>
+          <p:cNvSpPr txBox="1"/>
+          <p:nvPr/>
+        </p:nvSpPr>
+        <p:spPr>
+          <a:xfrm>
+            <a:off x="704088" y="3383280"/>
+            <a:ext cx="10863072" cy="822959"/>
+          </a:xfrm>
+          <a:prstGeom prst="rect">
+            <a:avLst/>
+          </a:prstGeom>
+          <a:noFill/>
+        </p:spPr>
+        <p:txBody>
+          <a:bodyPr wrap="square" lIns="73152" rIns="73152">
+            <a:spAutoFit/>
+          </a:bodyPr>
+          <a:lstStyle/>
+          <a:p>
+            <a:pPr algn="l">
+              <a:lnSpc>
+                <a:spcPct val="125000"/>
+              </a:lnSpc>
+            </a:pPr>
+            <a:r>
+              <a:rPr sz="1100" lang="fr-FR">
+                <a:solidFill>
+                  <a:srgbClr val="161616"/>
+                </a:solidFill>
+                <a:latin typeface="Marianne"/>
+              </a:rPr>
+              <a:t>• Une information doit être perceptible,</a:t>
+            </a:r>
+          </a:p>
+          <a:p>
+            <a:pPr algn="l">
+              <a:lnSpc>
+                <a:spcPct val="125000"/>
+              </a:lnSpc>
+            </a:pPr>
+            <a:r>
+              <a:rPr sz="1100" lang="fr-FR">
+                <a:solidFill>
+                  <a:srgbClr val="161616"/>
+                </a:solidFill>
+                <a:latin typeface="Marianne"/>
+              </a:rPr>
+              <a:t>• utilisable, compréhensible et robuste</a:t>
+            </a:r>
+          </a:p>
+          <a:p>
+            <a:pPr algn="l">
+              <a:lnSpc>
+                <a:spcPct val="125000"/>
+              </a:lnSpc>
+            </a:pPr>
+            <a:r>
+              <a:rPr sz="1100" lang="fr-FR">
+                <a:solidFill>
+                  <a:srgbClr val="161616"/>
+                </a:solidFill>
+                <a:latin typeface="Marianne"/>
+              </a:rPr>
+              <a:t>• (acronyme POUR de WCAG 2.2).</a:t>
+            </a:r>
+          </a:p>
+        </p:txBody>
+      </p:sp>
+      <p:sp>
+        <p:nvSpPr>
+          <p:cNvPr id="14" name="DSFR-box"/>
+          <p:cNvSpPr/>
+          <p:nvPr/>
+        </p:nvSpPr>
+        <p:spPr>
+          <a:xfrm>
+            <a:off x="548640" y="4617720"/>
+            <a:ext cx="11155680" cy="1371600"/>
+          </a:xfrm>
+          <a:prstGeom prst="rect">
+            <a:avLst/>
+          </a:prstGeom>
+          <a:solidFill>
+            <a:srgbClr val="F5F5FE"/>
+          </a:solidFill>
+          <a:ln>
+            <a:noFill/>
+          </a:ln>
+          <a:effectLst/>
+        </p:spPr>
+        <p:style>
+          <a:lnRef idx="1">
+            <a:schemeClr val="accent1"/>
+          </a:lnRef>
+          <a:fillRef idx="3">
+            <a:schemeClr val="accent1"/>
+          </a:fillRef>
+          <a:effectRef idx="2">
+            <a:schemeClr val="accent1"/>
+          </a:effectRef>
+          <a:fontRef idx="minor">
+            <a:schemeClr val="lt1"/>
+          </a:fontRef>
+        </p:style>
+        <p:txBody>
+          <a:bodyPr rtlCol="0" anchor="ctr"/>
+          <a:lstStyle/>
+          <a:p>
+            <a:pPr algn="ctr"/>
+          </a:p>
+        </p:txBody>
+      </p:sp>
+      <p:sp>
+        <p:nvSpPr>
+          <p:cNvPr id="15" name="DSFR-callout-titre"/>
+          <p:cNvSpPr txBox="1"/>
+          <p:nvPr/>
+        </p:nvSpPr>
+        <p:spPr>
+          <a:xfrm>
+            <a:off x="704088" y="4709160"/>
+            <a:ext cx="10908792" cy="365760"/>
+          </a:xfrm>
+          <a:prstGeom prst="rect">
+            <a:avLst/>
+          </a:prstGeom>
+          <a:noFill/>
+        </p:spPr>
+        <p:txBody>
+          <a:bodyPr wrap="square" anchor="t" lIns="73152" rIns="73152">
+            <a:spAutoFit/>
+          </a:bodyPr>
+          <a:lstStyle/>
+          <a:p>
+            <a:pPr algn="l">
+              <a:lnSpc>
+                <a:spcPct val="125000"/>
+              </a:lnSpc>
+            </a:pPr>
+            <a:r>
+              <a:rPr sz="1400" b="1" i="0" lang="fr-FR">
+                <a:solidFill>
+                  <a:srgbClr val="000091"/>
+                </a:solidFill>
+                <a:latin typeface="Marianne"/>
+              </a:rPr>
+              <a:t>Point d’attention</a:t>
+            </a:r>
+          </a:p>
+        </p:txBody>
+      </p:sp>
+      <p:sp>
+        <p:nvSpPr>
+          <p:cNvPr id="16" name="DSFR-callout-body"/>
+          <p:cNvSpPr txBox="1"/>
+          <p:nvPr/>
+        </p:nvSpPr>
+        <p:spPr>
+          <a:xfrm>
+            <a:off x="704088" y="5120640"/>
+            <a:ext cx="10908792" cy="777240"/>
+          </a:xfrm>
+          <a:prstGeom prst="rect">
+            <a:avLst/>
+          </a:prstGeom>
+          <a:noFill/>
+        </p:spPr>
+        <p:txBody>
+          <a:bodyPr wrap="square" lIns="73152" rIns="73152">
+            <a:spAutoFit/>
+          </a:bodyPr>
+          <a:lstStyle/>
+          <a:p>
+            <a:pPr algn="l">
+              <a:lnSpc>
+                <a:spcPct val="125000"/>
+              </a:lnSpc>
+            </a:pPr>
+            <a:r>
+              <a:rPr sz="1200" lang="fr-FR">
+                <a:solidFill>
+                  <a:srgbClr val="161616"/>
+                </a:solidFill>
+                <a:latin typeface="Marianne"/>
+              </a:rPr>
+              <a:t>• Ces 4 principes structurent l’ensemble des 50 critères RGAA 4.1.2.</a:t>
+            </a:r>
+          </a:p>
+          <a:p>
+            <a:pPr algn="l">
+              <a:lnSpc>
+                <a:spcPct val="125000"/>
+              </a:lnSpc>
+            </a:pPr>
+            <a:r>
+              <a:rPr sz="1200" lang="fr-FR">
+                <a:solidFill>
+                  <a:srgbClr val="161616"/>
+                </a:solidFill>
+                <a:latin typeface="Marianne"/>
+              </a:rPr>
+              <a:t>• Les retenir facilite la lecture du référentiel.</a:t>
+            </a:r>
+          </a:p>
+        </p:txBody>
+      </p:sp>
+      <p:sp>
+        <p:nvSpPr>
+          <p:cNvPr id="5" name="Espace réservé de la date 4"/>
+          <p:cNvSpPr>
+            <a:spLocks noGrp="1"/>
+          </p:cNvSpPr>
+          <p:nvPr>
+            <p:ph type="dt" sz="half" idx="10"/>
+          </p:nvPr>
+        </p:nvSpPr>
+        <p:spPr bwMode="gray"/>
+        <p:txBody>
+          <a:bodyPr wrap="square" anchor="t" lIns="73152" rIns="73152"/>
+          <a:lstStyle/>
+          <a:p>
+            <a:pPr algn="l">
+              <a:lnSpc>
+                <a:spcPct val="125000"/>
+              </a:lnSpc>
+            </a:pPr>
+            <a:r>
+              <a:rPr sz="1000" b="0" i="0" lang="fr-FR">
+                <a:solidFill>
+                  <a:srgbClr val="666666"/>
+                </a:solidFill>
+                <a:latin typeface="Marianne"/>
+              </a:rPr>
+              <a:t>4 juin 2026</a:t>
+            </a:r>
+            <a:endParaRPr lang="fr-FR" cap="all" dirty="0"/>
+          </a:p>
+        </p:txBody>
+      </p:sp>
+      <p:sp>
+        <p:nvSpPr>
+          <p:cNvPr id="6" name="Espace réservé du pied de page 5"/>
+          <p:cNvSpPr>
+            <a:spLocks noGrp="1"/>
+          </p:cNvSpPr>
+          <p:nvPr>
+            <p:ph type="ftr" sz="quarter" idx="11"/>
+          </p:nvPr>
+        </p:nvSpPr>
+        <p:spPr bwMode="gray">
+          <a:xfrm>
+            <a:off x="479998" y="6377984"/>
+            <a:ext cx="7871980" cy="479998"/>
+          </a:xfrm>
+        </p:spPr>
+        <p:txBody>
+          <a:bodyPr wrap="square" anchor="t" lIns="73152" rIns="73152"/>
+          <a:lstStyle/>
+          <a:p>
+            <a:pPr algn="l">
+              <a:lnSpc>
+                <a:spcPct val="125000"/>
+              </a:lnSpc>
+            </a:pPr>
+            <a:r>
+              <a:rPr sz="1000" b="0" i="0" lang="fr-FR">
+                <a:solidFill>
+                  <a:srgbClr val="666666"/>
+                </a:solidFill>
+                <a:latin typeface="Marianne"/>
+              </a:rPr>
+              <a:t>Formation 102638 / Démo composants</a:t>
+            </a:r>
+          </a:p>
+        </p:txBody>
+      </p:sp>
+      <p:sp>
+        <p:nvSpPr>
+          <p:cNvPr id="10" name="DSFR-card-numero"/>
+          <p:cNvSpPr/>
+          <p:nvPr/>
+        </p:nvSpPr>
+        <p:spPr>
+          <a:xfrm>
+            <a:off x="704088" y="2377440"/>
+            <a:ext cx="457200" cy="457200"/>
+          </a:xfrm>
+          <a:prstGeom prst="ellipse">
+            <a:avLst/>
+          </a:prstGeom>
+          <a:solidFill>
+            <a:srgbClr val="000091"/>
+          </a:solidFill>
+          <a:ln>
+            <a:noFill/>
+          </a:ln>
+          <a:effectLst/>
+        </p:spPr>
+        <p:style>
+          <a:lnRef idx="1">
+            <a:schemeClr val="accent1"/>
+          </a:lnRef>
+          <a:fillRef idx="3">
+            <a:schemeClr val="accent1"/>
+          </a:fillRef>
+          <a:effectRef idx="2">
+            <a:schemeClr val="accent1"/>
+          </a:effectRef>
+          <a:fontRef idx="minor">
+            <a:schemeClr val="lt1"/>
+          </a:fontRef>
+        </p:style>
+        <p:txBody>
+          <a:bodyPr rtlCol="0" anchor="ctr" wrap="square" lIns="73152" rIns="73152"/>
+          <a:lstStyle/>
+          <a:p>
+            <a:pPr algn="ctr">
+              <a:lnSpc>
+                <a:spcPct val="125000"/>
+              </a:lnSpc>
+            </a:pPr>
+            <a:r>
+              <a:rPr sz="1600" b="1" i="0" lang="fr-FR">
+                <a:solidFill>
+                  <a:srgbClr val="FFFFFF"/>
+                </a:solidFill>
+                <a:latin typeface="Marianne"/>
+              </a:rPr>
+              <a:t>1</a:t>
+            </a:r>
+          </a:p>
+        </p:txBody>
+      </p:sp>
+      <p:sp>
+        <p:nvSpPr>
+          <p:cNvPr id="8" name="DSFR-accent-decoratif" descr=""/>
+          <p:cNvSpPr/>
+          <p:nvPr/>
+        </p:nvSpPr>
+        <p:spPr>
+          <a:xfrm>
+            <a:off x="475488" y="2240280"/>
+            <a:ext cx="91440" cy="2103120"/>
+          </a:xfrm>
+          <a:prstGeom prst="rect">
+            <a:avLst/>
+          </a:prstGeom>
+          <a:solidFill>
+            <a:srgbClr val="000091"/>
+          </a:solidFill>
+          <a:ln>
+            <a:noFill/>
+          </a:ln>
+          <a:effectLst/>
+        </p:spPr>
+        <p:style>
+          <a:lnRef idx="1">
+            <a:schemeClr val="accent1"/>
+          </a:lnRef>
+          <a:fillRef idx="3">
+            <a:schemeClr val="accent1"/>
+          </a:fillRef>
+          <a:effectRef idx="2">
+            <a:schemeClr val="accent1"/>
+          </a:effectRef>
+          <a:fontRef idx="minor">
+            <a:schemeClr val="lt1"/>
+          </a:fontRef>
+        </p:style>
+        <p:txBody>
+          <a:bodyPr rtlCol="0" anchor="ctr"/>
+          <a:lstStyle/>
+          <a:p>
+            <a:pPr algn="ctr"/>
+          </a:p>
+        </p:txBody>
+      </p:sp>
+      <p:sp>
+        <p:nvSpPr>
+          <p:cNvPr id="13" name="DSFR-accent-decoratif" descr=""/>
+          <p:cNvSpPr/>
+          <p:nvPr/>
+        </p:nvSpPr>
+        <p:spPr>
+          <a:xfrm>
+            <a:off x="475488" y="4617720"/>
+            <a:ext cx="73152" cy="1371600"/>
+          </a:xfrm>
+          <a:prstGeom prst="rect">
+            <a:avLst/>
+          </a:prstGeom>
+          <a:solidFill>
+            <a:srgbClr val="000091"/>
+          </a:solidFill>
+          <a:ln>
+            <a:noFill/>
+          </a:ln>
+          <a:effectLst/>
+        </p:spPr>
+        <p:style>
+          <a:lnRef idx="1">
+            <a:schemeClr val="accent1"/>
+          </a:lnRef>
+          <a:fillRef idx="3">
+            <a:schemeClr val="accent1"/>
+          </a:fillRef>
+          <a:effectRef idx="2">
+            <a:schemeClr val="accent1"/>
+          </a:effectRef>
+          <a:fontRef idx="minor">
+            <a:schemeClr val="lt1"/>
+          </a:fontRef>
+        </p:style>
+        <p:txBody>
+          <a:bodyPr rtlCol="0" anchor="ctr"/>
+          <a:lstStyle/>
+          <a:p>
+            <a:pPr algn="ctr"/>
+          </a:p>
+        </p:txBody>
+      </p:sp>
+    </p:spTree>
+  </p:cSld>
+  <p:clrMapOvr>
+    <a:masterClrMapping/>
+  </p:clrMapOvr>
+</p:sld>
+</file>
+
+<file path=ppt/slides/slide17.xml><?xml version="1.0" encoding="utf-8"?>
+<p:sld xmlns:a="http://schemas.openxmlformats.org/drawingml/2006/main" xmlns:p="http://schemas.openxmlformats.org/presentationml/2006/main" xmlns:r="http://schemas.openxmlformats.org/officeDocument/2006/relationships">
+  <p:cSld>
+    <p:spTree>
+      <p:nvGrpSpPr>
+        <p:cNvPr id="1" name=""/>
+        <p:cNvGrpSpPr/>
+        <p:nvPr/>
+      </p:nvGrpSpPr>
+      <p:grpSpPr/>
+      <p:sp>
+        <p:nvSpPr>
+          <p:cNvPr id="2" name="Title 1"/>
+          <p:cNvSpPr>
+            <a:spLocks noGrp="1"/>
+          </p:cNvSpPr>
+          <p:nvPr>
+            <p:ph type="title"/>
+          </p:nvPr>
+        </p:nvSpPr>
+        <p:spPr/>
+        <p:txBody>
+          <a:bodyPr wrap="square" anchor="t" lIns="73152" rIns="73152"/>
+          <a:lstStyle/>
+          <a:p>
+            <a:pPr algn="l">
+              <a:lnSpc>
+                <a:spcPct val="125000"/>
+              </a:lnSpc>
+            </a:pPr>
+            <a:r>
+              <a:rPr sz="2800" b="1" i="0" lang="fr-FR">
+                <a:solidFill>
+                  <a:srgbClr val="000091"/>
+                </a:solidFill>
+                <a:latin typeface="Marianne"/>
+              </a:rPr>
+              <a:t>Deux cartes + callout — comparaison et synthèse</a:t>
+            </a:r>
+          </a:p>
+        </p:txBody>
+      </p:sp>
+      <p:sp>
+        <p:nvSpPr>
+          <p:cNvPr id="4" name="Text Placeholder 3"/>
+          <p:cNvSpPr>
+            <a:spLocks noGrp="1"/>
+          </p:cNvSpPr>
+          <p:nvPr>
+            <p:ph type="body" idx="13" sz="quarter"/>
+          </p:nvPr>
+        </p:nvSpPr>
+        <p:spPr/>
+        <p:txBody>
+          <a:bodyPr wrap="square" anchor="t" lIns="73152" rIns="73152"/>
+          <a:lstStyle/>
+          <a:p>
+            <a:pPr algn="r">
+              <a:lnSpc>
+                <a:spcPct val="125000"/>
+              </a:lnSpc>
+            </a:pPr>
+            <a:r>
+              <a:rPr sz="1100" b="0" i="0" lang="fr-FR">
+                <a:solidFill>
+                  <a:srgbClr val="666666"/>
+                </a:solidFill>
+                <a:latin typeface="Marianne"/>
+              </a:rPr>
+              <a:t>Démo | 2 cartes + callout</a:t>
+            </a:r>
+          </a:p>
+        </p:txBody>
+      </p:sp>
+      <p:sp>
+        <p:nvSpPr>
+          <p:cNvPr id="7" name="Espace réservé du numéro de diapositive 6"/>
+          <p:cNvSpPr>
+            <a:spLocks noGrp="1"/>
+          </p:cNvSpPr>
+          <p:nvPr>
+            <p:ph type="sldNum" sz="quarter" idx="12"/>
+          </p:nvPr>
+        </p:nvSpPr>
+        <p:spPr bwMode="gray"/>
+        <p:txBody>
+          <a:bodyPr wrap="square" anchor="t" lIns="73152" rIns="73152"/>
+          <a:lstStyle/>
+          <a:p>
+            <a:pPr algn="l">
+              <a:lnSpc>
+                <a:spcPct val="125000"/>
+              </a:lnSpc>
+            </a:pPr>
+            <a:r>
+              <a:rPr sz="1000" b="0" i="0" lang="fr-FR">
+                <a:solidFill>
+                  <a:srgbClr val="666666"/>
+                </a:solidFill>
+                <a:latin typeface="Marianne"/>
+              </a:rPr>
+              <a:t>17</a:t>
+            </a:r>
+            <a:endParaRPr lang="fr-FR" dirty="0"/>
+          </a:p>
+        </p:txBody>
+      </p:sp>
+      <p:sp>
+        <p:nvSpPr>
+          <p:cNvPr id="9" name="DSFR-box"/>
+          <p:cNvSpPr/>
+          <p:nvPr/>
+        </p:nvSpPr>
+        <p:spPr>
+          <a:xfrm>
+            <a:off x="566928" y="2240280"/>
+            <a:ext cx="5372100" cy="2103120"/>
+          </a:xfrm>
+          <a:prstGeom prst="rect">
+            <a:avLst/>
+          </a:prstGeom>
+          <a:solidFill>
+            <a:srgbClr val="F6F6F6"/>
+          </a:solidFill>
+          <a:ln>
+            <a:noFill/>
+          </a:ln>
+          <a:effectLst/>
+        </p:spPr>
+        <p:style>
+          <a:lnRef idx="1">
+            <a:schemeClr val="accent1"/>
+          </a:lnRef>
+          <a:fillRef idx="3">
+            <a:schemeClr val="accent1"/>
+          </a:fillRef>
+          <a:effectRef idx="2">
+            <a:schemeClr val="accent1"/>
+          </a:effectRef>
+          <a:fontRef idx="minor">
+            <a:schemeClr val="lt1"/>
+          </a:fontRef>
+        </p:style>
+        <p:txBody>
+          <a:bodyPr rtlCol="0" anchor="ctr"/>
+          <a:lstStyle/>
+          <a:p>
+            <a:pPr algn="ctr"/>
+          </a:p>
+        </p:txBody>
+      </p:sp>
+      <p:sp>
+        <p:nvSpPr>
+          <p:cNvPr id="11" name="DSFR-card-titre"/>
+          <p:cNvSpPr txBox="1"/>
+          <p:nvPr/>
+        </p:nvSpPr>
+        <p:spPr>
+          <a:xfrm>
+            <a:off x="704088" y="2926080"/>
+            <a:ext cx="5097779" cy="411480"/>
+          </a:xfrm>
+          <a:prstGeom prst="rect">
+            <a:avLst/>
+          </a:prstGeom>
+          <a:noFill/>
+        </p:spPr>
+        <p:txBody>
+          <a:bodyPr wrap="square" anchor="t" lIns="73152" rIns="73152">
+            <a:spAutoFit/>
+          </a:bodyPr>
+          <a:lstStyle/>
+          <a:p>
+            <a:pPr algn="l">
+              <a:lnSpc>
+                <a:spcPct val="125000"/>
+              </a:lnSpc>
+            </a:pPr>
+            <a:r>
+              <a:rPr sz="1400" b="1" i="0" lang="fr-FR">
+                <a:solidFill>
+                  <a:srgbClr val="000091"/>
+                </a:solidFill>
+                <a:latin typeface="Marianne"/>
+              </a:rPr>
+              <a:t>Audit automatique</a:t>
+            </a:r>
+          </a:p>
+        </p:txBody>
+      </p:sp>
+      <p:sp>
+        <p:nvSpPr>
+          <p:cNvPr id="12" name="DSFR-card-contenu"/>
+          <p:cNvSpPr txBox="1"/>
+          <p:nvPr/>
+        </p:nvSpPr>
+        <p:spPr>
+          <a:xfrm>
+            <a:off x="704088" y="3383280"/>
+            <a:ext cx="5097779" cy="822959"/>
+          </a:xfrm>
+          <a:prstGeom prst="rect">
+            <a:avLst/>
+          </a:prstGeom>
+          <a:noFill/>
+        </p:spPr>
+        <p:txBody>
+          <a:bodyPr wrap="square" lIns="73152" rIns="73152">
+            <a:spAutoFit/>
+          </a:bodyPr>
+          <a:lstStyle/>
+          <a:p>
+            <a:pPr algn="l">
+              <a:lnSpc>
+                <a:spcPct val="125000"/>
+              </a:lnSpc>
+            </a:pPr>
+            <a:r>
+              <a:rPr sz="1100" lang="fr-FR">
+                <a:solidFill>
+                  <a:srgbClr val="161616"/>
+                </a:solidFill>
+                <a:latin typeface="Marianne"/>
+              </a:rPr>
+              <a:t>• Rapide (quelques minutes)</a:t>
+            </a:r>
+          </a:p>
+          <a:p>
+            <a:pPr algn="l">
+              <a:lnSpc>
+                <a:spcPct val="125000"/>
+              </a:lnSpc>
+            </a:pPr>
+            <a:r>
+              <a:rPr sz="1100" lang="fr-FR">
+                <a:solidFill>
+                  <a:srgbClr val="161616"/>
+                </a:solidFill>
+                <a:latin typeface="Marianne"/>
+              </a:rPr>
+              <a:t>• Couvre 30 % des critères</a:t>
+            </a:r>
+          </a:p>
+        </p:txBody>
+      </p:sp>
+      <p:sp>
+        <p:nvSpPr>
+          <p:cNvPr id="14" name="DSFR-box"/>
+          <p:cNvSpPr/>
+          <p:nvPr/>
+        </p:nvSpPr>
+        <p:spPr>
+          <a:xfrm>
+            <a:off x="6332219" y="2240280"/>
+            <a:ext cx="5372100" cy="2103120"/>
+          </a:xfrm>
+          <a:prstGeom prst="rect">
+            <a:avLst/>
+          </a:prstGeom>
+          <a:solidFill>
+            <a:srgbClr val="F6F6F6"/>
+          </a:solidFill>
+          <a:ln>
+            <a:noFill/>
+          </a:ln>
+          <a:effectLst/>
+        </p:spPr>
+        <p:style>
+          <a:lnRef idx="1">
+            <a:schemeClr val="accent1"/>
+          </a:lnRef>
+          <a:fillRef idx="3">
+            <a:schemeClr val="accent1"/>
+          </a:fillRef>
+          <a:effectRef idx="2">
+            <a:schemeClr val="accent1"/>
+          </a:effectRef>
+          <a:fontRef idx="minor">
+            <a:schemeClr val="lt1"/>
+          </a:fontRef>
+        </p:style>
+        <p:txBody>
+          <a:bodyPr rtlCol="0" anchor="ctr"/>
+          <a:lstStyle/>
+          <a:p>
+            <a:pPr algn="ctr"/>
+          </a:p>
+        </p:txBody>
+      </p:sp>
+      <p:sp>
+        <p:nvSpPr>
+          <p:cNvPr id="16" name="DSFR-card-titre"/>
+          <p:cNvSpPr txBox="1"/>
+          <p:nvPr/>
+        </p:nvSpPr>
+        <p:spPr>
+          <a:xfrm>
+            <a:off x="6469379" y="2926080"/>
+            <a:ext cx="5097779" cy="411480"/>
+          </a:xfrm>
+          <a:prstGeom prst="rect">
+            <a:avLst/>
+          </a:prstGeom>
+          <a:noFill/>
+        </p:spPr>
+        <p:txBody>
+          <a:bodyPr wrap="square" anchor="t" lIns="73152" rIns="73152">
+            <a:spAutoFit/>
+          </a:bodyPr>
+          <a:lstStyle/>
+          <a:p>
+            <a:pPr algn="l">
+              <a:lnSpc>
+                <a:spcPct val="125000"/>
+              </a:lnSpc>
+            </a:pPr>
+            <a:r>
+              <a:rPr sz="1400" b="1" i="0" lang="fr-FR">
+                <a:solidFill>
+                  <a:srgbClr val="000091"/>
+                </a:solidFill>
+                <a:latin typeface="Marianne"/>
+              </a:rPr>
+              <a:t>Audit manuel</a:t>
+            </a:r>
+          </a:p>
+        </p:txBody>
+      </p:sp>
+      <p:sp>
+        <p:nvSpPr>
+          <p:cNvPr id="17" name="DSFR-card-contenu"/>
+          <p:cNvSpPr txBox="1"/>
+          <p:nvPr/>
+        </p:nvSpPr>
+        <p:spPr>
+          <a:xfrm>
+            <a:off x="6469379" y="3383280"/>
+            <a:ext cx="5097779" cy="822959"/>
+          </a:xfrm>
+          <a:prstGeom prst="rect">
+            <a:avLst/>
+          </a:prstGeom>
+          <a:noFill/>
+        </p:spPr>
+        <p:txBody>
+          <a:bodyPr wrap="square" lIns="73152" rIns="73152">
+            <a:spAutoFit/>
+          </a:bodyPr>
+          <a:lstStyle/>
+          <a:p>
+            <a:pPr algn="l">
+              <a:lnSpc>
+                <a:spcPct val="125000"/>
+              </a:lnSpc>
+            </a:pPr>
+            <a:r>
+              <a:rPr sz="1100" lang="fr-FR">
+                <a:solidFill>
+                  <a:srgbClr val="161616"/>
+                </a:solidFill>
+                <a:latin typeface="Marianne"/>
+              </a:rPr>
+              <a:t>• Long (journées à semaines)</a:t>
+            </a:r>
+          </a:p>
+          <a:p>
+            <a:pPr algn="l">
+              <a:lnSpc>
+                <a:spcPct val="125000"/>
+              </a:lnSpc>
+            </a:pPr>
+            <a:r>
+              <a:rPr sz="1100" lang="fr-FR">
+                <a:solidFill>
+                  <a:srgbClr val="161616"/>
+                </a:solidFill>
+                <a:latin typeface="Marianne"/>
+              </a:rPr>
+              <a:t>• Couvre 100 % des critères</a:t>
+            </a:r>
+          </a:p>
+        </p:txBody>
+      </p:sp>
+      <p:sp>
+        <p:nvSpPr>
+          <p:cNvPr id="19" name="DSFR-box"/>
+          <p:cNvSpPr/>
+          <p:nvPr/>
+        </p:nvSpPr>
+        <p:spPr>
+          <a:xfrm>
+            <a:off x="548640" y="4617720"/>
+            <a:ext cx="11155680" cy="1371600"/>
+          </a:xfrm>
+          <a:prstGeom prst="rect">
+            <a:avLst/>
+          </a:prstGeom>
+          <a:solidFill>
+            <a:srgbClr val="F5F5FE"/>
+          </a:solidFill>
+          <a:ln>
+            <a:noFill/>
+          </a:ln>
+          <a:effectLst/>
+        </p:spPr>
+        <p:style>
+          <a:lnRef idx="1">
+            <a:schemeClr val="accent1"/>
+          </a:lnRef>
+          <a:fillRef idx="3">
+            <a:schemeClr val="accent1"/>
+          </a:fillRef>
+          <a:effectRef idx="2">
+            <a:schemeClr val="accent1"/>
+          </a:effectRef>
+          <a:fontRef idx="minor">
+            <a:schemeClr val="lt1"/>
+          </a:fontRef>
+        </p:style>
+        <p:txBody>
+          <a:bodyPr rtlCol="0" anchor="ctr"/>
+          <a:lstStyle/>
+          <a:p>
+            <a:pPr algn="ctr"/>
+          </a:p>
+        </p:txBody>
+      </p:sp>
+      <p:sp>
+        <p:nvSpPr>
+          <p:cNvPr id="20" name="DSFR-callout-titre"/>
+          <p:cNvSpPr txBox="1"/>
+          <p:nvPr/>
+        </p:nvSpPr>
+        <p:spPr>
+          <a:xfrm>
+            <a:off x="704088" y="4709159"/>
+            <a:ext cx="10908792" cy="365760"/>
+          </a:xfrm>
+          <a:prstGeom prst="rect">
+            <a:avLst/>
+          </a:prstGeom>
+          <a:noFill/>
+        </p:spPr>
+        <p:txBody>
+          <a:bodyPr wrap="square" anchor="t" lIns="73152" rIns="73152">
+            <a:spAutoFit/>
+          </a:bodyPr>
+          <a:lstStyle/>
+          <a:p>
+            <a:pPr algn="l">
+              <a:lnSpc>
+                <a:spcPct val="125000"/>
+              </a:lnSpc>
+            </a:pPr>
+            <a:r>
+              <a:rPr sz="1400" b="1" i="0" lang="fr-FR">
+                <a:solidFill>
+                  <a:srgbClr val="000091"/>
+                </a:solidFill>
+                <a:latin typeface="Marianne"/>
+              </a:rPr>
+              <a:t>À retenir</a:t>
+            </a:r>
+          </a:p>
+        </p:txBody>
+      </p:sp>
+      <p:sp>
+        <p:nvSpPr>
+          <p:cNvPr id="21" name="DSFR-callout-body"/>
+          <p:cNvSpPr txBox="1"/>
+          <p:nvPr/>
+        </p:nvSpPr>
+        <p:spPr>
+          <a:xfrm>
+            <a:off x="704088" y="5120640"/>
+            <a:ext cx="10908792" cy="777240"/>
+          </a:xfrm>
+          <a:prstGeom prst="rect">
+            <a:avLst/>
+          </a:prstGeom>
+          <a:noFill/>
+        </p:spPr>
+        <p:txBody>
+          <a:bodyPr wrap="square" lIns="73152" rIns="73152">
+            <a:spAutoFit/>
+          </a:bodyPr>
+          <a:lstStyle/>
+          <a:p>
+            <a:pPr algn="l">
+              <a:lnSpc>
+                <a:spcPct val="125000"/>
+              </a:lnSpc>
+            </a:pPr>
+            <a:r>
+              <a:rPr sz="1200" lang="fr-FR">
+                <a:solidFill>
+                  <a:srgbClr val="161616"/>
+                </a:solidFill>
+                <a:latin typeface="Marianne"/>
+              </a:rPr>
+              <a:t>• Les deux approches sont complémentaires :</a:t>
+            </a:r>
+          </a:p>
+          <a:p>
+            <a:pPr algn="l">
+              <a:lnSpc>
+                <a:spcPct val="125000"/>
+              </a:lnSpc>
+            </a:pPr>
+            <a:r>
+              <a:rPr sz="1200" lang="fr-FR">
+                <a:solidFill>
+                  <a:srgbClr val="161616"/>
+                </a:solidFill>
+                <a:latin typeface="Marianne"/>
+              </a:rPr>
+              <a:t>• automatique pour détecter, manuel pour qualifier.</a:t>
+            </a:r>
+          </a:p>
+        </p:txBody>
+      </p:sp>
+      <p:sp>
+        <p:nvSpPr>
+          <p:cNvPr id="5" name="Espace réservé de la date 4"/>
+          <p:cNvSpPr>
+            <a:spLocks noGrp="1"/>
+          </p:cNvSpPr>
+          <p:nvPr>
+            <p:ph type="dt" sz="half" idx="10"/>
+          </p:nvPr>
+        </p:nvSpPr>
+        <p:spPr bwMode="gray"/>
+        <p:txBody>
+          <a:bodyPr wrap="square" anchor="t" lIns="73152" rIns="73152"/>
+          <a:lstStyle/>
+          <a:p>
+            <a:pPr algn="l">
+              <a:lnSpc>
+                <a:spcPct val="125000"/>
+              </a:lnSpc>
+            </a:pPr>
+            <a:r>
+              <a:rPr sz="1000" b="0" i="0" lang="fr-FR">
+                <a:solidFill>
+                  <a:srgbClr val="666666"/>
+                </a:solidFill>
+                <a:latin typeface="Marianne"/>
+              </a:rPr>
+              <a:t>4 juin 2026</a:t>
+            </a:r>
+            <a:endParaRPr lang="fr-FR" cap="all" dirty="0"/>
+          </a:p>
+        </p:txBody>
+      </p:sp>
+      <p:sp>
+        <p:nvSpPr>
+          <p:cNvPr id="6" name="Espace réservé du pied de page 5"/>
+          <p:cNvSpPr>
+            <a:spLocks noGrp="1"/>
+          </p:cNvSpPr>
+          <p:nvPr>
+            <p:ph type="ftr" sz="quarter" idx="11"/>
+          </p:nvPr>
+        </p:nvSpPr>
+        <p:spPr bwMode="gray">
+          <a:xfrm>
+            <a:off x="479998" y="6377984"/>
+            <a:ext cx="7871980" cy="479998"/>
+          </a:xfrm>
+        </p:spPr>
+        <p:txBody>
+          <a:bodyPr wrap="square" anchor="t" lIns="73152" rIns="73152"/>
+          <a:lstStyle/>
+          <a:p>
+            <a:pPr algn="l">
+              <a:lnSpc>
+                <a:spcPct val="125000"/>
+              </a:lnSpc>
+            </a:pPr>
+            <a:r>
+              <a:rPr sz="1000" b="0" i="0" lang="fr-FR">
+                <a:solidFill>
+                  <a:srgbClr val="666666"/>
+                </a:solidFill>
+                <a:latin typeface="Marianne"/>
+              </a:rPr>
+              <a:t>Formation 102638 / Démo composants</a:t>
+            </a:r>
+          </a:p>
+        </p:txBody>
+      </p:sp>
+      <p:sp>
+        <p:nvSpPr>
+          <p:cNvPr id="10" name="DSFR-card-numero"/>
+          <p:cNvSpPr/>
+          <p:nvPr/>
+        </p:nvSpPr>
+        <p:spPr>
+          <a:xfrm>
+            <a:off x="704088" y="2377440"/>
+            <a:ext cx="457200" cy="457200"/>
+          </a:xfrm>
+          <a:prstGeom prst="ellipse">
+            <a:avLst/>
+          </a:prstGeom>
+          <a:solidFill>
+            <a:srgbClr val="000091"/>
+          </a:solidFill>
+          <a:ln>
+            <a:noFill/>
+          </a:ln>
+          <a:effectLst/>
+        </p:spPr>
+        <p:style>
+          <a:lnRef idx="1">
+            <a:schemeClr val="accent1"/>
+          </a:lnRef>
+          <a:fillRef idx="3">
+            <a:schemeClr val="accent1"/>
+          </a:fillRef>
+          <a:effectRef idx="2">
+            <a:schemeClr val="accent1"/>
+          </a:effectRef>
+          <a:fontRef idx="minor">
+            <a:schemeClr val="lt1"/>
+          </a:fontRef>
+        </p:style>
+        <p:txBody>
+          <a:bodyPr rtlCol="0" anchor="ctr" wrap="square" lIns="73152" rIns="73152"/>
+          <a:lstStyle/>
+          <a:p>
+            <a:pPr algn="ctr">
+              <a:lnSpc>
+                <a:spcPct val="125000"/>
+              </a:lnSpc>
+            </a:pPr>
+            <a:r>
+              <a:rPr sz="1600" b="1" i="0" lang="fr-FR">
+                <a:solidFill>
+                  <a:srgbClr val="FFFFFF"/>
+                </a:solidFill>
+                <a:latin typeface="Marianne"/>
+              </a:rPr>
+              <a:t>1</a:t>
+            </a:r>
+          </a:p>
+        </p:txBody>
+      </p:sp>
+      <p:sp>
+        <p:nvSpPr>
+          <p:cNvPr id="15" name="DSFR-card-numero"/>
+          <p:cNvSpPr/>
+          <p:nvPr/>
+        </p:nvSpPr>
+        <p:spPr>
+          <a:xfrm>
+            <a:off x="6469379" y="2377440"/>
+            <a:ext cx="457200" cy="457200"/>
+          </a:xfrm>
+          <a:prstGeom prst="ellipse">
+            <a:avLst/>
+          </a:prstGeom>
+          <a:solidFill>
+            <a:srgbClr val="000091"/>
+          </a:solidFill>
+          <a:ln>
+            <a:noFill/>
+          </a:ln>
+          <a:effectLst/>
+        </p:spPr>
+        <p:style>
+          <a:lnRef idx="1">
+            <a:schemeClr val="accent1"/>
+          </a:lnRef>
+          <a:fillRef idx="3">
+            <a:schemeClr val="accent1"/>
+          </a:fillRef>
+          <a:effectRef idx="2">
+            <a:schemeClr val="accent1"/>
+          </a:effectRef>
+          <a:fontRef idx="minor">
+            <a:schemeClr val="lt1"/>
+          </a:fontRef>
+        </p:style>
+        <p:txBody>
+          <a:bodyPr rtlCol="0" anchor="ctr" wrap="square" lIns="73152" rIns="73152"/>
+          <a:lstStyle/>
+          <a:p>
+            <a:pPr algn="ctr">
+              <a:lnSpc>
+                <a:spcPct val="125000"/>
+              </a:lnSpc>
+            </a:pPr>
+            <a:r>
+              <a:rPr sz="1600" b="1" i="0" lang="fr-FR">
+                <a:solidFill>
+                  <a:srgbClr val="FFFFFF"/>
+                </a:solidFill>
+                <a:latin typeface="Marianne"/>
+              </a:rPr>
+              <a:t>2</a:t>
+            </a:r>
+          </a:p>
+        </p:txBody>
+      </p:sp>
+      <p:sp>
+        <p:nvSpPr>
+          <p:cNvPr id="8" name="DSFR-accent-decoratif" descr=""/>
+          <p:cNvSpPr/>
+          <p:nvPr/>
+        </p:nvSpPr>
+        <p:spPr>
+          <a:xfrm>
+            <a:off x="475488" y="2240280"/>
+            <a:ext cx="91440" cy="2103120"/>
+          </a:xfrm>
+          <a:prstGeom prst="rect">
+            <a:avLst/>
+          </a:prstGeom>
+          <a:solidFill>
+            <a:srgbClr val="000091"/>
+          </a:solidFill>
+          <a:ln>
+            <a:noFill/>
+          </a:ln>
+          <a:effectLst/>
+        </p:spPr>
+        <p:style>
+          <a:lnRef idx="1">
+            <a:schemeClr val="accent1"/>
+          </a:lnRef>
+          <a:fillRef idx="3">
+            <a:schemeClr val="accent1"/>
+          </a:fillRef>
+          <a:effectRef idx="2">
+            <a:schemeClr val="accent1"/>
+          </a:effectRef>
+          <a:fontRef idx="minor">
+            <a:schemeClr val="lt1"/>
+          </a:fontRef>
+        </p:style>
+        <p:txBody>
+          <a:bodyPr rtlCol="0" anchor="ctr"/>
+          <a:lstStyle/>
+          <a:p>
+            <a:pPr algn="ctr"/>
+          </a:p>
+        </p:txBody>
+      </p:sp>
+      <p:sp>
+        <p:nvSpPr>
+          <p:cNvPr id="13" name="DSFR-accent-decoratif" descr=""/>
+          <p:cNvSpPr/>
+          <p:nvPr/>
+        </p:nvSpPr>
+        <p:spPr>
+          <a:xfrm>
+            <a:off x="6240779" y="2240280"/>
+            <a:ext cx="91440" cy="2103120"/>
+          </a:xfrm>
+          <a:prstGeom prst="rect">
+            <a:avLst/>
+          </a:prstGeom>
+          <a:solidFill>
+            <a:srgbClr val="000091"/>
+          </a:solidFill>
+          <a:ln>
+            <a:noFill/>
+          </a:ln>
+          <a:effectLst/>
+        </p:spPr>
+        <p:style>
+          <a:lnRef idx="1">
+            <a:schemeClr val="accent1"/>
+          </a:lnRef>
+          <a:fillRef idx="3">
+            <a:schemeClr val="accent1"/>
+          </a:fillRef>
+          <a:effectRef idx="2">
+            <a:schemeClr val="accent1"/>
+          </a:effectRef>
+          <a:fontRef idx="minor">
+            <a:schemeClr val="lt1"/>
+          </a:fontRef>
+        </p:style>
+        <p:txBody>
+          <a:bodyPr rtlCol="0" anchor="ctr"/>
+          <a:lstStyle/>
+          <a:p>
+            <a:pPr algn="ctr"/>
+          </a:p>
+        </p:txBody>
+      </p:sp>
+      <p:sp>
+        <p:nvSpPr>
+          <p:cNvPr id="18" name="DSFR-accent-decoratif" descr=""/>
+          <p:cNvSpPr/>
+          <p:nvPr/>
+        </p:nvSpPr>
+        <p:spPr>
+          <a:xfrm>
+            <a:off x="475488" y="4617720"/>
+            <a:ext cx="73152" cy="1371600"/>
+          </a:xfrm>
+          <a:prstGeom prst="rect">
+            <a:avLst/>
+          </a:prstGeom>
+          <a:solidFill>
+            <a:srgbClr val="000091"/>
+          </a:solidFill>
+          <a:ln>
+            <a:noFill/>
+          </a:ln>
+          <a:effectLst/>
+        </p:spPr>
+        <p:style>
+          <a:lnRef idx="1">
+            <a:schemeClr val="accent1"/>
+          </a:lnRef>
+          <a:fillRef idx="3">
+            <a:schemeClr val="accent1"/>
+          </a:fillRef>
+          <a:effectRef idx="2">
+            <a:schemeClr val="accent1"/>
+          </a:effectRef>
+          <a:fontRef idx="minor">
+            <a:schemeClr val="lt1"/>
+          </a:fontRef>
+        </p:style>
+        <p:txBody>
+          <a:bodyPr rtlCol="0" anchor="ctr"/>
+          <a:lstStyle/>
+          <a:p>
+            <a:pPr algn="ctr"/>
+          </a:p>
+        </p:txBody>
+      </p:sp>
+    </p:spTree>
+  </p:cSld>
+  <p:clrMapOvr>
+    <a:masterClrMapping/>
+  </p:clrMapOvr>
+</p:sld>
+</file>
+
+<file path=ppt/slides/slide18.xml><?xml version="1.0" encoding="utf-8"?>
+<p:sld xmlns:a="http://schemas.openxmlformats.org/drawingml/2006/main" xmlns:p="http://schemas.openxmlformats.org/presentationml/2006/main" xmlns:r="http://schemas.openxmlformats.org/officeDocument/2006/relationships">
+  <p:cSld>
+    <p:spTree>
+      <p:nvGrpSpPr>
+        <p:cNvPr id="1" name=""/>
+        <p:cNvGrpSpPr/>
+        <p:nvPr/>
+      </p:nvGrpSpPr>
+      <p:grpSpPr/>
+      <p:sp>
+        <p:nvSpPr>
+          <p:cNvPr id="2" name="Title 1"/>
+          <p:cNvSpPr>
+            <a:spLocks noGrp="1"/>
+          </p:cNvSpPr>
+          <p:nvPr>
+            <p:ph type="title"/>
+          </p:nvPr>
+        </p:nvSpPr>
+        <p:spPr/>
+        <p:txBody>
+          <a:bodyPr wrap="square" anchor="t" lIns="73152" rIns="73152"/>
+          <a:lstStyle/>
+          <a:p>
+            <a:pPr algn="l">
+              <a:lnSpc>
+                <a:spcPct val="125000"/>
+              </a:lnSpc>
+            </a:pPr>
+            <a:r>
+              <a:rPr sz="2800" b="1" i="0" lang="fr-FR">
+                <a:solidFill>
+                  <a:srgbClr val="000091"/>
+                </a:solidFill>
+                <a:latin typeface="Marianne"/>
+              </a:rPr>
+              <a:t>Trois cartes + callout — processus et rappel</a:t>
+            </a:r>
+          </a:p>
+        </p:txBody>
+      </p:sp>
+      <p:sp>
+        <p:nvSpPr>
+          <p:cNvPr id="4" name="Text Placeholder 3"/>
+          <p:cNvSpPr>
+            <a:spLocks noGrp="1"/>
+          </p:cNvSpPr>
+          <p:nvPr>
+            <p:ph type="body" idx="13" sz="quarter"/>
+          </p:nvPr>
+        </p:nvSpPr>
+        <p:spPr/>
+        <p:txBody>
+          <a:bodyPr wrap="square" anchor="t" lIns="73152" rIns="73152"/>
+          <a:lstStyle/>
+          <a:p>
+            <a:pPr algn="r">
+              <a:lnSpc>
+                <a:spcPct val="125000"/>
+              </a:lnSpc>
+            </a:pPr>
+            <a:r>
+              <a:rPr sz="1100" b="0" i="0" lang="fr-FR">
+                <a:solidFill>
+                  <a:srgbClr val="666666"/>
+                </a:solidFill>
+                <a:latin typeface="Marianne"/>
+              </a:rPr>
+              <a:t>Démo | 3 cartes + callout</a:t>
+            </a:r>
+          </a:p>
+        </p:txBody>
+      </p:sp>
+      <p:sp>
+        <p:nvSpPr>
+          <p:cNvPr id="7" name="Espace réservé du numéro de diapositive 6"/>
+          <p:cNvSpPr>
+            <a:spLocks noGrp="1"/>
+          </p:cNvSpPr>
+          <p:nvPr>
+            <p:ph type="sldNum" sz="quarter" idx="12"/>
+          </p:nvPr>
+        </p:nvSpPr>
+        <p:spPr bwMode="gray"/>
+        <p:txBody>
+          <a:bodyPr wrap="square" anchor="t" lIns="73152" rIns="73152"/>
+          <a:lstStyle/>
+          <a:p>
+            <a:pPr algn="l">
+              <a:lnSpc>
+                <a:spcPct val="125000"/>
+              </a:lnSpc>
+            </a:pPr>
+            <a:r>
+              <a:rPr sz="1000" b="0" i="0" lang="fr-FR">
+                <a:solidFill>
+                  <a:srgbClr val="666666"/>
+                </a:solidFill>
+                <a:latin typeface="Marianne"/>
+              </a:rPr>
+              <a:t>18</a:t>
+            </a:r>
+            <a:endParaRPr lang="fr-FR" dirty="0"/>
+          </a:p>
+        </p:txBody>
+      </p:sp>
+      <p:sp>
+        <p:nvSpPr>
+          <p:cNvPr id="9" name="DSFR-box"/>
+          <p:cNvSpPr/>
+          <p:nvPr/>
+        </p:nvSpPr>
+        <p:spPr>
+          <a:xfrm>
+            <a:off x="566928" y="2240280"/>
+            <a:ext cx="3450335" cy="2103120"/>
+          </a:xfrm>
+          <a:prstGeom prst="rect">
+            <a:avLst/>
+          </a:prstGeom>
+          <a:solidFill>
+            <a:srgbClr val="F6F6F6"/>
+          </a:solidFill>
+          <a:ln>
+            <a:noFill/>
+          </a:ln>
+          <a:effectLst/>
+        </p:spPr>
+        <p:style>
+          <a:lnRef idx="1">
+            <a:schemeClr val="accent1"/>
+          </a:lnRef>
+          <a:fillRef idx="3">
+            <a:schemeClr val="accent1"/>
+          </a:fillRef>
+          <a:effectRef idx="2">
+            <a:schemeClr val="accent1"/>
+          </a:effectRef>
+          <a:fontRef idx="minor">
+            <a:schemeClr val="lt1"/>
+          </a:fontRef>
+        </p:style>
+        <p:txBody>
+          <a:bodyPr rtlCol="0" anchor="ctr"/>
+          <a:lstStyle/>
+          <a:p>
+            <a:pPr algn="ctr"/>
+          </a:p>
+        </p:txBody>
+      </p:sp>
+      <p:sp>
+        <p:nvSpPr>
+          <p:cNvPr id="11" name="DSFR-card-titre"/>
+          <p:cNvSpPr txBox="1"/>
+          <p:nvPr/>
+        </p:nvSpPr>
+        <p:spPr>
+          <a:xfrm>
+            <a:off x="704088" y="2926080"/>
+            <a:ext cx="3176016" cy="411480"/>
+          </a:xfrm>
+          <a:prstGeom prst="rect">
+            <a:avLst/>
+          </a:prstGeom>
+          <a:noFill/>
+        </p:spPr>
+        <p:txBody>
+          <a:bodyPr wrap="square" anchor="t" lIns="73152" rIns="73152">
+            <a:spAutoFit/>
+          </a:bodyPr>
+          <a:lstStyle/>
+          <a:p>
+            <a:pPr algn="l">
+              <a:lnSpc>
+                <a:spcPct val="125000"/>
+              </a:lnSpc>
+            </a:pPr>
+            <a:r>
+              <a:rPr sz="1400" b="1" i="0" lang="fr-FR">
+                <a:solidFill>
+                  <a:srgbClr val="000091"/>
+                </a:solidFill>
+                <a:latin typeface="Marianne"/>
+              </a:rPr>
+              <a:t>Analyser</a:t>
+            </a:r>
+          </a:p>
+        </p:txBody>
+      </p:sp>
+      <p:sp>
+        <p:nvSpPr>
+          <p:cNvPr id="12" name="DSFR-card-contenu"/>
+          <p:cNvSpPr txBox="1"/>
+          <p:nvPr/>
+        </p:nvSpPr>
+        <p:spPr>
+          <a:xfrm>
+            <a:off x="704088" y="3383280"/>
+            <a:ext cx="3176016" cy="822959"/>
+          </a:xfrm>
+          <a:prstGeom prst="rect">
+            <a:avLst/>
+          </a:prstGeom>
+          <a:noFill/>
+        </p:spPr>
+        <p:txBody>
+          <a:bodyPr wrap="square" lIns="73152" rIns="73152">
+            <a:spAutoFit/>
+          </a:bodyPr>
+          <a:lstStyle/>
+          <a:p>
+            <a:pPr algn="l">
+              <a:lnSpc>
+                <a:spcPct val="125000"/>
+              </a:lnSpc>
+            </a:pPr>
+            <a:r>
+              <a:rPr sz="1100" lang="fr-FR">
+                <a:solidFill>
+                  <a:srgbClr val="161616"/>
+                </a:solidFill>
+                <a:latin typeface="Marianne"/>
+              </a:rPr>
+              <a:t>• Identifier les blocages</a:t>
+            </a:r>
+          </a:p>
+          <a:p>
+            <a:pPr algn="l">
+              <a:lnSpc>
+                <a:spcPct val="125000"/>
+              </a:lnSpc>
+            </a:pPr>
+            <a:r>
+              <a:rPr sz="1100" lang="fr-FR">
+                <a:solidFill>
+                  <a:srgbClr val="161616"/>
+                </a:solidFill>
+                <a:latin typeface="Marianne"/>
+              </a:rPr>
+              <a:t>• Prioriser par impact</a:t>
+            </a:r>
+          </a:p>
+        </p:txBody>
+      </p:sp>
+      <p:sp>
+        <p:nvSpPr>
+          <p:cNvPr id="14" name="DSFR-box"/>
+          <p:cNvSpPr/>
+          <p:nvPr/>
+        </p:nvSpPr>
+        <p:spPr>
+          <a:xfrm>
+            <a:off x="4410455" y="2240280"/>
+            <a:ext cx="3450335" cy="2103120"/>
+          </a:xfrm>
+          <a:prstGeom prst="rect">
+            <a:avLst/>
+          </a:prstGeom>
+          <a:solidFill>
+            <a:srgbClr val="F6F6F6"/>
+          </a:solidFill>
+          <a:ln>
+            <a:noFill/>
+          </a:ln>
+          <a:effectLst/>
+        </p:spPr>
+        <p:style>
+          <a:lnRef idx="1">
+            <a:schemeClr val="accent1"/>
+          </a:lnRef>
+          <a:fillRef idx="3">
+            <a:schemeClr val="accent1"/>
+          </a:fillRef>
+          <a:effectRef idx="2">
+            <a:schemeClr val="accent1"/>
+          </a:effectRef>
+          <a:fontRef idx="minor">
+            <a:schemeClr val="lt1"/>
+          </a:fontRef>
+        </p:style>
+        <p:txBody>
+          <a:bodyPr rtlCol="0" anchor="ctr"/>
+          <a:lstStyle/>
+          <a:p>
+            <a:pPr algn="ctr"/>
+          </a:p>
+        </p:txBody>
+      </p:sp>
+      <p:sp>
+        <p:nvSpPr>
+          <p:cNvPr id="16" name="DSFR-card-titre"/>
+          <p:cNvSpPr txBox="1"/>
+          <p:nvPr/>
+        </p:nvSpPr>
+        <p:spPr>
+          <a:xfrm>
+            <a:off x="4547615" y="2926080"/>
+            <a:ext cx="3176016" cy="411480"/>
+          </a:xfrm>
+          <a:prstGeom prst="rect">
+            <a:avLst/>
+          </a:prstGeom>
+          <a:noFill/>
+        </p:spPr>
+        <p:txBody>
+          <a:bodyPr wrap="square" anchor="t" lIns="73152" rIns="73152">
+            <a:spAutoFit/>
+          </a:bodyPr>
+          <a:lstStyle/>
+          <a:p>
+            <a:pPr algn="l">
+              <a:lnSpc>
+                <a:spcPct val="125000"/>
+              </a:lnSpc>
+            </a:pPr>
+            <a:r>
+              <a:rPr sz="1400" b="1" i="0" lang="fr-FR">
+                <a:solidFill>
+                  <a:srgbClr val="000091"/>
+                </a:solidFill>
+                <a:latin typeface="Marianne"/>
+              </a:rPr>
+              <a:t>Corriger</a:t>
+            </a:r>
+          </a:p>
+        </p:txBody>
+      </p:sp>
+      <p:sp>
+        <p:nvSpPr>
+          <p:cNvPr id="17" name="DSFR-card-contenu"/>
+          <p:cNvSpPr txBox="1"/>
+          <p:nvPr/>
+        </p:nvSpPr>
+        <p:spPr>
+          <a:xfrm>
+            <a:off x="4547615" y="3383280"/>
+            <a:ext cx="3176016" cy="822959"/>
+          </a:xfrm>
+          <a:prstGeom prst="rect">
+            <a:avLst/>
+          </a:prstGeom>
+          <a:noFill/>
+        </p:spPr>
+        <p:txBody>
+          <a:bodyPr wrap="square" lIns="73152" rIns="73152">
+            <a:spAutoFit/>
+          </a:bodyPr>
+          <a:lstStyle/>
+          <a:p>
+            <a:pPr algn="l">
+              <a:lnSpc>
+                <a:spcPct val="125000"/>
+              </a:lnSpc>
+            </a:pPr>
+            <a:r>
+              <a:rPr sz="1100" lang="fr-FR">
+                <a:solidFill>
+                  <a:srgbClr val="161616"/>
+                </a:solidFill>
+                <a:latin typeface="Marianne"/>
+              </a:rPr>
+              <a:t>• Appliquer les remédiations</a:t>
+            </a:r>
+          </a:p>
+          <a:p>
+            <a:pPr algn="l">
+              <a:lnSpc>
+                <a:spcPct val="125000"/>
+              </a:lnSpc>
+            </a:pPr>
+            <a:r>
+              <a:rPr sz="1100" lang="fr-FR">
+                <a:solidFill>
+                  <a:srgbClr val="161616"/>
+                </a:solidFill>
+                <a:latin typeface="Marianne"/>
+              </a:rPr>
+              <a:t>• Documenter les écarts</a:t>
+            </a:r>
+          </a:p>
+        </p:txBody>
+      </p:sp>
+      <p:sp>
+        <p:nvSpPr>
+          <p:cNvPr id="19" name="DSFR-box"/>
+          <p:cNvSpPr/>
+          <p:nvPr/>
+        </p:nvSpPr>
+        <p:spPr>
+          <a:xfrm>
+            <a:off x="8253983" y="2240280"/>
+            <a:ext cx="3450335" cy="2103120"/>
+          </a:xfrm>
+          <a:prstGeom prst="rect">
+            <a:avLst/>
+          </a:prstGeom>
+          <a:solidFill>
+            <a:srgbClr val="F6F6F6"/>
+          </a:solidFill>
+          <a:ln>
+            <a:noFill/>
+          </a:ln>
+          <a:effectLst/>
+        </p:spPr>
+        <p:style>
+          <a:lnRef idx="1">
+            <a:schemeClr val="accent1"/>
+          </a:lnRef>
+          <a:fillRef idx="3">
+            <a:schemeClr val="accent1"/>
+          </a:fillRef>
+          <a:effectRef idx="2">
+            <a:schemeClr val="accent1"/>
+          </a:effectRef>
+          <a:fontRef idx="minor">
+            <a:schemeClr val="lt1"/>
+          </a:fontRef>
+        </p:style>
+        <p:txBody>
+          <a:bodyPr rtlCol="0" anchor="ctr"/>
+          <a:lstStyle/>
+          <a:p>
+            <a:pPr algn="ctr"/>
+          </a:p>
+        </p:txBody>
+      </p:sp>
+      <p:sp>
+        <p:nvSpPr>
+          <p:cNvPr id="21" name="DSFR-card-titre"/>
+          <p:cNvSpPr txBox="1"/>
+          <p:nvPr/>
+        </p:nvSpPr>
+        <p:spPr>
+          <a:xfrm>
+            <a:off x="8391144" y="2926080"/>
+            <a:ext cx="3176016" cy="411480"/>
+          </a:xfrm>
+          <a:prstGeom prst="rect">
+            <a:avLst/>
+          </a:prstGeom>
+          <a:noFill/>
+        </p:spPr>
+        <p:txBody>
+          <a:bodyPr wrap="square" anchor="t" lIns="73152" rIns="73152">
+            <a:spAutoFit/>
+          </a:bodyPr>
+          <a:lstStyle/>
+          <a:p>
+            <a:pPr algn="l">
+              <a:lnSpc>
+                <a:spcPct val="125000"/>
+              </a:lnSpc>
+            </a:pPr>
+            <a:r>
+              <a:rPr sz="1400" b="1" i="0" lang="fr-FR">
+                <a:solidFill>
+                  <a:srgbClr val="000091"/>
+                </a:solidFill>
+                <a:latin typeface="Marianne"/>
+              </a:rPr>
+              <a:t>Vérifier</a:t>
+            </a:r>
+          </a:p>
+        </p:txBody>
+      </p:sp>
+      <p:sp>
+        <p:nvSpPr>
+          <p:cNvPr id="22" name="DSFR-card-contenu"/>
+          <p:cNvSpPr txBox="1"/>
+          <p:nvPr/>
+        </p:nvSpPr>
+        <p:spPr>
+          <a:xfrm>
+            <a:off x="8391144" y="3383280"/>
+            <a:ext cx="3176016" cy="822959"/>
+          </a:xfrm>
+          <a:prstGeom prst="rect">
+            <a:avLst/>
+          </a:prstGeom>
+          <a:noFill/>
+        </p:spPr>
+        <p:txBody>
+          <a:bodyPr wrap="square" lIns="73152" rIns="73152">
+            <a:spAutoFit/>
+          </a:bodyPr>
+          <a:lstStyle/>
+          <a:p>
+            <a:pPr algn="l">
+              <a:lnSpc>
+                <a:spcPct val="125000"/>
+              </a:lnSpc>
+            </a:pPr>
+            <a:r>
+              <a:rPr sz="1100" lang="fr-FR">
+                <a:solidFill>
+                  <a:srgbClr val="161616"/>
+                </a:solidFill>
+                <a:latin typeface="Marianne"/>
+              </a:rPr>
+              <a:t>• Tester sur le terrain</a:t>
+            </a:r>
+          </a:p>
+          <a:p>
+            <a:pPr algn="l">
+              <a:lnSpc>
+                <a:spcPct val="125000"/>
+              </a:lnSpc>
+            </a:pPr>
+            <a:r>
+              <a:rPr sz="1100" lang="fr-FR">
+                <a:solidFill>
+                  <a:srgbClr val="161616"/>
+                </a:solidFill>
+                <a:latin typeface="Marianne"/>
+              </a:rPr>
+              <a:t>• Mesurer la progression</a:t>
+            </a:r>
+          </a:p>
+        </p:txBody>
+      </p:sp>
+      <p:sp>
+        <p:nvSpPr>
+          <p:cNvPr id="24" name="DSFR-box"/>
+          <p:cNvSpPr/>
+          <p:nvPr/>
+        </p:nvSpPr>
+        <p:spPr>
+          <a:xfrm>
+            <a:off x="548640" y="4617720"/>
+            <a:ext cx="11155680" cy="1371600"/>
+          </a:xfrm>
+          <a:prstGeom prst="rect">
+            <a:avLst/>
+          </a:prstGeom>
+          <a:solidFill>
+            <a:srgbClr val="F5F5FE"/>
+          </a:solidFill>
+          <a:ln>
+            <a:noFill/>
+          </a:ln>
+          <a:effectLst/>
+        </p:spPr>
+        <p:style>
+          <a:lnRef idx="1">
+            <a:schemeClr val="accent1"/>
+          </a:lnRef>
+          <a:fillRef idx="3">
+            <a:schemeClr val="accent1"/>
+          </a:fillRef>
+          <a:effectRef idx="2">
+            <a:schemeClr val="accent1"/>
+          </a:effectRef>
+          <a:fontRef idx="minor">
+            <a:schemeClr val="lt1"/>
+          </a:fontRef>
+        </p:style>
+        <p:txBody>
+          <a:bodyPr rtlCol="0" anchor="ctr"/>
+          <a:lstStyle/>
+          <a:p>
+            <a:pPr algn="ctr"/>
+          </a:p>
+        </p:txBody>
+      </p:sp>
+      <p:sp>
+        <p:nvSpPr>
+          <p:cNvPr id="25" name="DSFR-callout-titre"/>
+          <p:cNvSpPr txBox="1"/>
+          <p:nvPr/>
+        </p:nvSpPr>
+        <p:spPr>
+          <a:xfrm>
+            <a:off x="704088" y="4709159"/>
+            <a:ext cx="10908792" cy="365760"/>
+          </a:xfrm>
+          <a:prstGeom prst="rect">
+            <a:avLst/>
+          </a:prstGeom>
+          <a:noFill/>
+        </p:spPr>
+        <p:txBody>
+          <a:bodyPr wrap="square" anchor="t" lIns="73152" rIns="73152">
+            <a:spAutoFit/>
+          </a:bodyPr>
+          <a:lstStyle/>
+          <a:p>
+            <a:pPr algn="l">
+              <a:lnSpc>
+                <a:spcPct val="125000"/>
+              </a:lnSpc>
+            </a:pPr>
+            <a:r>
+              <a:rPr sz="1400" b="1" i="0" lang="fr-FR">
+                <a:solidFill>
+                  <a:srgbClr val="000091"/>
+                </a:solidFill>
+                <a:latin typeface="Marianne"/>
+              </a:rPr>
+              <a:t>Règle d’or</a:t>
+            </a:r>
+          </a:p>
+        </p:txBody>
+      </p:sp>
+      <p:sp>
+        <p:nvSpPr>
+          <p:cNvPr id="26" name="DSFR-callout-body"/>
+          <p:cNvSpPr txBox="1"/>
+          <p:nvPr/>
+        </p:nvSpPr>
+        <p:spPr>
+          <a:xfrm>
+            <a:off x="704088" y="5120640"/>
+            <a:ext cx="10908792" cy="777240"/>
+          </a:xfrm>
+          <a:prstGeom prst="rect">
+            <a:avLst/>
+          </a:prstGeom>
+          <a:noFill/>
+        </p:spPr>
+        <p:txBody>
+          <a:bodyPr wrap="square" lIns="73152" rIns="73152">
+            <a:spAutoFit/>
+          </a:bodyPr>
+          <a:lstStyle/>
+          <a:p>
+            <a:pPr algn="l">
+              <a:lnSpc>
+                <a:spcPct val="125000"/>
+              </a:lnSpc>
+            </a:pPr>
+            <a:r>
+              <a:rPr sz="1200" lang="fr-FR">
+                <a:solidFill>
+                  <a:srgbClr val="161616"/>
+                </a:solidFill>
+                <a:latin typeface="Marianne"/>
+              </a:rPr>
+              <a:t>• Un cycle Analyser-Corriger-Vérifier dure 2 à 3 semaines.</a:t>
+            </a:r>
+          </a:p>
+          <a:p>
+            <a:pPr algn="l">
+              <a:lnSpc>
+                <a:spcPct val="125000"/>
+              </a:lnSpc>
+            </a:pPr>
+            <a:r>
+              <a:rPr sz="1200" lang="fr-FR">
+                <a:solidFill>
+                  <a:srgbClr val="161616"/>
+                </a:solidFill>
+                <a:latin typeface="Marianne"/>
+              </a:rPr>
+              <a:t>• Le répéter tant qu’il reste des non-conformités bloquantes.</a:t>
+            </a:r>
+          </a:p>
+        </p:txBody>
+      </p:sp>
+      <p:sp>
+        <p:nvSpPr>
+          <p:cNvPr id="5" name="Espace réservé de la date 4"/>
+          <p:cNvSpPr>
+            <a:spLocks noGrp="1"/>
+          </p:cNvSpPr>
+          <p:nvPr>
+            <p:ph type="dt" sz="half" idx="10"/>
+          </p:nvPr>
+        </p:nvSpPr>
+        <p:spPr bwMode="gray"/>
+        <p:txBody>
+          <a:bodyPr wrap="square" anchor="t" lIns="73152" rIns="73152"/>
+          <a:lstStyle/>
+          <a:p>
+            <a:pPr algn="l">
+              <a:lnSpc>
+                <a:spcPct val="125000"/>
+              </a:lnSpc>
+            </a:pPr>
+            <a:r>
+              <a:rPr sz="1000" b="0" i="0" lang="fr-FR">
+                <a:solidFill>
+                  <a:srgbClr val="666666"/>
+                </a:solidFill>
+                <a:latin typeface="Marianne"/>
+              </a:rPr>
+              <a:t>4 juin 2026</a:t>
+            </a:r>
+            <a:endParaRPr lang="fr-FR" cap="all" dirty="0"/>
+          </a:p>
+        </p:txBody>
+      </p:sp>
+      <p:sp>
+        <p:nvSpPr>
+          <p:cNvPr id="6" name="Espace réservé du pied de page 5"/>
+          <p:cNvSpPr>
+            <a:spLocks noGrp="1"/>
+          </p:cNvSpPr>
+          <p:nvPr>
+            <p:ph type="ftr" sz="quarter" idx="11"/>
+          </p:nvPr>
+        </p:nvSpPr>
+        <p:spPr bwMode="gray">
+          <a:xfrm>
+            <a:off x="479998" y="6377984"/>
+            <a:ext cx="7871980" cy="479998"/>
+          </a:xfrm>
+        </p:spPr>
+        <p:txBody>
+          <a:bodyPr wrap="square" anchor="t" lIns="73152" rIns="73152"/>
+          <a:lstStyle/>
+          <a:p>
+            <a:pPr algn="l">
+              <a:lnSpc>
+                <a:spcPct val="125000"/>
+              </a:lnSpc>
+            </a:pPr>
+            <a:r>
+              <a:rPr sz="1000" b="0" i="0" lang="fr-FR">
+                <a:solidFill>
+                  <a:srgbClr val="666666"/>
+                </a:solidFill>
+                <a:latin typeface="Marianne"/>
+              </a:rPr>
+              <a:t>Formation 102638 / Démo composants</a:t>
+            </a:r>
+          </a:p>
+        </p:txBody>
+      </p:sp>
+      <p:sp>
+        <p:nvSpPr>
+          <p:cNvPr id="10" name="DSFR-card-numero"/>
+          <p:cNvSpPr/>
+          <p:nvPr/>
+        </p:nvSpPr>
+        <p:spPr>
+          <a:xfrm>
+            <a:off x="704088" y="2377440"/>
+            <a:ext cx="457200" cy="457200"/>
+          </a:xfrm>
+          <a:prstGeom prst="ellipse">
+            <a:avLst/>
+          </a:prstGeom>
+          <a:solidFill>
+            <a:srgbClr val="000091"/>
+          </a:solidFill>
+          <a:ln>
+            <a:noFill/>
+          </a:ln>
+          <a:effectLst/>
+        </p:spPr>
+        <p:style>
+          <a:lnRef idx="1">
+            <a:schemeClr val="accent1"/>
+          </a:lnRef>
+          <a:fillRef idx="3">
+            <a:schemeClr val="accent1"/>
+          </a:fillRef>
+          <a:effectRef idx="2">
+            <a:schemeClr val="accent1"/>
+          </a:effectRef>
+          <a:fontRef idx="minor">
+            <a:schemeClr val="lt1"/>
+          </a:fontRef>
+        </p:style>
+        <p:txBody>
+          <a:bodyPr rtlCol="0" anchor="ctr" wrap="square" lIns="73152" rIns="73152"/>
+          <a:lstStyle/>
+          <a:p>
+            <a:pPr algn="ctr">
+              <a:lnSpc>
+                <a:spcPct val="125000"/>
+              </a:lnSpc>
+            </a:pPr>
+            <a:r>
+              <a:rPr sz="1600" b="1" i="0" lang="fr-FR">
+                <a:solidFill>
+                  <a:srgbClr val="FFFFFF"/>
+                </a:solidFill>
+                <a:latin typeface="Marianne"/>
+              </a:rPr>
+              <a:t>1</a:t>
+            </a:r>
+          </a:p>
+        </p:txBody>
+      </p:sp>
+      <p:sp>
+        <p:nvSpPr>
+          <p:cNvPr id="15" name="DSFR-card-numero"/>
+          <p:cNvSpPr/>
+          <p:nvPr/>
+        </p:nvSpPr>
+        <p:spPr>
+          <a:xfrm>
+            <a:off x="4547615" y="2377440"/>
+            <a:ext cx="457200" cy="457200"/>
+          </a:xfrm>
+          <a:prstGeom prst="ellipse">
+            <a:avLst/>
+          </a:prstGeom>
+          <a:solidFill>
+            <a:srgbClr val="000091"/>
+          </a:solidFill>
+          <a:ln>
+            <a:noFill/>
+          </a:ln>
+          <a:effectLst/>
+        </p:spPr>
+        <p:style>
+          <a:lnRef idx="1">
+            <a:schemeClr val="accent1"/>
+          </a:lnRef>
+          <a:fillRef idx="3">
+            <a:schemeClr val="accent1"/>
+          </a:fillRef>
+          <a:effectRef idx="2">
+            <a:schemeClr val="accent1"/>
+          </a:effectRef>
+          <a:fontRef idx="minor">
+            <a:schemeClr val="lt1"/>
+          </a:fontRef>
+        </p:style>
+        <p:txBody>
+          <a:bodyPr rtlCol="0" anchor="ctr" wrap="square" lIns="73152" rIns="73152"/>
+          <a:lstStyle/>
+          <a:p>
+            <a:pPr algn="ctr">
+              <a:lnSpc>
+                <a:spcPct val="125000"/>
+              </a:lnSpc>
+            </a:pPr>
+            <a:r>
+              <a:rPr sz="1600" b="1" i="0" lang="fr-FR">
+                <a:solidFill>
+                  <a:srgbClr val="FFFFFF"/>
+                </a:solidFill>
+                <a:latin typeface="Marianne"/>
+              </a:rPr>
+              <a:t>2</a:t>
+            </a:r>
+          </a:p>
+        </p:txBody>
+      </p:sp>
+      <p:sp>
+        <p:nvSpPr>
+          <p:cNvPr id="20" name="DSFR-card-numero"/>
+          <p:cNvSpPr/>
+          <p:nvPr/>
+        </p:nvSpPr>
+        <p:spPr>
+          <a:xfrm>
+            <a:off x="8391144" y="2377440"/>
+            <a:ext cx="457200" cy="457200"/>
+          </a:xfrm>
+          <a:prstGeom prst="ellipse">
+            <a:avLst/>
+          </a:prstGeom>
+          <a:solidFill>
+            <a:srgbClr val="000091"/>
+          </a:solidFill>
+          <a:ln>
+            <a:noFill/>
+          </a:ln>
+          <a:effectLst/>
+        </p:spPr>
+        <p:style>
+          <a:lnRef idx="1">
+            <a:schemeClr val="accent1"/>
+          </a:lnRef>
+          <a:fillRef idx="3">
+            <a:schemeClr val="accent1"/>
+          </a:fillRef>
+          <a:effectRef idx="2">
+            <a:schemeClr val="accent1"/>
+          </a:effectRef>
+          <a:fontRef idx="minor">
+            <a:schemeClr val="lt1"/>
+          </a:fontRef>
+        </p:style>
+        <p:txBody>
+          <a:bodyPr rtlCol="0" anchor="ctr" wrap="square" lIns="73152" rIns="73152"/>
+          <a:lstStyle/>
+          <a:p>
+            <a:pPr algn="ctr">
+              <a:lnSpc>
+                <a:spcPct val="125000"/>
+              </a:lnSpc>
+            </a:pPr>
+            <a:r>
+              <a:rPr sz="1600" b="1" i="0" lang="fr-FR">
+                <a:solidFill>
+                  <a:srgbClr val="FFFFFF"/>
+                </a:solidFill>
+                <a:latin typeface="Marianne"/>
+              </a:rPr>
+              <a:t>3</a:t>
+            </a:r>
+          </a:p>
+        </p:txBody>
+      </p:sp>
+      <p:sp>
+        <p:nvSpPr>
+          <p:cNvPr id="8" name="DSFR-accent-decoratif" descr=""/>
+          <p:cNvSpPr/>
+          <p:nvPr/>
+        </p:nvSpPr>
+        <p:spPr>
+          <a:xfrm>
+            <a:off x="475488" y="2240280"/>
+            <a:ext cx="91440" cy="2103120"/>
+          </a:xfrm>
+          <a:prstGeom prst="rect">
+            <a:avLst/>
+          </a:prstGeom>
+          <a:solidFill>
+            <a:srgbClr val="000091"/>
+          </a:solidFill>
+          <a:ln>
+            <a:noFill/>
+          </a:ln>
+          <a:effectLst/>
+        </p:spPr>
+        <p:style>
+          <a:lnRef idx="1">
+            <a:schemeClr val="accent1"/>
+          </a:lnRef>
+          <a:fillRef idx="3">
+            <a:schemeClr val="accent1"/>
+          </a:fillRef>
+          <a:effectRef idx="2">
+            <a:schemeClr val="accent1"/>
+          </a:effectRef>
+          <a:fontRef idx="minor">
+            <a:schemeClr val="lt1"/>
+          </a:fontRef>
+        </p:style>
+        <p:txBody>
+          <a:bodyPr rtlCol="0" anchor="ctr"/>
+          <a:lstStyle/>
+          <a:p>
+            <a:pPr algn="ctr"/>
+          </a:p>
+        </p:txBody>
+      </p:sp>
+      <p:sp>
+        <p:nvSpPr>
+          <p:cNvPr id="13" name="DSFR-accent-decoratif" descr=""/>
+          <p:cNvSpPr/>
+          <p:nvPr/>
+        </p:nvSpPr>
+        <p:spPr>
+          <a:xfrm>
+            <a:off x="4319015" y="2240280"/>
+            <a:ext cx="91440" cy="2103120"/>
+          </a:xfrm>
+          <a:prstGeom prst="rect">
+            <a:avLst/>
+          </a:prstGeom>
+          <a:solidFill>
+            <a:srgbClr val="000091"/>
+          </a:solidFill>
+          <a:ln>
+            <a:noFill/>
+          </a:ln>
+          <a:effectLst/>
+        </p:spPr>
+        <p:style>
+          <a:lnRef idx="1">
+            <a:schemeClr val="accent1"/>
+          </a:lnRef>
+          <a:fillRef idx="3">
+            <a:schemeClr val="accent1"/>
+          </a:fillRef>
+          <a:effectRef idx="2">
+            <a:schemeClr val="accent1"/>
+          </a:effectRef>
+          <a:fontRef idx="minor">
+            <a:schemeClr val="lt1"/>
+          </a:fontRef>
+        </p:style>
+        <p:txBody>
+          <a:bodyPr rtlCol="0" anchor="ctr"/>
+          <a:lstStyle/>
+          <a:p>
+            <a:pPr algn="ctr"/>
+          </a:p>
+        </p:txBody>
+      </p:sp>
+      <p:sp>
+        <p:nvSpPr>
+          <p:cNvPr id="18" name="DSFR-accent-decoratif" descr=""/>
+          <p:cNvSpPr/>
+          <p:nvPr/>
+        </p:nvSpPr>
+        <p:spPr>
+          <a:xfrm>
+            <a:off x="8162543" y="2240280"/>
+            <a:ext cx="91440" cy="2103120"/>
+          </a:xfrm>
+          <a:prstGeom prst="rect">
+            <a:avLst/>
+          </a:prstGeom>
+          <a:solidFill>
+            <a:srgbClr val="000091"/>
+          </a:solidFill>
+          <a:ln>
+            <a:noFill/>
+          </a:ln>
+          <a:effectLst/>
+        </p:spPr>
+        <p:style>
+          <a:lnRef idx="1">
+            <a:schemeClr val="accent1"/>
+          </a:lnRef>
+          <a:fillRef idx="3">
+            <a:schemeClr val="accent1"/>
+          </a:fillRef>
+          <a:effectRef idx="2">
+            <a:schemeClr val="accent1"/>
+          </a:effectRef>
+          <a:fontRef idx="minor">
+            <a:schemeClr val="lt1"/>
+          </a:fontRef>
+        </p:style>
+        <p:txBody>
+          <a:bodyPr rtlCol="0" anchor="ctr"/>
+          <a:lstStyle/>
+          <a:p>
+            <a:pPr algn="ctr"/>
+          </a:p>
+        </p:txBody>
+      </p:sp>
+      <p:sp>
+        <p:nvSpPr>
+          <p:cNvPr id="23" name="DSFR-accent-decoratif" descr=""/>
+          <p:cNvSpPr/>
+          <p:nvPr/>
+        </p:nvSpPr>
+        <p:spPr>
+          <a:xfrm>
+            <a:off x="475488" y="4617720"/>
+            <a:ext cx="73152" cy="1371600"/>
+          </a:xfrm>
+          <a:prstGeom prst="rect">
+            <a:avLst/>
+          </a:prstGeom>
+          <a:solidFill>
+            <a:srgbClr val="000091"/>
+          </a:solidFill>
+          <a:ln>
+            <a:noFill/>
+          </a:ln>
+          <a:effectLst/>
+        </p:spPr>
+        <p:style>
+          <a:lnRef idx="1">
+            <a:schemeClr val="accent1"/>
+          </a:lnRef>
+          <a:fillRef idx="3">
+            <a:schemeClr val="accent1"/>
+          </a:fillRef>
+          <a:effectRef idx="2">
+            <a:schemeClr val="accent1"/>
+          </a:effectRef>
+          <a:fontRef idx="minor">
+            <a:schemeClr val="lt1"/>
+          </a:fontRef>
+        </p:style>
+        <p:txBody>
+          <a:bodyPr rtlCol="0" anchor="ctr"/>
+          <a:lstStyle/>
+          <a:p>
+            <a:pPr algn="ctr"/>
+          </a:p>
+        </p:txBody>
+      </p:sp>
+    </p:spTree>
+  </p:cSld>
+  <p:clrMapOvr>
+    <a:masterClrMapping/>
+  </p:clrMapOvr>
+</p:sld>
+</file>
+
 <file path=ppt/slides/slide2.xml><?xml version="1.0" encoding="utf-8"?>
 <p:sld xmlns:a="http://schemas.openxmlformats.org/drawingml/2006/main" xmlns:p="http://schemas.openxmlformats.org/presentationml/2006/main" xmlns:r="http://schemas.openxmlformats.org/officeDocument/2006/relationships">
   <p:cSld>
@@ -5555,7 +10569,7 @@
         </p:nvSpPr>
         <p:spPr>
           <a:xfrm>
-            <a:off x="566928" y="2587752"/>
+            <a:off x="566928" y="2240280"/>
             <a:ext cx="3450335" cy="3291840"/>
           </a:xfrm>
           <a:prstGeom prst="rect">
@@ -5599,7 +10613,7 @@
         </p:nvSpPr>
         <p:spPr>
           <a:xfrm>
-            <a:off x="704088" y="3273552"/>
+            <a:off x="704088" y="2926080"/>
             <a:ext cx="3176016" cy="411480"/>
           </a:xfrm>
           <a:prstGeom prst="rect">
@@ -5638,7 +10652,7 @@
         </p:nvSpPr>
         <p:spPr>
           <a:xfrm>
-            <a:off x="704088" y="3730752"/>
+            <a:off x="704088" y="3383280"/>
             <a:ext cx="3176016" cy="2011680"/>
           </a:xfrm>
           <a:prstGeom prst="rect">
@@ -5677,7 +10691,7 @@
         </p:nvSpPr>
         <p:spPr>
           <a:xfrm>
-            <a:off x="4410455" y="2587752"/>
+            <a:off x="4410455" y="2240280"/>
             <a:ext cx="3450335" cy="3291840"/>
           </a:xfrm>
           <a:prstGeom prst="rect">
@@ -5721,7 +10735,7 @@
         </p:nvSpPr>
         <p:spPr>
           <a:xfrm>
-            <a:off x="4547615" y="3273552"/>
+            <a:off x="4547615" y="2926080"/>
             <a:ext cx="3176016" cy="411480"/>
           </a:xfrm>
           <a:prstGeom prst="rect">
@@ -5760,7 +10774,7 @@
         </p:nvSpPr>
         <p:spPr>
           <a:xfrm>
-            <a:off x="4547615" y="3730752"/>
+            <a:off x="4547615" y="3383280"/>
             <a:ext cx="3176016" cy="2011680"/>
           </a:xfrm>
           <a:prstGeom prst="rect">
@@ -5799,7 +10813,7 @@
         </p:nvSpPr>
         <p:spPr>
           <a:xfrm>
-            <a:off x="8253983" y="2587752"/>
+            <a:off x="8253983" y="2240280"/>
             <a:ext cx="3450335" cy="3291840"/>
           </a:xfrm>
           <a:prstGeom prst="rect">
@@ -5843,7 +10857,7 @@
         </p:nvSpPr>
         <p:spPr>
           <a:xfrm>
-            <a:off x="8391144" y="3273552"/>
+            <a:off x="8391144" y="2926080"/>
             <a:ext cx="3176016" cy="411480"/>
           </a:xfrm>
           <a:prstGeom prst="rect">
@@ -5882,7 +10896,7 @@
         </p:nvSpPr>
         <p:spPr>
           <a:xfrm>
-            <a:off x="8391144" y="3730752"/>
+            <a:off x="8391144" y="3383280"/>
             <a:ext cx="3176016" cy="2011680"/>
           </a:xfrm>
           <a:prstGeom prst="rect">
@@ -5986,7 +11000,7 @@
         </p:nvSpPr>
         <p:spPr>
           <a:xfrm>
-            <a:off x="704088" y="2724912"/>
+            <a:off x="704088" y="2377440"/>
             <a:ext cx="457200" cy="457200"/>
           </a:xfrm>
           <a:prstGeom prst="ellipse">
@@ -6043,7 +11057,7 @@
         </p:nvSpPr>
         <p:spPr>
           <a:xfrm>
-            <a:off x="4547615" y="2724912"/>
+            <a:off x="4547615" y="2377440"/>
             <a:ext cx="457200" cy="457200"/>
           </a:xfrm>
           <a:prstGeom prst="ellipse">
@@ -6100,7 +11114,7 @@
         </p:nvSpPr>
         <p:spPr>
           <a:xfrm>
-            <a:off x="8391144" y="2724912"/>
+            <a:off x="8391144" y="2377440"/>
             <a:ext cx="457200" cy="457200"/>
           </a:xfrm>
           <a:prstGeom prst="ellipse">
@@ -6157,7 +11171,7 @@
         </p:nvSpPr>
         <p:spPr>
           <a:xfrm>
-            <a:off x="475488" y="2587752"/>
+            <a:off x="475488" y="2240280"/>
             <a:ext cx="91440" cy="3291840"/>
           </a:xfrm>
           <a:prstGeom prst="rect">
@@ -6201,7 +11215,7 @@
         </p:nvSpPr>
         <p:spPr>
           <a:xfrm>
-            <a:off x="4319015" y="2587752"/>
+            <a:off x="4319015" y="2240280"/>
             <a:ext cx="91440" cy="3291840"/>
           </a:xfrm>
           <a:prstGeom prst="rect">
@@ -6245,7 +11259,7 @@
         </p:nvSpPr>
         <p:spPr>
           <a:xfrm>
-            <a:off x="8162543" y="2587752"/>
+            <a:off x="8162543" y="2240280"/>
             <a:ext cx="91440" cy="3291840"/>
           </a:xfrm>
           <a:prstGeom prst="rect">
@@ -6647,7 +11661,7 @@
         </p:nvSpPr>
         <p:spPr>
           <a:xfrm>
-            <a:off x="566928" y="2450592"/>
+            <a:off x="566928" y="2240280"/>
             <a:ext cx="3450335" cy="3200400"/>
           </a:xfrm>
           <a:prstGeom prst="rect">
@@ -6691,7 +11705,7 @@
         </p:nvSpPr>
         <p:spPr>
           <a:xfrm>
-            <a:off x="704088" y="3136392"/>
+            <a:off x="704088" y="2926080"/>
             <a:ext cx="3176016" cy="411480"/>
           </a:xfrm>
           <a:prstGeom prst="rect">
@@ -6730,7 +11744,7 @@
         </p:nvSpPr>
         <p:spPr>
           <a:xfrm>
-            <a:off x="704088" y="3593592"/>
+            <a:off x="704088" y="3383280"/>
             <a:ext cx="3176016" cy="1920240"/>
           </a:xfrm>
           <a:prstGeom prst="rect">
@@ -6801,7 +11815,7 @@
         </p:nvSpPr>
         <p:spPr>
           <a:xfrm>
-            <a:off x="4410455" y="2450592"/>
+            <a:off x="4410455" y="2240280"/>
             <a:ext cx="3450335" cy="3200400"/>
           </a:xfrm>
           <a:prstGeom prst="rect">
@@ -6845,7 +11859,7 @@
         </p:nvSpPr>
         <p:spPr>
           <a:xfrm>
-            <a:off x="4547615" y="3136392"/>
+            <a:off x="4547615" y="2926080"/>
             <a:ext cx="3176016" cy="411480"/>
           </a:xfrm>
           <a:prstGeom prst="rect">
@@ -6884,7 +11898,7 @@
         </p:nvSpPr>
         <p:spPr>
           <a:xfrm>
-            <a:off x="4547615" y="3593592"/>
+            <a:off x="4547615" y="3383280"/>
             <a:ext cx="3176016" cy="1920240"/>
           </a:xfrm>
           <a:prstGeom prst="rect">
@@ -6955,7 +11969,7 @@
         </p:nvSpPr>
         <p:spPr>
           <a:xfrm>
-            <a:off x="8253983" y="2450592"/>
+            <a:off x="8253983" y="2240280"/>
             <a:ext cx="3450335" cy="3200400"/>
           </a:xfrm>
           <a:prstGeom prst="rect">
@@ -6999,7 +12013,7 @@
         </p:nvSpPr>
         <p:spPr>
           <a:xfrm>
-            <a:off x="8391144" y="3136392"/>
+            <a:off x="8391144" y="2926080"/>
             <a:ext cx="3176016" cy="411480"/>
           </a:xfrm>
           <a:prstGeom prst="rect">
@@ -7038,7 +12052,7 @@
         </p:nvSpPr>
         <p:spPr>
           <a:xfrm>
-            <a:off x="8391144" y="3593592"/>
+            <a:off x="8391144" y="3383280"/>
             <a:ext cx="3176016" cy="1920240"/>
           </a:xfrm>
           <a:prstGeom prst="rect">
@@ -7174,7 +12188,7 @@
         </p:nvSpPr>
         <p:spPr>
           <a:xfrm>
-            <a:off x="704088" y="2587752"/>
+            <a:off x="704088" y="2377440"/>
             <a:ext cx="457200" cy="457200"/>
           </a:xfrm>
           <a:prstGeom prst="ellipse">
@@ -7231,7 +12245,7 @@
         </p:nvSpPr>
         <p:spPr>
           <a:xfrm>
-            <a:off x="4547615" y="2587752"/>
+            <a:off x="4547615" y="2377440"/>
             <a:ext cx="457200" cy="457200"/>
           </a:xfrm>
           <a:prstGeom prst="ellipse">
@@ -7288,7 +12302,7 @@
         </p:nvSpPr>
         <p:spPr>
           <a:xfrm>
-            <a:off x="8391144" y="2587752"/>
+            <a:off x="8391144" y="2377440"/>
             <a:ext cx="457200" cy="457200"/>
           </a:xfrm>
           <a:prstGeom prst="ellipse">
@@ -7345,7 +12359,7 @@
         </p:nvSpPr>
         <p:spPr>
           <a:xfrm>
-            <a:off x="475488" y="2450592"/>
+            <a:off x="475488" y="2240280"/>
             <a:ext cx="91440" cy="3200400"/>
           </a:xfrm>
           <a:prstGeom prst="rect">
@@ -7389,7 +12403,7 @@
         </p:nvSpPr>
         <p:spPr>
           <a:xfrm>
-            <a:off x="4319015" y="2450592"/>
+            <a:off x="4319015" y="2240280"/>
             <a:ext cx="91440" cy="3200400"/>
           </a:xfrm>
           <a:prstGeom prst="rect">
@@ -7433,7 +12447,7 @@
         </p:nvSpPr>
         <p:spPr>
           <a:xfrm>
-            <a:off x="8162543" y="2450592"/>
+            <a:off x="8162543" y="2240280"/>
             <a:ext cx="91440" cy="3200400"/>
           </a:xfrm>
           <a:prstGeom prst="rect">

--- a/demo-template-dsfr.pptx
+++ b/demo-template-dsfr.pptx
@@ -29,6 +29,16 @@
     <p:sldId id="271" r:id="rId2"/>
     <p:sldId id="272" r:id="rId24"/>
     <p:sldId id="273" r:id="rId25"/>
+    <p:sldId id="274" r:id="rId26"/>
+    <p:sldId id="275" r:id="rId27"/>
+    <p:sldId id="276" r:id="rId28"/>
+    <p:sldId id="277" r:id="rId29"/>
+    <p:sldId id="278" r:id="rId30"/>
+    <p:sldId id="279" r:id="rId31"/>
+    <p:sldId id="280" r:id="rId32"/>
+    <p:sldId id="281" r:id="rId33"/>
+    <p:sldId id="282" r:id="rId34"/>
+    <p:sldId id="283" r:id="rId35"/>
   </p:sldIdLst>
   <p:sldSz cx="12191969" cy="6858000" type="screen16x9"/>
   <p:notesSz cx="6858000" cy="9144000"/>
@@ -1447,6 +1457,76 @@
 </p:notes>
 </file>
 
+<file path=ppt/notesSlides/notesSlide19.xml><?xml version="1.0" encoding="utf-8"?>
+<p:notes xmlns:a="http://schemas.openxmlformats.org/drawingml/2006/main" xmlns:p="http://schemas.openxmlformats.org/presentationml/2006/main" xmlns:r="http://schemas.openxmlformats.org/officeDocument/2006/relationships">
+  <p:cSld>
+    <p:spTree>
+      <p:nvGrpSpPr>
+        <p:cNvPr id="1" name=""/>
+        <p:cNvGrpSpPr/>
+        <p:nvPr/>
+      </p:nvGrpSpPr>
+      <p:grpSpPr>
+        <a:xfrm>
+          <a:off x="0" y="0"/>
+          <a:ext cx="0" cy="0"/>
+          <a:chOff x="0" y="0"/>
+          <a:chExt cx="0" cy="0"/>
+        </a:xfrm>
+      </p:grpSpPr>
+      <p:sp>
+        <p:nvSpPr>
+          <p:cNvPr id="2" name="Slide Image Placeholder 1"/>
+          <p:cNvSpPr>
+            <a:spLocks noGrp="1"/>
+          </p:cNvSpPr>
+          <p:nvPr>
+            <p:ph type="sldImg" idx="2"/>
+          </p:nvPr>
+        </p:nvSpPr>
+        <p:spPr/>
+      </p:sp>
+      <p:sp>
+        <p:nvSpPr>
+          <p:cNvPr id="3" name="Notes Placeholder 2"/>
+          <p:cNvSpPr>
+            <a:spLocks noGrp="1"/>
+          </p:cNvSpPr>
+          <p:nvPr>
+            <p:ph type="body" idx="3" sz="quarter"/>
+          </p:nvPr>
+        </p:nvSpPr>
+        <p:spPr/>
+        <p:txBody>
+          <a:bodyPr/>
+          <a:lstStyle/>
+          <a:p>
+            <a:r>
+              <a:t>Usage : carte isolée sans numérotation — un concept, pas une étape de séquence.</a:t>
+            </a:r>
+          </a:p>
+        </p:txBody>
+      </p:sp>
+      <p:sp>
+        <p:nvSpPr>
+          <p:cNvPr id="4" name="Slide Number Placeholder 3"/>
+          <p:cNvSpPr>
+            <a:spLocks noGrp="1"/>
+          </p:cNvSpPr>
+          <p:nvPr>
+            <p:ph type="sldNum" idx="5" sz="quarter"/>
+          </p:nvPr>
+        </p:nvSpPr>
+        <p:spPr/>
+      </p:sp>
+    </p:spTree>
+  </p:cSld>
+  <p:clrMapOvr>
+    <a:masterClrMapping/>
+  </p:clrMapOvr>
+</p:notes>
+</file>
+
 <file path=ppt/notesSlides/notesSlide2.xml><?xml version="1.0" encoding="utf-8"?>
 <p:notes xmlns:a="http://schemas.openxmlformats.org/drawingml/2006/main" xmlns:p="http://schemas.openxmlformats.org/presentationml/2006/main" xmlns:r="http://schemas.openxmlformats.org/officeDocument/2006/relationships">
   <p:cSld>
@@ -1493,6 +1573,636 @@
           <a:p>
             <a:r>
               <a:t>Présenter les 4 objectifs, insister sur le caractère opérationnel.</a:t>
+            </a:r>
+          </a:p>
+        </p:txBody>
+      </p:sp>
+      <p:sp>
+        <p:nvSpPr>
+          <p:cNvPr id="4" name="Slide Number Placeholder 3"/>
+          <p:cNvSpPr>
+            <a:spLocks noGrp="1"/>
+          </p:cNvSpPr>
+          <p:nvPr>
+            <p:ph type="sldNum" idx="5" sz="quarter"/>
+          </p:nvPr>
+        </p:nvSpPr>
+        <p:spPr/>
+      </p:sp>
+    </p:spTree>
+  </p:cSld>
+  <p:clrMapOvr>
+    <a:masterClrMapping/>
+  </p:clrMapOvr>
+</p:notes>
+</file>
+
+<file path=ppt/notesSlides/notesSlide20.xml><?xml version="1.0" encoding="utf-8"?>
+<p:notes xmlns:a="http://schemas.openxmlformats.org/drawingml/2006/main" xmlns:p="http://schemas.openxmlformats.org/presentationml/2006/main" xmlns:r="http://schemas.openxmlformats.org/officeDocument/2006/relationships">
+  <p:cSld>
+    <p:spTree>
+      <p:nvGrpSpPr>
+        <p:cNvPr id="1" name=""/>
+        <p:cNvGrpSpPr/>
+        <p:nvPr/>
+      </p:nvGrpSpPr>
+      <p:grpSpPr>
+        <a:xfrm>
+          <a:off x="0" y="0"/>
+          <a:ext cx="0" cy="0"/>
+          <a:chOff x="0" y="0"/>
+          <a:chExt cx="0" cy="0"/>
+        </a:xfrm>
+      </p:grpSpPr>
+      <p:sp>
+        <p:nvSpPr>
+          <p:cNvPr id="2" name="Slide Image Placeholder 1"/>
+          <p:cNvSpPr>
+            <a:spLocks noGrp="1"/>
+          </p:cNvSpPr>
+          <p:nvPr>
+            <p:ph type="sldImg" idx="2"/>
+          </p:nvPr>
+        </p:nvSpPr>
+        <p:spPr/>
+      </p:sp>
+      <p:sp>
+        <p:nvSpPr>
+          <p:cNvPr id="3" name="Notes Placeholder 2"/>
+          <p:cNvSpPr>
+            <a:spLocks noGrp="1"/>
+          </p:cNvSpPr>
+          <p:nvPr>
+            <p:ph type="body" idx="3" sz="quarter"/>
+          </p:nvPr>
+        </p:nvSpPr>
+        <p:spPr/>
+        <p:txBody>
+          <a:bodyPr/>
+          <a:lstStyle/>
+          <a:p>
+            <a:r>
+              <a:t>Usage : deux approches équivalentes, pas de hiérarchie ni d’ordre implicite — pas de numérotation.</a:t>
+            </a:r>
+          </a:p>
+        </p:txBody>
+      </p:sp>
+      <p:sp>
+        <p:nvSpPr>
+          <p:cNvPr id="4" name="Slide Number Placeholder 3"/>
+          <p:cNvSpPr>
+            <a:spLocks noGrp="1"/>
+          </p:cNvSpPr>
+          <p:nvPr>
+            <p:ph type="sldNum" idx="5" sz="quarter"/>
+          </p:nvPr>
+        </p:nvSpPr>
+        <p:spPr/>
+      </p:sp>
+    </p:spTree>
+  </p:cSld>
+  <p:clrMapOvr>
+    <a:masterClrMapping/>
+  </p:clrMapOvr>
+</p:notes>
+</file>
+
+<file path=ppt/notesSlides/notesSlide21.xml><?xml version="1.0" encoding="utf-8"?>
+<p:notes xmlns:a="http://schemas.openxmlformats.org/drawingml/2006/main" xmlns:p="http://schemas.openxmlformats.org/presentationml/2006/main" xmlns:r="http://schemas.openxmlformats.org/officeDocument/2006/relationships">
+  <p:cSld>
+    <p:spTree>
+      <p:nvGrpSpPr>
+        <p:cNvPr id="1" name=""/>
+        <p:cNvGrpSpPr/>
+        <p:nvPr/>
+      </p:nvGrpSpPr>
+      <p:grpSpPr>
+        <a:xfrm>
+          <a:off x="0" y="0"/>
+          <a:ext cx="0" cy="0"/>
+          <a:chOff x="0" y="0"/>
+          <a:chExt cx="0" cy="0"/>
+        </a:xfrm>
+      </p:grpSpPr>
+      <p:sp>
+        <p:nvSpPr>
+          <p:cNvPr id="2" name="Slide Image Placeholder 1"/>
+          <p:cNvSpPr>
+            <a:spLocks noGrp="1"/>
+          </p:cNvSpPr>
+          <p:nvPr>
+            <p:ph type="sldImg" idx="2"/>
+          </p:nvPr>
+        </p:nvSpPr>
+        <p:spPr/>
+      </p:sp>
+      <p:sp>
+        <p:nvSpPr>
+          <p:cNvPr id="3" name="Notes Placeholder 2"/>
+          <p:cNvSpPr>
+            <a:spLocks noGrp="1"/>
+          </p:cNvSpPr>
+          <p:nvPr>
+            <p:ph type="body" idx="3" sz="quarter"/>
+          </p:nvPr>
+        </p:nvSpPr>
+        <p:spPr/>
+        <p:txBody>
+          <a:bodyPr/>
+          <a:lstStyle/>
+          <a:p>
+            <a:r>
+              <a:t>Usage : trois concepts juxtaposés sans ordre — triade, piliers, dimensions équivalentes.</a:t>
+            </a:r>
+          </a:p>
+        </p:txBody>
+      </p:sp>
+      <p:sp>
+        <p:nvSpPr>
+          <p:cNvPr id="4" name="Slide Number Placeholder 3"/>
+          <p:cNvSpPr>
+            <a:spLocks noGrp="1"/>
+          </p:cNvSpPr>
+          <p:nvPr>
+            <p:ph type="sldNum" idx="5" sz="quarter"/>
+          </p:nvPr>
+        </p:nvSpPr>
+        <p:spPr/>
+      </p:sp>
+    </p:spTree>
+  </p:cSld>
+  <p:clrMapOvr>
+    <a:masterClrMapping/>
+  </p:clrMapOvr>
+</p:notes>
+</file>
+
+<file path=ppt/notesSlides/notesSlide22.xml><?xml version="1.0" encoding="utf-8"?>
+<p:notes xmlns:a="http://schemas.openxmlformats.org/drawingml/2006/main" xmlns:p="http://schemas.openxmlformats.org/presentationml/2006/main" xmlns:r="http://schemas.openxmlformats.org/officeDocument/2006/relationships">
+  <p:cSld>
+    <p:spTree>
+      <p:nvGrpSpPr>
+        <p:cNvPr id="1" name=""/>
+        <p:cNvGrpSpPr/>
+        <p:nvPr/>
+      </p:nvGrpSpPr>
+      <p:grpSpPr>
+        <a:xfrm>
+          <a:off x="0" y="0"/>
+          <a:ext cx="0" cy="0"/>
+          <a:chOff x="0" y="0"/>
+          <a:chExt cx="0" cy="0"/>
+        </a:xfrm>
+      </p:grpSpPr>
+      <p:sp>
+        <p:nvSpPr>
+          <p:cNvPr id="2" name="Slide Image Placeholder 1"/>
+          <p:cNvSpPr>
+            <a:spLocks noGrp="1"/>
+          </p:cNvSpPr>
+          <p:nvPr>
+            <p:ph type="sldImg" idx="2"/>
+          </p:nvPr>
+        </p:nvSpPr>
+        <p:spPr/>
+      </p:sp>
+      <p:sp>
+        <p:nvSpPr>
+          <p:cNvPr id="3" name="Notes Placeholder 2"/>
+          <p:cNvSpPr>
+            <a:spLocks noGrp="1"/>
+          </p:cNvSpPr>
+          <p:nvPr>
+            <p:ph type="body" idx="3" sz="quarter"/>
+          </p:nvPr>
+        </p:nvSpPr>
+        <p:spPr/>
+        <p:txBody>
+          <a:bodyPr/>
+          <a:lstStyle/>
+          <a:p>
+            <a:r>
+              <a:t>Usage : carte sans numérotation + callout de renforcement. Un concept unique relié à une implication concrète.</a:t>
+            </a:r>
+          </a:p>
+        </p:txBody>
+      </p:sp>
+      <p:sp>
+        <p:nvSpPr>
+          <p:cNvPr id="4" name="Slide Number Placeholder 3"/>
+          <p:cNvSpPr>
+            <a:spLocks noGrp="1"/>
+          </p:cNvSpPr>
+          <p:nvPr>
+            <p:ph type="sldNum" idx="5" sz="quarter"/>
+          </p:nvPr>
+        </p:nvSpPr>
+        <p:spPr/>
+      </p:sp>
+    </p:spTree>
+  </p:cSld>
+  <p:clrMapOvr>
+    <a:masterClrMapping/>
+  </p:clrMapOvr>
+</p:notes>
+</file>
+
+<file path=ppt/notesSlides/notesSlide23.xml><?xml version="1.0" encoding="utf-8"?>
+<p:notes xmlns:a="http://schemas.openxmlformats.org/drawingml/2006/main" xmlns:p="http://schemas.openxmlformats.org/presentationml/2006/main" xmlns:r="http://schemas.openxmlformats.org/officeDocument/2006/relationships">
+  <p:cSld>
+    <p:spTree>
+      <p:nvGrpSpPr>
+        <p:cNvPr id="1" name=""/>
+        <p:cNvGrpSpPr/>
+        <p:nvPr/>
+      </p:nvGrpSpPr>
+      <p:grpSpPr>
+        <a:xfrm>
+          <a:off x="0" y="0"/>
+          <a:ext cx="0" cy="0"/>
+          <a:chOff x="0" y="0"/>
+          <a:chExt cx="0" cy="0"/>
+        </a:xfrm>
+      </p:grpSpPr>
+      <p:sp>
+        <p:nvSpPr>
+          <p:cNvPr id="2" name="Slide Image Placeholder 1"/>
+          <p:cNvSpPr>
+            <a:spLocks noGrp="1"/>
+          </p:cNvSpPr>
+          <p:nvPr>
+            <p:ph type="sldImg" idx="2"/>
+          </p:nvPr>
+        </p:nvSpPr>
+        <p:spPr/>
+      </p:sp>
+      <p:sp>
+        <p:nvSpPr>
+          <p:cNvPr id="3" name="Notes Placeholder 2"/>
+          <p:cNvSpPr>
+            <a:spLocks noGrp="1"/>
+          </p:cNvSpPr>
+          <p:nvPr>
+            <p:ph type="body" idx="3" sz="quarter"/>
+          </p:nvPr>
+        </p:nvSpPr>
+        <p:spPr/>
+        <p:txBody>
+          <a:bodyPr/>
+          <a:lstStyle/>
+          <a:p>
+            <a:r>
+              <a:t>Usage : deux facettes équivalentes (pas d’ordre) + synthèse qui relie les deux.</a:t>
+            </a:r>
+          </a:p>
+        </p:txBody>
+      </p:sp>
+      <p:sp>
+        <p:nvSpPr>
+          <p:cNvPr id="4" name="Slide Number Placeholder 3"/>
+          <p:cNvSpPr>
+            <a:spLocks noGrp="1"/>
+          </p:cNvSpPr>
+          <p:nvPr>
+            <p:ph type="sldNum" idx="5" sz="quarter"/>
+          </p:nvPr>
+        </p:nvSpPr>
+        <p:spPr/>
+      </p:sp>
+    </p:spTree>
+  </p:cSld>
+  <p:clrMapOvr>
+    <a:masterClrMapping/>
+  </p:clrMapOvr>
+</p:notes>
+</file>
+
+<file path=ppt/notesSlides/notesSlide24.xml><?xml version="1.0" encoding="utf-8"?>
+<p:notes xmlns:a="http://schemas.openxmlformats.org/drawingml/2006/main" xmlns:p="http://schemas.openxmlformats.org/presentationml/2006/main" xmlns:r="http://schemas.openxmlformats.org/officeDocument/2006/relationships">
+  <p:cSld>
+    <p:spTree>
+      <p:nvGrpSpPr>
+        <p:cNvPr id="1" name=""/>
+        <p:cNvGrpSpPr/>
+        <p:nvPr/>
+      </p:nvGrpSpPr>
+      <p:grpSpPr>
+        <a:xfrm>
+          <a:off x="0" y="0"/>
+          <a:ext cx="0" cy="0"/>
+          <a:chOff x="0" y="0"/>
+          <a:chExt cx="0" cy="0"/>
+        </a:xfrm>
+      </p:grpSpPr>
+      <p:sp>
+        <p:nvSpPr>
+          <p:cNvPr id="2" name="Slide Image Placeholder 1"/>
+          <p:cNvSpPr>
+            <a:spLocks noGrp="1"/>
+          </p:cNvSpPr>
+          <p:nvPr>
+            <p:ph type="sldImg" idx="2"/>
+          </p:nvPr>
+        </p:nvSpPr>
+        <p:spPr/>
+      </p:sp>
+      <p:sp>
+        <p:nvSpPr>
+          <p:cNvPr id="3" name="Notes Placeholder 2"/>
+          <p:cNvSpPr>
+            <a:spLocks noGrp="1"/>
+          </p:cNvSpPr>
+          <p:nvPr>
+            <p:ph type="body" idx="3" sz="quarter"/>
+          </p:nvPr>
+        </p:nvSpPr>
+        <p:spPr/>
+        <p:txBody>
+          <a:bodyPr/>
+          <a:lstStyle/>
+          <a:p>
+            <a:r>
+              <a:t>Usage : triade équivalente + règle transverse qui englobe les trois. Pas de séquence, pas de numérotation.</a:t>
+            </a:r>
+          </a:p>
+        </p:txBody>
+      </p:sp>
+      <p:sp>
+        <p:nvSpPr>
+          <p:cNvPr id="4" name="Slide Number Placeholder 3"/>
+          <p:cNvSpPr>
+            <a:spLocks noGrp="1"/>
+          </p:cNvSpPr>
+          <p:nvPr>
+            <p:ph type="sldNum" idx="5" sz="quarter"/>
+          </p:nvPr>
+        </p:nvSpPr>
+        <p:spPr/>
+      </p:sp>
+    </p:spTree>
+  </p:cSld>
+  <p:clrMapOvr>
+    <a:masterClrMapping/>
+  </p:clrMapOvr>
+</p:notes>
+</file>
+
+<file path=ppt/notesSlides/notesSlide25.xml><?xml version="1.0" encoding="utf-8"?>
+<p:notes xmlns:a="http://schemas.openxmlformats.org/drawingml/2006/main" xmlns:p="http://schemas.openxmlformats.org/presentationml/2006/main" xmlns:r="http://schemas.openxmlformats.org/officeDocument/2006/relationships">
+  <p:cSld>
+    <p:spTree>
+      <p:nvGrpSpPr>
+        <p:cNvPr id="1" name=""/>
+        <p:cNvGrpSpPr/>
+        <p:nvPr/>
+      </p:nvGrpSpPr>
+      <p:grpSpPr>
+        <a:xfrm>
+          <a:off x="0" y="0"/>
+          <a:ext cx="0" cy="0"/>
+          <a:chOff x="0" y="0"/>
+          <a:chExt cx="0" cy="0"/>
+        </a:xfrm>
+      </p:grpSpPr>
+      <p:sp>
+        <p:nvSpPr>
+          <p:cNvPr id="2" name="Slide Image Placeholder 1"/>
+          <p:cNvSpPr>
+            <a:spLocks noGrp="1"/>
+          </p:cNvSpPr>
+          <p:nvPr>
+            <p:ph type="sldImg" idx="2"/>
+          </p:nvPr>
+        </p:nvSpPr>
+        <p:spPr/>
+      </p:sp>
+      <p:sp>
+        <p:nvSpPr>
+          <p:cNvPr id="3" name="Notes Placeholder 2"/>
+          <p:cNvSpPr>
+            <a:spLocks noGrp="1"/>
+          </p:cNvSpPr>
+          <p:nvPr>
+            <p:ph type="body" idx="3" sz="quarter"/>
+          </p:nvPr>
+        </p:nvSpPr>
+        <p:spPr/>
+        <p:txBody>
+          <a:bodyPr/>
+          <a:lstStyle/>
+          <a:p>
+            <a:r>
+              <a:t>Usage : récap de critères, to-do post-formation. Cases cochées = acquis, cases vides = à travailler.</a:t>
+            </a:r>
+          </a:p>
+        </p:txBody>
+      </p:sp>
+      <p:sp>
+        <p:nvSpPr>
+          <p:cNvPr id="4" name="Slide Number Placeholder 3"/>
+          <p:cNvSpPr>
+            <a:spLocks noGrp="1"/>
+          </p:cNvSpPr>
+          <p:nvPr>
+            <p:ph type="sldNum" idx="5" sz="quarter"/>
+          </p:nvPr>
+        </p:nvSpPr>
+        <p:spPr/>
+      </p:sp>
+    </p:spTree>
+  </p:cSld>
+  <p:clrMapOvr>
+    <a:masterClrMapping/>
+  </p:clrMapOvr>
+</p:notes>
+</file>
+
+<file path=ppt/notesSlides/notesSlide26.xml><?xml version="1.0" encoding="utf-8"?>
+<p:notes xmlns:a="http://schemas.openxmlformats.org/drawingml/2006/main" xmlns:p="http://schemas.openxmlformats.org/presentationml/2006/main" xmlns:r="http://schemas.openxmlformats.org/officeDocument/2006/relationships">
+  <p:cSld>
+    <p:spTree>
+      <p:nvGrpSpPr>
+        <p:cNvPr id="1" name=""/>
+        <p:cNvGrpSpPr/>
+        <p:nvPr/>
+      </p:nvGrpSpPr>
+      <p:grpSpPr>
+        <a:xfrm>
+          <a:off x="0" y="0"/>
+          <a:ext cx="0" cy="0"/>
+          <a:chOff x="0" y="0"/>
+          <a:chExt cx="0" cy="0"/>
+        </a:xfrm>
+      </p:grpSpPr>
+      <p:sp>
+        <p:nvSpPr>
+          <p:cNvPr id="2" name="Slide Image Placeholder 1"/>
+          <p:cNvSpPr>
+            <a:spLocks noGrp="1"/>
+          </p:cNvSpPr>
+          <p:nvPr>
+            <p:ph type="sldImg" idx="2"/>
+          </p:nvPr>
+        </p:nvSpPr>
+        <p:spPr/>
+      </p:sp>
+      <p:sp>
+        <p:nvSpPr>
+          <p:cNvPr id="3" name="Notes Placeholder 2"/>
+          <p:cNvSpPr>
+            <a:spLocks noGrp="1"/>
+          </p:cNvSpPr>
+          <p:nvPr>
+            <p:ph type="body" idx="3" sz="quarter"/>
+          </p:nvPr>
+        </p:nvSpPr>
+        <p:spPr/>
+        <p:txBody>
+          <a:bodyPr/>
+          <a:lstStyle/>
+          <a:p>
+            <a:r>
+              <a:t>Usage : montrer la correction d’un défaut courant. Rouge clair pour le défaut, vert clair pour la version accessible.</a:t>
+            </a:r>
+          </a:p>
+        </p:txBody>
+      </p:sp>
+      <p:sp>
+        <p:nvSpPr>
+          <p:cNvPr id="4" name="Slide Number Placeholder 3"/>
+          <p:cNvSpPr>
+            <a:spLocks noGrp="1"/>
+          </p:cNvSpPr>
+          <p:nvPr>
+            <p:ph type="sldNum" idx="5" sz="quarter"/>
+          </p:nvPr>
+        </p:nvSpPr>
+        <p:spPr/>
+      </p:sp>
+    </p:spTree>
+  </p:cSld>
+  <p:clrMapOvr>
+    <a:masterClrMapping/>
+  </p:clrMapOvr>
+</p:notes>
+</file>
+
+<file path=ppt/notesSlides/notesSlide27.xml><?xml version="1.0" encoding="utf-8"?>
+<p:notes xmlns:a="http://schemas.openxmlformats.org/drawingml/2006/main" xmlns:p="http://schemas.openxmlformats.org/presentationml/2006/main" xmlns:r="http://schemas.openxmlformats.org/officeDocument/2006/relationships">
+  <p:cSld>
+    <p:spTree>
+      <p:nvGrpSpPr>
+        <p:cNvPr id="1" name=""/>
+        <p:cNvGrpSpPr/>
+        <p:nvPr/>
+      </p:nvGrpSpPr>
+      <p:grpSpPr>
+        <a:xfrm>
+          <a:off x="0" y="0"/>
+          <a:ext cx="0" cy="0"/>
+          <a:chOff x="0" y="0"/>
+          <a:chExt cx="0" cy="0"/>
+        </a:xfrm>
+      </p:grpSpPr>
+      <p:sp>
+        <p:nvSpPr>
+          <p:cNvPr id="2" name="Slide Image Placeholder 1"/>
+          <p:cNvSpPr>
+            <a:spLocks noGrp="1"/>
+          </p:cNvSpPr>
+          <p:nvPr>
+            <p:ph type="sldImg" idx="2"/>
+          </p:nvPr>
+        </p:nvSpPr>
+        <p:spPr/>
+      </p:sp>
+      <p:sp>
+        <p:nvSpPr>
+          <p:cNvPr id="3" name="Notes Placeholder 2"/>
+          <p:cNvSpPr>
+            <a:spLocks noGrp="1"/>
+          </p:cNvSpPr>
+          <p:nvPr>
+            <p:ph type="body" idx="3" sz="quarter"/>
+          </p:nvPr>
+        </p:nvSpPr>
+        <p:spPr/>
+        <p:txBody>
+          <a:bodyPr/>
+          <a:lstStyle/>
+          <a:p>
+            <a:r>
+              <a:t>Usage : ancrage pédagogique par opposition. Icônes ✓ et ✗ signalent immédiatement la nature de chaque colonne.</a:t>
+            </a:r>
+          </a:p>
+        </p:txBody>
+      </p:sp>
+      <p:sp>
+        <p:nvSpPr>
+          <p:cNvPr id="4" name="Slide Number Placeholder 3"/>
+          <p:cNvSpPr>
+            <a:spLocks noGrp="1"/>
+          </p:cNvSpPr>
+          <p:nvPr>
+            <p:ph type="sldNum" idx="5" sz="quarter"/>
+          </p:nvPr>
+        </p:nvSpPr>
+        <p:spPr/>
+      </p:sp>
+    </p:spTree>
+  </p:cSld>
+  <p:clrMapOvr>
+    <a:masterClrMapping/>
+  </p:clrMapOvr>
+</p:notes>
+</file>
+
+<file path=ppt/notesSlides/notesSlide28.xml><?xml version="1.0" encoding="utf-8"?>
+<p:notes xmlns:a="http://schemas.openxmlformats.org/drawingml/2006/main" xmlns:p="http://schemas.openxmlformats.org/presentationml/2006/main" xmlns:r="http://schemas.openxmlformats.org/officeDocument/2006/relationships">
+  <p:cSld>
+    <p:spTree>
+      <p:nvGrpSpPr>
+        <p:cNvPr id="1" name=""/>
+        <p:cNvGrpSpPr/>
+        <p:nvPr/>
+      </p:nvGrpSpPr>
+      <p:grpSpPr>
+        <a:xfrm>
+          <a:off x="0" y="0"/>
+          <a:ext cx="0" cy="0"/>
+          <a:chOff x="0" y="0"/>
+          <a:chExt cx="0" cy="0"/>
+        </a:xfrm>
+      </p:grpSpPr>
+      <p:sp>
+        <p:nvSpPr>
+          <p:cNvPr id="2" name="Slide Image Placeholder 1"/>
+          <p:cNvSpPr>
+            <a:spLocks noGrp="1"/>
+          </p:cNvSpPr>
+          <p:nvPr>
+            <p:ph type="sldImg" idx="2"/>
+          </p:nvPr>
+        </p:nvSpPr>
+        <p:spPr/>
+      </p:sp>
+      <p:sp>
+        <p:nvSpPr>
+          <p:cNvPr id="3" name="Notes Placeholder 2"/>
+          <p:cNvSpPr>
+            <a:spLocks noGrp="1"/>
+          </p:cNvSpPr>
+          <p:nvPr>
+            <p:ph type="body" idx="3" sz="quarter"/>
+          </p:nvPr>
+        </p:nvSpPr>
+        <p:spPr/>
+        <p:txBody>
+          <a:bodyPr/>
+          <a:lstStyle/>
+          <a:p>
+            <a:r>
+              <a:t>Slide de clôture : remerciements, contact formateur, rappel évaluation à chaud. Pas de fil d’Ariane (fin de parcours).</a:t>
             </a:r>
           </a:p>
         </p:txBody>
@@ -10106,6 +10816,389 @@
 </p:sld>
 </file>
 
+<file path=ppt/slides/slide19.xml><?xml version="1.0" encoding="utf-8"?>
+<p:sld xmlns:a="http://schemas.openxmlformats.org/drawingml/2006/main" xmlns:p="http://schemas.openxmlformats.org/presentationml/2006/main" xmlns:r="http://schemas.openxmlformats.org/officeDocument/2006/relationships">
+  <p:cSld>
+    <p:spTree>
+      <p:nvGrpSpPr>
+        <p:cNvPr id="1" name=""/>
+        <p:cNvGrpSpPr/>
+        <p:nvPr/>
+      </p:nvGrpSpPr>
+      <p:grpSpPr/>
+      <p:sp>
+        <p:nvSpPr>
+          <p:cNvPr id="2" name="Title 1"/>
+          <p:cNvSpPr>
+            <a:spLocks noGrp="1"/>
+          </p:cNvSpPr>
+          <p:nvPr>
+            <p:ph type="title"/>
+          </p:nvPr>
+        </p:nvSpPr>
+        <p:spPr/>
+        <p:txBody>
+          <a:bodyPr wrap="square" anchor="t" lIns="73152" rIns="73152"/>
+          <a:lstStyle/>
+          <a:p>
+            <a:pPr algn="l">
+              <a:lnSpc>
+                <a:spcPct val="125000"/>
+              </a:lnSpc>
+            </a:pPr>
+            <a:r>
+              <a:rPr sz="2800" b="1" i="0" lang="fr-FR">
+                <a:solidFill>
+                  <a:srgbClr val="000091"/>
+                </a:solidFill>
+                <a:latin typeface="Marianne"/>
+              </a:rPr>
+              <a:t>Une carte sans numéro — message sans séquence</a:t>
+            </a:r>
+          </a:p>
+        </p:txBody>
+      </p:sp>
+      <p:sp>
+        <p:nvSpPr>
+          <p:cNvPr id="4" name="Text Placeholder 3"/>
+          <p:cNvSpPr>
+            <a:spLocks noGrp="1"/>
+          </p:cNvSpPr>
+          <p:nvPr>
+            <p:ph type="body" idx="13" sz="quarter"/>
+          </p:nvPr>
+        </p:nvSpPr>
+        <p:spPr/>
+        <p:txBody>
+          <a:bodyPr wrap="square" anchor="t" lIns="73152" rIns="73152"/>
+          <a:lstStyle/>
+          <a:p>
+            <a:pPr algn="r">
+              <a:lnSpc>
+                <a:spcPct val="125000"/>
+              </a:lnSpc>
+            </a:pPr>
+            <a:r>
+              <a:rPr sz="1100" b="0" i="0" lang="fr-FR">
+                <a:solidFill>
+                  <a:srgbClr val="666666"/>
+                </a:solidFill>
+                <a:latin typeface="Marianne"/>
+              </a:rPr>
+              <a:t>Démo | 1 carte sans n°</a:t>
+            </a:r>
+          </a:p>
+        </p:txBody>
+      </p:sp>
+      <p:sp>
+        <p:nvSpPr>
+          <p:cNvPr id="7" name="Espace réservé du numéro de diapositive 6"/>
+          <p:cNvSpPr>
+            <a:spLocks noGrp="1"/>
+          </p:cNvSpPr>
+          <p:nvPr>
+            <p:ph type="sldNum" sz="quarter" idx="12"/>
+          </p:nvPr>
+        </p:nvSpPr>
+        <p:spPr bwMode="gray"/>
+        <p:txBody>
+          <a:bodyPr wrap="square" anchor="t" lIns="73152" rIns="73152"/>
+          <a:lstStyle/>
+          <a:p>
+            <a:pPr algn="l">
+              <a:lnSpc>
+                <a:spcPct val="125000"/>
+              </a:lnSpc>
+            </a:pPr>
+            <a:r>
+              <a:rPr sz="1000" b="0" i="0" lang="fr-FR">
+                <a:solidFill>
+                  <a:srgbClr val="666666"/>
+                </a:solidFill>
+                <a:latin typeface="Marianne"/>
+              </a:rPr>
+              <a:t>19</a:t>
+            </a:r>
+            <a:endParaRPr lang="fr-FR" dirty="0"/>
+          </a:p>
+        </p:txBody>
+      </p:sp>
+      <p:sp>
+        <p:nvSpPr>
+          <p:cNvPr id="9" name="DSFR-box"/>
+          <p:cNvSpPr/>
+          <p:nvPr/>
+        </p:nvSpPr>
+        <p:spPr>
+          <a:xfrm>
+            <a:off x="566928" y="2240280"/>
+            <a:ext cx="11137392" cy="3200400"/>
+          </a:xfrm>
+          <a:prstGeom prst="rect">
+            <a:avLst/>
+          </a:prstGeom>
+          <a:solidFill>
+            <a:srgbClr val="F6F6F6"/>
+          </a:solidFill>
+          <a:ln>
+            <a:noFill/>
+          </a:ln>
+          <a:effectLst/>
+        </p:spPr>
+        <p:style>
+          <a:lnRef idx="1">
+            <a:schemeClr val="accent1"/>
+          </a:lnRef>
+          <a:fillRef idx="3">
+            <a:schemeClr val="accent1"/>
+          </a:fillRef>
+          <a:effectRef idx="2">
+            <a:schemeClr val="accent1"/>
+          </a:effectRef>
+          <a:fontRef idx="minor">
+            <a:schemeClr val="lt1"/>
+          </a:fontRef>
+        </p:style>
+        <p:txBody>
+          <a:bodyPr rtlCol="0" anchor="ctr"/>
+          <a:lstStyle/>
+          <a:p>
+            <a:pPr algn="ctr"/>
+          </a:p>
+        </p:txBody>
+      </p:sp>
+      <p:sp>
+        <p:nvSpPr>
+          <p:cNvPr id="10" name="DSFR-card-titre"/>
+          <p:cNvSpPr txBox="1"/>
+          <p:nvPr/>
+        </p:nvSpPr>
+        <p:spPr>
+          <a:xfrm>
+            <a:off x="704088" y="2377440"/>
+            <a:ext cx="10863072" cy="411480"/>
+          </a:xfrm>
+          <a:prstGeom prst="rect">
+            <a:avLst/>
+          </a:prstGeom>
+          <a:noFill/>
+        </p:spPr>
+        <p:txBody>
+          <a:bodyPr wrap="square" anchor="t" lIns="73152" rIns="73152">
+            <a:spAutoFit/>
+          </a:bodyPr>
+          <a:lstStyle/>
+          <a:p>
+            <a:pPr algn="l">
+              <a:lnSpc>
+                <a:spcPct val="125000"/>
+              </a:lnSpc>
+            </a:pPr>
+            <a:r>
+              <a:rPr sz="1400" b="1" i="0" lang="fr-FR">
+                <a:solidFill>
+                  <a:srgbClr val="000091"/>
+                </a:solidFill>
+                <a:latin typeface="Marianne"/>
+              </a:rPr>
+              <a:t>Principe fondamental</a:t>
+            </a:r>
+          </a:p>
+        </p:txBody>
+      </p:sp>
+      <p:sp>
+        <p:nvSpPr>
+          <p:cNvPr id="11" name="DSFR-card-contenu"/>
+          <p:cNvSpPr txBox="1"/>
+          <p:nvPr/>
+        </p:nvSpPr>
+        <p:spPr>
+          <a:xfrm>
+            <a:off x="704088" y="2834640"/>
+            <a:ext cx="10863072" cy="2468880"/>
+          </a:xfrm>
+          <a:prstGeom prst="rect">
+            <a:avLst/>
+          </a:prstGeom>
+          <a:noFill/>
+        </p:spPr>
+        <p:txBody>
+          <a:bodyPr wrap="square" lIns="73152" rIns="73152">
+            <a:spAutoFit/>
+          </a:bodyPr>
+          <a:lstStyle/>
+          <a:p>
+            <a:pPr algn="l">
+              <a:lnSpc>
+                <a:spcPct val="125000"/>
+              </a:lnSpc>
+            </a:pPr>
+            <a:r>
+              <a:rPr sz="1100" lang="fr-FR">
+                <a:solidFill>
+                  <a:srgbClr val="161616"/>
+                </a:solidFill>
+                <a:latin typeface="Marianne"/>
+              </a:rPr>
+              <a:t>• Une information doit être perceptible,</a:t>
+            </a:r>
+          </a:p>
+          <a:p>
+            <a:pPr algn="l">
+              <a:lnSpc>
+                <a:spcPct val="125000"/>
+              </a:lnSpc>
+            </a:pPr>
+            <a:r>
+              <a:rPr sz="1100" lang="fr-FR">
+                <a:solidFill>
+                  <a:srgbClr val="161616"/>
+                </a:solidFill>
+                <a:latin typeface="Marianne"/>
+              </a:rPr>
+              <a:t>• utilisable, compréhensible et robuste</a:t>
+            </a:r>
+          </a:p>
+          <a:p>
+            <a:pPr algn="l">
+              <a:lnSpc>
+                <a:spcPct val="125000"/>
+              </a:lnSpc>
+            </a:pPr>
+            <a:r>
+              <a:rPr sz="1100" lang="fr-FR">
+                <a:solidFill>
+                  <a:srgbClr val="161616"/>
+                </a:solidFill>
+                <a:latin typeface="Marianne"/>
+              </a:rPr>
+              <a:t>• (acronyme POUR de WCAG 2.2).</a:t>
+            </a:r>
+          </a:p>
+        </p:txBody>
+      </p:sp>
+      <p:sp>
+        <p:nvSpPr>
+          <p:cNvPr id="5" name="Espace réservé de la date 4"/>
+          <p:cNvSpPr>
+            <a:spLocks noGrp="1"/>
+          </p:cNvSpPr>
+          <p:nvPr>
+            <p:ph type="dt" sz="half" idx="10"/>
+          </p:nvPr>
+        </p:nvSpPr>
+        <p:spPr bwMode="gray"/>
+        <p:txBody>
+          <a:bodyPr wrap="square" anchor="t" lIns="73152" rIns="73152"/>
+          <a:lstStyle/>
+          <a:p>
+            <a:pPr algn="l">
+              <a:lnSpc>
+                <a:spcPct val="125000"/>
+              </a:lnSpc>
+            </a:pPr>
+            <a:r>
+              <a:rPr sz="1000" b="0" i="0" lang="fr-FR">
+                <a:solidFill>
+                  <a:srgbClr val="666666"/>
+                </a:solidFill>
+                <a:latin typeface="Marianne"/>
+              </a:rPr>
+              <a:t>4 juin 2026</a:t>
+            </a:r>
+            <a:endParaRPr lang="fr-FR" cap="all" dirty="0"/>
+          </a:p>
+        </p:txBody>
+      </p:sp>
+      <p:sp>
+        <p:nvSpPr>
+          <p:cNvPr id="6" name="Espace réservé du pied de page 5"/>
+          <p:cNvSpPr>
+            <a:spLocks noGrp="1"/>
+          </p:cNvSpPr>
+          <p:nvPr>
+            <p:ph type="ftr" sz="quarter" idx="11"/>
+          </p:nvPr>
+        </p:nvSpPr>
+        <p:spPr bwMode="gray">
+          <a:xfrm>
+            <a:off x="479998" y="6377984"/>
+            <a:ext cx="7871980" cy="479998"/>
+          </a:xfrm>
+        </p:spPr>
+        <p:txBody>
+          <a:bodyPr wrap="square" anchor="t" lIns="73152" rIns="73152"/>
+          <a:lstStyle/>
+          <a:p>
+            <a:pPr algn="l">
+              <a:lnSpc>
+                <a:spcPct val="125000"/>
+              </a:lnSpc>
+            </a:pPr>
+            <a:r>
+              <a:rPr sz="1000" b="0" i="0" lang="fr-FR">
+                <a:solidFill>
+                  <a:srgbClr val="666666"/>
+                </a:solidFill>
+                <a:latin typeface="Marianne"/>
+              </a:rPr>
+              <a:t>Formation 102638 / Démo composants</a:t>
+            </a:r>
+          </a:p>
+        </p:txBody>
+      </p:sp>
+      <p:sp>
+        <p:nvSpPr>
+          <p:cNvPr id="8" name="DSFR-accent-decoratif" descr=""/>
+          <p:cNvSpPr/>
+          <p:nvPr/>
+        </p:nvSpPr>
+        <p:spPr>
+          <a:xfrm>
+            <a:off x="475488" y="2240280"/>
+            <a:ext cx="91440" cy="3200400"/>
+          </a:xfrm>
+          <a:prstGeom prst="rect">
+            <a:avLst/>
+          </a:prstGeom>
+          <a:solidFill>
+            <a:srgbClr val="000091"/>
+          </a:solidFill>
+          <a:ln>
+            <a:noFill/>
+          </a:ln>
+          <a:effectLst/>
+        </p:spPr>
+        <p:style>
+          <a:lnRef idx="1">
+            <a:schemeClr val="accent1"/>
+          </a:lnRef>
+          <a:fillRef idx="3">
+            <a:schemeClr val="accent1"/>
+          </a:fillRef>
+          <a:effectRef idx="2">
+            <a:schemeClr val="accent1"/>
+          </a:effectRef>
+          <a:fontRef idx="minor">
+            <a:schemeClr val="lt1"/>
+          </a:fontRef>
+        </p:style>
+        <p:txBody>
+          <a:bodyPr rtlCol="0" anchor="ctr"/>
+          <a:lstStyle/>
+          <a:p>
+            <a:pPr algn="ctr"/>
+          </a:p>
+        </p:txBody>
+      </p:sp>
+    </p:spTree>
+  </p:cSld>
+  <p:clrMapOvr>
+    <a:masterClrMapping/>
+  </p:clrMapOvr>
+</p:sld>
+</file>
+
 <file path=ppt/slides/slide2.xml><?xml version="1.0" encoding="utf-8"?>
 <p:sld xmlns:a="http://schemas.openxmlformats.org/drawingml/2006/main" xmlns:p="http://schemas.openxmlformats.org/presentationml/2006/main" xmlns:r="http://schemas.openxmlformats.org/officeDocument/2006/relationships">
   <p:cSld>
@@ -10157,8 +11250,8 @@
         </p:nvSpPr>
         <p:spPr>
           <a:xfrm>
-            <a:off x="475488" y="3108960"/>
-            <a:ext cx="11228832" cy="1280160"/>
+            <a:off x="475488" y="2286000"/>
+            <a:ext cx="11228832" cy="1005840"/>
           </a:xfrm>
           <a:prstGeom prst="rect">
             <a:avLst/>
@@ -10196,8 +11289,8 @@
         </p:nvSpPr>
         <p:spPr>
           <a:xfrm>
-            <a:off x="548640" y="4572000"/>
-            <a:ext cx="11155680" cy="1645920"/>
+            <a:off x="548640" y="3474720"/>
+            <a:ext cx="11155680" cy="2286000"/>
           </a:xfrm>
           <a:prstGeom prst="rect">
             <a:avLst/>
@@ -10240,7 +11333,7 @@
         </p:nvSpPr>
         <p:spPr>
           <a:xfrm>
-            <a:off x="704088" y="4663440"/>
+            <a:off x="704088" y="3566160"/>
             <a:ext cx="10908792" cy="365760"/>
           </a:xfrm>
           <a:prstGeom prst="rect">
@@ -10279,8 +11372,8 @@
         </p:nvSpPr>
         <p:spPr>
           <a:xfrm>
-            <a:off x="704088" y="5074920"/>
-            <a:ext cx="10908792" cy="1051560"/>
+            <a:off x="704088" y="3977639"/>
+            <a:ext cx="10908792" cy="1691640"/>
           </a:xfrm>
           <a:prstGeom prst="rect">
             <a:avLst/>
@@ -10442,8 +11535,5480 @@
         </p:nvSpPr>
         <p:spPr>
           <a:xfrm>
-            <a:off x="475488" y="4572000"/>
-            <a:ext cx="73152" cy="1645920"/>
+            <a:off x="475488" y="3474720"/>
+            <a:ext cx="73152" cy="2286000"/>
+          </a:xfrm>
+          <a:prstGeom prst="rect">
+            <a:avLst/>
+          </a:prstGeom>
+          <a:solidFill>
+            <a:srgbClr val="000091"/>
+          </a:solidFill>
+          <a:ln>
+            <a:noFill/>
+          </a:ln>
+          <a:effectLst/>
+        </p:spPr>
+        <p:style>
+          <a:lnRef idx="1">
+            <a:schemeClr val="accent1"/>
+          </a:lnRef>
+          <a:fillRef idx="3">
+            <a:schemeClr val="accent1"/>
+          </a:fillRef>
+          <a:effectRef idx="2">
+            <a:schemeClr val="accent1"/>
+          </a:effectRef>
+          <a:fontRef idx="minor">
+            <a:schemeClr val="lt1"/>
+          </a:fontRef>
+        </p:style>
+        <p:txBody>
+          <a:bodyPr rtlCol="0" anchor="ctr"/>
+          <a:lstStyle/>
+          <a:p>
+            <a:pPr algn="ctr"/>
+          </a:p>
+        </p:txBody>
+      </p:sp>
+    </p:spTree>
+  </p:cSld>
+  <p:clrMapOvr>
+    <a:masterClrMapping/>
+  </p:clrMapOvr>
+</p:sld>
+</file>
+
+<file path=ppt/slides/slide20.xml><?xml version="1.0" encoding="utf-8"?>
+<p:sld xmlns:a="http://schemas.openxmlformats.org/drawingml/2006/main" xmlns:p="http://schemas.openxmlformats.org/presentationml/2006/main" xmlns:r="http://schemas.openxmlformats.org/officeDocument/2006/relationships">
+  <p:cSld>
+    <p:spTree>
+      <p:nvGrpSpPr>
+        <p:cNvPr id="1" name=""/>
+        <p:cNvGrpSpPr/>
+        <p:nvPr/>
+      </p:nvGrpSpPr>
+      <p:grpSpPr/>
+      <p:sp>
+        <p:nvSpPr>
+          <p:cNvPr id="2" name="Title 1"/>
+          <p:cNvSpPr>
+            <a:spLocks noGrp="1"/>
+          </p:cNvSpPr>
+          <p:nvPr>
+            <p:ph type="title"/>
+          </p:nvPr>
+        </p:nvSpPr>
+        <p:spPr/>
+        <p:txBody>
+          <a:bodyPr wrap="square" anchor="t" lIns="73152" rIns="73152"/>
+          <a:lstStyle/>
+          <a:p>
+            <a:pPr algn="l">
+              <a:lnSpc>
+                <a:spcPct val="125000"/>
+              </a:lnSpc>
+            </a:pPr>
+            <a:r>
+              <a:rPr sz="2800" b="1" i="0" lang="fr-FR">
+                <a:solidFill>
+                  <a:srgbClr val="000091"/>
+                </a:solidFill>
+                <a:latin typeface="Marianne"/>
+              </a:rPr>
+              <a:t>Deux cartes sans numéro — deux facettes équivalentes</a:t>
+            </a:r>
+          </a:p>
+        </p:txBody>
+      </p:sp>
+      <p:sp>
+        <p:nvSpPr>
+          <p:cNvPr id="4" name="Text Placeholder 3"/>
+          <p:cNvSpPr>
+            <a:spLocks noGrp="1"/>
+          </p:cNvSpPr>
+          <p:nvPr>
+            <p:ph type="body" idx="13" sz="quarter"/>
+          </p:nvPr>
+        </p:nvSpPr>
+        <p:spPr/>
+        <p:txBody>
+          <a:bodyPr wrap="square" anchor="t" lIns="73152" rIns="73152"/>
+          <a:lstStyle/>
+          <a:p>
+            <a:pPr algn="r">
+              <a:lnSpc>
+                <a:spcPct val="125000"/>
+              </a:lnSpc>
+            </a:pPr>
+            <a:r>
+              <a:rPr sz="1100" b="0" i="0" lang="fr-FR">
+                <a:solidFill>
+                  <a:srgbClr val="666666"/>
+                </a:solidFill>
+                <a:latin typeface="Marianne"/>
+              </a:rPr>
+              <a:t>Démo | 2 cartes sans n°</a:t>
+            </a:r>
+          </a:p>
+        </p:txBody>
+      </p:sp>
+      <p:sp>
+        <p:nvSpPr>
+          <p:cNvPr id="7" name="Espace réservé du numéro de diapositive 6"/>
+          <p:cNvSpPr>
+            <a:spLocks noGrp="1"/>
+          </p:cNvSpPr>
+          <p:nvPr>
+            <p:ph type="sldNum" sz="quarter" idx="12"/>
+          </p:nvPr>
+        </p:nvSpPr>
+        <p:spPr bwMode="gray"/>
+        <p:txBody>
+          <a:bodyPr wrap="square" anchor="t" lIns="73152" rIns="73152"/>
+          <a:lstStyle/>
+          <a:p>
+            <a:pPr algn="l">
+              <a:lnSpc>
+                <a:spcPct val="125000"/>
+              </a:lnSpc>
+            </a:pPr>
+            <a:r>
+              <a:rPr sz="1000" b="0" i="0" lang="fr-FR">
+                <a:solidFill>
+                  <a:srgbClr val="666666"/>
+                </a:solidFill>
+                <a:latin typeface="Marianne"/>
+              </a:rPr>
+              <a:t>20</a:t>
+            </a:r>
+            <a:endParaRPr lang="fr-FR" dirty="0"/>
+          </a:p>
+        </p:txBody>
+      </p:sp>
+      <p:sp>
+        <p:nvSpPr>
+          <p:cNvPr id="9" name="DSFR-box"/>
+          <p:cNvSpPr/>
+          <p:nvPr/>
+        </p:nvSpPr>
+        <p:spPr>
+          <a:xfrm>
+            <a:off x="566928" y="2240280"/>
+            <a:ext cx="5372100" cy="3200400"/>
+          </a:xfrm>
+          <a:prstGeom prst="rect">
+            <a:avLst/>
+          </a:prstGeom>
+          <a:solidFill>
+            <a:srgbClr val="F6F6F6"/>
+          </a:solidFill>
+          <a:ln>
+            <a:noFill/>
+          </a:ln>
+          <a:effectLst/>
+        </p:spPr>
+        <p:style>
+          <a:lnRef idx="1">
+            <a:schemeClr val="accent1"/>
+          </a:lnRef>
+          <a:fillRef idx="3">
+            <a:schemeClr val="accent1"/>
+          </a:fillRef>
+          <a:effectRef idx="2">
+            <a:schemeClr val="accent1"/>
+          </a:effectRef>
+          <a:fontRef idx="minor">
+            <a:schemeClr val="lt1"/>
+          </a:fontRef>
+        </p:style>
+        <p:txBody>
+          <a:bodyPr rtlCol="0" anchor="ctr"/>
+          <a:lstStyle/>
+          <a:p>
+            <a:pPr algn="ctr"/>
+          </a:p>
+        </p:txBody>
+      </p:sp>
+      <p:sp>
+        <p:nvSpPr>
+          <p:cNvPr id="10" name="DSFR-card-titre"/>
+          <p:cNvSpPr txBox="1"/>
+          <p:nvPr/>
+        </p:nvSpPr>
+        <p:spPr>
+          <a:xfrm>
+            <a:off x="704088" y="2377440"/>
+            <a:ext cx="5097779" cy="411480"/>
+          </a:xfrm>
+          <a:prstGeom prst="rect">
+            <a:avLst/>
+          </a:prstGeom>
+          <a:noFill/>
+        </p:spPr>
+        <p:txBody>
+          <a:bodyPr wrap="square" anchor="t" lIns="73152" rIns="73152">
+            <a:spAutoFit/>
+          </a:bodyPr>
+          <a:lstStyle/>
+          <a:p>
+            <a:pPr algn="l">
+              <a:lnSpc>
+                <a:spcPct val="125000"/>
+              </a:lnSpc>
+            </a:pPr>
+            <a:r>
+              <a:rPr sz="1400" b="1" i="0" lang="fr-FR">
+                <a:solidFill>
+                  <a:srgbClr val="000091"/>
+                </a:solidFill>
+                <a:latin typeface="Marianne"/>
+              </a:rPr>
+              <a:t>Audit automatique</a:t>
+            </a:r>
+          </a:p>
+        </p:txBody>
+      </p:sp>
+      <p:sp>
+        <p:nvSpPr>
+          <p:cNvPr id="11" name="DSFR-card-contenu"/>
+          <p:cNvSpPr txBox="1"/>
+          <p:nvPr/>
+        </p:nvSpPr>
+        <p:spPr>
+          <a:xfrm>
+            <a:off x="704088" y="2834640"/>
+            <a:ext cx="5097779" cy="2468880"/>
+          </a:xfrm>
+          <a:prstGeom prst="rect">
+            <a:avLst/>
+          </a:prstGeom>
+          <a:noFill/>
+        </p:spPr>
+        <p:txBody>
+          <a:bodyPr wrap="square" lIns="73152" rIns="73152">
+            <a:spAutoFit/>
+          </a:bodyPr>
+          <a:lstStyle/>
+          <a:p>
+            <a:pPr algn="l">
+              <a:lnSpc>
+                <a:spcPct val="125000"/>
+              </a:lnSpc>
+            </a:pPr>
+            <a:r>
+              <a:rPr sz="1100" lang="fr-FR">
+                <a:solidFill>
+                  <a:srgbClr val="161616"/>
+                </a:solidFill>
+                <a:latin typeface="Marianne"/>
+              </a:rPr>
+              <a:t>• Rapide (quelques minutes)</a:t>
+            </a:r>
+          </a:p>
+          <a:p>
+            <a:pPr algn="l">
+              <a:lnSpc>
+                <a:spcPct val="125000"/>
+              </a:lnSpc>
+            </a:pPr>
+            <a:r>
+              <a:rPr sz="1100" lang="fr-FR">
+                <a:solidFill>
+                  <a:srgbClr val="161616"/>
+                </a:solidFill>
+                <a:latin typeface="Marianne"/>
+              </a:rPr>
+              <a:t>• Couvre 30 % des critères</a:t>
+            </a:r>
+          </a:p>
+          <a:p>
+            <a:pPr algn="l">
+              <a:lnSpc>
+                <a:spcPct val="125000"/>
+              </a:lnSpc>
+            </a:pPr>
+            <a:r>
+              <a:rPr sz="1100" lang="fr-FR">
+                <a:solidFill>
+                  <a:srgbClr val="161616"/>
+                </a:solidFill>
+                <a:latin typeface="Marianne"/>
+              </a:rPr>
+              <a:t>• Outils : axe-core, WAVE, Lighthouse</a:t>
+            </a:r>
+          </a:p>
+        </p:txBody>
+      </p:sp>
+      <p:sp>
+        <p:nvSpPr>
+          <p:cNvPr id="13" name="DSFR-box"/>
+          <p:cNvSpPr/>
+          <p:nvPr/>
+        </p:nvSpPr>
+        <p:spPr>
+          <a:xfrm>
+            <a:off x="6332219" y="2240280"/>
+            <a:ext cx="5372100" cy="3200400"/>
+          </a:xfrm>
+          <a:prstGeom prst="rect">
+            <a:avLst/>
+          </a:prstGeom>
+          <a:solidFill>
+            <a:srgbClr val="F6F6F6"/>
+          </a:solidFill>
+          <a:ln>
+            <a:noFill/>
+          </a:ln>
+          <a:effectLst/>
+        </p:spPr>
+        <p:style>
+          <a:lnRef idx="1">
+            <a:schemeClr val="accent1"/>
+          </a:lnRef>
+          <a:fillRef idx="3">
+            <a:schemeClr val="accent1"/>
+          </a:fillRef>
+          <a:effectRef idx="2">
+            <a:schemeClr val="accent1"/>
+          </a:effectRef>
+          <a:fontRef idx="minor">
+            <a:schemeClr val="lt1"/>
+          </a:fontRef>
+        </p:style>
+        <p:txBody>
+          <a:bodyPr rtlCol="0" anchor="ctr"/>
+          <a:lstStyle/>
+          <a:p>
+            <a:pPr algn="ctr"/>
+          </a:p>
+        </p:txBody>
+      </p:sp>
+      <p:sp>
+        <p:nvSpPr>
+          <p:cNvPr id="14" name="DSFR-card-titre"/>
+          <p:cNvSpPr txBox="1"/>
+          <p:nvPr/>
+        </p:nvSpPr>
+        <p:spPr>
+          <a:xfrm>
+            <a:off x="6469379" y="2377440"/>
+            <a:ext cx="5097779" cy="411480"/>
+          </a:xfrm>
+          <a:prstGeom prst="rect">
+            <a:avLst/>
+          </a:prstGeom>
+          <a:noFill/>
+        </p:spPr>
+        <p:txBody>
+          <a:bodyPr wrap="square" anchor="t" lIns="73152" rIns="73152">
+            <a:spAutoFit/>
+          </a:bodyPr>
+          <a:lstStyle/>
+          <a:p>
+            <a:pPr algn="l">
+              <a:lnSpc>
+                <a:spcPct val="125000"/>
+              </a:lnSpc>
+            </a:pPr>
+            <a:r>
+              <a:rPr sz="1400" b="1" i="0" lang="fr-FR">
+                <a:solidFill>
+                  <a:srgbClr val="000091"/>
+                </a:solidFill>
+                <a:latin typeface="Marianne"/>
+              </a:rPr>
+              <a:t>Audit manuel</a:t>
+            </a:r>
+          </a:p>
+        </p:txBody>
+      </p:sp>
+      <p:sp>
+        <p:nvSpPr>
+          <p:cNvPr id="15" name="DSFR-card-contenu"/>
+          <p:cNvSpPr txBox="1"/>
+          <p:nvPr/>
+        </p:nvSpPr>
+        <p:spPr>
+          <a:xfrm>
+            <a:off x="6469379" y="2834640"/>
+            <a:ext cx="5097779" cy="2468880"/>
+          </a:xfrm>
+          <a:prstGeom prst="rect">
+            <a:avLst/>
+          </a:prstGeom>
+          <a:noFill/>
+        </p:spPr>
+        <p:txBody>
+          <a:bodyPr wrap="square" lIns="73152" rIns="73152">
+            <a:spAutoFit/>
+          </a:bodyPr>
+          <a:lstStyle/>
+          <a:p>
+            <a:pPr algn="l">
+              <a:lnSpc>
+                <a:spcPct val="125000"/>
+              </a:lnSpc>
+            </a:pPr>
+            <a:r>
+              <a:rPr sz="1100" lang="fr-FR">
+                <a:solidFill>
+                  <a:srgbClr val="161616"/>
+                </a:solidFill>
+                <a:latin typeface="Marianne"/>
+              </a:rPr>
+              <a:t>• Long (journées à semaines)</a:t>
+            </a:r>
+          </a:p>
+          <a:p>
+            <a:pPr algn="l">
+              <a:lnSpc>
+                <a:spcPct val="125000"/>
+              </a:lnSpc>
+            </a:pPr>
+            <a:r>
+              <a:rPr sz="1100" lang="fr-FR">
+                <a:solidFill>
+                  <a:srgbClr val="161616"/>
+                </a:solidFill>
+                <a:latin typeface="Marianne"/>
+              </a:rPr>
+              <a:t>• Couvre 100 % des critères</a:t>
+            </a:r>
+          </a:p>
+          <a:p>
+            <a:pPr algn="l">
+              <a:lnSpc>
+                <a:spcPct val="125000"/>
+              </a:lnSpc>
+            </a:pPr>
+            <a:r>
+              <a:rPr sz="1100" lang="fr-FR">
+                <a:solidFill>
+                  <a:srgbClr val="161616"/>
+                </a:solidFill>
+                <a:latin typeface="Marianne"/>
+              </a:rPr>
+              <a:t>• Tests clavier, lecteur d’écran, contraste</a:t>
+            </a:r>
+          </a:p>
+        </p:txBody>
+      </p:sp>
+      <p:sp>
+        <p:nvSpPr>
+          <p:cNvPr id="5" name="Espace réservé de la date 4"/>
+          <p:cNvSpPr>
+            <a:spLocks noGrp="1"/>
+          </p:cNvSpPr>
+          <p:nvPr>
+            <p:ph type="dt" sz="half" idx="10"/>
+          </p:nvPr>
+        </p:nvSpPr>
+        <p:spPr bwMode="gray"/>
+        <p:txBody>
+          <a:bodyPr wrap="square" anchor="t" lIns="73152" rIns="73152"/>
+          <a:lstStyle/>
+          <a:p>
+            <a:pPr algn="l">
+              <a:lnSpc>
+                <a:spcPct val="125000"/>
+              </a:lnSpc>
+            </a:pPr>
+            <a:r>
+              <a:rPr sz="1000" b="0" i="0" lang="fr-FR">
+                <a:solidFill>
+                  <a:srgbClr val="666666"/>
+                </a:solidFill>
+                <a:latin typeface="Marianne"/>
+              </a:rPr>
+              <a:t>4 juin 2026</a:t>
+            </a:r>
+            <a:endParaRPr lang="fr-FR" cap="all" dirty="0"/>
+          </a:p>
+        </p:txBody>
+      </p:sp>
+      <p:sp>
+        <p:nvSpPr>
+          <p:cNvPr id="6" name="Espace réservé du pied de page 5"/>
+          <p:cNvSpPr>
+            <a:spLocks noGrp="1"/>
+          </p:cNvSpPr>
+          <p:nvPr>
+            <p:ph type="ftr" sz="quarter" idx="11"/>
+          </p:nvPr>
+        </p:nvSpPr>
+        <p:spPr bwMode="gray">
+          <a:xfrm>
+            <a:off x="479998" y="6377984"/>
+            <a:ext cx="7871980" cy="479998"/>
+          </a:xfrm>
+        </p:spPr>
+        <p:txBody>
+          <a:bodyPr wrap="square" anchor="t" lIns="73152" rIns="73152"/>
+          <a:lstStyle/>
+          <a:p>
+            <a:pPr algn="l">
+              <a:lnSpc>
+                <a:spcPct val="125000"/>
+              </a:lnSpc>
+            </a:pPr>
+            <a:r>
+              <a:rPr sz="1000" b="0" i="0" lang="fr-FR">
+                <a:solidFill>
+                  <a:srgbClr val="666666"/>
+                </a:solidFill>
+                <a:latin typeface="Marianne"/>
+              </a:rPr>
+              <a:t>Formation 102638 / Démo composants</a:t>
+            </a:r>
+          </a:p>
+        </p:txBody>
+      </p:sp>
+      <p:sp>
+        <p:nvSpPr>
+          <p:cNvPr id="8" name="DSFR-accent-decoratif" descr=""/>
+          <p:cNvSpPr/>
+          <p:nvPr/>
+        </p:nvSpPr>
+        <p:spPr>
+          <a:xfrm>
+            <a:off x="475488" y="2240280"/>
+            <a:ext cx="91440" cy="3200400"/>
+          </a:xfrm>
+          <a:prstGeom prst="rect">
+            <a:avLst/>
+          </a:prstGeom>
+          <a:solidFill>
+            <a:srgbClr val="000091"/>
+          </a:solidFill>
+          <a:ln>
+            <a:noFill/>
+          </a:ln>
+          <a:effectLst/>
+        </p:spPr>
+        <p:style>
+          <a:lnRef idx="1">
+            <a:schemeClr val="accent1"/>
+          </a:lnRef>
+          <a:fillRef idx="3">
+            <a:schemeClr val="accent1"/>
+          </a:fillRef>
+          <a:effectRef idx="2">
+            <a:schemeClr val="accent1"/>
+          </a:effectRef>
+          <a:fontRef idx="minor">
+            <a:schemeClr val="lt1"/>
+          </a:fontRef>
+        </p:style>
+        <p:txBody>
+          <a:bodyPr rtlCol="0" anchor="ctr"/>
+          <a:lstStyle/>
+          <a:p>
+            <a:pPr algn="ctr"/>
+          </a:p>
+        </p:txBody>
+      </p:sp>
+      <p:sp>
+        <p:nvSpPr>
+          <p:cNvPr id="12" name="DSFR-accent-decoratif" descr=""/>
+          <p:cNvSpPr/>
+          <p:nvPr/>
+        </p:nvSpPr>
+        <p:spPr>
+          <a:xfrm>
+            <a:off x="6240779" y="2240280"/>
+            <a:ext cx="91440" cy="3200400"/>
+          </a:xfrm>
+          <a:prstGeom prst="rect">
+            <a:avLst/>
+          </a:prstGeom>
+          <a:solidFill>
+            <a:srgbClr val="000091"/>
+          </a:solidFill>
+          <a:ln>
+            <a:noFill/>
+          </a:ln>
+          <a:effectLst/>
+        </p:spPr>
+        <p:style>
+          <a:lnRef idx="1">
+            <a:schemeClr val="accent1"/>
+          </a:lnRef>
+          <a:fillRef idx="3">
+            <a:schemeClr val="accent1"/>
+          </a:fillRef>
+          <a:effectRef idx="2">
+            <a:schemeClr val="accent1"/>
+          </a:effectRef>
+          <a:fontRef idx="minor">
+            <a:schemeClr val="lt1"/>
+          </a:fontRef>
+        </p:style>
+        <p:txBody>
+          <a:bodyPr rtlCol="0" anchor="ctr"/>
+          <a:lstStyle/>
+          <a:p>
+            <a:pPr algn="ctr"/>
+          </a:p>
+        </p:txBody>
+      </p:sp>
+    </p:spTree>
+  </p:cSld>
+  <p:clrMapOvr>
+    <a:masterClrMapping/>
+  </p:clrMapOvr>
+</p:sld>
+</file>
+
+<file path=ppt/slides/slide21.xml><?xml version="1.0" encoding="utf-8"?>
+<p:sld xmlns:a="http://schemas.openxmlformats.org/drawingml/2006/main" xmlns:p="http://schemas.openxmlformats.org/presentationml/2006/main" xmlns:r="http://schemas.openxmlformats.org/officeDocument/2006/relationships">
+  <p:cSld>
+    <p:spTree>
+      <p:nvGrpSpPr>
+        <p:cNvPr id="1" name=""/>
+        <p:cNvGrpSpPr/>
+        <p:nvPr/>
+      </p:nvGrpSpPr>
+      <p:grpSpPr/>
+      <p:sp>
+        <p:nvSpPr>
+          <p:cNvPr id="2" name="Title 1"/>
+          <p:cNvSpPr>
+            <a:spLocks noGrp="1"/>
+          </p:cNvSpPr>
+          <p:nvPr>
+            <p:ph type="title"/>
+          </p:nvPr>
+        </p:nvSpPr>
+        <p:spPr/>
+        <p:txBody>
+          <a:bodyPr wrap="square" anchor="t" lIns="73152" rIns="73152"/>
+          <a:lstStyle/>
+          <a:p>
+            <a:pPr algn="l">
+              <a:lnSpc>
+                <a:spcPct val="125000"/>
+              </a:lnSpc>
+            </a:pPr>
+            <a:r>
+              <a:rPr sz="2800" b="1" i="0" lang="fr-FR">
+                <a:solidFill>
+                  <a:srgbClr val="000091"/>
+                </a:solidFill>
+                <a:latin typeface="Marianne"/>
+              </a:rPr>
+              <a:t>Trois cartes sans numéro — triade de concepts</a:t>
+            </a:r>
+          </a:p>
+        </p:txBody>
+      </p:sp>
+      <p:sp>
+        <p:nvSpPr>
+          <p:cNvPr id="4" name="Text Placeholder 3"/>
+          <p:cNvSpPr>
+            <a:spLocks noGrp="1"/>
+          </p:cNvSpPr>
+          <p:nvPr>
+            <p:ph type="body" idx="13" sz="quarter"/>
+          </p:nvPr>
+        </p:nvSpPr>
+        <p:spPr/>
+        <p:txBody>
+          <a:bodyPr wrap="square" anchor="t" lIns="73152" rIns="73152"/>
+          <a:lstStyle/>
+          <a:p>
+            <a:pPr algn="r">
+              <a:lnSpc>
+                <a:spcPct val="125000"/>
+              </a:lnSpc>
+            </a:pPr>
+            <a:r>
+              <a:rPr sz="1100" b="0" i="0" lang="fr-FR">
+                <a:solidFill>
+                  <a:srgbClr val="666666"/>
+                </a:solidFill>
+                <a:latin typeface="Marianne"/>
+              </a:rPr>
+              <a:t>Démo | 3 cartes sans n°</a:t>
+            </a:r>
+          </a:p>
+        </p:txBody>
+      </p:sp>
+      <p:sp>
+        <p:nvSpPr>
+          <p:cNvPr id="7" name="Espace réservé du numéro de diapositive 6"/>
+          <p:cNvSpPr>
+            <a:spLocks noGrp="1"/>
+          </p:cNvSpPr>
+          <p:nvPr>
+            <p:ph type="sldNum" sz="quarter" idx="12"/>
+          </p:nvPr>
+        </p:nvSpPr>
+        <p:spPr bwMode="gray"/>
+        <p:txBody>
+          <a:bodyPr wrap="square" anchor="t" lIns="73152" rIns="73152"/>
+          <a:lstStyle/>
+          <a:p>
+            <a:pPr algn="l">
+              <a:lnSpc>
+                <a:spcPct val="125000"/>
+              </a:lnSpc>
+            </a:pPr>
+            <a:r>
+              <a:rPr sz="1000" b="0" i="0" lang="fr-FR">
+                <a:solidFill>
+                  <a:srgbClr val="666666"/>
+                </a:solidFill>
+                <a:latin typeface="Marianne"/>
+              </a:rPr>
+              <a:t>21</a:t>
+            </a:r>
+            <a:endParaRPr lang="fr-FR" dirty="0"/>
+          </a:p>
+        </p:txBody>
+      </p:sp>
+      <p:sp>
+        <p:nvSpPr>
+          <p:cNvPr id="9" name="DSFR-box"/>
+          <p:cNvSpPr/>
+          <p:nvPr/>
+        </p:nvSpPr>
+        <p:spPr>
+          <a:xfrm>
+            <a:off x="566928" y="2240280"/>
+            <a:ext cx="3450335" cy="3200400"/>
+          </a:xfrm>
+          <a:prstGeom prst="rect">
+            <a:avLst/>
+          </a:prstGeom>
+          <a:solidFill>
+            <a:srgbClr val="F6F6F6"/>
+          </a:solidFill>
+          <a:ln>
+            <a:noFill/>
+          </a:ln>
+          <a:effectLst/>
+        </p:spPr>
+        <p:style>
+          <a:lnRef idx="1">
+            <a:schemeClr val="accent1"/>
+          </a:lnRef>
+          <a:fillRef idx="3">
+            <a:schemeClr val="accent1"/>
+          </a:fillRef>
+          <a:effectRef idx="2">
+            <a:schemeClr val="accent1"/>
+          </a:effectRef>
+          <a:fontRef idx="minor">
+            <a:schemeClr val="lt1"/>
+          </a:fontRef>
+        </p:style>
+        <p:txBody>
+          <a:bodyPr rtlCol="0" anchor="ctr"/>
+          <a:lstStyle/>
+          <a:p>
+            <a:pPr algn="ctr"/>
+          </a:p>
+        </p:txBody>
+      </p:sp>
+      <p:sp>
+        <p:nvSpPr>
+          <p:cNvPr id="10" name="DSFR-card-titre"/>
+          <p:cNvSpPr txBox="1"/>
+          <p:nvPr/>
+        </p:nvSpPr>
+        <p:spPr>
+          <a:xfrm>
+            <a:off x="704088" y="2377440"/>
+            <a:ext cx="3176016" cy="411480"/>
+          </a:xfrm>
+          <a:prstGeom prst="rect">
+            <a:avLst/>
+          </a:prstGeom>
+          <a:noFill/>
+        </p:spPr>
+        <p:txBody>
+          <a:bodyPr wrap="square" anchor="t" lIns="73152" rIns="73152">
+            <a:spAutoFit/>
+          </a:bodyPr>
+          <a:lstStyle/>
+          <a:p>
+            <a:pPr algn="l">
+              <a:lnSpc>
+                <a:spcPct val="125000"/>
+              </a:lnSpc>
+            </a:pPr>
+            <a:r>
+              <a:rPr sz="1400" b="1" i="0" lang="fr-FR">
+                <a:solidFill>
+                  <a:srgbClr val="000091"/>
+                </a:solidFill>
+                <a:latin typeface="Marianne"/>
+              </a:rPr>
+              <a:t>Perceptible</a:t>
+            </a:r>
+          </a:p>
+        </p:txBody>
+      </p:sp>
+      <p:sp>
+        <p:nvSpPr>
+          <p:cNvPr id="11" name="DSFR-card-contenu"/>
+          <p:cNvSpPr txBox="1"/>
+          <p:nvPr/>
+        </p:nvSpPr>
+        <p:spPr>
+          <a:xfrm>
+            <a:off x="704088" y="2834640"/>
+            <a:ext cx="3176016" cy="2468880"/>
+          </a:xfrm>
+          <a:prstGeom prst="rect">
+            <a:avLst/>
+          </a:prstGeom>
+          <a:noFill/>
+        </p:spPr>
+        <p:txBody>
+          <a:bodyPr wrap="square" lIns="73152" rIns="73152">
+            <a:spAutoFit/>
+          </a:bodyPr>
+          <a:lstStyle/>
+          <a:p>
+            <a:pPr algn="l">
+              <a:lnSpc>
+                <a:spcPct val="125000"/>
+              </a:lnSpc>
+            </a:pPr>
+            <a:r>
+              <a:rPr sz="1100" lang="fr-FR">
+                <a:solidFill>
+                  <a:srgbClr val="161616"/>
+                </a:solidFill>
+                <a:latin typeface="Marianne"/>
+              </a:rPr>
+              <a:t>• Alternatives textuelles</a:t>
+            </a:r>
+          </a:p>
+          <a:p>
+            <a:pPr algn="l">
+              <a:lnSpc>
+                <a:spcPct val="125000"/>
+              </a:lnSpc>
+            </a:pPr>
+            <a:r>
+              <a:rPr sz="1100" lang="fr-FR">
+                <a:solidFill>
+                  <a:srgbClr val="161616"/>
+                </a:solidFill>
+                <a:latin typeface="Marianne"/>
+              </a:rPr>
+              <a:t>• Contrastes suffisants</a:t>
+            </a:r>
+          </a:p>
+          <a:p>
+            <a:pPr algn="l">
+              <a:lnSpc>
+                <a:spcPct val="125000"/>
+              </a:lnSpc>
+            </a:pPr>
+            <a:r>
+              <a:rPr sz="1100" lang="fr-FR">
+                <a:solidFill>
+                  <a:srgbClr val="161616"/>
+                </a:solidFill>
+                <a:latin typeface="Marianne"/>
+              </a:rPr>
+              <a:t>• Sous-titres</a:t>
+            </a:r>
+          </a:p>
+        </p:txBody>
+      </p:sp>
+      <p:sp>
+        <p:nvSpPr>
+          <p:cNvPr id="13" name="DSFR-box"/>
+          <p:cNvSpPr/>
+          <p:nvPr/>
+        </p:nvSpPr>
+        <p:spPr>
+          <a:xfrm>
+            <a:off x="4410455" y="2240280"/>
+            <a:ext cx="3450335" cy="3200400"/>
+          </a:xfrm>
+          <a:prstGeom prst="rect">
+            <a:avLst/>
+          </a:prstGeom>
+          <a:solidFill>
+            <a:srgbClr val="F6F6F6"/>
+          </a:solidFill>
+          <a:ln>
+            <a:noFill/>
+          </a:ln>
+          <a:effectLst/>
+        </p:spPr>
+        <p:style>
+          <a:lnRef idx="1">
+            <a:schemeClr val="accent1"/>
+          </a:lnRef>
+          <a:fillRef idx="3">
+            <a:schemeClr val="accent1"/>
+          </a:fillRef>
+          <a:effectRef idx="2">
+            <a:schemeClr val="accent1"/>
+          </a:effectRef>
+          <a:fontRef idx="minor">
+            <a:schemeClr val="lt1"/>
+          </a:fontRef>
+        </p:style>
+        <p:txBody>
+          <a:bodyPr rtlCol="0" anchor="ctr"/>
+          <a:lstStyle/>
+          <a:p>
+            <a:pPr algn="ctr"/>
+          </a:p>
+        </p:txBody>
+      </p:sp>
+      <p:sp>
+        <p:nvSpPr>
+          <p:cNvPr id="14" name="DSFR-card-titre"/>
+          <p:cNvSpPr txBox="1"/>
+          <p:nvPr/>
+        </p:nvSpPr>
+        <p:spPr>
+          <a:xfrm>
+            <a:off x="4547615" y="2377440"/>
+            <a:ext cx="3176016" cy="411480"/>
+          </a:xfrm>
+          <a:prstGeom prst="rect">
+            <a:avLst/>
+          </a:prstGeom>
+          <a:noFill/>
+        </p:spPr>
+        <p:txBody>
+          <a:bodyPr wrap="square" anchor="t" lIns="73152" rIns="73152">
+            <a:spAutoFit/>
+          </a:bodyPr>
+          <a:lstStyle/>
+          <a:p>
+            <a:pPr algn="l">
+              <a:lnSpc>
+                <a:spcPct val="125000"/>
+              </a:lnSpc>
+            </a:pPr>
+            <a:r>
+              <a:rPr sz="1400" b="1" i="0" lang="fr-FR">
+                <a:solidFill>
+                  <a:srgbClr val="000091"/>
+                </a:solidFill>
+                <a:latin typeface="Marianne"/>
+              </a:rPr>
+              <a:t>Utilisable</a:t>
+            </a:r>
+          </a:p>
+        </p:txBody>
+      </p:sp>
+      <p:sp>
+        <p:nvSpPr>
+          <p:cNvPr id="15" name="DSFR-card-contenu"/>
+          <p:cNvSpPr txBox="1"/>
+          <p:nvPr/>
+        </p:nvSpPr>
+        <p:spPr>
+          <a:xfrm>
+            <a:off x="4547615" y="2834640"/>
+            <a:ext cx="3176016" cy="2468880"/>
+          </a:xfrm>
+          <a:prstGeom prst="rect">
+            <a:avLst/>
+          </a:prstGeom>
+          <a:noFill/>
+        </p:spPr>
+        <p:txBody>
+          <a:bodyPr wrap="square" lIns="73152" rIns="73152">
+            <a:spAutoFit/>
+          </a:bodyPr>
+          <a:lstStyle/>
+          <a:p>
+            <a:pPr algn="l">
+              <a:lnSpc>
+                <a:spcPct val="125000"/>
+              </a:lnSpc>
+            </a:pPr>
+            <a:r>
+              <a:rPr sz="1100" lang="fr-FR">
+                <a:solidFill>
+                  <a:srgbClr val="161616"/>
+                </a:solidFill>
+                <a:latin typeface="Marianne"/>
+              </a:rPr>
+              <a:t>• Navigation au clavier</a:t>
+            </a:r>
+          </a:p>
+          <a:p>
+            <a:pPr algn="l">
+              <a:lnSpc>
+                <a:spcPct val="125000"/>
+              </a:lnSpc>
+            </a:pPr>
+            <a:r>
+              <a:rPr sz="1100" lang="fr-FR">
+                <a:solidFill>
+                  <a:srgbClr val="161616"/>
+                </a:solidFill>
+                <a:latin typeface="Marianne"/>
+              </a:rPr>
+              <a:t>• Temps suffisant</a:t>
+            </a:r>
+          </a:p>
+          <a:p>
+            <a:pPr algn="l">
+              <a:lnSpc>
+                <a:spcPct val="125000"/>
+              </a:lnSpc>
+            </a:pPr>
+            <a:r>
+              <a:rPr sz="1100" lang="fr-FR">
+                <a:solidFill>
+                  <a:srgbClr val="161616"/>
+                </a:solidFill>
+                <a:latin typeface="Marianne"/>
+              </a:rPr>
+              <a:t>• Pas de clignotement</a:t>
+            </a:r>
+          </a:p>
+        </p:txBody>
+      </p:sp>
+      <p:sp>
+        <p:nvSpPr>
+          <p:cNvPr id="17" name="DSFR-box"/>
+          <p:cNvSpPr/>
+          <p:nvPr/>
+        </p:nvSpPr>
+        <p:spPr>
+          <a:xfrm>
+            <a:off x="8253983" y="2240280"/>
+            <a:ext cx="3450335" cy="3200400"/>
+          </a:xfrm>
+          <a:prstGeom prst="rect">
+            <a:avLst/>
+          </a:prstGeom>
+          <a:solidFill>
+            <a:srgbClr val="F6F6F6"/>
+          </a:solidFill>
+          <a:ln>
+            <a:noFill/>
+          </a:ln>
+          <a:effectLst/>
+        </p:spPr>
+        <p:style>
+          <a:lnRef idx="1">
+            <a:schemeClr val="accent1"/>
+          </a:lnRef>
+          <a:fillRef idx="3">
+            <a:schemeClr val="accent1"/>
+          </a:fillRef>
+          <a:effectRef idx="2">
+            <a:schemeClr val="accent1"/>
+          </a:effectRef>
+          <a:fontRef idx="minor">
+            <a:schemeClr val="lt1"/>
+          </a:fontRef>
+        </p:style>
+        <p:txBody>
+          <a:bodyPr rtlCol="0" anchor="ctr"/>
+          <a:lstStyle/>
+          <a:p>
+            <a:pPr algn="ctr"/>
+          </a:p>
+        </p:txBody>
+      </p:sp>
+      <p:sp>
+        <p:nvSpPr>
+          <p:cNvPr id="18" name="DSFR-card-titre"/>
+          <p:cNvSpPr txBox="1"/>
+          <p:nvPr/>
+        </p:nvSpPr>
+        <p:spPr>
+          <a:xfrm>
+            <a:off x="8391144" y="2377440"/>
+            <a:ext cx="3176016" cy="411480"/>
+          </a:xfrm>
+          <a:prstGeom prst="rect">
+            <a:avLst/>
+          </a:prstGeom>
+          <a:noFill/>
+        </p:spPr>
+        <p:txBody>
+          <a:bodyPr wrap="square" anchor="t" lIns="73152" rIns="73152">
+            <a:spAutoFit/>
+          </a:bodyPr>
+          <a:lstStyle/>
+          <a:p>
+            <a:pPr algn="l">
+              <a:lnSpc>
+                <a:spcPct val="125000"/>
+              </a:lnSpc>
+            </a:pPr>
+            <a:r>
+              <a:rPr sz="1400" b="1" i="0" lang="fr-FR">
+                <a:solidFill>
+                  <a:srgbClr val="000091"/>
+                </a:solidFill>
+                <a:latin typeface="Marianne"/>
+              </a:rPr>
+              <a:t>Compréhensible</a:t>
+            </a:r>
+          </a:p>
+        </p:txBody>
+      </p:sp>
+      <p:sp>
+        <p:nvSpPr>
+          <p:cNvPr id="19" name="DSFR-card-contenu"/>
+          <p:cNvSpPr txBox="1"/>
+          <p:nvPr/>
+        </p:nvSpPr>
+        <p:spPr>
+          <a:xfrm>
+            <a:off x="8391144" y="2834640"/>
+            <a:ext cx="3176016" cy="2468880"/>
+          </a:xfrm>
+          <a:prstGeom prst="rect">
+            <a:avLst/>
+          </a:prstGeom>
+          <a:noFill/>
+        </p:spPr>
+        <p:txBody>
+          <a:bodyPr wrap="square" lIns="73152" rIns="73152">
+            <a:spAutoFit/>
+          </a:bodyPr>
+          <a:lstStyle/>
+          <a:p>
+            <a:pPr algn="l">
+              <a:lnSpc>
+                <a:spcPct val="125000"/>
+              </a:lnSpc>
+            </a:pPr>
+            <a:r>
+              <a:rPr sz="1100" lang="fr-FR">
+                <a:solidFill>
+                  <a:srgbClr val="161616"/>
+                </a:solidFill>
+                <a:latin typeface="Marianne"/>
+              </a:rPr>
+              <a:t>• Langue identifiée</a:t>
+            </a:r>
+          </a:p>
+          <a:p>
+            <a:pPr algn="l">
+              <a:lnSpc>
+                <a:spcPct val="125000"/>
+              </a:lnSpc>
+            </a:pPr>
+            <a:r>
+              <a:rPr sz="1100" lang="fr-FR">
+                <a:solidFill>
+                  <a:srgbClr val="161616"/>
+                </a:solidFill>
+                <a:latin typeface="Marianne"/>
+              </a:rPr>
+              <a:t>• Texte lisible</a:t>
+            </a:r>
+          </a:p>
+          <a:p>
+            <a:pPr algn="l">
+              <a:lnSpc>
+                <a:spcPct val="125000"/>
+              </a:lnSpc>
+            </a:pPr>
+            <a:r>
+              <a:rPr sz="1100" lang="fr-FR">
+                <a:solidFill>
+                  <a:srgbClr val="161616"/>
+                </a:solidFill>
+                <a:latin typeface="Marianne"/>
+              </a:rPr>
+              <a:t>• Prévisibilité</a:t>
+            </a:r>
+          </a:p>
+        </p:txBody>
+      </p:sp>
+      <p:sp>
+        <p:nvSpPr>
+          <p:cNvPr id="5" name="Espace réservé de la date 4"/>
+          <p:cNvSpPr>
+            <a:spLocks noGrp="1"/>
+          </p:cNvSpPr>
+          <p:nvPr>
+            <p:ph type="dt" sz="half" idx="10"/>
+          </p:nvPr>
+        </p:nvSpPr>
+        <p:spPr bwMode="gray"/>
+        <p:txBody>
+          <a:bodyPr wrap="square" anchor="t" lIns="73152" rIns="73152"/>
+          <a:lstStyle/>
+          <a:p>
+            <a:pPr algn="l">
+              <a:lnSpc>
+                <a:spcPct val="125000"/>
+              </a:lnSpc>
+            </a:pPr>
+            <a:r>
+              <a:rPr sz="1000" b="0" i="0" lang="fr-FR">
+                <a:solidFill>
+                  <a:srgbClr val="666666"/>
+                </a:solidFill>
+                <a:latin typeface="Marianne"/>
+              </a:rPr>
+              <a:t>4 juin 2026</a:t>
+            </a:r>
+            <a:endParaRPr lang="fr-FR" cap="all" dirty="0"/>
+          </a:p>
+        </p:txBody>
+      </p:sp>
+      <p:sp>
+        <p:nvSpPr>
+          <p:cNvPr id="6" name="Espace réservé du pied de page 5"/>
+          <p:cNvSpPr>
+            <a:spLocks noGrp="1"/>
+          </p:cNvSpPr>
+          <p:nvPr>
+            <p:ph type="ftr" sz="quarter" idx="11"/>
+          </p:nvPr>
+        </p:nvSpPr>
+        <p:spPr bwMode="gray">
+          <a:xfrm>
+            <a:off x="479998" y="6377984"/>
+            <a:ext cx="7871980" cy="479998"/>
+          </a:xfrm>
+        </p:spPr>
+        <p:txBody>
+          <a:bodyPr wrap="square" anchor="t" lIns="73152" rIns="73152"/>
+          <a:lstStyle/>
+          <a:p>
+            <a:pPr algn="l">
+              <a:lnSpc>
+                <a:spcPct val="125000"/>
+              </a:lnSpc>
+            </a:pPr>
+            <a:r>
+              <a:rPr sz="1000" b="0" i="0" lang="fr-FR">
+                <a:solidFill>
+                  <a:srgbClr val="666666"/>
+                </a:solidFill>
+                <a:latin typeface="Marianne"/>
+              </a:rPr>
+              <a:t>Formation 102638 / Démo composants</a:t>
+            </a:r>
+          </a:p>
+        </p:txBody>
+      </p:sp>
+      <p:sp>
+        <p:nvSpPr>
+          <p:cNvPr id="8" name="DSFR-accent-decoratif" descr=""/>
+          <p:cNvSpPr/>
+          <p:nvPr/>
+        </p:nvSpPr>
+        <p:spPr>
+          <a:xfrm>
+            <a:off x="475488" y="2240280"/>
+            <a:ext cx="91440" cy="3200400"/>
+          </a:xfrm>
+          <a:prstGeom prst="rect">
+            <a:avLst/>
+          </a:prstGeom>
+          <a:solidFill>
+            <a:srgbClr val="000091"/>
+          </a:solidFill>
+          <a:ln>
+            <a:noFill/>
+          </a:ln>
+          <a:effectLst/>
+        </p:spPr>
+        <p:style>
+          <a:lnRef idx="1">
+            <a:schemeClr val="accent1"/>
+          </a:lnRef>
+          <a:fillRef idx="3">
+            <a:schemeClr val="accent1"/>
+          </a:fillRef>
+          <a:effectRef idx="2">
+            <a:schemeClr val="accent1"/>
+          </a:effectRef>
+          <a:fontRef idx="minor">
+            <a:schemeClr val="lt1"/>
+          </a:fontRef>
+        </p:style>
+        <p:txBody>
+          <a:bodyPr rtlCol="0" anchor="ctr"/>
+          <a:lstStyle/>
+          <a:p>
+            <a:pPr algn="ctr"/>
+          </a:p>
+        </p:txBody>
+      </p:sp>
+      <p:sp>
+        <p:nvSpPr>
+          <p:cNvPr id="12" name="DSFR-accent-decoratif" descr=""/>
+          <p:cNvSpPr/>
+          <p:nvPr/>
+        </p:nvSpPr>
+        <p:spPr>
+          <a:xfrm>
+            <a:off x="4319015" y="2240280"/>
+            <a:ext cx="91440" cy="3200400"/>
+          </a:xfrm>
+          <a:prstGeom prst="rect">
+            <a:avLst/>
+          </a:prstGeom>
+          <a:solidFill>
+            <a:srgbClr val="000091"/>
+          </a:solidFill>
+          <a:ln>
+            <a:noFill/>
+          </a:ln>
+          <a:effectLst/>
+        </p:spPr>
+        <p:style>
+          <a:lnRef idx="1">
+            <a:schemeClr val="accent1"/>
+          </a:lnRef>
+          <a:fillRef idx="3">
+            <a:schemeClr val="accent1"/>
+          </a:fillRef>
+          <a:effectRef idx="2">
+            <a:schemeClr val="accent1"/>
+          </a:effectRef>
+          <a:fontRef idx="minor">
+            <a:schemeClr val="lt1"/>
+          </a:fontRef>
+        </p:style>
+        <p:txBody>
+          <a:bodyPr rtlCol="0" anchor="ctr"/>
+          <a:lstStyle/>
+          <a:p>
+            <a:pPr algn="ctr"/>
+          </a:p>
+        </p:txBody>
+      </p:sp>
+      <p:sp>
+        <p:nvSpPr>
+          <p:cNvPr id="16" name="DSFR-accent-decoratif" descr=""/>
+          <p:cNvSpPr/>
+          <p:nvPr/>
+        </p:nvSpPr>
+        <p:spPr>
+          <a:xfrm>
+            <a:off x="8162543" y="2240280"/>
+            <a:ext cx="91440" cy="3200400"/>
+          </a:xfrm>
+          <a:prstGeom prst="rect">
+            <a:avLst/>
+          </a:prstGeom>
+          <a:solidFill>
+            <a:srgbClr val="000091"/>
+          </a:solidFill>
+          <a:ln>
+            <a:noFill/>
+          </a:ln>
+          <a:effectLst/>
+        </p:spPr>
+        <p:style>
+          <a:lnRef idx="1">
+            <a:schemeClr val="accent1"/>
+          </a:lnRef>
+          <a:fillRef idx="3">
+            <a:schemeClr val="accent1"/>
+          </a:fillRef>
+          <a:effectRef idx="2">
+            <a:schemeClr val="accent1"/>
+          </a:effectRef>
+          <a:fontRef idx="minor">
+            <a:schemeClr val="lt1"/>
+          </a:fontRef>
+        </p:style>
+        <p:txBody>
+          <a:bodyPr rtlCol="0" anchor="ctr"/>
+          <a:lstStyle/>
+          <a:p>
+            <a:pPr algn="ctr"/>
+          </a:p>
+        </p:txBody>
+      </p:sp>
+    </p:spTree>
+  </p:cSld>
+  <p:clrMapOvr>
+    <a:masterClrMapping/>
+  </p:clrMapOvr>
+</p:sld>
+</file>
+
+<file path=ppt/slides/slide22.xml><?xml version="1.0" encoding="utf-8"?>
+<p:sld xmlns:a="http://schemas.openxmlformats.org/drawingml/2006/main" xmlns:p="http://schemas.openxmlformats.org/presentationml/2006/main" xmlns:r="http://schemas.openxmlformats.org/officeDocument/2006/relationships">
+  <p:cSld>
+    <p:spTree>
+      <p:nvGrpSpPr>
+        <p:cNvPr id="1" name=""/>
+        <p:cNvGrpSpPr/>
+        <p:nvPr/>
+      </p:nvGrpSpPr>
+      <p:grpSpPr/>
+      <p:sp>
+        <p:nvSpPr>
+          <p:cNvPr id="2" name="Title 1"/>
+          <p:cNvSpPr>
+            <a:spLocks noGrp="1"/>
+          </p:cNvSpPr>
+          <p:nvPr>
+            <p:ph type="title"/>
+          </p:nvPr>
+        </p:nvSpPr>
+        <p:spPr/>
+        <p:txBody>
+          <a:bodyPr wrap="square" anchor="t" lIns="73152" rIns="73152"/>
+          <a:lstStyle/>
+          <a:p>
+            <a:pPr algn="l">
+              <a:lnSpc>
+                <a:spcPct val="125000"/>
+              </a:lnSpc>
+            </a:pPr>
+            <a:r>
+              <a:rPr sz="2800" b="1" i="0" lang="fr-FR">
+                <a:solidFill>
+                  <a:srgbClr val="000091"/>
+                </a:solidFill>
+                <a:latin typeface="Marianne"/>
+              </a:rPr>
+              <a:t>Une carte sans numéro + callout</a:t>
+            </a:r>
+          </a:p>
+        </p:txBody>
+      </p:sp>
+      <p:sp>
+        <p:nvSpPr>
+          <p:cNvPr id="4" name="Text Placeholder 3"/>
+          <p:cNvSpPr>
+            <a:spLocks noGrp="1"/>
+          </p:cNvSpPr>
+          <p:nvPr>
+            <p:ph type="body" idx="13" sz="quarter"/>
+          </p:nvPr>
+        </p:nvSpPr>
+        <p:spPr/>
+        <p:txBody>
+          <a:bodyPr wrap="square" anchor="t" lIns="73152" rIns="73152"/>
+          <a:lstStyle/>
+          <a:p>
+            <a:pPr algn="r">
+              <a:lnSpc>
+                <a:spcPct val="125000"/>
+              </a:lnSpc>
+            </a:pPr>
+            <a:r>
+              <a:rPr sz="1100" b="0" i="0" lang="fr-FR">
+                <a:solidFill>
+                  <a:srgbClr val="666666"/>
+                </a:solidFill>
+                <a:latin typeface="Marianne"/>
+              </a:rPr>
+              <a:t>Démo | 1 carte sans n° + callout</a:t>
+            </a:r>
+          </a:p>
+        </p:txBody>
+      </p:sp>
+      <p:sp>
+        <p:nvSpPr>
+          <p:cNvPr id="7" name="Espace réservé du numéro de diapositive 6"/>
+          <p:cNvSpPr>
+            <a:spLocks noGrp="1"/>
+          </p:cNvSpPr>
+          <p:nvPr>
+            <p:ph type="sldNum" sz="quarter" idx="12"/>
+          </p:nvPr>
+        </p:nvSpPr>
+        <p:spPr bwMode="gray"/>
+        <p:txBody>
+          <a:bodyPr wrap="square" anchor="t" lIns="73152" rIns="73152"/>
+          <a:lstStyle/>
+          <a:p>
+            <a:pPr algn="l">
+              <a:lnSpc>
+                <a:spcPct val="125000"/>
+              </a:lnSpc>
+            </a:pPr>
+            <a:r>
+              <a:rPr sz="1000" b="0" i="0" lang="fr-FR">
+                <a:solidFill>
+                  <a:srgbClr val="666666"/>
+                </a:solidFill>
+                <a:latin typeface="Marianne"/>
+              </a:rPr>
+              <a:t>22</a:t>
+            </a:r>
+            <a:endParaRPr lang="fr-FR" dirty="0"/>
+          </a:p>
+        </p:txBody>
+      </p:sp>
+      <p:sp>
+        <p:nvSpPr>
+          <p:cNvPr id="9" name="DSFR-box"/>
+          <p:cNvSpPr/>
+          <p:nvPr/>
+        </p:nvSpPr>
+        <p:spPr>
+          <a:xfrm>
+            <a:off x="566928" y="2240280"/>
+            <a:ext cx="11137392" cy="2103120"/>
+          </a:xfrm>
+          <a:prstGeom prst="rect">
+            <a:avLst/>
+          </a:prstGeom>
+          <a:solidFill>
+            <a:srgbClr val="F6F6F6"/>
+          </a:solidFill>
+          <a:ln>
+            <a:noFill/>
+          </a:ln>
+          <a:effectLst/>
+        </p:spPr>
+        <p:style>
+          <a:lnRef idx="1">
+            <a:schemeClr val="accent1"/>
+          </a:lnRef>
+          <a:fillRef idx="3">
+            <a:schemeClr val="accent1"/>
+          </a:fillRef>
+          <a:effectRef idx="2">
+            <a:schemeClr val="accent1"/>
+          </a:effectRef>
+          <a:fontRef idx="minor">
+            <a:schemeClr val="lt1"/>
+          </a:fontRef>
+        </p:style>
+        <p:txBody>
+          <a:bodyPr rtlCol="0" anchor="ctr"/>
+          <a:lstStyle/>
+          <a:p>
+            <a:pPr algn="ctr"/>
+          </a:p>
+        </p:txBody>
+      </p:sp>
+      <p:sp>
+        <p:nvSpPr>
+          <p:cNvPr id="10" name="DSFR-card-titre"/>
+          <p:cNvSpPr txBox="1"/>
+          <p:nvPr/>
+        </p:nvSpPr>
+        <p:spPr>
+          <a:xfrm>
+            <a:off x="704088" y="2377440"/>
+            <a:ext cx="10863072" cy="411480"/>
+          </a:xfrm>
+          <a:prstGeom prst="rect">
+            <a:avLst/>
+          </a:prstGeom>
+          <a:noFill/>
+        </p:spPr>
+        <p:txBody>
+          <a:bodyPr wrap="square" anchor="t" lIns="73152" rIns="73152">
+            <a:spAutoFit/>
+          </a:bodyPr>
+          <a:lstStyle/>
+          <a:p>
+            <a:pPr algn="l">
+              <a:lnSpc>
+                <a:spcPct val="125000"/>
+              </a:lnSpc>
+            </a:pPr>
+            <a:r>
+              <a:rPr sz="1400" b="1" i="0" lang="fr-FR">
+                <a:solidFill>
+                  <a:srgbClr val="000091"/>
+                </a:solidFill>
+                <a:latin typeface="Marianne"/>
+              </a:rPr>
+              <a:t>Principe fondamental</a:t>
+            </a:r>
+          </a:p>
+        </p:txBody>
+      </p:sp>
+      <p:sp>
+        <p:nvSpPr>
+          <p:cNvPr id="11" name="DSFR-card-contenu"/>
+          <p:cNvSpPr txBox="1"/>
+          <p:nvPr/>
+        </p:nvSpPr>
+        <p:spPr>
+          <a:xfrm>
+            <a:off x="704088" y="2834640"/>
+            <a:ext cx="10863072" cy="1371600"/>
+          </a:xfrm>
+          <a:prstGeom prst="rect">
+            <a:avLst/>
+          </a:prstGeom>
+          <a:noFill/>
+        </p:spPr>
+        <p:txBody>
+          <a:bodyPr wrap="square" lIns="73152" rIns="73152">
+            <a:spAutoFit/>
+          </a:bodyPr>
+          <a:lstStyle/>
+          <a:p>
+            <a:pPr algn="l">
+              <a:lnSpc>
+                <a:spcPct val="125000"/>
+              </a:lnSpc>
+            </a:pPr>
+            <a:r>
+              <a:rPr sz="1100" lang="fr-FR">
+                <a:solidFill>
+                  <a:srgbClr val="161616"/>
+                </a:solidFill>
+                <a:latin typeface="Marianne"/>
+              </a:rPr>
+              <a:t>• Une information doit être perceptible,</a:t>
+            </a:r>
+          </a:p>
+          <a:p>
+            <a:pPr algn="l">
+              <a:lnSpc>
+                <a:spcPct val="125000"/>
+              </a:lnSpc>
+            </a:pPr>
+            <a:r>
+              <a:rPr sz="1100" lang="fr-FR">
+                <a:solidFill>
+                  <a:srgbClr val="161616"/>
+                </a:solidFill>
+                <a:latin typeface="Marianne"/>
+              </a:rPr>
+              <a:t>• utilisable, compréhensible et robuste</a:t>
+            </a:r>
+          </a:p>
+          <a:p>
+            <a:pPr algn="l">
+              <a:lnSpc>
+                <a:spcPct val="125000"/>
+              </a:lnSpc>
+            </a:pPr>
+            <a:r>
+              <a:rPr sz="1100" lang="fr-FR">
+                <a:solidFill>
+                  <a:srgbClr val="161616"/>
+                </a:solidFill>
+                <a:latin typeface="Marianne"/>
+              </a:rPr>
+              <a:t>• (acronyme POUR de WCAG 2.2).</a:t>
+            </a:r>
+          </a:p>
+        </p:txBody>
+      </p:sp>
+      <p:sp>
+        <p:nvSpPr>
+          <p:cNvPr id="13" name="DSFR-box"/>
+          <p:cNvSpPr/>
+          <p:nvPr/>
+        </p:nvSpPr>
+        <p:spPr>
+          <a:xfrm>
+            <a:off x="548640" y="4617720"/>
+            <a:ext cx="11155680" cy="1371600"/>
+          </a:xfrm>
+          <a:prstGeom prst="rect">
+            <a:avLst/>
+          </a:prstGeom>
+          <a:solidFill>
+            <a:srgbClr val="F5F5FE"/>
+          </a:solidFill>
+          <a:ln>
+            <a:noFill/>
+          </a:ln>
+          <a:effectLst/>
+        </p:spPr>
+        <p:style>
+          <a:lnRef idx="1">
+            <a:schemeClr val="accent1"/>
+          </a:lnRef>
+          <a:fillRef idx="3">
+            <a:schemeClr val="accent1"/>
+          </a:fillRef>
+          <a:effectRef idx="2">
+            <a:schemeClr val="accent1"/>
+          </a:effectRef>
+          <a:fontRef idx="minor">
+            <a:schemeClr val="lt1"/>
+          </a:fontRef>
+        </p:style>
+        <p:txBody>
+          <a:bodyPr rtlCol="0" anchor="ctr"/>
+          <a:lstStyle/>
+          <a:p>
+            <a:pPr algn="ctr"/>
+          </a:p>
+        </p:txBody>
+      </p:sp>
+      <p:sp>
+        <p:nvSpPr>
+          <p:cNvPr id="14" name="DSFR-callout-titre"/>
+          <p:cNvSpPr txBox="1"/>
+          <p:nvPr/>
+        </p:nvSpPr>
+        <p:spPr>
+          <a:xfrm>
+            <a:off x="704088" y="4709160"/>
+            <a:ext cx="10908792" cy="365760"/>
+          </a:xfrm>
+          <a:prstGeom prst="rect">
+            <a:avLst/>
+          </a:prstGeom>
+          <a:noFill/>
+        </p:spPr>
+        <p:txBody>
+          <a:bodyPr wrap="square" anchor="t" lIns="73152" rIns="73152">
+            <a:spAutoFit/>
+          </a:bodyPr>
+          <a:lstStyle/>
+          <a:p>
+            <a:pPr algn="l">
+              <a:lnSpc>
+                <a:spcPct val="125000"/>
+              </a:lnSpc>
+            </a:pPr>
+            <a:r>
+              <a:rPr sz="1400" b="1" i="0" lang="fr-FR">
+                <a:solidFill>
+                  <a:srgbClr val="000091"/>
+                </a:solidFill>
+                <a:latin typeface="Marianne"/>
+              </a:rPr>
+              <a:t>Point d’attention</a:t>
+            </a:r>
+          </a:p>
+        </p:txBody>
+      </p:sp>
+      <p:sp>
+        <p:nvSpPr>
+          <p:cNvPr id="15" name="DSFR-callout-body"/>
+          <p:cNvSpPr txBox="1"/>
+          <p:nvPr/>
+        </p:nvSpPr>
+        <p:spPr>
+          <a:xfrm>
+            <a:off x="704088" y="5120640"/>
+            <a:ext cx="10908792" cy="777240"/>
+          </a:xfrm>
+          <a:prstGeom prst="rect">
+            <a:avLst/>
+          </a:prstGeom>
+          <a:noFill/>
+        </p:spPr>
+        <p:txBody>
+          <a:bodyPr wrap="square" lIns="73152" rIns="73152">
+            <a:spAutoFit/>
+          </a:bodyPr>
+          <a:lstStyle/>
+          <a:p>
+            <a:pPr algn="l">
+              <a:lnSpc>
+                <a:spcPct val="125000"/>
+              </a:lnSpc>
+            </a:pPr>
+            <a:r>
+              <a:rPr sz="1200" lang="fr-FR">
+                <a:solidFill>
+                  <a:srgbClr val="161616"/>
+                </a:solidFill>
+                <a:latin typeface="Marianne"/>
+              </a:rPr>
+              <a:t>• Ces 4 principes structurent l’ensemble des 50 critères RGAA 4.1.2.</a:t>
+            </a:r>
+          </a:p>
+          <a:p>
+            <a:pPr algn="l">
+              <a:lnSpc>
+                <a:spcPct val="125000"/>
+              </a:lnSpc>
+            </a:pPr>
+            <a:r>
+              <a:rPr sz="1200" lang="fr-FR">
+                <a:solidFill>
+                  <a:srgbClr val="161616"/>
+                </a:solidFill>
+                <a:latin typeface="Marianne"/>
+              </a:rPr>
+              <a:t>• Les retenir facilite la lecture du référentiel.</a:t>
+            </a:r>
+          </a:p>
+        </p:txBody>
+      </p:sp>
+      <p:sp>
+        <p:nvSpPr>
+          <p:cNvPr id="5" name="Espace réservé de la date 4"/>
+          <p:cNvSpPr>
+            <a:spLocks noGrp="1"/>
+          </p:cNvSpPr>
+          <p:nvPr>
+            <p:ph type="dt" sz="half" idx="10"/>
+          </p:nvPr>
+        </p:nvSpPr>
+        <p:spPr bwMode="gray"/>
+        <p:txBody>
+          <a:bodyPr wrap="square" anchor="t" lIns="73152" rIns="73152"/>
+          <a:lstStyle/>
+          <a:p>
+            <a:pPr algn="l">
+              <a:lnSpc>
+                <a:spcPct val="125000"/>
+              </a:lnSpc>
+            </a:pPr>
+            <a:r>
+              <a:rPr sz="1000" b="0" i="0" lang="fr-FR">
+                <a:solidFill>
+                  <a:srgbClr val="666666"/>
+                </a:solidFill>
+                <a:latin typeface="Marianne"/>
+              </a:rPr>
+              <a:t>4 juin 2026</a:t>
+            </a:r>
+            <a:endParaRPr lang="fr-FR" cap="all" dirty="0"/>
+          </a:p>
+        </p:txBody>
+      </p:sp>
+      <p:sp>
+        <p:nvSpPr>
+          <p:cNvPr id="6" name="Espace réservé du pied de page 5"/>
+          <p:cNvSpPr>
+            <a:spLocks noGrp="1"/>
+          </p:cNvSpPr>
+          <p:nvPr>
+            <p:ph type="ftr" sz="quarter" idx="11"/>
+          </p:nvPr>
+        </p:nvSpPr>
+        <p:spPr bwMode="gray">
+          <a:xfrm>
+            <a:off x="479998" y="6377984"/>
+            <a:ext cx="7871980" cy="479998"/>
+          </a:xfrm>
+        </p:spPr>
+        <p:txBody>
+          <a:bodyPr wrap="square" anchor="t" lIns="73152" rIns="73152"/>
+          <a:lstStyle/>
+          <a:p>
+            <a:pPr algn="l">
+              <a:lnSpc>
+                <a:spcPct val="125000"/>
+              </a:lnSpc>
+            </a:pPr>
+            <a:r>
+              <a:rPr sz="1000" b="0" i="0" lang="fr-FR">
+                <a:solidFill>
+                  <a:srgbClr val="666666"/>
+                </a:solidFill>
+                <a:latin typeface="Marianne"/>
+              </a:rPr>
+              <a:t>Formation 102638 / Démo composants</a:t>
+            </a:r>
+          </a:p>
+        </p:txBody>
+      </p:sp>
+      <p:sp>
+        <p:nvSpPr>
+          <p:cNvPr id="8" name="DSFR-accent-decoratif" descr=""/>
+          <p:cNvSpPr/>
+          <p:nvPr/>
+        </p:nvSpPr>
+        <p:spPr>
+          <a:xfrm>
+            <a:off x="475488" y="2240280"/>
+            <a:ext cx="91440" cy="2103120"/>
+          </a:xfrm>
+          <a:prstGeom prst="rect">
+            <a:avLst/>
+          </a:prstGeom>
+          <a:solidFill>
+            <a:srgbClr val="000091"/>
+          </a:solidFill>
+          <a:ln>
+            <a:noFill/>
+          </a:ln>
+          <a:effectLst/>
+        </p:spPr>
+        <p:style>
+          <a:lnRef idx="1">
+            <a:schemeClr val="accent1"/>
+          </a:lnRef>
+          <a:fillRef idx="3">
+            <a:schemeClr val="accent1"/>
+          </a:fillRef>
+          <a:effectRef idx="2">
+            <a:schemeClr val="accent1"/>
+          </a:effectRef>
+          <a:fontRef idx="minor">
+            <a:schemeClr val="lt1"/>
+          </a:fontRef>
+        </p:style>
+        <p:txBody>
+          <a:bodyPr rtlCol="0" anchor="ctr"/>
+          <a:lstStyle/>
+          <a:p>
+            <a:pPr algn="ctr"/>
+          </a:p>
+        </p:txBody>
+      </p:sp>
+      <p:sp>
+        <p:nvSpPr>
+          <p:cNvPr id="12" name="DSFR-accent-decoratif" descr=""/>
+          <p:cNvSpPr/>
+          <p:nvPr/>
+        </p:nvSpPr>
+        <p:spPr>
+          <a:xfrm>
+            <a:off x="475488" y="4617720"/>
+            <a:ext cx="73152" cy="1371600"/>
+          </a:xfrm>
+          <a:prstGeom prst="rect">
+            <a:avLst/>
+          </a:prstGeom>
+          <a:solidFill>
+            <a:srgbClr val="000091"/>
+          </a:solidFill>
+          <a:ln>
+            <a:noFill/>
+          </a:ln>
+          <a:effectLst/>
+        </p:spPr>
+        <p:style>
+          <a:lnRef idx="1">
+            <a:schemeClr val="accent1"/>
+          </a:lnRef>
+          <a:fillRef idx="3">
+            <a:schemeClr val="accent1"/>
+          </a:fillRef>
+          <a:effectRef idx="2">
+            <a:schemeClr val="accent1"/>
+          </a:effectRef>
+          <a:fontRef idx="minor">
+            <a:schemeClr val="lt1"/>
+          </a:fontRef>
+        </p:style>
+        <p:txBody>
+          <a:bodyPr rtlCol="0" anchor="ctr"/>
+          <a:lstStyle/>
+          <a:p>
+            <a:pPr algn="ctr"/>
+          </a:p>
+        </p:txBody>
+      </p:sp>
+    </p:spTree>
+  </p:cSld>
+  <p:clrMapOvr>
+    <a:masterClrMapping/>
+  </p:clrMapOvr>
+</p:sld>
+</file>
+
+<file path=ppt/slides/slide23.xml><?xml version="1.0" encoding="utf-8"?>
+<p:sld xmlns:a="http://schemas.openxmlformats.org/drawingml/2006/main" xmlns:p="http://schemas.openxmlformats.org/presentationml/2006/main" xmlns:r="http://schemas.openxmlformats.org/officeDocument/2006/relationships">
+  <p:cSld>
+    <p:spTree>
+      <p:nvGrpSpPr>
+        <p:cNvPr id="1" name=""/>
+        <p:cNvGrpSpPr/>
+        <p:nvPr/>
+      </p:nvGrpSpPr>
+      <p:grpSpPr/>
+      <p:sp>
+        <p:nvSpPr>
+          <p:cNvPr id="2" name="Title 1"/>
+          <p:cNvSpPr>
+            <a:spLocks noGrp="1"/>
+          </p:cNvSpPr>
+          <p:nvPr>
+            <p:ph type="title"/>
+          </p:nvPr>
+        </p:nvSpPr>
+        <p:spPr/>
+        <p:txBody>
+          <a:bodyPr wrap="square" anchor="t" lIns="73152" rIns="73152"/>
+          <a:lstStyle/>
+          <a:p>
+            <a:pPr algn="l">
+              <a:lnSpc>
+                <a:spcPct val="125000"/>
+              </a:lnSpc>
+            </a:pPr>
+            <a:r>
+              <a:rPr sz="2800" b="1" i="0" lang="fr-FR">
+                <a:solidFill>
+                  <a:srgbClr val="000091"/>
+                </a:solidFill>
+                <a:latin typeface="Marianne"/>
+              </a:rPr>
+              <a:t>Deux cartes sans numéro + callout</a:t>
+            </a:r>
+          </a:p>
+        </p:txBody>
+      </p:sp>
+      <p:sp>
+        <p:nvSpPr>
+          <p:cNvPr id="4" name="Text Placeholder 3"/>
+          <p:cNvSpPr>
+            <a:spLocks noGrp="1"/>
+          </p:cNvSpPr>
+          <p:nvPr>
+            <p:ph type="body" idx="13" sz="quarter"/>
+          </p:nvPr>
+        </p:nvSpPr>
+        <p:spPr/>
+        <p:txBody>
+          <a:bodyPr wrap="square" anchor="t" lIns="73152" rIns="73152"/>
+          <a:lstStyle/>
+          <a:p>
+            <a:pPr algn="r">
+              <a:lnSpc>
+                <a:spcPct val="125000"/>
+              </a:lnSpc>
+            </a:pPr>
+            <a:r>
+              <a:rPr sz="1100" b="0" i="0" lang="fr-FR">
+                <a:solidFill>
+                  <a:srgbClr val="666666"/>
+                </a:solidFill>
+                <a:latin typeface="Marianne"/>
+              </a:rPr>
+              <a:t>Démo | 2 cartes sans n° + callout</a:t>
+            </a:r>
+          </a:p>
+        </p:txBody>
+      </p:sp>
+      <p:sp>
+        <p:nvSpPr>
+          <p:cNvPr id="7" name="Espace réservé du numéro de diapositive 6"/>
+          <p:cNvSpPr>
+            <a:spLocks noGrp="1"/>
+          </p:cNvSpPr>
+          <p:nvPr>
+            <p:ph type="sldNum" sz="quarter" idx="12"/>
+          </p:nvPr>
+        </p:nvSpPr>
+        <p:spPr bwMode="gray"/>
+        <p:txBody>
+          <a:bodyPr wrap="square" anchor="t" lIns="73152" rIns="73152"/>
+          <a:lstStyle/>
+          <a:p>
+            <a:pPr algn="l">
+              <a:lnSpc>
+                <a:spcPct val="125000"/>
+              </a:lnSpc>
+            </a:pPr>
+            <a:r>
+              <a:rPr sz="1000" b="0" i="0" lang="fr-FR">
+                <a:solidFill>
+                  <a:srgbClr val="666666"/>
+                </a:solidFill>
+                <a:latin typeface="Marianne"/>
+              </a:rPr>
+              <a:t>23</a:t>
+            </a:r>
+            <a:endParaRPr lang="fr-FR" dirty="0"/>
+          </a:p>
+        </p:txBody>
+      </p:sp>
+      <p:sp>
+        <p:nvSpPr>
+          <p:cNvPr id="9" name="DSFR-box"/>
+          <p:cNvSpPr/>
+          <p:nvPr/>
+        </p:nvSpPr>
+        <p:spPr>
+          <a:xfrm>
+            <a:off x="566928" y="2240280"/>
+            <a:ext cx="5372100" cy="2103120"/>
+          </a:xfrm>
+          <a:prstGeom prst="rect">
+            <a:avLst/>
+          </a:prstGeom>
+          <a:solidFill>
+            <a:srgbClr val="F6F6F6"/>
+          </a:solidFill>
+          <a:ln>
+            <a:noFill/>
+          </a:ln>
+          <a:effectLst/>
+        </p:spPr>
+        <p:style>
+          <a:lnRef idx="1">
+            <a:schemeClr val="accent1"/>
+          </a:lnRef>
+          <a:fillRef idx="3">
+            <a:schemeClr val="accent1"/>
+          </a:fillRef>
+          <a:effectRef idx="2">
+            <a:schemeClr val="accent1"/>
+          </a:effectRef>
+          <a:fontRef idx="minor">
+            <a:schemeClr val="lt1"/>
+          </a:fontRef>
+        </p:style>
+        <p:txBody>
+          <a:bodyPr rtlCol="0" anchor="ctr"/>
+          <a:lstStyle/>
+          <a:p>
+            <a:pPr algn="ctr"/>
+          </a:p>
+        </p:txBody>
+      </p:sp>
+      <p:sp>
+        <p:nvSpPr>
+          <p:cNvPr id="10" name="DSFR-card-titre"/>
+          <p:cNvSpPr txBox="1"/>
+          <p:nvPr/>
+        </p:nvSpPr>
+        <p:spPr>
+          <a:xfrm>
+            <a:off x="704088" y="2377440"/>
+            <a:ext cx="5097779" cy="411480"/>
+          </a:xfrm>
+          <a:prstGeom prst="rect">
+            <a:avLst/>
+          </a:prstGeom>
+          <a:noFill/>
+        </p:spPr>
+        <p:txBody>
+          <a:bodyPr wrap="square" anchor="t" lIns="73152" rIns="73152">
+            <a:spAutoFit/>
+          </a:bodyPr>
+          <a:lstStyle/>
+          <a:p>
+            <a:pPr algn="l">
+              <a:lnSpc>
+                <a:spcPct val="125000"/>
+              </a:lnSpc>
+            </a:pPr>
+            <a:r>
+              <a:rPr sz="1400" b="1" i="0" lang="fr-FR">
+                <a:solidFill>
+                  <a:srgbClr val="000091"/>
+                </a:solidFill>
+                <a:latin typeface="Marianne"/>
+              </a:rPr>
+              <a:t>Audit automatique</a:t>
+            </a:r>
+          </a:p>
+        </p:txBody>
+      </p:sp>
+      <p:sp>
+        <p:nvSpPr>
+          <p:cNvPr id="11" name="DSFR-card-contenu"/>
+          <p:cNvSpPr txBox="1"/>
+          <p:nvPr/>
+        </p:nvSpPr>
+        <p:spPr>
+          <a:xfrm>
+            <a:off x="704088" y="2834640"/>
+            <a:ext cx="5097779" cy="1371600"/>
+          </a:xfrm>
+          <a:prstGeom prst="rect">
+            <a:avLst/>
+          </a:prstGeom>
+          <a:noFill/>
+        </p:spPr>
+        <p:txBody>
+          <a:bodyPr wrap="square" lIns="73152" rIns="73152">
+            <a:spAutoFit/>
+          </a:bodyPr>
+          <a:lstStyle/>
+          <a:p>
+            <a:pPr algn="l">
+              <a:lnSpc>
+                <a:spcPct val="125000"/>
+              </a:lnSpc>
+            </a:pPr>
+            <a:r>
+              <a:rPr sz="1100" lang="fr-FR">
+                <a:solidFill>
+                  <a:srgbClr val="161616"/>
+                </a:solidFill>
+                <a:latin typeface="Marianne"/>
+              </a:rPr>
+              <a:t>• Rapide (quelques minutes)</a:t>
+            </a:r>
+          </a:p>
+          <a:p>
+            <a:pPr algn="l">
+              <a:lnSpc>
+                <a:spcPct val="125000"/>
+              </a:lnSpc>
+            </a:pPr>
+            <a:r>
+              <a:rPr sz="1100" lang="fr-FR">
+                <a:solidFill>
+                  <a:srgbClr val="161616"/>
+                </a:solidFill>
+                <a:latin typeface="Marianne"/>
+              </a:rPr>
+              <a:t>• Couvre 30 % des critères</a:t>
+            </a:r>
+          </a:p>
+        </p:txBody>
+      </p:sp>
+      <p:sp>
+        <p:nvSpPr>
+          <p:cNvPr id="13" name="DSFR-box"/>
+          <p:cNvSpPr/>
+          <p:nvPr/>
+        </p:nvSpPr>
+        <p:spPr>
+          <a:xfrm>
+            <a:off x="6332219" y="2240280"/>
+            <a:ext cx="5372100" cy="2103120"/>
+          </a:xfrm>
+          <a:prstGeom prst="rect">
+            <a:avLst/>
+          </a:prstGeom>
+          <a:solidFill>
+            <a:srgbClr val="F6F6F6"/>
+          </a:solidFill>
+          <a:ln>
+            <a:noFill/>
+          </a:ln>
+          <a:effectLst/>
+        </p:spPr>
+        <p:style>
+          <a:lnRef idx="1">
+            <a:schemeClr val="accent1"/>
+          </a:lnRef>
+          <a:fillRef idx="3">
+            <a:schemeClr val="accent1"/>
+          </a:fillRef>
+          <a:effectRef idx="2">
+            <a:schemeClr val="accent1"/>
+          </a:effectRef>
+          <a:fontRef idx="minor">
+            <a:schemeClr val="lt1"/>
+          </a:fontRef>
+        </p:style>
+        <p:txBody>
+          <a:bodyPr rtlCol="0" anchor="ctr"/>
+          <a:lstStyle/>
+          <a:p>
+            <a:pPr algn="ctr"/>
+          </a:p>
+        </p:txBody>
+      </p:sp>
+      <p:sp>
+        <p:nvSpPr>
+          <p:cNvPr id="14" name="DSFR-card-titre"/>
+          <p:cNvSpPr txBox="1"/>
+          <p:nvPr/>
+        </p:nvSpPr>
+        <p:spPr>
+          <a:xfrm>
+            <a:off x="6469379" y="2377440"/>
+            <a:ext cx="5097779" cy="411480"/>
+          </a:xfrm>
+          <a:prstGeom prst="rect">
+            <a:avLst/>
+          </a:prstGeom>
+          <a:noFill/>
+        </p:spPr>
+        <p:txBody>
+          <a:bodyPr wrap="square" anchor="t" lIns="73152" rIns="73152">
+            <a:spAutoFit/>
+          </a:bodyPr>
+          <a:lstStyle/>
+          <a:p>
+            <a:pPr algn="l">
+              <a:lnSpc>
+                <a:spcPct val="125000"/>
+              </a:lnSpc>
+            </a:pPr>
+            <a:r>
+              <a:rPr sz="1400" b="1" i="0" lang="fr-FR">
+                <a:solidFill>
+                  <a:srgbClr val="000091"/>
+                </a:solidFill>
+                <a:latin typeface="Marianne"/>
+              </a:rPr>
+              <a:t>Audit manuel</a:t>
+            </a:r>
+          </a:p>
+        </p:txBody>
+      </p:sp>
+      <p:sp>
+        <p:nvSpPr>
+          <p:cNvPr id="15" name="DSFR-card-contenu"/>
+          <p:cNvSpPr txBox="1"/>
+          <p:nvPr/>
+        </p:nvSpPr>
+        <p:spPr>
+          <a:xfrm>
+            <a:off x="6469379" y="2834640"/>
+            <a:ext cx="5097779" cy="1371600"/>
+          </a:xfrm>
+          <a:prstGeom prst="rect">
+            <a:avLst/>
+          </a:prstGeom>
+          <a:noFill/>
+        </p:spPr>
+        <p:txBody>
+          <a:bodyPr wrap="square" lIns="73152" rIns="73152">
+            <a:spAutoFit/>
+          </a:bodyPr>
+          <a:lstStyle/>
+          <a:p>
+            <a:pPr algn="l">
+              <a:lnSpc>
+                <a:spcPct val="125000"/>
+              </a:lnSpc>
+            </a:pPr>
+            <a:r>
+              <a:rPr sz="1100" lang="fr-FR">
+                <a:solidFill>
+                  <a:srgbClr val="161616"/>
+                </a:solidFill>
+                <a:latin typeface="Marianne"/>
+              </a:rPr>
+              <a:t>• Long (journées à semaines)</a:t>
+            </a:r>
+          </a:p>
+          <a:p>
+            <a:pPr algn="l">
+              <a:lnSpc>
+                <a:spcPct val="125000"/>
+              </a:lnSpc>
+            </a:pPr>
+            <a:r>
+              <a:rPr sz="1100" lang="fr-FR">
+                <a:solidFill>
+                  <a:srgbClr val="161616"/>
+                </a:solidFill>
+                <a:latin typeface="Marianne"/>
+              </a:rPr>
+              <a:t>• Couvre 100 % des critères</a:t>
+            </a:r>
+          </a:p>
+        </p:txBody>
+      </p:sp>
+      <p:sp>
+        <p:nvSpPr>
+          <p:cNvPr id="17" name="DSFR-box"/>
+          <p:cNvSpPr/>
+          <p:nvPr/>
+        </p:nvSpPr>
+        <p:spPr>
+          <a:xfrm>
+            <a:off x="548640" y="4617720"/>
+            <a:ext cx="11155680" cy="1371600"/>
+          </a:xfrm>
+          <a:prstGeom prst="rect">
+            <a:avLst/>
+          </a:prstGeom>
+          <a:solidFill>
+            <a:srgbClr val="F5F5FE"/>
+          </a:solidFill>
+          <a:ln>
+            <a:noFill/>
+          </a:ln>
+          <a:effectLst/>
+        </p:spPr>
+        <p:style>
+          <a:lnRef idx="1">
+            <a:schemeClr val="accent1"/>
+          </a:lnRef>
+          <a:fillRef idx="3">
+            <a:schemeClr val="accent1"/>
+          </a:fillRef>
+          <a:effectRef idx="2">
+            <a:schemeClr val="accent1"/>
+          </a:effectRef>
+          <a:fontRef idx="minor">
+            <a:schemeClr val="lt1"/>
+          </a:fontRef>
+        </p:style>
+        <p:txBody>
+          <a:bodyPr rtlCol="0" anchor="ctr"/>
+          <a:lstStyle/>
+          <a:p>
+            <a:pPr algn="ctr"/>
+          </a:p>
+        </p:txBody>
+      </p:sp>
+      <p:sp>
+        <p:nvSpPr>
+          <p:cNvPr id="18" name="DSFR-callout-titre"/>
+          <p:cNvSpPr txBox="1"/>
+          <p:nvPr/>
+        </p:nvSpPr>
+        <p:spPr>
+          <a:xfrm>
+            <a:off x="704088" y="4709159"/>
+            <a:ext cx="10908792" cy="365760"/>
+          </a:xfrm>
+          <a:prstGeom prst="rect">
+            <a:avLst/>
+          </a:prstGeom>
+          <a:noFill/>
+        </p:spPr>
+        <p:txBody>
+          <a:bodyPr wrap="square" anchor="t" lIns="73152" rIns="73152">
+            <a:spAutoFit/>
+          </a:bodyPr>
+          <a:lstStyle/>
+          <a:p>
+            <a:pPr algn="l">
+              <a:lnSpc>
+                <a:spcPct val="125000"/>
+              </a:lnSpc>
+            </a:pPr>
+            <a:r>
+              <a:rPr sz="1400" b="1" i="0" lang="fr-FR">
+                <a:solidFill>
+                  <a:srgbClr val="000091"/>
+                </a:solidFill>
+                <a:latin typeface="Marianne"/>
+              </a:rPr>
+              <a:t>À retenir</a:t>
+            </a:r>
+          </a:p>
+        </p:txBody>
+      </p:sp>
+      <p:sp>
+        <p:nvSpPr>
+          <p:cNvPr id="19" name="DSFR-callout-body"/>
+          <p:cNvSpPr txBox="1"/>
+          <p:nvPr/>
+        </p:nvSpPr>
+        <p:spPr>
+          <a:xfrm>
+            <a:off x="704088" y="5120640"/>
+            <a:ext cx="10908792" cy="777240"/>
+          </a:xfrm>
+          <a:prstGeom prst="rect">
+            <a:avLst/>
+          </a:prstGeom>
+          <a:noFill/>
+        </p:spPr>
+        <p:txBody>
+          <a:bodyPr wrap="square" lIns="73152" rIns="73152">
+            <a:spAutoFit/>
+          </a:bodyPr>
+          <a:lstStyle/>
+          <a:p>
+            <a:pPr algn="l">
+              <a:lnSpc>
+                <a:spcPct val="125000"/>
+              </a:lnSpc>
+            </a:pPr>
+            <a:r>
+              <a:rPr sz="1200" lang="fr-FR">
+                <a:solidFill>
+                  <a:srgbClr val="161616"/>
+                </a:solidFill>
+                <a:latin typeface="Marianne"/>
+              </a:rPr>
+              <a:t>• Les deux approches sont complémentaires :</a:t>
+            </a:r>
+          </a:p>
+          <a:p>
+            <a:pPr algn="l">
+              <a:lnSpc>
+                <a:spcPct val="125000"/>
+              </a:lnSpc>
+            </a:pPr>
+            <a:r>
+              <a:rPr sz="1200" lang="fr-FR">
+                <a:solidFill>
+                  <a:srgbClr val="161616"/>
+                </a:solidFill>
+                <a:latin typeface="Marianne"/>
+              </a:rPr>
+              <a:t>• automatique pour détecter, manuel pour qualifier.</a:t>
+            </a:r>
+          </a:p>
+        </p:txBody>
+      </p:sp>
+      <p:sp>
+        <p:nvSpPr>
+          <p:cNvPr id="5" name="Espace réservé de la date 4"/>
+          <p:cNvSpPr>
+            <a:spLocks noGrp="1"/>
+          </p:cNvSpPr>
+          <p:nvPr>
+            <p:ph type="dt" sz="half" idx="10"/>
+          </p:nvPr>
+        </p:nvSpPr>
+        <p:spPr bwMode="gray"/>
+        <p:txBody>
+          <a:bodyPr wrap="square" anchor="t" lIns="73152" rIns="73152"/>
+          <a:lstStyle/>
+          <a:p>
+            <a:pPr algn="l">
+              <a:lnSpc>
+                <a:spcPct val="125000"/>
+              </a:lnSpc>
+            </a:pPr>
+            <a:r>
+              <a:rPr sz="1000" b="0" i="0" lang="fr-FR">
+                <a:solidFill>
+                  <a:srgbClr val="666666"/>
+                </a:solidFill>
+                <a:latin typeface="Marianne"/>
+              </a:rPr>
+              <a:t>4 juin 2026</a:t>
+            </a:r>
+            <a:endParaRPr lang="fr-FR" cap="all" dirty="0"/>
+          </a:p>
+        </p:txBody>
+      </p:sp>
+      <p:sp>
+        <p:nvSpPr>
+          <p:cNvPr id="6" name="Espace réservé du pied de page 5"/>
+          <p:cNvSpPr>
+            <a:spLocks noGrp="1"/>
+          </p:cNvSpPr>
+          <p:nvPr>
+            <p:ph type="ftr" sz="quarter" idx="11"/>
+          </p:nvPr>
+        </p:nvSpPr>
+        <p:spPr bwMode="gray">
+          <a:xfrm>
+            <a:off x="479998" y="6377984"/>
+            <a:ext cx="7871980" cy="479998"/>
+          </a:xfrm>
+        </p:spPr>
+        <p:txBody>
+          <a:bodyPr wrap="square" anchor="t" lIns="73152" rIns="73152"/>
+          <a:lstStyle/>
+          <a:p>
+            <a:pPr algn="l">
+              <a:lnSpc>
+                <a:spcPct val="125000"/>
+              </a:lnSpc>
+            </a:pPr>
+            <a:r>
+              <a:rPr sz="1000" b="0" i="0" lang="fr-FR">
+                <a:solidFill>
+                  <a:srgbClr val="666666"/>
+                </a:solidFill>
+                <a:latin typeface="Marianne"/>
+              </a:rPr>
+              <a:t>Formation 102638 / Démo composants</a:t>
+            </a:r>
+          </a:p>
+        </p:txBody>
+      </p:sp>
+      <p:sp>
+        <p:nvSpPr>
+          <p:cNvPr id="8" name="DSFR-accent-decoratif" descr=""/>
+          <p:cNvSpPr/>
+          <p:nvPr/>
+        </p:nvSpPr>
+        <p:spPr>
+          <a:xfrm>
+            <a:off x="475488" y="2240280"/>
+            <a:ext cx="91440" cy="2103120"/>
+          </a:xfrm>
+          <a:prstGeom prst="rect">
+            <a:avLst/>
+          </a:prstGeom>
+          <a:solidFill>
+            <a:srgbClr val="000091"/>
+          </a:solidFill>
+          <a:ln>
+            <a:noFill/>
+          </a:ln>
+          <a:effectLst/>
+        </p:spPr>
+        <p:style>
+          <a:lnRef idx="1">
+            <a:schemeClr val="accent1"/>
+          </a:lnRef>
+          <a:fillRef idx="3">
+            <a:schemeClr val="accent1"/>
+          </a:fillRef>
+          <a:effectRef idx="2">
+            <a:schemeClr val="accent1"/>
+          </a:effectRef>
+          <a:fontRef idx="minor">
+            <a:schemeClr val="lt1"/>
+          </a:fontRef>
+        </p:style>
+        <p:txBody>
+          <a:bodyPr rtlCol="0" anchor="ctr"/>
+          <a:lstStyle/>
+          <a:p>
+            <a:pPr algn="ctr"/>
+          </a:p>
+        </p:txBody>
+      </p:sp>
+      <p:sp>
+        <p:nvSpPr>
+          <p:cNvPr id="12" name="DSFR-accent-decoratif" descr=""/>
+          <p:cNvSpPr/>
+          <p:nvPr/>
+        </p:nvSpPr>
+        <p:spPr>
+          <a:xfrm>
+            <a:off x="6240779" y="2240280"/>
+            <a:ext cx="91440" cy="2103120"/>
+          </a:xfrm>
+          <a:prstGeom prst="rect">
+            <a:avLst/>
+          </a:prstGeom>
+          <a:solidFill>
+            <a:srgbClr val="000091"/>
+          </a:solidFill>
+          <a:ln>
+            <a:noFill/>
+          </a:ln>
+          <a:effectLst/>
+        </p:spPr>
+        <p:style>
+          <a:lnRef idx="1">
+            <a:schemeClr val="accent1"/>
+          </a:lnRef>
+          <a:fillRef idx="3">
+            <a:schemeClr val="accent1"/>
+          </a:fillRef>
+          <a:effectRef idx="2">
+            <a:schemeClr val="accent1"/>
+          </a:effectRef>
+          <a:fontRef idx="minor">
+            <a:schemeClr val="lt1"/>
+          </a:fontRef>
+        </p:style>
+        <p:txBody>
+          <a:bodyPr rtlCol="0" anchor="ctr"/>
+          <a:lstStyle/>
+          <a:p>
+            <a:pPr algn="ctr"/>
+          </a:p>
+        </p:txBody>
+      </p:sp>
+      <p:sp>
+        <p:nvSpPr>
+          <p:cNvPr id="16" name="DSFR-accent-decoratif" descr=""/>
+          <p:cNvSpPr/>
+          <p:nvPr/>
+        </p:nvSpPr>
+        <p:spPr>
+          <a:xfrm>
+            <a:off x="475488" y="4617720"/>
+            <a:ext cx="73152" cy="1371600"/>
+          </a:xfrm>
+          <a:prstGeom prst="rect">
+            <a:avLst/>
+          </a:prstGeom>
+          <a:solidFill>
+            <a:srgbClr val="000091"/>
+          </a:solidFill>
+          <a:ln>
+            <a:noFill/>
+          </a:ln>
+          <a:effectLst/>
+        </p:spPr>
+        <p:style>
+          <a:lnRef idx="1">
+            <a:schemeClr val="accent1"/>
+          </a:lnRef>
+          <a:fillRef idx="3">
+            <a:schemeClr val="accent1"/>
+          </a:fillRef>
+          <a:effectRef idx="2">
+            <a:schemeClr val="accent1"/>
+          </a:effectRef>
+          <a:fontRef idx="minor">
+            <a:schemeClr val="lt1"/>
+          </a:fontRef>
+        </p:style>
+        <p:txBody>
+          <a:bodyPr rtlCol="0" anchor="ctr"/>
+          <a:lstStyle/>
+          <a:p>
+            <a:pPr algn="ctr"/>
+          </a:p>
+        </p:txBody>
+      </p:sp>
+    </p:spTree>
+  </p:cSld>
+  <p:clrMapOvr>
+    <a:masterClrMapping/>
+  </p:clrMapOvr>
+</p:sld>
+</file>
+
+<file path=ppt/slides/slide24.xml><?xml version="1.0" encoding="utf-8"?>
+<p:sld xmlns:a="http://schemas.openxmlformats.org/drawingml/2006/main" xmlns:p="http://schemas.openxmlformats.org/presentationml/2006/main" xmlns:r="http://schemas.openxmlformats.org/officeDocument/2006/relationships">
+  <p:cSld>
+    <p:spTree>
+      <p:nvGrpSpPr>
+        <p:cNvPr id="1" name=""/>
+        <p:cNvGrpSpPr/>
+        <p:nvPr/>
+      </p:nvGrpSpPr>
+      <p:grpSpPr/>
+      <p:sp>
+        <p:nvSpPr>
+          <p:cNvPr id="2" name="Title 1"/>
+          <p:cNvSpPr>
+            <a:spLocks noGrp="1"/>
+          </p:cNvSpPr>
+          <p:nvPr>
+            <p:ph type="title"/>
+          </p:nvPr>
+        </p:nvSpPr>
+        <p:spPr/>
+        <p:txBody>
+          <a:bodyPr wrap="square" anchor="t" lIns="73152" rIns="73152"/>
+          <a:lstStyle/>
+          <a:p>
+            <a:pPr algn="l">
+              <a:lnSpc>
+                <a:spcPct val="125000"/>
+              </a:lnSpc>
+            </a:pPr>
+            <a:r>
+              <a:rPr sz="2800" b="1" i="0" lang="fr-FR">
+                <a:solidFill>
+                  <a:srgbClr val="000091"/>
+                </a:solidFill>
+                <a:latin typeface="Marianne"/>
+              </a:rPr>
+              <a:t>Trois cartes sans numéro + callout</a:t>
+            </a:r>
+          </a:p>
+        </p:txBody>
+      </p:sp>
+      <p:sp>
+        <p:nvSpPr>
+          <p:cNvPr id="4" name="Text Placeholder 3"/>
+          <p:cNvSpPr>
+            <a:spLocks noGrp="1"/>
+          </p:cNvSpPr>
+          <p:nvPr>
+            <p:ph type="body" idx="13" sz="quarter"/>
+          </p:nvPr>
+        </p:nvSpPr>
+        <p:spPr/>
+        <p:txBody>
+          <a:bodyPr wrap="square" anchor="t" lIns="73152" rIns="73152"/>
+          <a:lstStyle/>
+          <a:p>
+            <a:pPr algn="r">
+              <a:lnSpc>
+                <a:spcPct val="125000"/>
+              </a:lnSpc>
+            </a:pPr>
+            <a:r>
+              <a:rPr sz="1100" b="0" i="0" lang="fr-FR">
+                <a:solidFill>
+                  <a:srgbClr val="666666"/>
+                </a:solidFill>
+                <a:latin typeface="Marianne"/>
+              </a:rPr>
+              <a:t>Démo | 3 cartes sans n° + callout</a:t>
+            </a:r>
+          </a:p>
+        </p:txBody>
+      </p:sp>
+      <p:sp>
+        <p:nvSpPr>
+          <p:cNvPr id="7" name="Espace réservé du numéro de diapositive 6"/>
+          <p:cNvSpPr>
+            <a:spLocks noGrp="1"/>
+          </p:cNvSpPr>
+          <p:nvPr>
+            <p:ph type="sldNum" sz="quarter" idx="12"/>
+          </p:nvPr>
+        </p:nvSpPr>
+        <p:spPr bwMode="gray"/>
+        <p:txBody>
+          <a:bodyPr wrap="square" anchor="t" lIns="73152" rIns="73152"/>
+          <a:lstStyle/>
+          <a:p>
+            <a:pPr algn="l">
+              <a:lnSpc>
+                <a:spcPct val="125000"/>
+              </a:lnSpc>
+            </a:pPr>
+            <a:r>
+              <a:rPr sz="1000" b="0" i="0" lang="fr-FR">
+                <a:solidFill>
+                  <a:srgbClr val="666666"/>
+                </a:solidFill>
+                <a:latin typeface="Marianne"/>
+              </a:rPr>
+              <a:t>24</a:t>
+            </a:r>
+            <a:endParaRPr lang="fr-FR" dirty="0"/>
+          </a:p>
+        </p:txBody>
+      </p:sp>
+      <p:sp>
+        <p:nvSpPr>
+          <p:cNvPr id="9" name="DSFR-box"/>
+          <p:cNvSpPr/>
+          <p:nvPr/>
+        </p:nvSpPr>
+        <p:spPr>
+          <a:xfrm>
+            <a:off x="566928" y="2240280"/>
+            <a:ext cx="3450335" cy="2103120"/>
+          </a:xfrm>
+          <a:prstGeom prst="rect">
+            <a:avLst/>
+          </a:prstGeom>
+          <a:solidFill>
+            <a:srgbClr val="F6F6F6"/>
+          </a:solidFill>
+          <a:ln>
+            <a:noFill/>
+          </a:ln>
+          <a:effectLst/>
+        </p:spPr>
+        <p:style>
+          <a:lnRef idx="1">
+            <a:schemeClr val="accent1"/>
+          </a:lnRef>
+          <a:fillRef idx="3">
+            <a:schemeClr val="accent1"/>
+          </a:fillRef>
+          <a:effectRef idx="2">
+            <a:schemeClr val="accent1"/>
+          </a:effectRef>
+          <a:fontRef idx="minor">
+            <a:schemeClr val="lt1"/>
+          </a:fontRef>
+        </p:style>
+        <p:txBody>
+          <a:bodyPr rtlCol="0" anchor="ctr"/>
+          <a:lstStyle/>
+          <a:p>
+            <a:pPr algn="ctr"/>
+          </a:p>
+        </p:txBody>
+      </p:sp>
+      <p:sp>
+        <p:nvSpPr>
+          <p:cNvPr id="10" name="DSFR-card-titre"/>
+          <p:cNvSpPr txBox="1"/>
+          <p:nvPr/>
+        </p:nvSpPr>
+        <p:spPr>
+          <a:xfrm>
+            <a:off x="704088" y="2377440"/>
+            <a:ext cx="3176016" cy="411480"/>
+          </a:xfrm>
+          <a:prstGeom prst="rect">
+            <a:avLst/>
+          </a:prstGeom>
+          <a:noFill/>
+        </p:spPr>
+        <p:txBody>
+          <a:bodyPr wrap="square" anchor="t" lIns="73152" rIns="73152">
+            <a:spAutoFit/>
+          </a:bodyPr>
+          <a:lstStyle/>
+          <a:p>
+            <a:pPr algn="l">
+              <a:lnSpc>
+                <a:spcPct val="125000"/>
+              </a:lnSpc>
+            </a:pPr>
+            <a:r>
+              <a:rPr sz="1400" b="1" i="0" lang="fr-FR">
+                <a:solidFill>
+                  <a:srgbClr val="000091"/>
+                </a:solidFill>
+                <a:latin typeface="Marianne"/>
+              </a:rPr>
+              <a:t>Perceptible</a:t>
+            </a:r>
+          </a:p>
+        </p:txBody>
+      </p:sp>
+      <p:sp>
+        <p:nvSpPr>
+          <p:cNvPr id="11" name="DSFR-card-contenu"/>
+          <p:cNvSpPr txBox="1"/>
+          <p:nvPr/>
+        </p:nvSpPr>
+        <p:spPr>
+          <a:xfrm>
+            <a:off x="704088" y="2834640"/>
+            <a:ext cx="3176016" cy="1371600"/>
+          </a:xfrm>
+          <a:prstGeom prst="rect">
+            <a:avLst/>
+          </a:prstGeom>
+          <a:noFill/>
+        </p:spPr>
+        <p:txBody>
+          <a:bodyPr wrap="square" lIns="73152" rIns="73152">
+            <a:spAutoFit/>
+          </a:bodyPr>
+          <a:lstStyle/>
+          <a:p>
+            <a:pPr algn="l">
+              <a:lnSpc>
+                <a:spcPct val="125000"/>
+              </a:lnSpc>
+            </a:pPr>
+            <a:r>
+              <a:rPr sz="1100" lang="fr-FR">
+                <a:solidFill>
+                  <a:srgbClr val="161616"/>
+                </a:solidFill>
+                <a:latin typeface="Marianne"/>
+              </a:rPr>
+              <a:t>• Alternatives textuelles</a:t>
+            </a:r>
+          </a:p>
+          <a:p>
+            <a:pPr algn="l">
+              <a:lnSpc>
+                <a:spcPct val="125000"/>
+              </a:lnSpc>
+            </a:pPr>
+            <a:r>
+              <a:rPr sz="1100" lang="fr-FR">
+                <a:solidFill>
+                  <a:srgbClr val="161616"/>
+                </a:solidFill>
+                <a:latin typeface="Marianne"/>
+              </a:rPr>
+              <a:t>• Contrastes suffisants</a:t>
+            </a:r>
+          </a:p>
+        </p:txBody>
+      </p:sp>
+      <p:sp>
+        <p:nvSpPr>
+          <p:cNvPr id="13" name="DSFR-box"/>
+          <p:cNvSpPr/>
+          <p:nvPr/>
+        </p:nvSpPr>
+        <p:spPr>
+          <a:xfrm>
+            <a:off x="4410455" y="2240280"/>
+            <a:ext cx="3450335" cy="2103120"/>
+          </a:xfrm>
+          <a:prstGeom prst="rect">
+            <a:avLst/>
+          </a:prstGeom>
+          <a:solidFill>
+            <a:srgbClr val="F6F6F6"/>
+          </a:solidFill>
+          <a:ln>
+            <a:noFill/>
+          </a:ln>
+          <a:effectLst/>
+        </p:spPr>
+        <p:style>
+          <a:lnRef idx="1">
+            <a:schemeClr val="accent1"/>
+          </a:lnRef>
+          <a:fillRef idx="3">
+            <a:schemeClr val="accent1"/>
+          </a:fillRef>
+          <a:effectRef idx="2">
+            <a:schemeClr val="accent1"/>
+          </a:effectRef>
+          <a:fontRef idx="minor">
+            <a:schemeClr val="lt1"/>
+          </a:fontRef>
+        </p:style>
+        <p:txBody>
+          <a:bodyPr rtlCol="0" anchor="ctr"/>
+          <a:lstStyle/>
+          <a:p>
+            <a:pPr algn="ctr"/>
+          </a:p>
+        </p:txBody>
+      </p:sp>
+      <p:sp>
+        <p:nvSpPr>
+          <p:cNvPr id="14" name="DSFR-card-titre"/>
+          <p:cNvSpPr txBox="1"/>
+          <p:nvPr/>
+        </p:nvSpPr>
+        <p:spPr>
+          <a:xfrm>
+            <a:off x="4547615" y="2377440"/>
+            <a:ext cx="3176016" cy="411480"/>
+          </a:xfrm>
+          <a:prstGeom prst="rect">
+            <a:avLst/>
+          </a:prstGeom>
+          <a:noFill/>
+        </p:spPr>
+        <p:txBody>
+          <a:bodyPr wrap="square" anchor="t" lIns="73152" rIns="73152">
+            <a:spAutoFit/>
+          </a:bodyPr>
+          <a:lstStyle/>
+          <a:p>
+            <a:pPr algn="l">
+              <a:lnSpc>
+                <a:spcPct val="125000"/>
+              </a:lnSpc>
+            </a:pPr>
+            <a:r>
+              <a:rPr sz="1400" b="1" i="0" lang="fr-FR">
+                <a:solidFill>
+                  <a:srgbClr val="000091"/>
+                </a:solidFill>
+                <a:latin typeface="Marianne"/>
+              </a:rPr>
+              <a:t>Utilisable</a:t>
+            </a:r>
+          </a:p>
+        </p:txBody>
+      </p:sp>
+      <p:sp>
+        <p:nvSpPr>
+          <p:cNvPr id="15" name="DSFR-card-contenu"/>
+          <p:cNvSpPr txBox="1"/>
+          <p:nvPr/>
+        </p:nvSpPr>
+        <p:spPr>
+          <a:xfrm>
+            <a:off x="4547615" y="2834640"/>
+            <a:ext cx="3176016" cy="1371600"/>
+          </a:xfrm>
+          <a:prstGeom prst="rect">
+            <a:avLst/>
+          </a:prstGeom>
+          <a:noFill/>
+        </p:spPr>
+        <p:txBody>
+          <a:bodyPr wrap="square" lIns="73152" rIns="73152">
+            <a:spAutoFit/>
+          </a:bodyPr>
+          <a:lstStyle/>
+          <a:p>
+            <a:pPr algn="l">
+              <a:lnSpc>
+                <a:spcPct val="125000"/>
+              </a:lnSpc>
+            </a:pPr>
+            <a:r>
+              <a:rPr sz="1100" lang="fr-FR">
+                <a:solidFill>
+                  <a:srgbClr val="161616"/>
+                </a:solidFill>
+                <a:latin typeface="Marianne"/>
+              </a:rPr>
+              <a:t>• Navigation au clavier</a:t>
+            </a:r>
+          </a:p>
+          <a:p>
+            <a:pPr algn="l">
+              <a:lnSpc>
+                <a:spcPct val="125000"/>
+              </a:lnSpc>
+            </a:pPr>
+            <a:r>
+              <a:rPr sz="1100" lang="fr-FR">
+                <a:solidFill>
+                  <a:srgbClr val="161616"/>
+                </a:solidFill>
+                <a:latin typeface="Marianne"/>
+              </a:rPr>
+              <a:t>• Temps suffisant</a:t>
+            </a:r>
+          </a:p>
+        </p:txBody>
+      </p:sp>
+      <p:sp>
+        <p:nvSpPr>
+          <p:cNvPr id="17" name="DSFR-box"/>
+          <p:cNvSpPr/>
+          <p:nvPr/>
+        </p:nvSpPr>
+        <p:spPr>
+          <a:xfrm>
+            <a:off x="8253983" y="2240280"/>
+            <a:ext cx="3450335" cy="2103120"/>
+          </a:xfrm>
+          <a:prstGeom prst="rect">
+            <a:avLst/>
+          </a:prstGeom>
+          <a:solidFill>
+            <a:srgbClr val="F6F6F6"/>
+          </a:solidFill>
+          <a:ln>
+            <a:noFill/>
+          </a:ln>
+          <a:effectLst/>
+        </p:spPr>
+        <p:style>
+          <a:lnRef idx="1">
+            <a:schemeClr val="accent1"/>
+          </a:lnRef>
+          <a:fillRef idx="3">
+            <a:schemeClr val="accent1"/>
+          </a:fillRef>
+          <a:effectRef idx="2">
+            <a:schemeClr val="accent1"/>
+          </a:effectRef>
+          <a:fontRef idx="minor">
+            <a:schemeClr val="lt1"/>
+          </a:fontRef>
+        </p:style>
+        <p:txBody>
+          <a:bodyPr rtlCol="0" anchor="ctr"/>
+          <a:lstStyle/>
+          <a:p>
+            <a:pPr algn="ctr"/>
+          </a:p>
+        </p:txBody>
+      </p:sp>
+      <p:sp>
+        <p:nvSpPr>
+          <p:cNvPr id="18" name="DSFR-card-titre"/>
+          <p:cNvSpPr txBox="1"/>
+          <p:nvPr/>
+        </p:nvSpPr>
+        <p:spPr>
+          <a:xfrm>
+            <a:off x="8391144" y="2377440"/>
+            <a:ext cx="3176016" cy="411480"/>
+          </a:xfrm>
+          <a:prstGeom prst="rect">
+            <a:avLst/>
+          </a:prstGeom>
+          <a:noFill/>
+        </p:spPr>
+        <p:txBody>
+          <a:bodyPr wrap="square" anchor="t" lIns="73152" rIns="73152">
+            <a:spAutoFit/>
+          </a:bodyPr>
+          <a:lstStyle/>
+          <a:p>
+            <a:pPr algn="l">
+              <a:lnSpc>
+                <a:spcPct val="125000"/>
+              </a:lnSpc>
+            </a:pPr>
+            <a:r>
+              <a:rPr sz="1400" b="1" i="0" lang="fr-FR">
+                <a:solidFill>
+                  <a:srgbClr val="000091"/>
+                </a:solidFill>
+                <a:latin typeface="Marianne"/>
+              </a:rPr>
+              <a:t>Compréhensible</a:t>
+            </a:r>
+          </a:p>
+        </p:txBody>
+      </p:sp>
+      <p:sp>
+        <p:nvSpPr>
+          <p:cNvPr id="19" name="DSFR-card-contenu"/>
+          <p:cNvSpPr txBox="1"/>
+          <p:nvPr/>
+        </p:nvSpPr>
+        <p:spPr>
+          <a:xfrm>
+            <a:off x="8391144" y="2834640"/>
+            <a:ext cx="3176016" cy="1371600"/>
+          </a:xfrm>
+          <a:prstGeom prst="rect">
+            <a:avLst/>
+          </a:prstGeom>
+          <a:noFill/>
+        </p:spPr>
+        <p:txBody>
+          <a:bodyPr wrap="square" lIns="73152" rIns="73152">
+            <a:spAutoFit/>
+          </a:bodyPr>
+          <a:lstStyle/>
+          <a:p>
+            <a:pPr algn="l">
+              <a:lnSpc>
+                <a:spcPct val="125000"/>
+              </a:lnSpc>
+            </a:pPr>
+            <a:r>
+              <a:rPr sz="1100" lang="fr-FR">
+                <a:solidFill>
+                  <a:srgbClr val="161616"/>
+                </a:solidFill>
+                <a:latin typeface="Marianne"/>
+              </a:rPr>
+              <a:t>• Langue identifiée</a:t>
+            </a:r>
+          </a:p>
+          <a:p>
+            <a:pPr algn="l">
+              <a:lnSpc>
+                <a:spcPct val="125000"/>
+              </a:lnSpc>
+            </a:pPr>
+            <a:r>
+              <a:rPr sz="1100" lang="fr-FR">
+                <a:solidFill>
+                  <a:srgbClr val="161616"/>
+                </a:solidFill>
+                <a:latin typeface="Marianne"/>
+              </a:rPr>
+              <a:t>• Texte lisible</a:t>
+            </a:r>
+          </a:p>
+        </p:txBody>
+      </p:sp>
+      <p:sp>
+        <p:nvSpPr>
+          <p:cNvPr id="21" name="DSFR-box"/>
+          <p:cNvSpPr/>
+          <p:nvPr/>
+        </p:nvSpPr>
+        <p:spPr>
+          <a:xfrm>
+            <a:off x="548640" y="4617720"/>
+            <a:ext cx="11155680" cy="1371600"/>
+          </a:xfrm>
+          <a:prstGeom prst="rect">
+            <a:avLst/>
+          </a:prstGeom>
+          <a:solidFill>
+            <a:srgbClr val="F5F5FE"/>
+          </a:solidFill>
+          <a:ln>
+            <a:noFill/>
+          </a:ln>
+          <a:effectLst/>
+        </p:spPr>
+        <p:style>
+          <a:lnRef idx="1">
+            <a:schemeClr val="accent1"/>
+          </a:lnRef>
+          <a:fillRef idx="3">
+            <a:schemeClr val="accent1"/>
+          </a:fillRef>
+          <a:effectRef idx="2">
+            <a:schemeClr val="accent1"/>
+          </a:effectRef>
+          <a:fontRef idx="minor">
+            <a:schemeClr val="lt1"/>
+          </a:fontRef>
+        </p:style>
+        <p:txBody>
+          <a:bodyPr rtlCol="0" anchor="ctr"/>
+          <a:lstStyle/>
+          <a:p>
+            <a:pPr algn="ctr"/>
+          </a:p>
+        </p:txBody>
+      </p:sp>
+      <p:sp>
+        <p:nvSpPr>
+          <p:cNvPr id="22" name="DSFR-callout-titre"/>
+          <p:cNvSpPr txBox="1"/>
+          <p:nvPr/>
+        </p:nvSpPr>
+        <p:spPr>
+          <a:xfrm>
+            <a:off x="704088" y="4709159"/>
+            <a:ext cx="10908792" cy="365760"/>
+          </a:xfrm>
+          <a:prstGeom prst="rect">
+            <a:avLst/>
+          </a:prstGeom>
+          <a:noFill/>
+        </p:spPr>
+        <p:txBody>
+          <a:bodyPr wrap="square" anchor="t" lIns="73152" rIns="73152">
+            <a:spAutoFit/>
+          </a:bodyPr>
+          <a:lstStyle/>
+          <a:p>
+            <a:pPr algn="l">
+              <a:lnSpc>
+                <a:spcPct val="125000"/>
+              </a:lnSpc>
+            </a:pPr>
+            <a:r>
+              <a:rPr sz="1400" b="1" i="0" lang="fr-FR">
+                <a:solidFill>
+                  <a:srgbClr val="000091"/>
+                </a:solidFill>
+                <a:latin typeface="Marianne"/>
+              </a:rPr>
+              <a:t>Règle d’or</a:t>
+            </a:r>
+          </a:p>
+        </p:txBody>
+      </p:sp>
+      <p:sp>
+        <p:nvSpPr>
+          <p:cNvPr id="23" name="DSFR-callout-body"/>
+          <p:cNvSpPr txBox="1"/>
+          <p:nvPr/>
+        </p:nvSpPr>
+        <p:spPr>
+          <a:xfrm>
+            <a:off x="704088" y="5120640"/>
+            <a:ext cx="10908792" cy="777240"/>
+          </a:xfrm>
+          <a:prstGeom prst="rect">
+            <a:avLst/>
+          </a:prstGeom>
+          <a:noFill/>
+        </p:spPr>
+        <p:txBody>
+          <a:bodyPr wrap="square" lIns="73152" rIns="73152">
+            <a:spAutoFit/>
+          </a:bodyPr>
+          <a:lstStyle/>
+          <a:p>
+            <a:pPr algn="l">
+              <a:lnSpc>
+                <a:spcPct val="125000"/>
+              </a:lnSpc>
+            </a:pPr>
+            <a:r>
+              <a:rPr sz="1200" lang="fr-FR">
+                <a:solidFill>
+                  <a:srgbClr val="161616"/>
+                </a:solidFill>
+                <a:latin typeface="Marianne"/>
+              </a:rPr>
+              <a:t>• Les 4 principes POUR couvrent 100 % des exigences WCAG.</a:t>
+            </a:r>
+          </a:p>
+          <a:p>
+            <a:pPr algn="l">
+              <a:lnSpc>
+                <a:spcPct val="125000"/>
+              </a:lnSpc>
+            </a:pPr>
+            <a:r>
+              <a:rPr sz="1200" lang="fr-FR">
+                <a:solidFill>
+                  <a:srgbClr val="161616"/>
+                </a:solidFill>
+                <a:latin typeface="Marianne"/>
+              </a:rPr>
+              <a:t>• Tout critère se rattache à l’un d’eux.</a:t>
+            </a:r>
+          </a:p>
+        </p:txBody>
+      </p:sp>
+      <p:sp>
+        <p:nvSpPr>
+          <p:cNvPr id="5" name="Espace réservé de la date 4"/>
+          <p:cNvSpPr>
+            <a:spLocks noGrp="1"/>
+          </p:cNvSpPr>
+          <p:nvPr>
+            <p:ph type="dt" sz="half" idx="10"/>
+          </p:nvPr>
+        </p:nvSpPr>
+        <p:spPr bwMode="gray"/>
+        <p:txBody>
+          <a:bodyPr wrap="square" anchor="t" lIns="73152" rIns="73152"/>
+          <a:lstStyle/>
+          <a:p>
+            <a:pPr algn="l">
+              <a:lnSpc>
+                <a:spcPct val="125000"/>
+              </a:lnSpc>
+            </a:pPr>
+            <a:r>
+              <a:rPr sz="1000" b="0" i="0" lang="fr-FR">
+                <a:solidFill>
+                  <a:srgbClr val="666666"/>
+                </a:solidFill>
+                <a:latin typeface="Marianne"/>
+              </a:rPr>
+              <a:t>4 juin 2026</a:t>
+            </a:r>
+            <a:endParaRPr lang="fr-FR" cap="all" dirty="0"/>
+          </a:p>
+        </p:txBody>
+      </p:sp>
+      <p:sp>
+        <p:nvSpPr>
+          <p:cNvPr id="6" name="Espace réservé du pied de page 5"/>
+          <p:cNvSpPr>
+            <a:spLocks noGrp="1"/>
+          </p:cNvSpPr>
+          <p:nvPr>
+            <p:ph type="ftr" sz="quarter" idx="11"/>
+          </p:nvPr>
+        </p:nvSpPr>
+        <p:spPr bwMode="gray">
+          <a:xfrm>
+            <a:off x="479998" y="6377984"/>
+            <a:ext cx="7871980" cy="479998"/>
+          </a:xfrm>
+        </p:spPr>
+        <p:txBody>
+          <a:bodyPr wrap="square" anchor="t" lIns="73152" rIns="73152"/>
+          <a:lstStyle/>
+          <a:p>
+            <a:pPr algn="l">
+              <a:lnSpc>
+                <a:spcPct val="125000"/>
+              </a:lnSpc>
+            </a:pPr>
+            <a:r>
+              <a:rPr sz="1000" b="0" i="0" lang="fr-FR">
+                <a:solidFill>
+                  <a:srgbClr val="666666"/>
+                </a:solidFill>
+                <a:latin typeface="Marianne"/>
+              </a:rPr>
+              <a:t>Formation 102638 / Démo composants</a:t>
+            </a:r>
+          </a:p>
+        </p:txBody>
+      </p:sp>
+      <p:sp>
+        <p:nvSpPr>
+          <p:cNvPr id="8" name="DSFR-accent-decoratif" descr=""/>
+          <p:cNvSpPr/>
+          <p:nvPr/>
+        </p:nvSpPr>
+        <p:spPr>
+          <a:xfrm>
+            <a:off x="475488" y="2240280"/>
+            <a:ext cx="91440" cy="2103120"/>
+          </a:xfrm>
+          <a:prstGeom prst="rect">
+            <a:avLst/>
+          </a:prstGeom>
+          <a:solidFill>
+            <a:srgbClr val="000091"/>
+          </a:solidFill>
+          <a:ln>
+            <a:noFill/>
+          </a:ln>
+          <a:effectLst/>
+        </p:spPr>
+        <p:style>
+          <a:lnRef idx="1">
+            <a:schemeClr val="accent1"/>
+          </a:lnRef>
+          <a:fillRef idx="3">
+            <a:schemeClr val="accent1"/>
+          </a:fillRef>
+          <a:effectRef idx="2">
+            <a:schemeClr val="accent1"/>
+          </a:effectRef>
+          <a:fontRef idx="minor">
+            <a:schemeClr val="lt1"/>
+          </a:fontRef>
+        </p:style>
+        <p:txBody>
+          <a:bodyPr rtlCol="0" anchor="ctr"/>
+          <a:lstStyle/>
+          <a:p>
+            <a:pPr algn="ctr"/>
+          </a:p>
+        </p:txBody>
+      </p:sp>
+      <p:sp>
+        <p:nvSpPr>
+          <p:cNvPr id="12" name="DSFR-accent-decoratif" descr=""/>
+          <p:cNvSpPr/>
+          <p:nvPr/>
+        </p:nvSpPr>
+        <p:spPr>
+          <a:xfrm>
+            <a:off x="4319015" y="2240280"/>
+            <a:ext cx="91440" cy="2103120"/>
+          </a:xfrm>
+          <a:prstGeom prst="rect">
+            <a:avLst/>
+          </a:prstGeom>
+          <a:solidFill>
+            <a:srgbClr val="000091"/>
+          </a:solidFill>
+          <a:ln>
+            <a:noFill/>
+          </a:ln>
+          <a:effectLst/>
+        </p:spPr>
+        <p:style>
+          <a:lnRef idx="1">
+            <a:schemeClr val="accent1"/>
+          </a:lnRef>
+          <a:fillRef idx="3">
+            <a:schemeClr val="accent1"/>
+          </a:fillRef>
+          <a:effectRef idx="2">
+            <a:schemeClr val="accent1"/>
+          </a:effectRef>
+          <a:fontRef idx="minor">
+            <a:schemeClr val="lt1"/>
+          </a:fontRef>
+        </p:style>
+        <p:txBody>
+          <a:bodyPr rtlCol="0" anchor="ctr"/>
+          <a:lstStyle/>
+          <a:p>
+            <a:pPr algn="ctr"/>
+          </a:p>
+        </p:txBody>
+      </p:sp>
+      <p:sp>
+        <p:nvSpPr>
+          <p:cNvPr id="16" name="DSFR-accent-decoratif" descr=""/>
+          <p:cNvSpPr/>
+          <p:nvPr/>
+        </p:nvSpPr>
+        <p:spPr>
+          <a:xfrm>
+            <a:off x="8162543" y="2240280"/>
+            <a:ext cx="91440" cy="2103120"/>
+          </a:xfrm>
+          <a:prstGeom prst="rect">
+            <a:avLst/>
+          </a:prstGeom>
+          <a:solidFill>
+            <a:srgbClr val="000091"/>
+          </a:solidFill>
+          <a:ln>
+            <a:noFill/>
+          </a:ln>
+          <a:effectLst/>
+        </p:spPr>
+        <p:style>
+          <a:lnRef idx="1">
+            <a:schemeClr val="accent1"/>
+          </a:lnRef>
+          <a:fillRef idx="3">
+            <a:schemeClr val="accent1"/>
+          </a:fillRef>
+          <a:effectRef idx="2">
+            <a:schemeClr val="accent1"/>
+          </a:effectRef>
+          <a:fontRef idx="minor">
+            <a:schemeClr val="lt1"/>
+          </a:fontRef>
+        </p:style>
+        <p:txBody>
+          <a:bodyPr rtlCol="0" anchor="ctr"/>
+          <a:lstStyle/>
+          <a:p>
+            <a:pPr algn="ctr"/>
+          </a:p>
+        </p:txBody>
+      </p:sp>
+      <p:sp>
+        <p:nvSpPr>
+          <p:cNvPr id="20" name="DSFR-accent-decoratif" descr=""/>
+          <p:cNvSpPr/>
+          <p:nvPr/>
+        </p:nvSpPr>
+        <p:spPr>
+          <a:xfrm>
+            <a:off x="475488" y="4617720"/>
+            <a:ext cx="73152" cy="1371600"/>
+          </a:xfrm>
+          <a:prstGeom prst="rect">
+            <a:avLst/>
+          </a:prstGeom>
+          <a:solidFill>
+            <a:srgbClr val="000091"/>
+          </a:solidFill>
+          <a:ln>
+            <a:noFill/>
+          </a:ln>
+          <a:effectLst/>
+        </p:spPr>
+        <p:style>
+          <a:lnRef idx="1">
+            <a:schemeClr val="accent1"/>
+          </a:lnRef>
+          <a:fillRef idx="3">
+            <a:schemeClr val="accent1"/>
+          </a:fillRef>
+          <a:effectRef idx="2">
+            <a:schemeClr val="accent1"/>
+          </a:effectRef>
+          <a:fontRef idx="minor">
+            <a:schemeClr val="lt1"/>
+          </a:fontRef>
+        </p:style>
+        <p:txBody>
+          <a:bodyPr rtlCol="0" anchor="ctr"/>
+          <a:lstStyle/>
+          <a:p>
+            <a:pPr algn="ctr"/>
+          </a:p>
+        </p:txBody>
+      </p:sp>
+    </p:spTree>
+  </p:cSld>
+  <p:clrMapOvr>
+    <a:masterClrMapping/>
+  </p:clrMapOvr>
+</p:sld>
+</file>
+
+<file path=ppt/slides/slide25.xml><?xml version="1.0" encoding="utf-8"?>
+<p:sld xmlns:a="http://schemas.openxmlformats.org/drawingml/2006/main" xmlns:p="http://schemas.openxmlformats.org/presentationml/2006/main" xmlns:r="http://schemas.openxmlformats.org/officeDocument/2006/relationships">
+  <p:cSld>
+    <p:spTree>
+      <p:nvGrpSpPr>
+        <p:cNvPr id="1" name=""/>
+        <p:cNvGrpSpPr/>
+        <p:nvPr/>
+      </p:nvGrpSpPr>
+      <p:grpSpPr/>
+      <p:sp>
+        <p:nvSpPr>
+          <p:cNvPr id="2" name="Title 1"/>
+          <p:cNvSpPr>
+            <a:spLocks noGrp="1"/>
+          </p:cNvSpPr>
+          <p:nvPr>
+            <p:ph type="title"/>
+          </p:nvPr>
+        </p:nvSpPr>
+        <p:spPr/>
+        <p:txBody>
+          <a:bodyPr wrap="square" anchor="t" lIns="73152" rIns="73152"/>
+          <a:lstStyle/>
+          <a:p>
+            <a:pPr algn="l">
+              <a:lnSpc>
+                <a:spcPct val="125000"/>
+              </a:lnSpc>
+            </a:pPr>
+            <a:r>
+              <a:rPr sz="2800" b="1" i="0" lang="fr-FR">
+                <a:solidFill>
+                  <a:srgbClr val="000091"/>
+                </a:solidFill>
+                <a:latin typeface="Marianne"/>
+              </a:rPr>
+              <a:t>Checklist — préparer un document accessible</a:t>
+            </a:r>
+          </a:p>
+        </p:txBody>
+      </p:sp>
+      <p:sp>
+        <p:nvSpPr>
+          <p:cNvPr id="4" name="Text Placeholder 3"/>
+          <p:cNvSpPr>
+            <a:spLocks noGrp="1"/>
+          </p:cNvSpPr>
+          <p:nvPr>
+            <p:ph type="body" idx="13" sz="quarter"/>
+          </p:nvPr>
+        </p:nvSpPr>
+        <p:spPr/>
+        <p:txBody>
+          <a:bodyPr wrap="square" anchor="t" lIns="73152" rIns="73152"/>
+          <a:lstStyle/>
+          <a:p>
+            <a:pPr algn="r">
+              <a:lnSpc>
+                <a:spcPct val="125000"/>
+              </a:lnSpc>
+            </a:pPr>
+            <a:r>
+              <a:rPr sz="1100" b="0" i="0" lang="fr-FR">
+                <a:solidFill>
+                  <a:srgbClr val="666666"/>
+                </a:solidFill>
+                <a:latin typeface="Marianne"/>
+              </a:rPr>
+              <a:t>Démo | Checklist</a:t>
+            </a:r>
+          </a:p>
+        </p:txBody>
+      </p:sp>
+      <p:sp>
+        <p:nvSpPr>
+          <p:cNvPr id="7" name="Espace réservé du numéro de diapositive 6"/>
+          <p:cNvSpPr>
+            <a:spLocks noGrp="1"/>
+          </p:cNvSpPr>
+          <p:nvPr>
+            <p:ph type="sldNum" sz="quarter" idx="12"/>
+          </p:nvPr>
+        </p:nvSpPr>
+        <p:spPr bwMode="gray"/>
+        <p:txBody>
+          <a:bodyPr wrap="square" anchor="t" lIns="73152" rIns="73152"/>
+          <a:lstStyle/>
+          <a:p>
+            <a:pPr algn="l">
+              <a:lnSpc>
+                <a:spcPct val="125000"/>
+              </a:lnSpc>
+            </a:pPr>
+            <a:r>
+              <a:rPr sz="1000" b="0" i="0" lang="fr-FR">
+                <a:solidFill>
+                  <a:srgbClr val="666666"/>
+                </a:solidFill>
+                <a:latin typeface="Marianne"/>
+              </a:rPr>
+              <a:t>25</a:t>
+            </a:r>
+            <a:endParaRPr lang="fr-FR" dirty="0"/>
+          </a:p>
+        </p:txBody>
+      </p:sp>
+      <p:sp>
+        <p:nvSpPr>
+          <p:cNvPr id="8" name="DSFR-checklist"/>
+          <p:cNvSpPr txBox="1"/>
+          <p:nvPr/>
+        </p:nvSpPr>
+        <p:spPr>
+          <a:xfrm>
+            <a:off x="475488" y="2240280"/>
+            <a:ext cx="11228832" cy="3154679"/>
+          </a:xfrm>
+          <a:prstGeom prst="rect">
+            <a:avLst/>
+          </a:prstGeom>
+          <a:noFill/>
+        </p:spPr>
+        <p:txBody>
+          <a:bodyPr wrap="square" lIns="137160" rIns="137160" tIns="91440" bIns="91440">
+            <a:spAutoFit/>
+          </a:bodyPr>
+          <a:lstStyle/>
+          <a:p>
+            <a:pPr algn="l">
+              <a:lnSpc>
+                <a:spcPct val="150000"/>
+              </a:lnSpc>
+            </a:pPr>
+            <a:r>
+              <a:rPr sz="1800" b="1" lang="fr-FR">
+                <a:solidFill>
+                  <a:srgbClr val="18753C"/>
+                </a:solidFill>
+                <a:latin typeface="Marianne"/>
+              </a:rPr>
+              <a:t>☑  </a:t>
+            </a:r>
+            <a:r>
+              <a:rPr sz="1400" lang="fr-FR">
+                <a:solidFill>
+                  <a:srgbClr val="161616"/>
+                </a:solidFill>
+                <a:latin typeface="Marianne"/>
+              </a:rPr>
+              <a:t>Styles hiérarchiques appliqués (Titre 1, Titre 2, Titre 3)</a:t>
+            </a:r>
+          </a:p>
+          <a:p>
+            <a:pPr algn="l">
+              <a:lnSpc>
+                <a:spcPct val="150000"/>
+              </a:lnSpc>
+            </a:pPr>
+            <a:r>
+              <a:rPr sz="1800" b="1" lang="fr-FR">
+                <a:solidFill>
+                  <a:srgbClr val="18753C"/>
+                </a:solidFill>
+                <a:latin typeface="Marianne"/>
+              </a:rPr>
+              <a:t>☑  </a:t>
+            </a:r>
+            <a:r>
+              <a:rPr sz="1400" lang="fr-FR">
+                <a:solidFill>
+                  <a:srgbClr val="161616"/>
+                </a:solidFill>
+                <a:latin typeface="Marianne"/>
+              </a:rPr>
+              <a:t>Alt text renseigné sur toutes les images informatives</a:t>
+            </a:r>
+          </a:p>
+          <a:p>
+            <a:pPr algn="l">
+              <a:lnSpc>
+                <a:spcPct val="150000"/>
+              </a:lnSpc>
+            </a:pPr>
+            <a:r>
+              <a:rPr sz="1800" b="1" lang="fr-FR">
+                <a:solidFill>
+                  <a:srgbClr val="000091"/>
+                </a:solidFill>
+                <a:latin typeface="Marianne"/>
+              </a:rPr>
+              <a:t>☐  </a:t>
+            </a:r>
+            <a:r>
+              <a:rPr sz="1400" lang="fr-FR">
+                <a:solidFill>
+                  <a:srgbClr val="161616"/>
+                </a:solidFill>
+                <a:latin typeface="Marianne"/>
+              </a:rPr>
+              <a:t>Contrastes vérifiés (≥ 4,5:1 pour le texte courant)</a:t>
+            </a:r>
+          </a:p>
+          <a:p>
+            <a:pPr algn="l">
+              <a:lnSpc>
+                <a:spcPct val="150000"/>
+              </a:lnSpc>
+            </a:pPr>
+            <a:r>
+              <a:rPr sz="1800" b="1" lang="fr-FR">
+                <a:solidFill>
+                  <a:srgbClr val="18753C"/>
+                </a:solidFill>
+                <a:latin typeface="Marianne"/>
+              </a:rPr>
+              <a:t>☑  </a:t>
+            </a:r>
+            <a:r>
+              <a:rPr sz="1400" lang="fr-FR">
+                <a:solidFill>
+                  <a:srgbClr val="161616"/>
+                </a:solidFill>
+                <a:latin typeface="Marianne"/>
+              </a:rPr>
+              <a:t>Tableaux avec en-têtes de colonne identifiés</a:t>
+            </a:r>
+          </a:p>
+          <a:p>
+            <a:pPr algn="l">
+              <a:lnSpc>
+                <a:spcPct val="150000"/>
+              </a:lnSpc>
+            </a:pPr>
+            <a:r>
+              <a:rPr sz="1800" b="1" lang="fr-FR">
+                <a:solidFill>
+                  <a:srgbClr val="000091"/>
+                </a:solidFill>
+                <a:latin typeface="Marianne"/>
+              </a:rPr>
+              <a:t>☐  </a:t>
+            </a:r>
+            <a:r>
+              <a:rPr sz="1400" lang="fr-FR">
+                <a:solidFill>
+                  <a:srgbClr val="161616"/>
+                </a:solidFill>
+                <a:latin typeface="Marianne"/>
+              </a:rPr>
+              <a:t>Liens avec texte descriptif (pas « cliquer ici »)</a:t>
+            </a:r>
+          </a:p>
+          <a:p>
+            <a:pPr algn="l">
+              <a:lnSpc>
+                <a:spcPct val="150000"/>
+              </a:lnSpc>
+            </a:pPr>
+            <a:r>
+              <a:rPr sz="1800" b="1" lang="fr-FR">
+                <a:solidFill>
+                  <a:srgbClr val="18753C"/>
+                </a:solidFill>
+                <a:latin typeface="Marianne"/>
+              </a:rPr>
+              <a:t>☑  </a:t>
+            </a:r>
+            <a:r>
+              <a:rPr sz="1400" lang="fr-FR">
+                <a:solidFill>
+                  <a:srgbClr val="161616"/>
+                </a:solidFill>
+                <a:latin typeface="Marianne"/>
+              </a:rPr>
+              <a:t>Langue du document définie (fr-FR)</a:t>
+            </a:r>
+          </a:p>
+          <a:p>
+            <a:pPr algn="l">
+              <a:lnSpc>
+                <a:spcPct val="150000"/>
+              </a:lnSpc>
+            </a:pPr>
+            <a:r>
+              <a:rPr sz="1800" b="1" lang="fr-FR">
+                <a:solidFill>
+                  <a:srgbClr val="000091"/>
+                </a:solidFill>
+                <a:latin typeface="Marianne"/>
+              </a:rPr>
+              <a:t>☐  </a:t>
+            </a:r>
+            <a:r>
+              <a:rPr sz="1400" lang="fr-FR">
+                <a:solidFill>
+                  <a:srgbClr val="161616"/>
+                </a:solidFill>
+                <a:latin typeface="Marianne"/>
+              </a:rPr>
+              <a:t>Pas de justification — alignement à gauche</a:t>
+            </a:r>
+          </a:p>
+        </p:txBody>
+      </p:sp>
+      <p:sp>
+        <p:nvSpPr>
+          <p:cNvPr id="5" name="Espace réservé de la date 4"/>
+          <p:cNvSpPr>
+            <a:spLocks noGrp="1"/>
+          </p:cNvSpPr>
+          <p:nvPr>
+            <p:ph type="dt" sz="half" idx="10"/>
+          </p:nvPr>
+        </p:nvSpPr>
+        <p:spPr bwMode="gray"/>
+        <p:txBody>
+          <a:bodyPr wrap="square" anchor="t" lIns="73152" rIns="73152"/>
+          <a:lstStyle/>
+          <a:p>
+            <a:pPr algn="l">
+              <a:lnSpc>
+                <a:spcPct val="125000"/>
+              </a:lnSpc>
+            </a:pPr>
+            <a:r>
+              <a:rPr sz="1000" b="0" i="0" lang="fr-FR">
+                <a:solidFill>
+                  <a:srgbClr val="666666"/>
+                </a:solidFill>
+                <a:latin typeface="Marianne"/>
+              </a:rPr>
+              <a:t>4 juin 2026</a:t>
+            </a:r>
+            <a:endParaRPr lang="fr-FR" cap="all" dirty="0"/>
+          </a:p>
+        </p:txBody>
+      </p:sp>
+      <p:sp>
+        <p:nvSpPr>
+          <p:cNvPr id="6" name="Espace réservé du pied de page 5"/>
+          <p:cNvSpPr>
+            <a:spLocks noGrp="1"/>
+          </p:cNvSpPr>
+          <p:nvPr>
+            <p:ph type="ftr" sz="quarter" idx="11"/>
+          </p:nvPr>
+        </p:nvSpPr>
+        <p:spPr bwMode="gray">
+          <a:xfrm>
+            <a:off x="479998" y="6377984"/>
+            <a:ext cx="7871980" cy="479998"/>
+          </a:xfrm>
+        </p:spPr>
+        <p:txBody>
+          <a:bodyPr wrap="square" anchor="t" lIns="73152" rIns="73152"/>
+          <a:lstStyle/>
+          <a:p>
+            <a:pPr algn="l">
+              <a:lnSpc>
+                <a:spcPct val="125000"/>
+              </a:lnSpc>
+            </a:pPr>
+            <a:r>
+              <a:rPr sz="1000" b="0" i="0" lang="fr-FR">
+                <a:solidFill>
+                  <a:srgbClr val="666666"/>
+                </a:solidFill>
+                <a:latin typeface="Marianne"/>
+              </a:rPr>
+              <a:t>Formation 102638 / Démo composants</a:t>
+            </a:r>
+          </a:p>
+        </p:txBody>
+      </p:sp>
+    </p:spTree>
+  </p:cSld>
+  <p:clrMapOvr>
+    <a:masterClrMapping/>
+  </p:clrMapOvr>
+</p:sld>
+</file>
+
+<file path=ppt/slides/slide26.xml><?xml version="1.0" encoding="utf-8"?>
+<p:sld xmlns:a="http://schemas.openxmlformats.org/drawingml/2006/main" xmlns:p="http://schemas.openxmlformats.org/presentationml/2006/main" xmlns:r="http://schemas.openxmlformats.org/officeDocument/2006/relationships">
+  <p:cSld>
+    <p:spTree>
+      <p:nvGrpSpPr>
+        <p:cNvPr id="1" name=""/>
+        <p:cNvGrpSpPr/>
+        <p:nvPr/>
+      </p:nvGrpSpPr>
+      <p:grpSpPr/>
+      <p:sp>
+        <p:nvSpPr>
+          <p:cNvPr id="2" name="Title 1"/>
+          <p:cNvSpPr>
+            <a:spLocks noGrp="1"/>
+          </p:cNvSpPr>
+          <p:nvPr>
+            <p:ph type="title"/>
+          </p:nvPr>
+        </p:nvSpPr>
+        <p:spPr/>
+        <p:txBody>
+          <a:bodyPr wrap="square" anchor="t" lIns="73152" rIns="73152"/>
+          <a:lstStyle/>
+          <a:p>
+            <a:pPr algn="l">
+              <a:lnSpc>
+                <a:spcPct val="125000"/>
+              </a:lnSpc>
+            </a:pPr>
+            <a:r>
+              <a:rPr sz="2800" b="1" i="0" lang="fr-FR">
+                <a:solidFill>
+                  <a:srgbClr val="000091"/>
+                </a:solidFill>
+                <a:latin typeface="Marianne"/>
+              </a:rPr>
+              <a:t>Avant / après — un lien accessible</a:t>
+            </a:r>
+          </a:p>
+        </p:txBody>
+      </p:sp>
+      <p:sp>
+        <p:nvSpPr>
+          <p:cNvPr id="4" name="Text Placeholder 3"/>
+          <p:cNvSpPr>
+            <a:spLocks noGrp="1"/>
+          </p:cNvSpPr>
+          <p:nvPr>
+            <p:ph type="body" idx="13" sz="quarter"/>
+          </p:nvPr>
+        </p:nvSpPr>
+        <p:spPr/>
+        <p:txBody>
+          <a:bodyPr wrap="square" anchor="t" lIns="73152" rIns="73152"/>
+          <a:lstStyle/>
+          <a:p>
+            <a:pPr algn="r">
+              <a:lnSpc>
+                <a:spcPct val="125000"/>
+              </a:lnSpc>
+            </a:pPr>
+            <a:r>
+              <a:rPr sz="1100" b="0" i="0" lang="fr-FR">
+                <a:solidFill>
+                  <a:srgbClr val="666666"/>
+                </a:solidFill>
+                <a:latin typeface="Marianne"/>
+              </a:rPr>
+              <a:t>Démo | Avant et après</a:t>
+            </a:r>
+          </a:p>
+        </p:txBody>
+      </p:sp>
+      <p:sp>
+        <p:nvSpPr>
+          <p:cNvPr id="7" name="Espace réservé du numéro de diapositive 6"/>
+          <p:cNvSpPr>
+            <a:spLocks noGrp="1"/>
+          </p:cNvSpPr>
+          <p:nvPr>
+            <p:ph type="sldNum" sz="quarter" idx="12"/>
+          </p:nvPr>
+        </p:nvSpPr>
+        <p:spPr bwMode="gray"/>
+        <p:txBody>
+          <a:bodyPr wrap="square" anchor="t" lIns="73152" rIns="73152"/>
+          <a:lstStyle/>
+          <a:p>
+            <a:pPr algn="l">
+              <a:lnSpc>
+                <a:spcPct val="125000"/>
+              </a:lnSpc>
+            </a:pPr>
+            <a:r>
+              <a:rPr sz="1000" b="0" i="0" lang="fr-FR">
+                <a:solidFill>
+                  <a:srgbClr val="666666"/>
+                </a:solidFill>
+                <a:latin typeface="Marianne"/>
+              </a:rPr>
+              <a:t>26</a:t>
+            </a:r>
+            <a:endParaRPr lang="fr-FR" dirty="0"/>
+          </a:p>
+        </p:txBody>
+      </p:sp>
+      <p:sp>
+        <p:nvSpPr>
+          <p:cNvPr id="9" name="DSFR-box"/>
+          <p:cNvSpPr/>
+          <p:nvPr/>
+        </p:nvSpPr>
+        <p:spPr>
+          <a:xfrm>
+            <a:off x="548640" y="2240280"/>
+            <a:ext cx="5390388" cy="3200400"/>
+          </a:xfrm>
+          <a:prstGeom prst="rect">
+            <a:avLst/>
+          </a:prstGeom>
+          <a:solidFill>
+            <a:srgbClr val="FFE8E5"/>
+          </a:solidFill>
+          <a:ln>
+            <a:noFill/>
+          </a:ln>
+          <a:effectLst/>
+        </p:spPr>
+        <p:style>
+          <a:lnRef idx="1">
+            <a:schemeClr val="accent1"/>
+          </a:lnRef>
+          <a:fillRef idx="3">
+            <a:schemeClr val="accent1"/>
+          </a:fillRef>
+          <a:effectRef idx="2">
+            <a:schemeClr val="accent1"/>
+          </a:effectRef>
+          <a:fontRef idx="minor">
+            <a:schemeClr val="lt1"/>
+          </a:fontRef>
+        </p:style>
+        <p:txBody>
+          <a:bodyPr rtlCol="0" anchor="ctr"/>
+          <a:lstStyle/>
+          <a:p>
+            <a:pPr algn="ctr"/>
+          </a:p>
+        </p:txBody>
+      </p:sp>
+      <p:sp>
+        <p:nvSpPr>
+          <p:cNvPr id="10" name="DSFR-alert-error-titre"/>
+          <p:cNvSpPr txBox="1"/>
+          <p:nvPr/>
+        </p:nvSpPr>
+        <p:spPr>
+          <a:xfrm>
+            <a:off x="704088" y="2331720"/>
+            <a:ext cx="5143500" cy="365760"/>
+          </a:xfrm>
+          <a:prstGeom prst="rect">
+            <a:avLst/>
+          </a:prstGeom>
+          <a:noFill/>
+        </p:spPr>
+        <p:txBody>
+          <a:bodyPr wrap="square" anchor="t" lIns="73152" rIns="73152">
+            <a:spAutoFit/>
+          </a:bodyPr>
+          <a:lstStyle/>
+          <a:p>
+            <a:pPr algn="l">
+              <a:lnSpc>
+                <a:spcPct val="125000"/>
+              </a:lnSpc>
+            </a:pPr>
+            <a:r>
+              <a:rPr sz="1400" b="1" i="0" lang="fr-FR">
+                <a:solidFill>
+                  <a:srgbClr val="CE0500"/>
+                </a:solidFill>
+                <a:latin typeface="Marianne"/>
+              </a:rPr>
+              <a:t>Avant</a:t>
+            </a:r>
+          </a:p>
+        </p:txBody>
+      </p:sp>
+      <p:sp>
+        <p:nvSpPr>
+          <p:cNvPr id="11" name="DSFR-alert-error-body"/>
+          <p:cNvSpPr txBox="1"/>
+          <p:nvPr/>
+        </p:nvSpPr>
+        <p:spPr>
+          <a:xfrm>
+            <a:off x="704088" y="2743200"/>
+            <a:ext cx="5143500" cy="2606040"/>
+          </a:xfrm>
+          <a:prstGeom prst="rect">
+            <a:avLst/>
+          </a:prstGeom>
+          <a:noFill/>
+        </p:spPr>
+        <p:txBody>
+          <a:bodyPr wrap="square" lIns="73152" rIns="73152">
+            <a:spAutoFit/>
+          </a:bodyPr>
+          <a:lstStyle/>
+          <a:p>
+            <a:pPr algn="l">
+              <a:lnSpc>
+                <a:spcPct val="125000"/>
+              </a:lnSpc>
+            </a:pPr>
+            <a:r>
+              <a:rPr sz="1200" lang="fr-FR">
+                <a:solidFill>
+                  <a:srgbClr val="161616"/>
+                </a:solidFill>
+                <a:latin typeface="Marianne"/>
+              </a:rPr>
+              <a:t>• « Cliquez ici pour en savoir plus »</a:t>
+            </a:r>
+          </a:p>
+          <a:p>
+            <a:pPr algn="l">
+              <a:lnSpc>
+                <a:spcPct val="125000"/>
+              </a:lnSpc>
+            </a:pPr>
+            <a:r>
+              <a:rPr sz="1200" lang="fr-FR">
+                <a:solidFill>
+                  <a:srgbClr val="161616"/>
+                </a:solidFill>
+                <a:latin typeface="Marianne"/>
+              </a:rPr>
+              <a:t>• Hors contexte, le lecteur ne sait pas où il arrive</a:t>
+            </a:r>
+          </a:p>
+          <a:p>
+            <a:pPr algn="l">
+              <a:lnSpc>
+                <a:spcPct val="125000"/>
+              </a:lnSpc>
+            </a:pPr>
+            <a:r>
+              <a:rPr sz="1200" lang="fr-FR">
+                <a:solidFill>
+                  <a:srgbClr val="161616"/>
+                </a:solidFill>
+                <a:latin typeface="Marianne"/>
+              </a:rPr>
+              <a:t>• Échec du critère RGAA 6.1</a:t>
+            </a:r>
+          </a:p>
+        </p:txBody>
+      </p:sp>
+      <p:sp>
+        <p:nvSpPr>
+          <p:cNvPr id="13" name="DSFR-box"/>
+          <p:cNvSpPr/>
+          <p:nvPr/>
+        </p:nvSpPr>
+        <p:spPr>
+          <a:xfrm>
+            <a:off x="6313931" y="2240280"/>
+            <a:ext cx="5390388" cy="3200400"/>
+          </a:xfrm>
+          <a:prstGeom prst="rect">
+            <a:avLst/>
+          </a:prstGeom>
+          <a:solidFill>
+            <a:srgbClr val="B8FEC9"/>
+          </a:solidFill>
+          <a:ln>
+            <a:noFill/>
+          </a:ln>
+          <a:effectLst/>
+        </p:spPr>
+        <p:style>
+          <a:lnRef idx="1">
+            <a:schemeClr val="accent1"/>
+          </a:lnRef>
+          <a:fillRef idx="3">
+            <a:schemeClr val="accent1"/>
+          </a:fillRef>
+          <a:effectRef idx="2">
+            <a:schemeClr val="accent1"/>
+          </a:effectRef>
+          <a:fontRef idx="minor">
+            <a:schemeClr val="lt1"/>
+          </a:fontRef>
+        </p:style>
+        <p:txBody>
+          <a:bodyPr rtlCol="0" anchor="ctr"/>
+          <a:lstStyle/>
+          <a:p>
+            <a:pPr algn="ctr"/>
+          </a:p>
+        </p:txBody>
+      </p:sp>
+      <p:sp>
+        <p:nvSpPr>
+          <p:cNvPr id="14" name="DSFR-alert-success-titre"/>
+          <p:cNvSpPr txBox="1"/>
+          <p:nvPr/>
+        </p:nvSpPr>
+        <p:spPr>
+          <a:xfrm>
+            <a:off x="6469379" y="2331720"/>
+            <a:ext cx="5143500" cy="365760"/>
+          </a:xfrm>
+          <a:prstGeom prst="rect">
+            <a:avLst/>
+          </a:prstGeom>
+          <a:noFill/>
+        </p:spPr>
+        <p:txBody>
+          <a:bodyPr wrap="square" anchor="t" lIns="73152" rIns="73152">
+            <a:spAutoFit/>
+          </a:bodyPr>
+          <a:lstStyle/>
+          <a:p>
+            <a:pPr algn="l">
+              <a:lnSpc>
+                <a:spcPct val="125000"/>
+              </a:lnSpc>
+            </a:pPr>
+            <a:r>
+              <a:rPr sz="1400" b="1" i="0" lang="fr-FR">
+                <a:solidFill>
+                  <a:srgbClr val="18753C"/>
+                </a:solidFill>
+                <a:latin typeface="Marianne"/>
+              </a:rPr>
+              <a:t>Après</a:t>
+            </a:r>
+          </a:p>
+        </p:txBody>
+      </p:sp>
+      <p:sp>
+        <p:nvSpPr>
+          <p:cNvPr id="15" name="DSFR-alert-success-body"/>
+          <p:cNvSpPr txBox="1"/>
+          <p:nvPr/>
+        </p:nvSpPr>
+        <p:spPr>
+          <a:xfrm>
+            <a:off x="6469379" y="2743200"/>
+            <a:ext cx="5143500" cy="2606040"/>
+          </a:xfrm>
+          <a:prstGeom prst="rect">
+            <a:avLst/>
+          </a:prstGeom>
+          <a:noFill/>
+        </p:spPr>
+        <p:txBody>
+          <a:bodyPr wrap="square" lIns="73152" rIns="73152">
+            <a:spAutoFit/>
+          </a:bodyPr>
+          <a:lstStyle/>
+          <a:p>
+            <a:pPr algn="l">
+              <a:lnSpc>
+                <a:spcPct val="125000"/>
+              </a:lnSpc>
+            </a:pPr>
+            <a:r>
+              <a:rPr sz="1200" lang="fr-FR">
+                <a:solidFill>
+                  <a:srgbClr val="161616"/>
+                </a:solidFill>
+                <a:latin typeface="Marianne"/>
+              </a:rPr>
+              <a:t>• « Consulter le rapport d’audit 2025 »</a:t>
+            </a:r>
+          </a:p>
+          <a:p>
+            <a:pPr algn="l">
+              <a:lnSpc>
+                <a:spcPct val="125000"/>
+              </a:lnSpc>
+            </a:pPr>
+            <a:r>
+              <a:rPr sz="1200" lang="fr-FR">
+                <a:solidFill>
+                  <a:srgbClr val="161616"/>
+                </a:solidFill>
+                <a:latin typeface="Marianne"/>
+              </a:rPr>
+              <a:t>• Le texte du lien décrit sa destination</a:t>
+            </a:r>
+          </a:p>
+          <a:p>
+            <a:pPr algn="l">
+              <a:lnSpc>
+                <a:spcPct val="125000"/>
+              </a:lnSpc>
+            </a:pPr>
+            <a:r>
+              <a:rPr sz="1200" lang="fr-FR">
+                <a:solidFill>
+                  <a:srgbClr val="161616"/>
+                </a:solidFill>
+                <a:latin typeface="Marianne"/>
+              </a:rPr>
+              <a:t>• Conforme au critère RGAA 6.1</a:t>
+            </a:r>
+          </a:p>
+        </p:txBody>
+      </p:sp>
+      <p:sp>
+        <p:nvSpPr>
+          <p:cNvPr id="5" name="Espace réservé de la date 4"/>
+          <p:cNvSpPr>
+            <a:spLocks noGrp="1"/>
+          </p:cNvSpPr>
+          <p:nvPr>
+            <p:ph type="dt" sz="half" idx="10"/>
+          </p:nvPr>
+        </p:nvSpPr>
+        <p:spPr bwMode="gray"/>
+        <p:txBody>
+          <a:bodyPr wrap="square" anchor="t" lIns="73152" rIns="73152"/>
+          <a:lstStyle/>
+          <a:p>
+            <a:pPr algn="l">
+              <a:lnSpc>
+                <a:spcPct val="125000"/>
+              </a:lnSpc>
+            </a:pPr>
+            <a:r>
+              <a:rPr sz="1000" b="0" i="0" lang="fr-FR">
+                <a:solidFill>
+                  <a:srgbClr val="666666"/>
+                </a:solidFill>
+                <a:latin typeface="Marianne"/>
+              </a:rPr>
+              <a:t>4 juin 2026</a:t>
+            </a:r>
+            <a:endParaRPr lang="fr-FR" cap="all" dirty="0"/>
+          </a:p>
+        </p:txBody>
+      </p:sp>
+      <p:sp>
+        <p:nvSpPr>
+          <p:cNvPr id="6" name="Espace réservé du pied de page 5"/>
+          <p:cNvSpPr>
+            <a:spLocks noGrp="1"/>
+          </p:cNvSpPr>
+          <p:nvPr>
+            <p:ph type="ftr" sz="quarter" idx="11"/>
+          </p:nvPr>
+        </p:nvSpPr>
+        <p:spPr bwMode="gray">
+          <a:xfrm>
+            <a:off x="479998" y="6377984"/>
+            <a:ext cx="7871980" cy="479998"/>
+          </a:xfrm>
+        </p:spPr>
+        <p:txBody>
+          <a:bodyPr wrap="square" anchor="t" lIns="73152" rIns="73152"/>
+          <a:lstStyle/>
+          <a:p>
+            <a:pPr algn="l">
+              <a:lnSpc>
+                <a:spcPct val="125000"/>
+              </a:lnSpc>
+            </a:pPr>
+            <a:r>
+              <a:rPr sz="1000" b="0" i="0" lang="fr-FR">
+                <a:solidFill>
+                  <a:srgbClr val="666666"/>
+                </a:solidFill>
+                <a:latin typeface="Marianne"/>
+              </a:rPr>
+              <a:t>Formation 102638 / Démo composants</a:t>
+            </a:r>
+          </a:p>
+        </p:txBody>
+      </p:sp>
+      <p:sp>
+        <p:nvSpPr>
+          <p:cNvPr id="8" name="DSFR-accent-decoratif" descr=""/>
+          <p:cNvSpPr/>
+          <p:nvPr/>
+        </p:nvSpPr>
+        <p:spPr>
+          <a:xfrm>
+            <a:off x="475488" y="2240280"/>
+            <a:ext cx="73152" cy="3200400"/>
+          </a:xfrm>
+          <a:prstGeom prst="rect">
+            <a:avLst/>
+          </a:prstGeom>
+          <a:solidFill>
+            <a:srgbClr val="CE0500"/>
+          </a:solidFill>
+          <a:ln>
+            <a:noFill/>
+          </a:ln>
+          <a:effectLst/>
+        </p:spPr>
+        <p:style>
+          <a:lnRef idx="1">
+            <a:schemeClr val="accent1"/>
+          </a:lnRef>
+          <a:fillRef idx="3">
+            <a:schemeClr val="accent1"/>
+          </a:fillRef>
+          <a:effectRef idx="2">
+            <a:schemeClr val="accent1"/>
+          </a:effectRef>
+          <a:fontRef idx="minor">
+            <a:schemeClr val="lt1"/>
+          </a:fontRef>
+        </p:style>
+        <p:txBody>
+          <a:bodyPr rtlCol="0" anchor="ctr"/>
+          <a:lstStyle/>
+          <a:p>
+            <a:pPr algn="ctr"/>
+          </a:p>
+        </p:txBody>
+      </p:sp>
+      <p:sp>
+        <p:nvSpPr>
+          <p:cNvPr id="12" name="DSFR-accent-decoratif" descr=""/>
+          <p:cNvSpPr/>
+          <p:nvPr/>
+        </p:nvSpPr>
+        <p:spPr>
+          <a:xfrm>
+            <a:off x="6240779" y="2240280"/>
+            <a:ext cx="73152" cy="3200400"/>
+          </a:xfrm>
+          <a:prstGeom prst="rect">
+            <a:avLst/>
+          </a:prstGeom>
+          <a:solidFill>
+            <a:srgbClr val="18753C"/>
+          </a:solidFill>
+          <a:ln>
+            <a:noFill/>
+          </a:ln>
+          <a:effectLst/>
+        </p:spPr>
+        <p:style>
+          <a:lnRef idx="1">
+            <a:schemeClr val="accent1"/>
+          </a:lnRef>
+          <a:fillRef idx="3">
+            <a:schemeClr val="accent1"/>
+          </a:fillRef>
+          <a:effectRef idx="2">
+            <a:schemeClr val="accent1"/>
+          </a:effectRef>
+          <a:fontRef idx="minor">
+            <a:schemeClr val="lt1"/>
+          </a:fontRef>
+        </p:style>
+        <p:txBody>
+          <a:bodyPr rtlCol="0" anchor="ctr"/>
+          <a:lstStyle/>
+          <a:p>
+            <a:pPr algn="ctr"/>
+          </a:p>
+        </p:txBody>
+      </p:sp>
+    </p:spTree>
+  </p:cSld>
+  <p:clrMapOvr>
+    <a:masterClrMapping/>
+  </p:clrMapOvr>
+</p:sld>
+</file>
+
+<file path=ppt/slides/slide27.xml><?xml version="1.0" encoding="utf-8"?>
+<p:sld xmlns:a="http://schemas.openxmlformats.org/drawingml/2006/main" xmlns:p="http://schemas.openxmlformats.org/presentationml/2006/main" xmlns:r="http://schemas.openxmlformats.org/officeDocument/2006/relationships">
+  <p:cSld>
+    <p:spTree>
+      <p:nvGrpSpPr>
+        <p:cNvPr id="1" name=""/>
+        <p:cNvGrpSpPr/>
+        <p:nvPr/>
+      </p:nvGrpSpPr>
+      <p:grpSpPr/>
+      <p:sp>
+        <p:nvSpPr>
+          <p:cNvPr id="2" name="Title 1"/>
+          <p:cNvSpPr>
+            <a:spLocks noGrp="1"/>
+          </p:cNvSpPr>
+          <p:nvPr>
+            <p:ph type="title"/>
+          </p:nvPr>
+        </p:nvSpPr>
+        <p:spPr/>
+        <p:txBody>
+          <a:bodyPr wrap="square" anchor="t" lIns="73152" rIns="73152"/>
+          <a:lstStyle/>
+          <a:p>
+            <a:pPr algn="l">
+              <a:lnSpc>
+                <a:spcPct val="125000"/>
+              </a:lnSpc>
+            </a:pPr>
+            <a:r>
+              <a:rPr sz="2800" b="1" i="0" lang="fr-FR">
+                <a:solidFill>
+                  <a:srgbClr val="000091"/>
+                </a:solidFill>
+                <a:latin typeface="Marianne"/>
+              </a:rPr>
+              <a:t>Exemple et contre-exemple — alt text d’image</a:t>
+            </a:r>
+          </a:p>
+        </p:txBody>
+      </p:sp>
+      <p:sp>
+        <p:nvSpPr>
+          <p:cNvPr id="4" name="Text Placeholder 3"/>
+          <p:cNvSpPr>
+            <a:spLocks noGrp="1"/>
+          </p:cNvSpPr>
+          <p:nvPr>
+            <p:ph type="body" idx="13" sz="quarter"/>
+          </p:nvPr>
+        </p:nvSpPr>
+        <p:spPr/>
+        <p:txBody>
+          <a:bodyPr wrap="square" anchor="t" lIns="73152" rIns="73152"/>
+          <a:lstStyle/>
+          <a:p>
+            <a:pPr algn="r">
+              <a:lnSpc>
+                <a:spcPct val="125000"/>
+              </a:lnSpc>
+            </a:pPr>
+            <a:r>
+              <a:rPr sz="1100" b="0" i="0" lang="fr-FR">
+                <a:solidFill>
+                  <a:srgbClr val="666666"/>
+                </a:solidFill>
+                <a:latin typeface="Marianne"/>
+              </a:rPr>
+              <a:t>Démo | Bon et mauvais exemple</a:t>
+            </a:r>
+          </a:p>
+        </p:txBody>
+      </p:sp>
+      <p:sp>
+        <p:nvSpPr>
+          <p:cNvPr id="7" name="Espace réservé du numéro de diapositive 6"/>
+          <p:cNvSpPr>
+            <a:spLocks noGrp="1"/>
+          </p:cNvSpPr>
+          <p:nvPr>
+            <p:ph type="sldNum" sz="quarter" idx="12"/>
+          </p:nvPr>
+        </p:nvSpPr>
+        <p:spPr bwMode="gray"/>
+        <p:txBody>
+          <a:bodyPr wrap="square" anchor="t" lIns="73152" rIns="73152"/>
+          <a:lstStyle/>
+          <a:p>
+            <a:pPr algn="l">
+              <a:lnSpc>
+                <a:spcPct val="125000"/>
+              </a:lnSpc>
+            </a:pPr>
+            <a:r>
+              <a:rPr sz="1000" b="0" i="0" lang="fr-FR">
+                <a:solidFill>
+                  <a:srgbClr val="666666"/>
+                </a:solidFill>
+                <a:latin typeface="Marianne"/>
+              </a:rPr>
+              <a:t>27</a:t>
+            </a:r>
+            <a:endParaRPr lang="fr-FR" dirty="0"/>
+          </a:p>
+        </p:txBody>
+      </p:sp>
+      <p:sp>
+        <p:nvSpPr>
+          <p:cNvPr id="9" name="DSFR-box"/>
+          <p:cNvSpPr/>
+          <p:nvPr/>
+        </p:nvSpPr>
+        <p:spPr>
+          <a:xfrm>
+            <a:off x="548640" y="2240280"/>
+            <a:ext cx="5390388" cy="3200400"/>
+          </a:xfrm>
+          <a:prstGeom prst="rect">
+            <a:avLst/>
+          </a:prstGeom>
+          <a:solidFill>
+            <a:srgbClr val="B8FEC9"/>
+          </a:solidFill>
+          <a:ln>
+            <a:noFill/>
+          </a:ln>
+          <a:effectLst/>
+        </p:spPr>
+        <p:style>
+          <a:lnRef idx="1">
+            <a:schemeClr val="accent1"/>
+          </a:lnRef>
+          <a:fillRef idx="3">
+            <a:schemeClr val="accent1"/>
+          </a:fillRef>
+          <a:effectRef idx="2">
+            <a:schemeClr val="accent1"/>
+          </a:effectRef>
+          <a:fontRef idx="minor">
+            <a:schemeClr val="lt1"/>
+          </a:fontRef>
+        </p:style>
+        <p:txBody>
+          <a:bodyPr rtlCol="0" anchor="ctr"/>
+          <a:lstStyle/>
+          <a:p>
+            <a:pPr algn="ctr"/>
+          </a:p>
+        </p:txBody>
+      </p:sp>
+      <p:sp>
+        <p:nvSpPr>
+          <p:cNvPr id="10" name="DSFR-alert-success-titre"/>
+          <p:cNvSpPr txBox="1"/>
+          <p:nvPr/>
+        </p:nvSpPr>
+        <p:spPr>
+          <a:xfrm>
+            <a:off x="704088" y="2331720"/>
+            <a:ext cx="5143500" cy="365760"/>
+          </a:xfrm>
+          <a:prstGeom prst="rect">
+            <a:avLst/>
+          </a:prstGeom>
+          <a:noFill/>
+        </p:spPr>
+        <p:txBody>
+          <a:bodyPr wrap="square" anchor="t" lIns="73152" rIns="73152">
+            <a:spAutoFit/>
+          </a:bodyPr>
+          <a:lstStyle/>
+          <a:p>
+            <a:pPr algn="l">
+              <a:lnSpc>
+                <a:spcPct val="125000"/>
+              </a:lnSpc>
+            </a:pPr>
+            <a:r>
+              <a:rPr sz="1400" b="1" i="0" lang="fr-FR">
+                <a:solidFill>
+                  <a:srgbClr val="18753C"/>
+                </a:solidFill>
+                <a:latin typeface="Marianne"/>
+              </a:rPr>
+              <a:t>✓  À faire</a:t>
+            </a:r>
+          </a:p>
+        </p:txBody>
+      </p:sp>
+      <p:sp>
+        <p:nvSpPr>
+          <p:cNvPr id="11" name="DSFR-alert-success-body"/>
+          <p:cNvSpPr txBox="1"/>
+          <p:nvPr/>
+        </p:nvSpPr>
+        <p:spPr>
+          <a:xfrm>
+            <a:off x="704088" y="2743200"/>
+            <a:ext cx="5143500" cy="2606040"/>
+          </a:xfrm>
+          <a:prstGeom prst="rect">
+            <a:avLst/>
+          </a:prstGeom>
+          <a:noFill/>
+        </p:spPr>
+        <p:txBody>
+          <a:bodyPr wrap="square" lIns="73152" rIns="73152">
+            <a:spAutoFit/>
+          </a:bodyPr>
+          <a:lstStyle/>
+          <a:p>
+            <a:pPr algn="l">
+              <a:lnSpc>
+                <a:spcPct val="125000"/>
+              </a:lnSpc>
+            </a:pPr>
+            <a:r>
+              <a:rPr sz="1200" lang="fr-FR">
+                <a:solidFill>
+                  <a:srgbClr val="161616"/>
+                </a:solidFill>
+                <a:latin typeface="Marianne"/>
+              </a:rPr>
+              <a:t>• alt="Graphique en barres : progression 2020-2025"</a:t>
+            </a:r>
+          </a:p>
+          <a:p>
+            <a:pPr algn="l">
+              <a:lnSpc>
+                <a:spcPct val="125000"/>
+              </a:lnSpc>
+            </a:pPr>
+            <a:r>
+              <a:rPr sz="1200" lang="fr-FR">
+                <a:solidFill>
+                  <a:srgbClr val="161616"/>
+                </a:solidFill>
+                <a:latin typeface="Marianne"/>
+              </a:rPr>
+              <a:t>• Description concise et informative</a:t>
+            </a:r>
+          </a:p>
+          <a:p>
+            <a:pPr algn="l">
+              <a:lnSpc>
+                <a:spcPct val="125000"/>
+              </a:lnSpc>
+            </a:pPr>
+            <a:r>
+              <a:rPr sz="1200" lang="fr-FR">
+                <a:solidFill>
+                  <a:srgbClr val="161616"/>
+                </a:solidFill>
+                <a:latin typeface="Marianne"/>
+              </a:rPr>
+              <a:t>• Rend l’image compréhensible sans la voir</a:t>
+            </a:r>
+          </a:p>
+        </p:txBody>
+      </p:sp>
+      <p:sp>
+        <p:nvSpPr>
+          <p:cNvPr id="13" name="DSFR-box"/>
+          <p:cNvSpPr/>
+          <p:nvPr/>
+        </p:nvSpPr>
+        <p:spPr>
+          <a:xfrm>
+            <a:off x="6313931" y="2240280"/>
+            <a:ext cx="5390388" cy="3200400"/>
+          </a:xfrm>
+          <a:prstGeom prst="rect">
+            <a:avLst/>
+          </a:prstGeom>
+          <a:solidFill>
+            <a:srgbClr val="FFE8E5"/>
+          </a:solidFill>
+          <a:ln>
+            <a:noFill/>
+          </a:ln>
+          <a:effectLst/>
+        </p:spPr>
+        <p:style>
+          <a:lnRef idx="1">
+            <a:schemeClr val="accent1"/>
+          </a:lnRef>
+          <a:fillRef idx="3">
+            <a:schemeClr val="accent1"/>
+          </a:fillRef>
+          <a:effectRef idx="2">
+            <a:schemeClr val="accent1"/>
+          </a:effectRef>
+          <a:fontRef idx="minor">
+            <a:schemeClr val="lt1"/>
+          </a:fontRef>
+        </p:style>
+        <p:txBody>
+          <a:bodyPr rtlCol="0" anchor="ctr"/>
+          <a:lstStyle/>
+          <a:p>
+            <a:pPr algn="ctr"/>
+          </a:p>
+        </p:txBody>
+      </p:sp>
+      <p:sp>
+        <p:nvSpPr>
+          <p:cNvPr id="14" name="DSFR-alert-error-titre"/>
+          <p:cNvSpPr txBox="1"/>
+          <p:nvPr/>
+        </p:nvSpPr>
+        <p:spPr>
+          <a:xfrm>
+            <a:off x="6469379" y="2331720"/>
+            <a:ext cx="5143500" cy="365760"/>
+          </a:xfrm>
+          <a:prstGeom prst="rect">
+            <a:avLst/>
+          </a:prstGeom>
+          <a:noFill/>
+        </p:spPr>
+        <p:txBody>
+          <a:bodyPr wrap="square" anchor="t" lIns="73152" rIns="73152">
+            <a:spAutoFit/>
+          </a:bodyPr>
+          <a:lstStyle/>
+          <a:p>
+            <a:pPr algn="l">
+              <a:lnSpc>
+                <a:spcPct val="125000"/>
+              </a:lnSpc>
+            </a:pPr>
+            <a:r>
+              <a:rPr sz="1400" b="1" i="0" lang="fr-FR">
+                <a:solidFill>
+                  <a:srgbClr val="CE0500"/>
+                </a:solidFill>
+                <a:latin typeface="Marianne"/>
+              </a:rPr>
+              <a:t>✗  À éviter</a:t>
+            </a:r>
+          </a:p>
+        </p:txBody>
+      </p:sp>
+      <p:sp>
+        <p:nvSpPr>
+          <p:cNvPr id="15" name="DSFR-alert-error-body"/>
+          <p:cNvSpPr txBox="1"/>
+          <p:nvPr/>
+        </p:nvSpPr>
+        <p:spPr>
+          <a:xfrm>
+            <a:off x="6469379" y="2743200"/>
+            <a:ext cx="5143500" cy="2606040"/>
+          </a:xfrm>
+          <a:prstGeom prst="rect">
+            <a:avLst/>
+          </a:prstGeom>
+          <a:noFill/>
+        </p:spPr>
+        <p:txBody>
+          <a:bodyPr wrap="square" lIns="73152" rIns="73152">
+            <a:spAutoFit/>
+          </a:bodyPr>
+          <a:lstStyle/>
+          <a:p>
+            <a:pPr algn="l">
+              <a:lnSpc>
+                <a:spcPct val="125000"/>
+              </a:lnSpc>
+            </a:pPr>
+            <a:r>
+              <a:rPr sz="1200" lang="fr-FR">
+                <a:solidFill>
+                  <a:srgbClr val="161616"/>
+                </a:solidFill>
+                <a:latin typeface="Marianne"/>
+              </a:rPr>
+              <a:t>• alt="image" ou alt="image1.png"</a:t>
+            </a:r>
+          </a:p>
+          <a:p>
+            <a:pPr algn="l">
+              <a:lnSpc>
+                <a:spcPct val="125000"/>
+              </a:lnSpc>
+            </a:pPr>
+            <a:r>
+              <a:rPr sz="1200" lang="fr-FR">
+                <a:solidFill>
+                  <a:srgbClr val="161616"/>
+                </a:solidFill>
+                <a:latin typeface="Marianne"/>
+              </a:rPr>
+              <a:t>• Texte sans valeur informative</a:t>
+            </a:r>
+          </a:p>
+          <a:p>
+            <a:pPr algn="l">
+              <a:lnSpc>
+                <a:spcPct val="125000"/>
+              </a:lnSpc>
+            </a:pPr>
+            <a:r>
+              <a:rPr sz="1200" lang="fr-FR">
+                <a:solidFill>
+                  <a:srgbClr val="161616"/>
+                </a:solidFill>
+                <a:latin typeface="Marianne"/>
+              </a:rPr>
+              <a:t>• alt="" sur une image porteuse d’information</a:t>
+            </a:r>
+          </a:p>
+        </p:txBody>
+      </p:sp>
+      <p:sp>
+        <p:nvSpPr>
+          <p:cNvPr id="5" name="Espace réservé de la date 4"/>
+          <p:cNvSpPr>
+            <a:spLocks noGrp="1"/>
+          </p:cNvSpPr>
+          <p:nvPr>
+            <p:ph type="dt" sz="half" idx="10"/>
+          </p:nvPr>
+        </p:nvSpPr>
+        <p:spPr bwMode="gray"/>
+        <p:txBody>
+          <a:bodyPr wrap="square" anchor="t" lIns="73152" rIns="73152"/>
+          <a:lstStyle/>
+          <a:p>
+            <a:pPr algn="l">
+              <a:lnSpc>
+                <a:spcPct val="125000"/>
+              </a:lnSpc>
+            </a:pPr>
+            <a:r>
+              <a:rPr sz="1000" b="0" i="0" lang="fr-FR">
+                <a:solidFill>
+                  <a:srgbClr val="666666"/>
+                </a:solidFill>
+                <a:latin typeface="Marianne"/>
+              </a:rPr>
+              <a:t>4 juin 2026</a:t>
+            </a:r>
+            <a:endParaRPr lang="fr-FR" cap="all" dirty="0"/>
+          </a:p>
+        </p:txBody>
+      </p:sp>
+      <p:sp>
+        <p:nvSpPr>
+          <p:cNvPr id="6" name="Espace réservé du pied de page 5"/>
+          <p:cNvSpPr>
+            <a:spLocks noGrp="1"/>
+          </p:cNvSpPr>
+          <p:nvPr>
+            <p:ph type="ftr" sz="quarter" idx="11"/>
+          </p:nvPr>
+        </p:nvSpPr>
+        <p:spPr bwMode="gray">
+          <a:xfrm>
+            <a:off x="479998" y="6377984"/>
+            <a:ext cx="7871980" cy="479998"/>
+          </a:xfrm>
+        </p:spPr>
+        <p:txBody>
+          <a:bodyPr wrap="square" anchor="t" lIns="73152" rIns="73152"/>
+          <a:lstStyle/>
+          <a:p>
+            <a:pPr algn="l">
+              <a:lnSpc>
+                <a:spcPct val="125000"/>
+              </a:lnSpc>
+            </a:pPr>
+            <a:r>
+              <a:rPr sz="1000" b="0" i="0" lang="fr-FR">
+                <a:solidFill>
+                  <a:srgbClr val="666666"/>
+                </a:solidFill>
+                <a:latin typeface="Marianne"/>
+              </a:rPr>
+              <a:t>Formation 102638 / Démo composants</a:t>
+            </a:r>
+          </a:p>
+        </p:txBody>
+      </p:sp>
+      <p:sp>
+        <p:nvSpPr>
+          <p:cNvPr id="8" name="DSFR-accent-decoratif" descr=""/>
+          <p:cNvSpPr/>
+          <p:nvPr/>
+        </p:nvSpPr>
+        <p:spPr>
+          <a:xfrm>
+            <a:off x="475488" y="2240280"/>
+            <a:ext cx="73152" cy="3200400"/>
+          </a:xfrm>
+          <a:prstGeom prst="rect">
+            <a:avLst/>
+          </a:prstGeom>
+          <a:solidFill>
+            <a:srgbClr val="18753C"/>
+          </a:solidFill>
+          <a:ln>
+            <a:noFill/>
+          </a:ln>
+          <a:effectLst/>
+        </p:spPr>
+        <p:style>
+          <a:lnRef idx="1">
+            <a:schemeClr val="accent1"/>
+          </a:lnRef>
+          <a:fillRef idx="3">
+            <a:schemeClr val="accent1"/>
+          </a:fillRef>
+          <a:effectRef idx="2">
+            <a:schemeClr val="accent1"/>
+          </a:effectRef>
+          <a:fontRef idx="minor">
+            <a:schemeClr val="lt1"/>
+          </a:fontRef>
+        </p:style>
+        <p:txBody>
+          <a:bodyPr rtlCol="0" anchor="ctr"/>
+          <a:lstStyle/>
+          <a:p>
+            <a:pPr algn="ctr"/>
+          </a:p>
+        </p:txBody>
+      </p:sp>
+      <p:sp>
+        <p:nvSpPr>
+          <p:cNvPr id="12" name="DSFR-accent-decoratif" descr=""/>
+          <p:cNvSpPr/>
+          <p:nvPr/>
+        </p:nvSpPr>
+        <p:spPr>
+          <a:xfrm>
+            <a:off x="6240779" y="2240280"/>
+            <a:ext cx="73152" cy="3200400"/>
+          </a:xfrm>
+          <a:prstGeom prst="rect">
+            <a:avLst/>
+          </a:prstGeom>
+          <a:solidFill>
+            <a:srgbClr val="CE0500"/>
+          </a:solidFill>
+          <a:ln>
+            <a:noFill/>
+          </a:ln>
+          <a:effectLst/>
+        </p:spPr>
+        <p:style>
+          <a:lnRef idx="1">
+            <a:schemeClr val="accent1"/>
+          </a:lnRef>
+          <a:fillRef idx="3">
+            <a:schemeClr val="accent1"/>
+          </a:fillRef>
+          <a:effectRef idx="2">
+            <a:schemeClr val="accent1"/>
+          </a:effectRef>
+          <a:fontRef idx="minor">
+            <a:schemeClr val="lt1"/>
+          </a:fontRef>
+        </p:style>
+        <p:txBody>
+          <a:bodyPr rtlCol="0" anchor="ctr"/>
+          <a:lstStyle/>
+          <a:p>
+            <a:pPr algn="ctr"/>
+          </a:p>
+        </p:txBody>
+      </p:sp>
+    </p:spTree>
+  </p:cSld>
+  <p:clrMapOvr>
+    <a:masterClrMapping/>
+  </p:clrMapOvr>
+</p:sld>
+</file>
+
+<file path=ppt/slides/slide28.xml><?xml version="1.0" encoding="utf-8"?>
+<p:sld xmlns:a="http://schemas.openxmlformats.org/drawingml/2006/main" xmlns:p="http://schemas.openxmlformats.org/presentationml/2006/main" xmlns:r="http://schemas.openxmlformats.org/officeDocument/2006/relationships">
+  <p:cSld>
+    <p:spTree>
+      <p:nvGrpSpPr>
+        <p:cNvPr id="1" name=""/>
+        <p:cNvGrpSpPr/>
+        <p:nvPr/>
+      </p:nvGrpSpPr>
+      <p:grpSpPr/>
+      <p:sp>
+        <p:nvSpPr>
+          <p:cNvPr id="2" name="Title 1"/>
+          <p:cNvSpPr>
+            <a:spLocks noGrp="1"/>
+          </p:cNvSpPr>
+          <p:nvPr>
+            <p:ph type="title"/>
+          </p:nvPr>
+        </p:nvSpPr>
+        <p:spPr/>
+        <p:txBody>
+          <a:bodyPr wrap="square" anchor="t" lIns="73152" rIns="73152"/>
+          <a:lstStyle/>
+          <a:p>
+            <a:pPr algn="l">
+              <a:lnSpc>
+                <a:spcPct val="125000"/>
+              </a:lnSpc>
+            </a:pPr>
+            <a:r>
+              <a:rPr sz="2800" b="1" i="0" lang="fr-FR">
+                <a:solidFill>
+                  <a:srgbClr val="000091"/>
+                </a:solidFill>
+                <a:latin typeface="Marianne"/>
+              </a:rPr>
+              <a:t>Merci pour votre attention</a:t>
+            </a:r>
+          </a:p>
+        </p:txBody>
+      </p:sp>
+      <p:sp>
+        <p:nvSpPr>
+          <p:cNvPr id="7" name="Espace réservé du numéro de diapositive 6"/>
+          <p:cNvSpPr>
+            <a:spLocks noGrp="1"/>
+          </p:cNvSpPr>
+          <p:nvPr>
+            <p:ph type="sldNum" sz="quarter" idx="12"/>
+          </p:nvPr>
+        </p:nvSpPr>
+        <p:spPr bwMode="gray"/>
+        <p:txBody>
+          <a:bodyPr wrap="square" anchor="t" lIns="73152" rIns="73152"/>
+          <a:lstStyle/>
+          <a:p>
+            <a:pPr algn="l">
+              <a:lnSpc>
+                <a:spcPct val="125000"/>
+              </a:lnSpc>
+            </a:pPr>
+            <a:r>
+              <a:rPr sz="1000" b="0" i="0" lang="fr-FR">
+                <a:solidFill>
+                  <a:srgbClr val="666666"/>
+                </a:solidFill>
+                <a:latin typeface="Marianne"/>
+              </a:rPr>
+              <a:t>28</a:t>
+            </a:r>
+            <a:endParaRPr lang="fr-FR" dirty="0"/>
+          </a:p>
+        </p:txBody>
+      </p:sp>
+      <p:sp>
+        <p:nvSpPr>
+          <p:cNvPr id="9" name="DSFR-box"/>
+          <p:cNvSpPr/>
+          <p:nvPr/>
+        </p:nvSpPr>
+        <p:spPr>
+          <a:xfrm>
+            <a:off x="585216" y="2926080"/>
+            <a:ext cx="11119104" cy="914400"/>
+          </a:xfrm>
+          <a:prstGeom prst="rect">
+            <a:avLst/>
+          </a:prstGeom>
+          <a:solidFill>
+            <a:srgbClr val="F6F6F6"/>
+          </a:solidFill>
+          <a:ln>
+            <a:noFill/>
+          </a:ln>
+          <a:effectLst/>
+        </p:spPr>
+        <p:style>
+          <a:lnRef idx="1">
+            <a:schemeClr val="accent1"/>
+          </a:lnRef>
+          <a:fillRef idx="3">
+            <a:schemeClr val="accent1"/>
+          </a:fillRef>
+          <a:effectRef idx="2">
+            <a:schemeClr val="accent1"/>
+          </a:effectRef>
+          <a:fontRef idx="minor">
+            <a:schemeClr val="lt1"/>
+          </a:fontRef>
+        </p:style>
+        <p:txBody>
+          <a:bodyPr rtlCol="0" anchor="ctr"/>
+          <a:lstStyle/>
+          <a:p>
+            <a:pPr algn="ctr"/>
+          </a:p>
+        </p:txBody>
+      </p:sp>
+      <p:sp>
+        <p:nvSpPr>
+          <p:cNvPr id="10" name="DSFR-highlight"/>
+          <p:cNvSpPr txBox="1"/>
+          <p:nvPr/>
+        </p:nvSpPr>
+        <p:spPr>
+          <a:xfrm>
+            <a:off x="749808" y="3017520"/>
+            <a:ext cx="10863072" cy="731520"/>
+          </a:xfrm>
+          <a:prstGeom prst="rect">
+            <a:avLst/>
+          </a:prstGeom>
+          <a:noFill/>
+        </p:spPr>
+        <p:txBody>
+          <a:bodyPr wrap="square" anchor="ctr" lIns="73152" rIns="73152">
+            <a:spAutoFit/>
+          </a:bodyPr>
+          <a:lstStyle/>
+          <a:p>
+            <a:pPr algn="l">
+              <a:lnSpc>
+                <a:spcPct val="125000"/>
+              </a:lnSpc>
+            </a:pPr>
+            <a:r>
+              <a:rPr sz="1800" b="1" i="0" lang="fr-FR">
+                <a:solidFill>
+                  <a:srgbClr val="000091"/>
+                </a:solidFill>
+                <a:latin typeface="Marianne"/>
+              </a:rPr>
+              <a:t>Pour toute question : formation-igpde@finances.gouv.fr</a:t>
+            </a:r>
+          </a:p>
+        </p:txBody>
+      </p:sp>
+      <p:sp>
+        <p:nvSpPr>
+          <p:cNvPr id="11" name="DSFR-texte-libre"/>
+          <p:cNvSpPr txBox="1"/>
+          <p:nvPr/>
+        </p:nvSpPr>
+        <p:spPr>
+          <a:xfrm>
+            <a:off x="475488" y="4206240"/>
+            <a:ext cx="11228832" cy="457200"/>
+          </a:xfrm>
+          <a:prstGeom prst="rect">
+            <a:avLst/>
+          </a:prstGeom>
+          <a:noFill/>
+        </p:spPr>
+        <p:txBody>
+          <a:bodyPr wrap="square" anchor="t" lIns="73152" rIns="73152">
+            <a:spAutoFit/>
+          </a:bodyPr>
+          <a:lstStyle/>
+          <a:p>
+            <a:pPr algn="ctr">
+              <a:lnSpc>
+                <a:spcPct val="125000"/>
+              </a:lnSpc>
+            </a:pPr>
+            <a:r>
+              <a:rPr sz="1400" b="0" i="0" lang="fr-FR">
+                <a:solidFill>
+                  <a:srgbClr val="000091"/>
+                </a:solidFill>
+                <a:latin typeface="Marianne"/>
+              </a:rPr>
+              <a:t>Retrouvez les supports sur l’espace Alizé de l’IGPDE</a:t>
+            </a:r>
+          </a:p>
+        </p:txBody>
+      </p:sp>
+      <p:sp>
+        <p:nvSpPr>
+          <p:cNvPr id="12" name="DSFR-texte-libre"/>
+          <p:cNvSpPr txBox="1"/>
+          <p:nvPr/>
+        </p:nvSpPr>
+        <p:spPr>
+          <a:xfrm>
+            <a:off x="475488" y="4846320"/>
+            <a:ext cx="11228832" cy="457200"/>
+          </a:xfrm>
+          <a:prstGeom prst="rect">
+            <a:avLst/>
+          </a:prstGeom>
+          <a:noFill/>
+        </p:spPr>
+        <p:txBody>
+          <a:bodyPr wrap="square" anchor="t" lIns="73152" rIns="73152">
+            <a:spAutoFit/>
+          </a:bodyPr>
+          <a:lstStyle/>
+          <a:p>
+            <a:pPr algn="ctr">
+              <a:lnSpc>
+                <a:spcPct val="125000"/>
+              </a:lnSpc>
+            </a:pPr>
+            <a:r>
+              <a:rPr sz="1200" b="0" i="0" lang="fr-FR">
+                <a:solidFill>
+                  <a:srgbClr val="F6F6F6"/>
+                </a:solidFill>
+                <a:latin typeface="Marianne"/>
+              </a:rPr>
+              <a:t>Merci de répondre à l’évaluation à chaud en sortant de salle</a:t>
+            </a:r>
+          </a:p>
+        </p:txBody>
+      </p:sp>
+      <p:sp>
+        <p:nvSpPr>
+          <p:cNvPr id="5" name="Espace réservé de la date 4"/>
+          <p:cNvSpPr>
+            <a:spLocks noGrp="1"/>
+          </p:cNvSpPr>
+          <p:nvPr>
+            <p:ph type="dt" sz="half" idx="10"/>
+          </p:nvPr>
+        </p:nvSpPr>
+        <p:spPr bwMode="gray"/>
+        <p:txBody>
+          <a:bodyPr wrap="square" anchor="t" lIns="73152" rIns="73152"/>
+          <a:lstStyle/>
+          <a:p>
+            <a:pPr algn="l">
+              <a:lnSpc>
+                <a:spcPct val="125000"/>
+              </a:lnSpc>
+            </a:pPr>
+            <a:r>
+              <a:rPr sz="1000" b="0" i="0" lang="fr-FR">
+                <a:solidFill>
+                  <a:srgbClr val="666666"/>
+                </a:solidFill>
+                <a:latin typeface="Marianne"/>
+              </a:rPr>
+              <a:t>4 juin 2026</a:t>
+            </a:r>
+            <a:endParaRPr lang="fr-FR" cap="all" dirty="0"/>
+          </a:p>
+        </p:txBody>
+      </p:sp>
+      <p:sp>
+        <p:nvSpPr>
+          <p:cNvPr id="6" name="Espace réservé du pied de page 5"/>
+          <p:cNvSpPr>
+            <a:spLocks noGrp="1"/>
+          </p:cNvSpPr>
+          <p:nvPr>
+            <p:ph type="ftr" sz="quarter" idx="11"/>
+          </p:nvPr>
+        </p:nvSpPr>
+        <p:spPr bwMode="gray">
+          <a:xfrm>
+            <a:off x="479998" y="6377984"/>
+            <a:ext cx="7871980" cy="479998"/>
+          </a:xfrm>
+        </p:spPr>
+        <p:txBody>
+          <a:bodyPr wrap="square" anchor="t" lIns="73152" rIns="73152"/>
+          <a:lstStyle/>
+          <a:p>
+            <a:pPr algn="l">
+              <a:lnSpc>
+                <a:spcPct val="125000"/>
+              </a:lnSpc>
+            </a:pPr>
+            <a:r>
+              <a:rPr sz="1000" b="0" i="0" lang="fr-FR">
+                <a:solidFill>
+                  <a:srgbClr val="666666"/>
+                </a:solidFill>
+                <a:latin typeface="Marianne"/>
+              </a:rPr>
+              <a:t>Formation 102638 / Clôture</a:t>
+            </a:r>
+          </a:p>
+        </p:txBody>
+      </p:sp>
+      <p:sp>
+        <p:nvSpPr>
+          <p:cNvPr id="8" name="DSFR-accent-decoratif" descr=""/>
+          <p:cNvSpPr/>
+          <p:nvPr/>
+        </p:nvSpPr>
+        <p:spPr>
+          <a:xfrm>
+            <a:off x="475488" y="2926080"/>
+            <a:ext cx="109728" cy="914400"/>
           </a:xfrm>
           <a:prstGeom prst="rect">
             <a:avLst/>
